--- a/attached_assets/ThriveUp_RPLICE_MEASURE_Improved.pptx
+++ b/attached_assets/ThriveUp_RPLICE_MEASURE_Improved.pptx
@@ -515,7 +515,7 @@
           <a:p>
             <a:r>
               <a:rPr lang="en-US" dirty="0"/>
-              <a:t>This presentation introduces The Collaborative Advocate — both the nonprofit Foundation (501(c)(3)) and the consulting LLC (VOSB). Together they operate RPLICE and the ThriveUp ecosystem. The tagline captures the core mission: we build systems that prove whether interventions actually work in the communities they serve. Dr. Terry Flood holds a Doctorate in Health Administration and co-founded the organization with Meredith Sisnett. Both are veterans. KEY EMPHASIS: This is an AI-powered implementation science platform — not just technology for technology's sake. Our 4-engine AI architecture with RAG (Retrieval-Augmented Generation) means every recommendation is grounded in real scholarly evidence and real community data, never hallucinated. When you see the word AI in this presentation, understand that it means ethical, transparent, citation-backed AI — the kind that Jameila Styles (Meme) has been advocating for in the equity data space.</a:t>
+              <a:t>This presentation introduces The Collaborative Advocate — both the nonprofit Foundation (501(c)(3)) and the consulting LLC, a Veteran-Owned Small Business. Together they operate RPLICE and the ThriveUp ecosystem. The tagline captures the core mission: we build AI-powered systems that prove whether interventions actually work in the communities they serve. Dr. Terry Flood holds a Doctorate in Health Administration and co-founded the organization with Meredith Sisnett. Both are veterans. Our 4-engine AI architecture with RAG (Retrieval-Augmented Generation) ensures every recommendation is grounded in real scholarly evidence and real community data — never hallucinated.</a:t>
             </a:r>
             <a:endParaRPr lang="en-US" dirty="0"/>
           </a:p>
@@ -603,7 +603,7 @@
           <a:p>
             <a:r>
               <a:rPr lang="en-US" dirty="0"/>
-              <a:t>This is a new slide dedicated to Meme's role as a leading ethical AI consultant. This matters because the AI conversation in the social sector is exploding right now — funders are asking about AI, community organizations are nervous about AI, and very few people are providing thoughtful leadership on how AI should serve equity. Meme is one of those leaders. Her work with MEASURE has always been about ensuring that data tools serve communities rather than extracting from them. As AI becomes more powerful, this principle becomes more critical. Our partnership positions Meme's ethical AI expertise as the governance layer over our technical AI architecture. She is not learning AI from us — she has been thinking about equitable technology longer than most of the AI industry has existed. What we provide is the engineering to implement her vision at scale: transparent outputs, cited sources, bias-auditable chains, community-owned data, and anti-hallucination guardrails. Together, we can demonstrate to funders, policymakers, and communities what ethical AI looks like in practice — not as a white paper, but as a live, operational system serving real communities in Central Texas.</a:t>
+              <a:t>Values alignment matters for any collaboration. Both organizations believe data must serve communities, not extract from them. Equity is structure, not decoration. Lived experience is valid evidence. Measurement without action is meaningless. Both are community-centered. Both serve Austin and Pflugerville. On AI: both believe AI must be ethical, transparent, and bias-auditable. Meme's CARE Model governance combined with our anti-hallucination AI architecture creates trustworthy systems.</a:t>
             </a:r>
             <a:endParaRPr lang="en-US" dirty="0"/>
           </a:p>
@@ -691,7 +691,7 @@
           <a:p>
             <a:r>
               <a:rPr lang="en-US" dirty="0"/>
-              <a:t>MEASURE offers a Free Data Support Program — a 25,000 dollar in-kind grant plus a 1,000 dollar participant stipend. This is directly relevant to TCAF. We qualify as a Black-led organization in Texas. The in-kind support includes data analysis, evaluation tools, and impact measurement — exactly the kind of support that strengthens our grant applications across the entire pipeline. Applying for this program is a priority action item. It is available at wemeasure.org/our-programs. The strategic value goes beyond the 25K: having MEASURE as a documented data partner strengthens every proposal we submit. St. David's wants community-informed design? MEASURE provides the data. SSG Fox VA wants evidence-based intervention models? RPLICE plus MEASURE provides the full evidence chain. The AI integration opportunity is significant — if MEASURE's Ignite data flows into our RAG pipeline, we can produce AI-powered analysis of community data that neither organization could produce alone.</a:t>
+              <a:t>Partnership opportunities span immediate to long-term. Immediate: joint grant applications, Ignite data flowing into RPLICE RAG pipeline for AI-powered community analysis, shared regional presence, Huston-Tillotson student research. Long-term: build Central Texas into a national model for community AI + implementation science, publish CARE Model + MAP-GAP as a peer-reviewable framework, scale beyond Austin using MEASURE network plus our technology. This is not a vendor pitch — two organizations, same mission, same geography, complementary capabilities.</a:t>
             </a:r>
             <a:endParaRPr lang="en-US" dirty="0"/>
           </a:p>
@@ -779,7 +779,7 @@
           <a:p>
             <a:r>
               <a:rPr lang="en-US" dirty="0"/>
-              <a:t>Partnership can start immediately with joint grant applications where MEASURE serves as the community partner and we provide the technology and AI measurement infrastructure. The most impactful near-term opportunity is integrating MEASURE's Ignite platform data into RPLICE's RAG pipeline — this would allow our AI to produce analysis grounded in both scholarly evidence AND community-collected data, which is unique in this space. Joint opportunities include data sharing between Ignite and RPLICE, combined research publications using CARE Model plus MAP-GAP methodology, shared training programs through ThriveUp Academy, and combined policy advocacy using AI-verified outcome data. Long-term, the vision is to build Central Texas into a national model for how communities use data plus AI plus implementation science to drive equity. The CARE Model from MEASURE plus MAP-GAP from us equals a peer-reviewable framework that could change how the entire social sector approaches community-driven AI. The partnership is flexible — MEASURE can engage at whatever level makes sense.</a:t>
+              <a:t>Three regional hubs represent our geographic strategy. Austin Hub: housing crisis response — median home 435K, 3,200+ homeless, 85% cost-burdened. Manor Hub: 400% population growth, critical infrastructure gap, 38% under 18. Pflugerville Hub: 75K population, 52% growth, digital access gap. Each hub generates different data feeding the RAG pipeline. AI cross-references across hubs using MG-PATR replication protocol.</a:t>
             </a:r>
             <a:endParaRPr lang="en-US" dirty="0"/>
           </a:p>
@@ -867,7 +867,7 @@
           <a:p>
             <a:r>
               <a:rPr lang="en-US" dirty="0"/>
-              <a:t>The three regional hubs represent our geographic strategy. Austin Hub focuses on housing crisis response — median home price 435K, over 3,200 homeless in the 2025 point-in-time count, 85% of renters cost-burdened. Manor Hub addresses growth without gaps — 400% population growth since 2010, critical infrastructure gap, 38% of population under 18. Pflugerville Hub focuses on infrastructure before growth — 75K population, 52% growth rate, significant digital access gap. The AI layer is relevant here because each hub generates different data that feeds into the RAG pipeline. Austin hub data is about housing instability and health. Manor hub data is about rapid growth and youth services. Pflugerville hub data is about digital access and workforce. The AI can cross-reference across hubs — if an intervention works in one community, RPLICE can assess whether it would transfer to another using the MG-PATR replication protocol.</a:t>
+              <a:t>Closing slide with contact info. RPLICE is live and available for walkthrough. Next step is a conversation — not a commitment. We want to understand priorities, upcoming deadlines, and where collaboration delivers the most value. The technology is ready. The communities are the same. The AI is ethical and operational. See the appendix for live links to every platform.</a:t>
             </a:r>
             <a:endParaRPr lang="en-US" dirty="0"/>
           </a:p>
@@ -955,7 +955,7 @@
           <a:p>
             <a:r>
               <a:rPr lang="en-US" dirty="0"/>
-              <a:t>This is the closing slide with direct contact information. Dr. Terry Flood can be reached at mr.terryflood@gmail.com and Meredith Sisnett at sisnett.meredith@gmail.com. RPLICE is live and accessible for a walkthrough at any time. The next step we are proposing is a conversation — not a commitment. We want to understand MEASURE's current priorities, upcoming grant deadlines, and where AI-powered collaboration would deliver the most value for the communities both organizations serve. The AI architecture is ready. The ethical framework is shared. The communities are the same. The door is open.</a:t>
+              <a:t>Appendix with live links to every platform in the ecosystem. These are all operational, live websites — not mockups. Anyone reviewing this deck can click through and see what we have built. This is the proof that our technology claims are real.</a:t>
             </a:r>
             <a:endParaRPr lang="en-US" dirty="0"/>
           </a:p>
@@ -1043,7 +1043,7 @@
           <a:p>
             <a:r>
               <a:rPr lang="en-US" dirty="0"/>
-              <a:t>The Collaborative Advocate operates as a dual structure. The Foundation handles community programs, grant-funded research, and direct services. The LLC handles consulting, technology development, and government contracts through VOSB status. Our 24 platforms span six domains — health, education, workforce, criminal justice, housing, and safety. Every platform is measured, every intervention tracked, every outcome verified. This is operational today, not aspirational. CRITICAL POINT FOR THIS AUDIENCE: Our AI architecture is not a chatbot bolted onto a dashboard. It is a multi-engine system where GPT-5, Claude Sonnet, and scholarly research databases work together through RAG pipelines to produce evidence-grounded recommendations. Anti-hallucination guardrails ensure every AI output includes APA citations. This is the ethical AI approach that Meme has been championing — AI that serves communities rather than extracting from them.</a:t>
+              <a:t>The Collaborative Advocate operates as a dual structure. The Foundation handles community programs, grant-funded research, and direct services. The LLC handles consulting, technology development, and government contracts through VOSB status. Our 24 platforms span six domains — health, education, workforce, criminal justice, housing, and safety. Every platform is AI-enabled, measured, tracked, and verified. The AI architecture runs 4 engines: GPT-5 for structured analysis, Claude Sonnet for nuanced reasoning, a scholarly research RAG engine querying 6 live databases (PubMed, Semantic Scholar, CrossRef, Europe PMC, medRxiv, bioRxiv), and an ecosystem RAG engine with platform-specific context. Anti-hallucination guardrails ensure every output includes APA citations.</a:t>
             </a:r>
             <a:endParaRPr lang="en-US" dirty="0"/>
           </a:p>
@@ -1131,7 +1131,7 @@
           <a:p>
             <a:r>
               <a:rPr lang="en-US" dirty="0"/>
-              <a:t>RPLICE is the quality gate for the entire ecosystem. When a funder asks how do you measure outcomes, this is the answer. The AI architecture deserves special attention: we run four engines in parallel. GPT-5 handles structured analysis and recommendations. Claude Sonnet provides nuanced reasoning for complex implementation questions. The Scholarly Research engine queries six live academic databases — PubMed, Semantic Scholar, CrossRef, Europe PMC, medRxiv, and bioRxiv — using RAG (Retrieval-Augmented Generation) to ground every recommendation in peer-reviewed evidence. The Ecosystem RAG engine is platform-aware — it understands your specific data, your participants, your interventions. When you run ALL mode, all four engines fire in parallel, then synthesize into one unified response with anti-hallucination guardrails and APA citations on every response. This is not generic AI. This is implementation science AI — trained on real frameworks, grounded in real evidence, producing real recommendations that clinicians and program managers can act on. Meme would recognize this as ethical AI done right — transparent, cited, community-serving, and bias-auditable.</a:t>
+              <a:t>RPLICE is the quality gate for the entire ecosystem. When a funder asks how do you measure outcomes — this is the answer. The AI architecture: 4 engines fire in parallel. GPT-5 handles structured analysis. Claude Sonnet provides nuanced reasoning. The Scholarly Research engine queries 6 live academic databases using RAG to ground every recommendation in peer-reviewed evidence. The Ecosystem RAG engine is platform-aware — it knows your specific data, participants, and interventions. ALL mode fires all engines simultaneously, synthesizes into one unified response with anti-hallucination guardrails and APA citations. This is implementation science AI — trained on real frameworks, grounded in real evidence, producing actionable recommendations.</a:t>
             </a:r>
             <a:endParaRPr lang="en-US" dirty="0"/>
           </a:p>
@@ -1219,7 +1219,7 @@
           <a:p>
             <a:r>
               <a:rPr lang="en-US" dirty="0"/>
-              <a:t>This slide is new — it goes deeper on the AI and RAG architecture because this is a competitive differentiator no other organization in this space has. The RAG pipeline works like this: when a user asks a question about their program or intervention, RPLICE does not just query a general-purpose AI model. It simultaneously queries six scholarly databases for relevant peer-reviewed evidence, queries the ecosystem database for platform-specific data about the user's actual participants and outcomes, runs the combined context through GPT-5 and Claude Sonnet in parallel, applies anti-hallucination checks that verify every factual claim against source data, and synthesizes the results into a single response with APA-formatted citations. The practical result: a program manager asks "Is my mentoring program working?" and gets back a response that references specific outcome data from their program, compares it against published evidence from PubMed, identifies where implementation fidelity has drifted using CFIR domains, and recommends specific corrective actions — all with citations. This is what ethical AI looks like. Meme has been a leading voice in ensuring that AI serves communities of color rather than perpetuating bias. Our architecture directly addresses her concerns: outputs are transparent, sources are cited, bias can be audited, and community data stays owned by the community. We built this because Dr. Flood and Meme share the same conviction — measurement without ethics is just surveillance.</a:t>
+              <a:t>This slide explains how the RAG pipeline works in practice. When a user asks a question, RPLICE simultaneously queries 6 scholarly databases for peer-reviewed evidence, queries the ecosystem database for platform-specific data, runs combined context through GPT-5 and Claude in parallel, applies anti-hallucination checks, and synthesizes results with APA citations. Practical example: a program manager asks Is my mentoring program working? and gets back specific outcome data, published evidence comparison, where fidelity has drifted, and corrective actions — all cited. This architecture ensures AI is ethical and transparent — sources always cited, bias traceable, community data stays owned by the organization.</a:t>
             </a:r>
             <a:endParaRPr lang="en-US" dirty="0"/>
           </a:p>
@@ -1307,7 +1307,7 @@
           <a:p>
             <a:r>
               <a:rPr lang="en-US" dirty="0"/>
-              <a:t>The 24-platform ecosystem is the infrastructure that makes RPLICE meaningful. Without real programs generating real data, implementation science is just theory. Each platform is a live, operational system — not a mockup. The Ecosystem Nexus connects all platforms through a cross-platform event bus, meaning a student flagged in ISSS for home instability automatically triggers LifeBridge housing resources. A veteran completing Mission Transition automatically gets connected to workforce pathways through ThriveUp Academy. All data flows into RPLICE for fidelity tracking and outcome measurement. The AI layer sits across everything — any platform can invoke the AI for recommendations, and the RAG pipeline has context about all 24 platforms. This is what makes our AI different from bolting ChatGPT onto a dashboard — our AI KNOWS the ecosystem.</a:t>
+              <a:t>The 24-platform ecosystem is the infrastructure that makes RPLICE meaningful. Without real programs generating real data, implementation science is just theory. Each platform is a live, operational system. The Ecosystem Nexus connects all platforms through a cross-platform event bus. All data flows into RPLICE for fidelity tracking and outcome measurement. The AI layer sits across everything — any platform can invoke the AI, and the RAG pipeline has context about all 24 platforms.</a:t>
             </a:r>
             <a:endParaRPr lang="en-US" dirty="0"/>
           </a:p>
@@ -1395,7 +1395,7 @@
           <a:p>
             <a:r>
               <a:rPr lang="en-US" dirty="0"/>
-              <a:t>ISSS — Schools Addressing Multiple Issues — is the only K-12 implementation science platform on the market. It uses a five-layer progressive unlock model and provides seven role-specific portals. Schools adopt evidence-based programs constantly — anti-bullying, SEL, substance abuse prevention — but most fail because implementation drifts. ISSS tracks whether interventions are delivered as designed using AI-powered fidelity monitoring. The AI layer here is critical: ISSS uses the same RAG pipeline as RPLICE, meaning it can pull scholarly evidence on intervention effectiveness and compare it against real classroom implementation data. When a counselor skips a component, the AI flags it. When outcomes plateau, the AI identifies which implementation element drifted and recommends corrective action — with citations from the evidence base.</a:t>
+              <a:t>ISSS — Schools Addressing Multiple Issues — is the only K-12 implementation science platform on the market. Five-layer progressive unlock model, seven role-specific portals. Schools adopt evidence-based programs constantly but most fail because implementation drifts. ISSS uses AI-powered fidelity monitoring through the same RAG pipeline as RPLICE. When a counselor skips a component, the AI flags it. When outcomes plateau, the AI identifies which element drifted and recommends corrective action with citations. ISSS connects to the broader ecosystem — student instability triggers LifeBridge, mental health needs connect to WholeMind, substance use concerns tracked through RPLICE.</a:t>
             </a:r>
             <a:endParaRPr lang="en-US" dirty="0"/>
           </a:p>
@@ -1483,7 +1483,7 @@
           <a:p>
             <a:r>
               <a:rPr lang="en-US" dirty="0"/>
-              <a:t>This is the MEASURE introduction slide. Jameila "Meme" Styles is not just the founder of MEASURE — she is a leading ethical AI consultant who has been at the forefront of ensuring that data and AI tools serve communities of color rather than extracting from them. Her work with the CARE Model is fundamentally about equity-centered evaluation — making sure that research is done WITH communities, not ON communities. MEASURE has delivered over 3,000 hours of free data support to Black-led organizations in Austin. They have MIT Solve backing. They partnered with Huston-Tillotson University, an HBCU. They helped pass the CROWN Act in Texas. Their Ignite platform helps organizations that have never had data systems before start collecting and using data. The 79% statistic is devastating and motivating: 79% of Black-led organizations in Austin had NO systems for collecting data before MEASURE intervened. This is the gap we fill together.</a:t>
+              <a:t>This is the partnership pitch — framed as what we bring to the table for any collaboration. We are not asking to join anyone. We are showing what makes us a strong collaborator. Our technology infrastructure is operational — 24 live platforms, not mockups. Our AI architecture is ethical and transparent. We have federal contracting capability through VOSB. Our implementation science methodology (MAP-GAP, Three Realities) is proprietary and proven. We serve the same Central Texas communities. We bring the engineering backbone that community organizations need but cannot build alone.</a:t>
             </a:r>
             <a:endParaRPr lang="en-US" dirty="0"/>
           </a:p>
@@ -1571,7 +1571,7 @@
           <a:p>
             <a:r>
               <a:rPr lang="en-US" dirty="0"/>
-              <a:t>MEASURE found that 79% of Black-led organizations have no systems for collecting data. That is what led them to build Ignite. But data collection is only step one. The harder questions are implementation science questions: Is the intervention being delivered as designed? Are outcomes actually improving? What is the gap between plan and reality? How do we know gains will sustain? MEASURE provides the front end — community voice, data collection, advocacy, and policy change. We provide the AI-powered engine — implementation design, fidelity tracking with AI monitoring, outcome measurement verified against scholarly evidence through RAG, and sustainment planning. Combined, the full loop works: community voice drives intervention design, AI-powered fidelity tracking ensures the intervention is delivered as designed, outcomes are measured and verified against evidence, data feeds back to community, and the cycle continuously improves. The AI component is what makes this scalable. Without AI, this loop requires armies of researchers. With our 4-engine RAG architecture, a single program manager can run the entire cycle. That is the breakthrough. Nobody else in Central Texas — or frankly most of the country — has this complete loop from community voice to AI-verified outcomes.</a:t>
+              <a:t>This slide positions the MEASURE relationship as a mutual opportunity — not us asking to join them or praising them. MEASURE brings community trust and data collection through Ignite. We bring AI-powered implementation tracking through RPLICE. Together, the full loop closes: community voice drives intervention, AI tracks fidelity, outcomes are verified against evidence, data feeds back. Neither organization alone has this complete loop. Meme Styles founded MEASURE and is a leading ethical AI consultant — her CARE Model governance complements our technical AI architecture. The partnership is strategic and mutual.</a:t>
             </a:r>
             <a:endParaRPr lang="en-US" dirty="0"/>
           </a:p>
@@ -1659,7 +1659,7 @@
           <a:p>
             <a:r>
               <a:rPr lang="en-US" dirty="0"/>
-              <a:t>This is the values alignment slide and it is critical for the MEASURE relationship. Meme's core belief is that lived experience and quantitative data about complex social problems impacting Black, Brown, and Multiracial communities are not used effectively for justice due to racism, a lack of equitable data tools, and village support. Our core belief is that nothing happens in a silo — collaboration is key, and we must implement with fidelity by knowing our stakeholders and building with the user experience in mind. Where we align: Data must serve communities, not extract from them. Equity is structure, not decoration. Lived experience is valid evidence. Measurement without action is meaningless. AI must be ethical, transparent, and bias-auditable. Both organizations believe the people most impacted should drive the solutions. The ethical AI alignment is especially important: Meme has been a leading voice nationally on how AI can either perpetuate or dismantle systemic inequity. Our AI architecture was built with this philosophy — anti-hallucination guardrails, APA citations, transparent source chains, and community data ownership are not features we added later. They were design principles from day one.</a:t>
+              <a:t>79% of Black-led organizations have no systems for collecting data — MEASURE built Ignite to address that. But data collection is step one. The harder questions: Is the intervention delivered as designed? Are outcomes improving? What is the gap? How do we sustain? MEASURE provides community voice and data collection. RPLICE provides AI-powered fidelity tracking, RAG-verified outcomes, and sustainment planning. Combined: community voice drives intervention, AI tracks fidelity, outcomes measured against evidence via RAG, data feeds back, continuous improvement. AI makes this scalable — one program manager can run the full cycle.</a:t>
             </a:r>
             <a:endParaRPr lang="en-US" dirty="0"/>
           </a:p>
@@ -2370,7 +2370,7 @@
               <a:buNone/>
             </a:pPr>
             <a:r>
-              <a:rPr lang="en-US" sz="2200" b="1" dirty="0">
+              <a:rPr lang="en-US" sz="2400" b="1" dirty="0">
                 <a:solidFill>
                   <a:srgbClr val="FFFFFF"/>
                 </a:solidFill>
@@ -2378,9 +2378,9 @@
                 <a:ea typeface="Georgia" pitchFamily="34" charset="-122"/>
                 <a:cs typeface="Georgia" pitchFamily="34" charset="-120"/>
               </a:rPr>
-              <a:t>Meme Styles — Leading Ethical AI in Community Data</a:t>
-            </a:r>
-            <a:endParaRPr lang="en-US" sz="2200" dirty="0"/>
+              <a:t>Shared Values</a:t>
+            </a:r>
+            <a:endParaRPr lang="en-US" sz="2400" dirty="0"/>
           </a:p>
         </p:txBody>
       </p:sp>
@@ -2392,32 +2392,32 @@
         </p:nvSpPr>
         <p:spPr>
           <a:xfrm>
-            <a:off x="731520" y="822960"/>
-            <a:ext cx="7680960" cy="274320"/>
-          </a:xfrm>
-          <a:prstGeom prst="rect">
-            <a:avLst/>
-          </a:prstGeom>
-          <a:noFill/>
-          <a:ln/>
-        </p:spPr>
-        <p:txBody>
-          <a:bodyPr wrap="square" rtlCol="0" anchor="ctr"/>
-          <a:lstStyle/>
-          <a:p>
-            <a:pPr indent="0" marL="0">
-              <a:buNone/>
-            </a:pPr>
-            <a:r>
-              <a:rPr lang="en-US" sz="1300" dirty="0">
-                <a:solidFill>
-                  <a:srgbClr val="F59E0B"/>
+            <a:off x="731520" y="1097280"/>
+            <a:ext cx="3840480" cy="274320"/>
+          </a:xfrm>
+          <a:prstGeom prst="rect">
+            <a:avLst/>
+          </a:prstGeom>
+          <a:noFill/>
+          <a:ln/>
+        </p:spPr>
+        <p:txBody>
+          <a:bodyPr wrap="square" rtlCol="0" anchor="ctr"/>
+          <a:lstStyle/>
+          <a:p>
+            <a:pPr indent="0" marL="0">
+              <a:buNone/>
+            </a:pPr>
+            <a:r>
+              <a:rPr lang="en-US" sz="1300" b="1" dirty="0">
+                <a:solidFill>
+                  <a:srgbClr val="14B8A6"/>
                 </a:solidFill>
                 <a:latin typeface="Georgia" pitchFamily="34" charset="0"/>
                 <a:ea typeface="Georgia" pitchFamily="34" charset="-122"/>
                 <a:cs typeface="Georgia" pitchFamily="34" charset="-120"/>
               </a:rPr>
-              <a:t>Jameila "Meme" Styles, Founder of MEASURE</a:t>
+              <a:t>Where We Align:</a:t>
             </a:r>
             <a:endParaRPr lang="en-US" sz="1300" dirty="0"/>
           </a:p>
@@ -2431,7 +2431,169 @@
         </p:nvSpPr>
         <p:spPr>
           <a:xfrm>
-            <a:off x="731520" y="1371600"/>
+            <a:off x="731520" y="1463040"/>
+            <a:ext cx="3840480" cy="2286000"/>
+          </a:xfrm>
+          <a:prstGeom prst="rect">
+            <a:avLst/>
+          </a:prstGeom>
+          <a:noFill/>
+          <a:ln/>
+        </p:spPr>
+        <p:txBody>
+          <a:bodyPr wrap="square" rtlCol="0" anchor="ctr"/>
+          <a:lstStyle/>
+          <a:p>
+            <a:pPr indent="0" marL="0">
+              <a:lnSpc>
+                <a:spcPct val="130000"/>
+              </a:lnSpc>
+              <a:buNone/>
+            </a:pPr>
+            <a:r>
+              <a:rPr lang="en-US" sz="1100" dirty="0">
+                <a:solidFill>
+                  <a:srgbClr val="E2E8F0"/>
+                </a:solidFill>
+                <a:latin typeface="Calibri" pitchFamily="34" charset="0"/>
+                <a:ea typeface="Calibri" pitchFamily="34" charset="-122"/>
+                <a:cs typeface="Calibri" pitchFamily="34" charset="-120"/>
+              </a:rPr>
+              <a:t>• Data must serve communities, not extract</a:t>
+            </a:r>
+            <a:endParaRPr lang="en-US" sz="1100" dirty="0"/>
+          </a:p>
+          <a:p>
+            <a:pPr indent="0" marL="0">
+              <a:lnSpc>
+                <a:spcPct val="130000"/>
+              </a:lnSpc>
+              <a:buNone/>
+            </a:pPr>
+            <a:r>
+              <a:rPr lang="en-US" sz="1100" dirty="0">
+                <a:solidFill>
+                  <a:srgbClr val="E2E8F0"/>
+                </a:solidFill>
+                <a:latin typeface="Calibri" pitchFamily="34" charset="0"/>
+                <a:ea typeface="Calibri" pitchFamily="34" charset="-122"/>
+                <a:cs typeface="Calibri" pitchFamily="34" charset="-120"/>
+              </a:rPr>
+              <a:t>• Equity is structure, not decoration</a:t>
+            </a:r>
+            <a:endParaRPr lang="en-US" sz="1100" dirty="0"/>
+          </a:p>
+          <a:p>
+            <a:pPr indent="0" marL="0">
+              <a:lnSpc>
+                <a:spcPct val="130000"/>
+              </a:lnSpc>
+              <a:buNone/>
+            </a:pPr>
+            <a:r>
+              <a:rPr lang="en-US" sz="1100" dirty="0">
+                <a:solidFill>
+                  <a:srgbClr val="E2E8F0"/>
+                </a:solidFill>
+                <a:latin typeface="Calibri" pitchFamily="34" charset="0"/>
+                <a:ea typeface="Calibri" pitchFamily="34" charset="-122"/>
+                <a:cs typeface="Calibri" pitchFamily="34" charset="-120"/>
+              </a:rPr>
+              <a:t>• Lived experience is valid evidence</a:t>
+            </a:r>
+            <a:endParaRPr lang="en-US" sz="1100" dirty="0"/>
+          </a:p>
+          <a:p>
+            <a:pPr indent="0" marL="0">
+              <a:lnSpc>
+                <a:spcPct val="130000"/>
+              </a:lnSpc>
+              <a:buNone/>
+            </a:pPr>
+            <a:r>
+              <a:rPr lang="en-US" sz="1100" dirty="0">
+                <a:solidFill>
+                  <a:srgbClr val="E2E8F0"/>
+                </a:solidFill>
+                <a:latin typeface="Calibri" pitchFamily="34" charset="0"/>
+                <a:ea typeface="Calibri" pitchFamily="34" charset="-122"/>
+                <a:cs typeface="Calibri" pitchFamily="34" charset="-120"/>
+              </a:rPr>
+              <a:t>• Measurement without action is meaningless</a:t>
+            </a:r>
+            <a:endParaRPr lang="en-US" sz="1100" dirty="0"/>
+          </a:p>
+          <a:p>
+            <a:pPr indent="0" marL="0">
+              <a:lnSpc>
+                <a:spcPct val="130000"/>
+              </a:lnSpc>
+              <a:buNone/>
+            </a:pPr>
+            <a:r>
+              <a:rPr lang="en-US" sz="1100" dirty="0">
+                <a:solidFill>
+                  <a:srgbClr val="E2E8F0"/>
+                </a:solidFill>
+                <a:latin typeface="Calibri" pitchFamily="34" charset="0"/>
+                <a:ea typeface="Calibri" pitchFamily="34" charset="-122"/>
+                <a:cs typeface="Calibri" pitchFamily="34" charset="-120"/>
+              </a:rPr>
+              <a:t>• Community-centered, not institution-centered</a:t>
+            </a:r>
+            <a:endParaRPr lang="en-US" sz="1100" dirty="0"/>
+          </a:p>
+          <a:p>
+            <a:pPr indent="0" marL="0">
+              <a:lnSpc>
+                <a:spcPct val="130000"/>
+              </a:lnSpc>
+              <a:buNone/>
+            </a:pPr>
+            <a:r>
+              <a:rPr lang="en-US" sz="1100" dirty="0">
+                <a:solidFill>
+                  <a:srgbClr val="E2E8F0"/>
+                </a:solidFill>
+                <a:latin typeface="Calibri" pitchFamily="34" charset="0"/>
+                <a:ea typeface="Calibri" pitchFamily="34" charset="-122"/>
+                <a:cs typeface="Calibri" pitchFamily="34" charset="-120"/>
+              </a:rPr>
+              <a:t>• Austin / Pflugerville shared geography</a:t>
+            </a:r>
+            <a:endParaRPr lang="en-US" sz="1100" dirty="0"/>
+          </a:p>
+          <a:p>
+            <a:pPr indent="0" marL="0">
+              <a:lnSpc>
+                <a:spcPct val="130000"/>
+              </a:lnSpc>
+              <a:buNone/>
+            </a:pPr>
+            <a:r>
+              <a:rPr lang="en-US" sz="1100" dirty="0">
+                <a:solidFill>
+                  <a:srgbClr val="E2E8F0"/>
+                </a:solidFill>
+                <a:latin typeface="Calibri" pitchFamily="34" charset="0"/>
+                <a:ea typeface="Calibri" pitchFamily="34" charset="-122"/>
+                <a:cs typeface="Calibri" pitchFamily="34" charset="-120"/>
+              </a:rPr>
+              <a:t>• People most impacted drive solutions</a:t>
+            </a:r>
+            <a:endParaRPr lang="en-US" sz="1100" dirty="0"/>
+          </a:p>
+        </p:txBody>
+      </p:sp>
+      <p:sp>
+        <p:nvSpPr>
+          <p:cNvPr id="6" name="Text 3"/>
+          <p:cNvSpPr/>
+          <p:nvPr/>
+        </p:nvSpPr>
+        <p:spPr>
+          <a:xfrm>
+            <a:off x="4846320" y="1097280"/>
             <a:ext cx="3840480" cy="274320"/>
           </a:xfrm>
           <a:prstGeom prst="rect">
@@ -2450,13 +2612,13 @@
             <a:r>
               <a:rPr lang="en-US" sz="1300" b="1" dirty="0">
                 <a:solidFill>
-                  <a:srgbClr val="14B8A6"/>
+                  <a:srgbClr val="6366F1"/>
                 </a:solidFill>
                 <a:latin typeface="Georgia" pitchFamily="34" charset="0"/>
                 <a:ea typeface="Georgia" pitchFamily="34" charset="-122"/>
                 <a:cs typeface="Georgia" pitchFamily="34" charset="-120"/>
               </a:rPr>
-              <a:t>Why This Matters Now:</a:t>
+              <a:t>On Ethical AI:</a:t>
             </a:r>
             <a:endParaRPr lang="en-US" sz="1300" dirty="0"/>
           </a:p>
@@ -2464,14 +2626,14 @@
       </p:sp>
       <p:sp>
         <p:nvSpPr>
-          <p:cNvPr id="6" name="Text 3"/>
-          <p:cNvSpPr/>
-          <p:nvPr/>
-        </p:nvSpPr>
-        <p:spPr>
-          <a:xfrm>
-            <a:off x="731520" y="1737360"/>
-            <a:ext cx="3840480" cy="3200400"/>
+          <p:cNvPr id="7" name="Text 4"/>
+          <p:cNvSpPr/>
+          <p:nvPr/>
+        </p:nvSpPr>
+        <p:spPr>
+          <a:xfrm>
+            <a:off x="4846320" y="1463040"/>
+            <a:ext cx="3840480" cy="2743200"/>
           </a:xfrm>
           <a:prstGeom prst="rect">
             <a:avLst/>
@@ -2490,17 +2652,17 @@
               <a:buNone/>
             </a:pPr>
             <a:r>
-              <a:rPr lang="en-US" sz="1050" dirty="0">
-                <a:solidFill>
-                  <a:srgbClr val="E2E8F0"/>
-                </a:solidFill>
-                <a:latin typeface="Calibri" pitchFamily="34" charset="0"/>
-                <a:ea typeface="Calibri" pitchFamily="34" charset="-122"/>
-                <a:cs typeface="Calibri" pitchFamily="34" charset="-120"/>
-              </a:rPr>
-              <a:t>• AI is exploding in the social sector</a:t>
-            </a:r>
-            <a:endParaRPr lang="en-US" sz="1050" dirty="0"/>
+              <a:rPr lang="en-US" sz="1100" dirty="0">
+                <a:solidFill>
+                  <a:srgbClr val="E2E8F0"/>
+                </a:solidFill>
+                <a:latin typeface="Calibri" pitchFamily="34" charset="0"/>
+                <a:ea typeface="Calibri" pitchFamily="34" charset="-122"/>
+                <a:cs typeface="Calibri" pitchFamily="34" charset="-120"/>
+              </a:rPr>
+              <a:t>• AI outputs are transparent and cited</a:t>
+            </a:r>
+            <a:endParaRPr lang="en-US" sz="1100" dirty="0"/>
           </a:p>
           <a:p>
             <a:pPr indent="0" marL="0">
@@ -2510,17 +2672,17 @@
               <a:buNone/>
             </a:pPr>
             <a:r>
-              <a:rPr lang="en-US" sz="1050" dirty="0">
-                <a:solidFill>
-                  <a:srgbClr val="E2E8F0"/>
-                </a:solidFill>
-                <a:latin typeface="Calibri" pitchFamily="34" charset="0"/>
-                <a:ea typeface="Calibri" pitchFamily="34" charset="-122"/>
-                <a:cs typeface="Calibri" pitchFamily="34" charset="-120"/>
-              </a:rPr>
-              <a:t>• Funders are asking: "How are you using AI?"</a:t>
-            </a:r>
-            <a:endParaRPr lang="en-US" sz="1050" dirty="0"/>
+              <a:rPr lang="en-US" sz="1100" dirty="0">
+                <a:solidFill>
+                  <a:srgbClr val="E2E8F0"/>
+                </a:solidFill>
+                <a:latin typeface="Calibri" pitchFamily="34" charset="0"/>
+                <a:ea typeface="Calibri" pitchFamily="34" charset="-122"/>
+                <a:cs typeface="Calibri" pitchFamily="34" charset="-120"/>
+              </a:rPr>
+              <a:t>• Bias is auditable — not hidden</a:t>
+            </a:r>
+            <a:endParaRPr lang="en-US" sz="1100" dirty="0"/>
           </a:p>
           <a:p>
             <a:pPr indent="0" marL="0">
@@ -2530,17 +2692,17 @@
               <a:buNone/>
             </a:pPr>
             <a:r>
-              <a:rPr lang="en-US" sz="1050" dirty="0">
-                <a:solidFill>
-                  <a:srgbClr val="E2E8F0"/>
-                </a:solidFill>
-                <a:latin typeface="Calibri" pitchFamily="34" charset="0"/>
-                <a:ea typeface="Calibri" pitchFamily="34" charset="-122"/>
-                <a:cs typeface="Calibri" pitchFamily="34" charset="-120"/>
-              </a:rPr>
-              <a:t>• Communities are nervous: "Will AI replace us?"</a:t>
-            </a:r>
-            <a:endParaRPr lang="en-US" sz="1050" dirty="0"/>
+              <a:rPr lang="en-US" sz="1100" dirty="0">
+                <a:solidFill>
+                  <a:srgbClr val="E2E8F0"/>
+                </a:solidFill>
+                <a:latin typeface="Calibri" pitchFamily="34" charset="0"/>
+                <a:ea typeface="Calibri" pitchFamily="34" charset="-122"/>
+                <a:cs typeface="Calibri" pitchFamily="34" charset="-120"/>
+              </a:rPr>
+              <a:t>• Community data stays community-owned</a:t>
+            </a:r>
+            <a:endParaRPr lang="en-US" sz="1100" dirty="0"/>
           </a:p>
           <a:p>
             <a:pPr indent="0" marL="0">
@@ -2550,17 +2712,17 @@
               <a:buNone/>
             </a:pPr>
             <a:r>
-              <a:rPr lang="en-US" sz="1050" dirty="0">
-                <a:solidFill>
-                  <a:srgbClr val="E2E8F0"/>
-                </a:solidFill>
-                <a:latin typeface="Calibri" pitchFamily="34" charset="0"/>
-                <a:ea typeface="Calibri" pitchFamily="34" charset="-122"/>
-                <a:cs typeface="Calibri" pitchFamily="34" charset="-120"/>
-              </a:rPr>
-              <a:t>• Very few leaders bridge equity + AI</a:t>
-            </a:r>
-            <a:endParaRPr lang="en-US" sz="1050" dirty="0"/>
+              <a:rPr lang="en-US" sz="1100" dirty="0">
+                <a:solidFill>
+                  <a:srgbClr val="E2E8F0"/>
+                </a:solidFill>
+                <a:latin typeface="Calibri" pitchFamily="34" charset="0"/>
+                <a:ea typeface="Calibri" pitchFamily="34" charset="-122"/>
+                <a:cs typeface="Calibri" pitchFamily="34" charset="-120"/>
+              </a:rPr>
+              <a:t>• AI serves — it never surveils</a:t>
+            </a:r>
+            <a:endParaRPr lang="en-US" sz="1100" dirty="0"/>
           </a:p>
           <a:p>
             <a:pPr indent="0" marL="0">
@@ -2569,7 +2731,7 @@
               </a:lnSpc>
               <a:buNone/>
             </a:pPr>
-            <a:endParaRPr lang="en-US" sz="1050" dirty="0"/>
+            <a:endParaRPr lang="en-US" sz="1100" dirty="0"/>
           </a:p>
           <a:p>
             <a:pPr indent="0" marL="0">
@@ -2579,17 +2741,17 @@
               <a:buNone/>
             </a:pPr>
             <a:r>
-              <a:rPr lang="en-US" sz="1050" dirty="0">
-                <a:solidFill>
-                  <a:srgbClr val="E2E8F0"/>
-                </a:solidFill>
-                <a:latin typeface="Calibri" pitchFamily="34" charset="0"/>
-                <a:ea typeface="Calibri" pitchFamily="34" charset="-122"/>
-                <a:cs typeface="Calibri" pitchFamily="34" charset="-120"/>
-              </a:rPr>
-              <a:t>Meme has been thinking about equitable</a:t>
-            </a:r>
-            <a:endParaRPr lang="en-US" sz="1050" dirty="0"/>
+              <a:rPr lang="en-US" sz="1100" dirty="0">
+                <a:solidFill>
+                  <a:srgbClr val="E2E8F0"/>
+                </a:solidFill>
+                <a:latin typeface="Calibri" pitchFamily="34" charset="0"/>
+                <a:ea typeface="Calibri" pitchFamily="34" charset="-122"/>
+                <a:cs typeface="Calibri" pitchFamily="34" charset="-120"/>
+              </a:rPr>
+              <a:t>MEASURE's CARE Model governance</a:t>
+            </a:r>
+            <a:endParaRPr lang="en-US" sz="1100" dirty="0"/>
           </a:p>
           <a:p>
             <a:pPr indent="0" marL="0">
@@ -2599,17 +2761,17 @@
               <a:buNone/>
             </a:pPr>
             <a:r>
-              <a:rPr lang="en-US" sz="1050" dirty="0">
-                <a:solidFill>
-                  <a:srgbClr val="E2E8F0"/>
-                </a:solidFill>
-                <a:latin typeface="Calibri" pitchFamily="34" charset="0"/>
-                <a:ea typeface="Calibri" pitchFamily="34" charset="-122"/>
-                <a:cs typeface="Calibri" pitchFamily="34" charset="-120"/>
-              </a:rPr>
-              <a:t>technology longer than most of the AI</a:t>
-            </a:r>
-            <a:endParaRPr lang="en-US" sz="1050" dirty="0"/>
+              <a:rPr lang="en-US" sz="1100" dirty="0">
+                <a:solidFill>
+                  <a:srgbClr val="E2E8F0"/>
+                </a:solidFill>
+                <a:latin typeface="Calibri" pitchFamily="34" charset="0"/>
+                <a:ea typeface="Calibri" pitchFamily="34" charset="-122"/>
+                <a:cs typeface="Calibri" pitchFamily="34" charset="-120"/>
+              </a:rPr>
+              <a:t>+ our anti-hallucination AI architecture</a:t>
+            </a:r>
+            <a:endParaRPr lang="en-US" sz="1100" dirty="0"/>
           </a:p>
           <a:p>
             <a:pPr indent="0" marL="0">
@@ -2619,17 +2781,17 @@
               <a:buNone/>
             </a:pPr>
             <a:r>
-              <a:rPr lang="en-US" sz="1050" dirty="0">
-                <a:solidFill>
-                  <a:srgbClr val="E2E8F0"/>
-                </a:solidFill>
-                <a:latin typeface="Calibri" pitchFamily="34" charset="0"/>
-                <a:ea typeface="Calibri" pitchFamily="34" charset="-122"/>
-                <a:cs typeface="Calibri" pitchFamily="34" charset="-120"/>
-              </a:rPr>
-              <a:t>industry has existed.</a:t>
-            </a:r>
-            <a:endParaRPr lang="en-US" sz="1050" dirty="0"/>
+              <a:rPr lang="en-US" sz="1100" dirty="0">
+                <a:solidFill>
+                  <a:srgbClr val="E2E8F0"/>
+                </a:solidFill>
+                <a:latin typeface="Calibri" pitchFamily="34" charset="0"/>
+                <a:ea typeface="Calibri" pitchFamily="34" charset="-122"/>
+                <a:cs typeface="Calibri" pitchFamily="34" charset="-120"/>
+              </a:rPr>
+              <a:t>= trustworthy AI for community data</a:t>
+            </a:r>
+            <a:endParaRPr lang="en-US" sz="1100" dirty="0"/>
           </a:p>
           <a:p>
             <a:pPr indent="0" marL="0">
@@ -2638,7 +2800,7 @@
               </a:lnSpc>
               <a:buNone/>
             </a:pPr>
-            <a:endParaRPr lang="en-US" sz="1050" dirty="0"/>
+            <a:endParaRPr lang="en-US" sz="1100" dirty="0"/>
           </a:p>
           <a:p>
             <a:pPr indent="0" marL="0">
@@ -2648,17 +2810,17 @@
               <a:buNone/>
             </a:pPr>
             <a:r>
-              <a:rPr lang="en-US" sz="1050" dirty="0">
-                <a:solidFill>
-                  <a:srgbClr val="E2E8F0"/>
-                </a:solidFill>
-                <a:latin typeface="Calibri" pitchFamily="34" charset="0"/>
-                <a:ea typeface="Calibri" pitchFamily="34" charset="-122"/>
-                <a:cs typeface="Calibri" pitchFamily="34" charset="-120"/>
-              </a:rPr>
-              <a:t>Her CARE Model is the governance framework</a:t>
-            </a:r>
-            <a:endParaRPr lang="en-US" sz="1050" dirty="0"/>
+              <a:rPr lang="en-US" sz="1100" dirty="0">
+                <a:solidFill>
+                  <a:srgbClr val="E2E8F0"/>
+                </a:solidFill>
+                <a:latin typeface="Calibri" pitchFamily="34" charset="0"/>
+                <a:ea typeface="Calibri" pitchFamily="34" charset="-122"/>
+                <a:cs typeface="Calibri" pitchFamily="34" charset="-120"/>
+              </a:rPr>
+              <a:t>Both organizations believe AI</a:t>
+            </a:r>
+            <a:endParaRPr lang="en-US" sz="1100" dirty="0"/>
           </a:p>
           <a:p>
             <a:pPr indent="0" marL="0">
@@ -2668,17 +2830,17 @@
               <a:buNone/>
             </a:pPr>
             <a:r>
-              <a:rPr lang="en-US" sz="1050" dirty="0">
-                <a:solidFill>
-                  <a:srgbClr val="E2E8F0"/>
-                </a:solidFill>
-                <a:latin typeface="Calibri" pitchFamily="34" charset="0"/>
-                <a:ea typeface="Calibri" pitchFamily="34" charset="-122"/>
-                <a:cs typeface="Calibri" pitchFamily="34" charset="-120"/>
-              </a:rPr>
-              <a:t>for how AI should interact with community data:</a:t>
-            </a:r>
-            <a:endParaRPr lang="en-US" sz="1050" dirty="0"/>
+              <a:rPr lang="en-US" sz="1100" dirty="0">
+                <a:solidFill>
+                  <a:srgbClr val="E2E8F0"/>
+                </a:solidFill>
+                <a:latin typeface="Calibri" pitchFamily="34" charset="0"/>
+                <a:ea typeface="Calibri" pitchFamily="34" charset="-122"/>
+                <a:cs typeface="Calibri" pitchFamily="34" charset="-120"/>
+              </a:rPr>
+              <a:t>should amplify community voice,</a:t>
+            </a:r>
+            <a:endParaRPr lang="en-US" sz="1100" dirty="0"/>
           </a:p>
           <a:p>
             <a:pPr indent="0" marL="0">
@@ -2688,476 +2850,17 @@
               <a:buNone/>
             </a:pPr>
             <a:r>
-              <a:rPr lang="en-US" sz="1050" dirty="0">
-                <a:solidFill>
-                  <a:srgbClr val="E2E8F0"/>
-                </a:solidFill>
-                <a:latin typeface="Calibri" pitchFamily="34" charset="0"/>
-                <a:ea typeface="Calibri" pitchFamily="34" charset="-122"/>
-                <a:cs typeface="Calibri" pitchFamily="34" charset="-120"/>
-              </a:rPr>
-              <a:t>  → Community-centered</a:t>
-            </a:r>
-            <a:endParaRPr lang="en-US" sz="1050" dirty="0"/>
-          </a:p>
-          <a:p>
-            <a:pPr indent="0" marL="0">
-              <a:lnSpc>
-                <a:spcPct val="120000"/>
-              </a:lnSpc>
-              <a:buNone/>
-            </a:pPr>
-            <a:r>
-              <a:rPr lang="en-US" sz="1050" dirty="0">
-                <a:solidFill>
-                  <a:srgbClr val="E2E8F0"/>
-                </a:solidFill>
-                <a:latin typeface="Calibri" pitchFamily="34" charset="0"/>
-                <a:ea typeface="Calibri" pitchFamily="34" charset="-122"/>
-                <a:cs typeface="Calibri" pitchFamily="34" charset="-120"/>
-              </a:rPr>
-              <a:t>  → Anti-extractive</a:t>
-            </a:r>
-            <a:endParaRPr lang="en-US" sz="1050" dirty="0"/>
-          </a:p>
-          <a:p>
-            <a:pPr indent="0" marL="0">
-              <a:lnSpc>
-                <a:spcPct val="120000"/>
-              </a:lnSpc>
-              <a:buNone/>
-            </a:pPr>
-            <a:r>
-              <a:rPr lang="en-US" sz="1050" dirty="0">
-                <a:solidFill>
-                  <a:srgbClr val="E2E8F0"/>
-                </a:solidFill>
-                <a:latin typeface="Calibri" pitchFamily="34" charset="0"/>
-                <a:ea typeface="Calibri" pitchFamily="34" charset="-122"/>
-                <a:cs typeface="Calibri" pitchFamily="34" charset="-120"/>
-              </a:rPr>
-              <a:t>  → Research-grounded</a:t>
-            </a:r>
-            <a:endParaRPr lang="en-US" sz="1050" dirty="0"/>
-          </a:p>
-          <a:p>
-            <a:pPr indent="0" marL="0">
-              <a:lnSpc>
-                <a:spcPct val="120000"/>
-              </a:lnSpc>
-              <a:buNone/>
-            </a:pPr>
-            <a:r>
-              <a:rPr lang="en-US" sz="1050" dirty="0">
-                <a:solidFill>
-                  <a:srgbClr val="E2E8F0"/>
-                </a:solidFill>
-                <a:latin typeface="Calibri" pitchFamily="34" charset="0"/>
-                <a:ea typeface="Calibri" pitchFamily="34" charset="-122"/>
-                <a:cs typeface="Calibri" pitchFamily="34" charset="-120"/>
-              </a:rPr>
-              <a:t>  → Equity-first</a:t>
-            </a:r>
-            <a:endParaRPr lang="en-US" sz="1050" dirty="0"/>
-          </a:p>
-        </p:txBody>
-      </p:sp>
-      <p:sp>
-        <p:nvSpPr>
-          <p:cNvPr id="7" name="Text 4"/>
-          <p:cNvSpPr/>
-          <p:nvPr/>
-        </p:nvSpPr>
-        <p:spPr>
-          <a:xfrm>
-            <a:off x="4846320" y="1371600"/>
-            <a:ext cx="3840480" cy="274320"/>
-          </a:xfrm>
-          <a:prstGeom prst="rect">
-            <a:avLst/>
-          </a:prstGeom>
-          <a:noFill/>
-          <a:ln/>
-        </p:spPr>
-        <p:txBody>
-          <a:bodyPr wrap="square" rtlCol="0" anchor="ctr"/>
-          <a:lstStyle/>
-          <a:p>
-            <a:pPr indent="0" marL="0">
-              <a:buNone/>
-            </a:pPr>
-            <a:r>
-              <a:rPr lang="en-US" sz="1300" b="1" dirty="0">
-                <a:solidFill>
-                  <a:srgbClr val="6366F1"/>
-                </a:solidFill>
-                <a:latin typeface="Georgia" pitchFamily="34" charset="0"/>
-                <a:ea typeface="Georgia" pitchFamily="34" charset="-122"/>
-                <a:cs typeface="Georgia" pitchFamily="34" charset="-120"/>
-              </a:rPr>
-              <a:t>Our Partnership Model:</a:t>
-            </a:r>
-            <a:endParaRPr lang="en-US" sz="1300" dirty="0"/>
-          </a:p>
-        </p:txBody>
-      </p:sp>
-      <p:sp>
-        <p:nvSpPr>
-          <p:cNvPr id="8" name="Text 5"/>
-          <p:cNvSpPr/>
-          <p:nvPr/>
-        </p:nvSpPr>
-        <p:spPr>
-          <a:xfrm>
-            <a:off x="4846320" y="1737360"/>
-            <a:ext cx="3840480" cy="3200400"/>
-          </a:xfrm>
-          <a:prstGeom prst="rect">
-            <a:avLst/>
-          </a:prstGeom>
-          <a:noFill/>
-          <a:ln/>
-        </p:spPr>
-        <p:txBody>
-          <a:bodyPr wrap="square" rtlCol="0" anchor="ctr"/>
-          <a:lstStyle/>
-          <a:p>
-            <a:pPr indent="0" marL="0">
-              <a:lnSpc>
-                <a:spcPct val="115000"/>
-              </a:lnSpc>
-              <a:buNone/>
-            </a:pPr>
-            <a:r>
-              <a:rPr lang="en-US" sz="1050" dirty="0">
-                <a:solidFill>
-                  <a:srgbClr val="E2E8F0"/>
-                </a:solidFill>
-                <a:latin typeface="Calibri" pitchFamily="34" charset="0"/>
-                <a:ea typeface="Calibri" pitchFamily="34" charset="-122"/>
-                <a:cs typeface="Calibri" pitchFamily="34" charset="-120"/>
-              </a:rPr>
-              <a:t>Meme's Ethical AI Expertise</a:t>
-            </a:r>
-            <a:endParaRPr lang="en-US" sz="1050" dirty="0"/>
-          </a:p>
-          <a:p>
-            <a:pPr indent="0" marL="0">
-              <a:lnSpc>
-                <a:spcPct val="115000"/>
-              </a:lnSpc>
-              <a:buNone/>
-            </a:pPr>
-            <a:r>
-              <a:rPr lang="en-US" sz="1050" dirty="0">
-                <a:solidFill>
-                  <a:srgbClr val="E2E8F0"/>
-                </a:solidFill>
-                <a:latin typeface="Calibri" pitchFamily="34" charset="0"/>
-                <a:ea typeface="Calibri" pitchFamily="34" charset="-122"/>
-                <a:cs typeface="Calibri" pitchFamily="34" charset="-120"/>
-              </a:rPr>
-              <a:t>(governance, principles, community trust)</a:t>
-            </a:r>
-            <a:endParaRPr lang="en-US" sz="1050" dirty="0"/>
-          </a:p>
-          <a:p>
-            <a:pPr indent="0" marL="0">
-              <a:lnSpc>
-                <a:spcPct val="115000"/>
-              </a:lnSpc>
-              <a:buNone/>
-            </a:pPr>
-            <a:r>
-              <a:rPr lang="en-US" sz="1050" dirty="0">
-                <a:solidFill>
-                  <a:srgbClr val="E2E8F0"/>
-                </a:solidFill>
-                <a:latin typeface="Calibri" pitchFamily="34" charset="0"/>
-                <a:ea typeface="Calibri" pitchFamily="34" charset="-122"/>
-                <a:cs typeface="Calibri" pitchFamily="34" charset="-120"/>
-              </a:rPr>
-              <a:t>        +</a:t>
-            </a:r>
-            <a:endParaRPr lang="en-US" sz="1050" dirty="0"/>
-          </a:p>
-          <a:p>
-            <a:pPr indent="0" marL="0">
-              <a:lnSpc>
-                <a:spcPct val="115000"/>
-              </a:lnSpc>
-              <a:buNone/>
-            </a:pPr>
-            <a:r>
-              <a:rPr lang="en-US" sz="1050" dirty="0">
-                <a:solidFill>
-                  <a:srgbClr val="E2E8F0"/>
-                </a:solidFill>
-                <a:latin typeface="Calibri" pitchFamily="34" charset="0"/>
-                <a:ea typeface="Calibri" pitchFamily="34" charset="-122"/>
-                <a:cs typeface="Calibri" pitchFamily="34" charset="-120"/>
-              </a:rPr>
-              <a:t>Our Technical AI Architecture</a:t>
-            </a:r>
-            <a:endParaRPr lang="en-US" sz="1050" dirty="0"/>
-          </a:p>
-          <a:p>
-            <a:pPr indent="0" marL="0">
-              <a:lnSpc>
-                <a:spcPct val="115000"/>
-              </a:lnSpc>
-              <a:buNone/>
-            </a:pPr>
-            <a:r>
-              <a:rPr lang="en-US" sz="1050" dirty="0">
-                <a:solidFill>
-                  <a:srgbClr val="E2E8F0"/>
-                </a:solidFill>
-                <a:latin typeface="Calibri" pitchFamily="34" charset="0"/>
-                <a:ea typeface="Calibri" pitchFamily="34" charset="-122"/>
-                <a:cs typeface="Calibri" pitchFamily="34" charset="-120"/>
-              </a:rPr>
-              <a:t>(4 engines, RAG, anti-hallucination,</a:t>
-            </a:r>
-            <a:endParaRPr lang="en-US" sz="1050" dirty="0"/>
-          </a:p>
-          <a:p>
-            <a:pPr indent="0" marL="0">
-              <a:lnSpc>
-                <a:spcPct val="115000"/>
-              </a:lnSpc>
-              <a:buNone/>
-            </a:pPr>
-            <a:r>
-              <a:rPr lang="en-US" sz="1050" dirty="0">
-                <a:solidFill>
-                  <a:srgbClr val="E2E8F0"/>
-                </a:solidFill>
-                <a:latin typeface="Calibri" pitchFamily="34" charset="0"/>
-                <a:ea typeface="Calibri" pitchFamily="34" charset="-122"/>
-                <a:cs typeface="Calibri" pitchFamily="34" charset="-120"/>
-              </a:rPr>
-              <a:t>citations, bias auditing)</a:t>
-            </a:r>
-            <a:endParaRPr lang="en-US" sz="1050" dirty="0"/>
-          </a:p>
-          <a:p>
-            <a:pPr indent="0" marL="0">
-              <a:lnSpc>
-                <a:spcPct val="115000"/>
-              </a:lnSpc>
-              <a:buNone/>
-            </a:pPr>
-            <a:r>
-              <a:rPr lang="en-US" sz="1050" dirty="0">
-                <a:solidFill>
-                  <a:srgbClr val="E2E8F0"/>
-                </a:solidFill>
-                <a:latin typeface="Calibri" pitchFamily="34" charset="0"/>
-                <a:ea typeface="Calibri" pitchFamily="34" charset="-122"/>
-                <a:cs typeface="Calibri" pitchFamily="34" charset="-120"/>
-              </a:rPr>
-              <a:t>        =</a:t>
-            </a:r>
-            <a:endParaRPr lang="en-US" sz="1050" dirty="0"/>
-          </a:p>
-          <a:p>
-            <a:pPr indent="0" marL="0">
-              <a:lnSpc>
-                <a:spcPct val="115000"/>
-              </a:lnSpc>
-              <a:buNone/>
-            </a:pPr>
-            <a:r>
-              <a:rPr lang="en-US" sz="1050" dirty="0">
-                <a:solidFill>
-                  <a:srgbClr val="E2E8F0"/>
-                </a:solidFill>
-                <a:latin typeface="Calibri" pitchFamily="34" charset="0"/>
-                <a:ea typeface="Calibri" pitchFamily="34" charset="-122"/>
-                <a:cs typeface="Calibri" pitchFamily="34" charset="-120"/>
-              </a:rPr>
-              <a:t>A live demonstration of what ethical AI</a:t>
-            </a:r>
-            <a:endParaRPr lang="en-US" sz="1050" dirty="0"/>
-          </a:p>
-          <a:p>
-            <a:pPr indent="0" marL="0">
-              <a:lnSpc>
-                <a:spcPct val="115000"/>
-              </a:lnSpc>
-              <a:buNone/>
-            </a:pPr>
-            <a:r>
-              <a:rPr lang="en-US" sz="1050" dirty="0">
-                <a:solidFill>
-                  <a:srgbClr val="E2E8F0"/>
-                </a:solidFill>
-                <a:latin typeface="Calibri" pitchFamily="34" charset="0"/>
-                <a:ea typeface="Calibri" pitchFamily="34" charset="-122"/>
-                <a:cs typeface="Calibri" pitchFamily="34" charset="-120"/>
-              </a:rPr>
-              <a:t>looks like in practice — not a white paper,</a:t>
-            </a:r>
-            <a:endParaRPr lang="en-US" sz="1050" dirty="0"/>
-          </a:p>
-          <a:p>
-            <a:pPr indent="0" marL="0">
-              <a:lnSpc>
-                <a:spcPct val="115000"/>
-              </a:lnSpc>
-              <a:buNone/>
-            </a:pPr>
-            <a:r>
-              <a:rPr lang="en-US" sz="1050" dirty="0">
-                <a:solidFill>
-                  <a:srgbClr val="E2E8F0"/>
-                </a:solidFill>
-                <a:latin typeface="Calibri" pitchFamily="34" charset="0"/>
-                <a:ea typeface="Calibri" pitchFamily="34" charset="-122"/>
-                <a:cs typeface="Calibri" pitchFamily="34" charset="-120"/>
-              </a:rPr>
-              <a:t>but an operational system serving real</a:t>
-            </a:r>
-            <a:endParaRPr lang="en-US" sz="1050" dirty="0"/>
-          </a:p>
-          <a:p>
-            <a:pPr indent="0" marL="0">
-              <a:lnSpc>
-                <a:spcPct val="115000"/>
-              </a:lnSpc>
-              <a:buNone/>
-            </a:pPr>
-            <a:r>
-              <a:rPr lang="en-US" sz="1050" dirty="0">
-                <a:solidFill>
-                  <a:srgbClr val="E2E8F0"/>
-                </a:solidFill>
-                <a:latin typeface="Calibri" pitchFamily="34" charset="0"/>
-                <a:ea typeface="Calibri" pitchFamily="34" charset="-122"/>
-                <a:cs typeface="Calibri" pitchFamily="34" charset="-120"/>
-              </a:rPr>
-              <a:t>communities in Central Texas</a:t>
-            </a:r>
-            <a:endParaRPr lang="en-US" sz="1050" dirty="0"/>
-          </a:p>
-          <a:p>
-            <a:pPr indent="0" marL="0">
-              <a:lnSpc>
-                <a:spcPct val="115000"/>
-              </a:lnSpc>
-              <a:buNone/>
-            </a:pPr>
-            <a:endParaRPr lang="en-US" sz="1050" dirty="0"/>
-          </a:p>
-          <a:p>
-            <a:pPr indent="0" marL="0">
-              <a:lnSpc>
-                <a:spcPct val="115000"/>
-              </a:lnSpc>
-              <a:buNone/>
-            </a:pPr>
-            <a:r>
-              <a:rPr lang="en-US" sz="1050" dirty="0">
-                <a:solidFill>
-                  <a:srgbClr val="E2E8F0"/>
-                </a:solidFill>
-                <a:latin typeface="Calibri" pitchFamily="34" charset="0"/>
-                <a:ea typeface="Calibri" pitchFamily="34" charset="-122"/>
-                <a:cs typeface="Calibri" pitchFamily="34" charset="-120"/>
-              </a:rPr>
-              <a:t>This is publishable.</a:t>
-            </a:r>
-            <a:endParaRPr lang="en-US" sz="1050" dirty="0"/>
-          </a:p>
-          <a:p>
-            <a:pPr indent="0" marL="0">
-              <a:lnSpc>
-                <a:spcPct val="115000"/>
-              </a:lnSpc>
-              <a:buNone/>
-            </a:pPr>
-            <a:r>
-              <a:rPr lang="en-US" sz="1050" dirty="0">
-                <a:solidFill>
-                  <a:srgbClr val="E2E8F0"/>
-                </a:solidFill>
-                <a:latin typeface="Calibri" pitchFamily="34" charset="0"/>
-                <a:ea typeface="Calibri" pitchFamily="34" charset="-122"/>
-                <a:cs typeface="Calibri" pitchFamily="34" charset="-120"/>
-              </a:rPr>
-              <a:t>This is fundable.</a:t>
-            </a:r>
-            <a:endParaRPr lang="en-US" sz="1050" dirty="0"/>
-          </a:p>
-          <a:p>
-            <a:pPr indent="0" marL="0">
-              <a:lnSpc>
-                <a:spcPct val="115000"/>
-              </a:lnSpc>
-              <a:buNone/>
-            </a:pPr>
-            <a:r>
-              <a:rPr lang="en-US" sz="1050" dirty="0">
-                <a:solidFill>
-                  <a:srgbClr val="E2E8F0"/>
-                </a:solidFill>
-                <a:latin typeface="Calibri" pitchFamily="34" charset="0"/>
-                <a:ea typeface="Calibri" pitchFamily="34" charset="-122"/>
-                <a:cs typeface="Calibri" pitchFamily="34" charset="-120"/>
-              </a:rPr>
-              <a:t>This is what the sector needs.</a:t>
-            </a:r>
-            <a:endParaRPr lang="en-US" sz="1050" dirty="0"/>
-          </a:p>
-          <a:p>
-            <a:pPr indent="0" marL="0">
-              <a:lnSpc>
-                <a:spcPct val="115000"/>
-              </a:lnSpc>
-              <a:buNone/>
-            </a:pPr>
-            <a:endParaRPr lang="en-US" sz="1050" dirty="0"/>
-          </a:p>
-          <a:p>
-            <a:pPr indent="0" marL="0">
-              <a:lnSpc>
-                <a:spcPct val="115000"/>
-              </a:lnSpc>
-              <a:buNone/>
-            </a:pPr>
-            <a:r>
-              <a:rPr lang="en-US" sz="1050" dirty="0">
-                <a:solidFill>
-                  <a:srgbClr val="E2E8F0"/>
-                </a:solidFill>
-                <a:latin typeface="Calibri" pitchFamily="34" charset="0"/>
-                <a:ea typeface="Calibri" pitchFamily="34" charset="-122"/>
-                <a:cs typeface="Calibri" pitchFamily="34" charset="-120"/>
-              </a:rPr>
-              <a:t>Meme is not learning AI from us.</a:t>
-            </a:r>
-            <a:endParaRPr lang="en-US" sz="1050" dirty="0"/>
-          </a:p>
-          <a:p>
-            <a:pPr indent="0" marL="0">
-              <a:lnSpc>
-                <a:spcPct val="115000"/>
-              </a:lnSpc>
-              <a:buNone/>
-            </a:pPr>
-            <a:r>
-              <a:rPr lang="en-US" sz="1050" dirty="0">
-                <a:solidFill>
-                  <a:srgbClr val="E2E8F0"/>
-                </a:solidFill>
-                <a:latin typeface="Calibri" pitchFamily="34" charset="0"/>
-                <a:ea typeface="Calibri" pitchFamily="34" charset="-122"/>
-                <a:cs typeface="Calibri" pitchFamily="34" charset="-120"/>
-              </a:rPr>
-              <a:t>We are engineering her vision at scale.</a:t>
-            </a:r>
-            <a:endParaRPr lang="en-US" sz="1050" dirty="0"/>
+              <a:rPr lang="en-US" sz="1100" dirty="0">
+                <a:solidFill>
+                  <a:srgbClr val="E2E8F0"/>
+                </a:solidFill>
+                <a:latin typeface="Calibri" pitchFamily="34" charset="0"/>
+                <a:ea typeface="Calibri" pitchFamily="34" charset="-122"/>
+                <a:cs typeface="Calibri" pitchFamily="34" charset="-120"/>
+              </a:rPr>
+              <a:t>not replace it.</a:t>
+            </a:r>
+            <a:endParaRPr lang="en-US" sz="1100" dirty="0"/>
           </a:p>
         </p:txBody>
       </p:sp>
@@ -3226,7 +2929,7 @@
                 <a:ea typeface="Georgia" pitchFamily="34" charset="-122"/>
                 <a:cs typeface="Georgia" pitchFamily="34" charset="-120"/>
               </a:rPr>
-              <a:t>MEASURE Free Data Support Program</a:t>
+              <a:t>What Partnership Looks Like</a:t>
             </a:r>
             <a:endParaRPr lang="en-US" sz="2400" dirty="0"/>
           </a:p>
@@ -3240,34 +2943,34 @@
         </p:nvSpPr>
         <p:spPr>
           <a:xfrm>
-            <a:off x="731520" y="822960"/>
-            <a:ext cx="7680960" cy="274320"/>
-          </a:xfrm>
-          <a:prstGeom prst="rect">
-            <a:avLst/>
-          </a:prstGeom>
-          <a:noFill/>
-          <a:ln/>
-        </p:spPr>
-        <p:txBody>
-          <a:bodyPr wrap="square" rtlCol="0" anchor="ctr"/>
-          <a:lstStyle/>
-          <a:p>
-            <a:pPr indent="0" marL="0">
-              <a:buNone/>
-            </a:pPr>
-            <a:r>
-              <a:rPr lang="en-US" sz="1400" b="1" dirty="0">
-                <a:solidFill>
-                  <a:srgbClr val="F59E0B"/>
+            <a:off x="731520" y="1097280"/>
+            <a:ext cx="3840480" cy="274320"/>
+          </a:xfrm>
+          <a:prstGeom prst="rect">
+            <a:avLst/>
+          </a:prstGeom>
+          <a:noFill/>
+          <a:ln/>
+        </p:spPr>
+        <p:txBody>
+          <a:bodyPr wrap="square" rtlCol="0" anchor="ctr"/>
+          <a:lstStyle/>
+          <a:p>
+            <a:pPr indent="0" marL="0">
+              <a:buNone/>
+            </a:pPr>
+            <a:r>
+              <a:rPr lang="en-US" sz="1300" b="1" dirty="0">
+                <a:solidFill>
+                  <a:srgbClr val="14B8A6"/>
                 </a:solidFill>
                 <a:latin typeface="Georgia" pitchFamily="34" charset="0"/>
                 <a:ea typeface="Georgia" pitchFamily="34" charset="-122"/>
                 <a:cs typeface="Georgia" pitchFamily="34" charset="-120"/>
               </a:rPr>
-              <a:t>5,000 in-kind grant + ,000 stipend</a:t>
-            </a:r>
-            <a:endParaRPr lang="en-US" sz="1400" dirty="0"/>
+              <a:t>Immediate Opportunities:</a:t>
+            </a:r>
+            <a:endParaRPr lang="en-US" sz="1300" dirty="0"/>
           </a:p>
         </p:txBody>
       </p:sp>
@@ -3279,7 +2982,296 @@
         </p:nvSpPr>
         <p:spPr>
           <a:xfrm>
-            <a:off x="731520" y="1371600"/>
+            <a:off x="731520" y="1463040"/>
+            <a:ext cx="3840480" cy="3200400"/>
+          </a:xfrm>
+          <a:prstGeom prst="rect">
+            <a:avLst/>
+          </a:prstGeom>
+          <a:noFill/>
+          <a:ln/>
+        </p:spPr>
+        <p:txBody>
+          <a:bodyPr wrap="square" rtlCol="0" anchor="ctr"/>
+          <a:lstStyle/>
+          <a:p>
+            <a:pPr indent="0" marL="0">
+              <a:lnSpc>
+                <a:spcPct val="115000"/>
+              </a:lnSpc>
+              <a:buNone/>
+            </a:pPr>
+            <a:r>
+              <a:rPr lang="en-US" sz="1050" dirty="0">
+                <a:solidFill>
+                  <a:srgbClr val="E2E8F0"/>
+                </a:solidFill>
+                <a:latin typeface="Calibri" pitchFamily="34" charset="0"/>
+                <a:ea typeface="Calibri" pitchFamily="34" charset="-122"/>
+                <a:cs typeface="Calibri" pitchFamily="34" charset="-120"/>
+              </a:rPr>
+              <a:t>• Joint grant applications</a:t>
+            </a:r>
+            <a:endParaRPr lang="en-US" sz="1050" dirty="0"/>
+          </a:p>
+          <a:p>
+            <a:pPr indent="0" marL="0">
+              <a:lnSpc>
+                <a:spcPct val="115000"/>
+              </a:lnSpc>
+              <a:buNone/>
+            </a:pPr>
+            <a:r>
+              <a:rPr lang="en-US" sz="1050" dirty="0">
+                <a:solidFill>
+                  <a:srgbClr val="E2E8F0"/>
+                </a:solidFill>
+                <a:latin typeface="Calibri" pitchFamily="34" charset="0"/>
+                <a:ea typeface="Calibri" pitchFamily="34" charset="-122"/>
+                <a:cs typeface="Calibri" pitchFamily="34" charset="-120"/>
+              </a:rPr>
+              <a:t>   MEASURE = community partner</a:t>
+            </a:r>
+            <a:endParaRPr lang="en-US" sz="1050" dirty="0"/>
+          </a:p>
+          <a:p>
+            <a:pPr indent="0" marL="0">
+              <a:lnSpc>
+                <a:spcPct val="115000"/>
+              </a:lnSpc>
+              <a:buNone/>
+            </a:pPr>
+            <a:r>
+              <a:rPr lang="en-US" sz="1050" dirty="0">
+                <a:solidFill>
+                  <a:srgbClr val="E2E8F0"/>
+                </a:solidFill>
+                <a:latin typeface="Calibri" pitchFamily="34" charset="0"/>
+                <a:ea typeface="Calibri" pitchFamily="34" charset="-122"/>
+                <a:cs typeface="Calibri" pitchFamily="34" charset="-120"/>
+              </a:rPr>
+              <a:t>   We = AI + technology partner</a:t>
+            </a:r>
+            <a:endParaRPr lang="en-US" sz="1050" dirty="0"/>
+          </a:p>
+          <a:p>
+            <a:pPr indent="0" marL="0">
+              <a:lnSpc>
+                <a:spcPct val="115000"/>
+              </a:lnSpc>
+              <a:buNone/>
+            </a:pPr>
+            <a:r>
+              <a:rPr lang="en-US" sz="1050" dirty="0">
+                <a:solidFill>
+                  <a:srgbClr val="E2E8F0"/>
+                </a:solidFill>
+                <a:latin typeface="Calibri" pitchFamily="34" charset="0"/>
+                <a:ea typeface="Calibri" pitchFamily="34" charset="-122"/>
+                <a:cs typeface="Calibri" pitchFamily="34" charset="-120"/>
+              </a:rPr>
+              <a:t>   Combined = complete proposal</a:t>
+            </a:r>
+            <a:endParaRPr lang="en-US" sz="1050" dirty="0"/>
+          </a:p>
+          <a:p>
+            <a:pPr indent="0" marL="0">
+              <a:lnSpc>
+                <a:spcPct val="115000"/>
+              </a:lnSpc>
+              <a:buNone/>
+            </a:pPr>
+            <a:endParaRPr lang="en-US" sz="1050" dirty="0"/>
+          </a:p>
+          <a:p>
+            <a:pPr indent="0" marL="0">
+              <a:lnSpc>
+                <a:spcPct val="115000"/>
+              </a:lnSpc>
+              <a:buNone/>
+            </a:pPr>
+            <a:r>
+              <a:rPr lang="en-US" sz="1050" dirty="0">
+                <a:solidFill>
+                  <a:srgbClr val="E2E8F0"/>
+                </a:solidFill>
+                <a:latin typeface="Calibri" pitchFamily="34" charset="0"/>
+                <a:ea typeface="Calibri" pitchFamily="34" charset="-122"/>
+                <a:cs typeface="Calibri" pitchFamily="34" charset="-120"/>
+              </a:rPr>
+              <a:t>• Ignite → RPLICE RAG integration</a:t>
+            </a:r>
+            <a:endParaRPr lang="en-US" sz="1050" dirty="0"/>
+          </a:p>
+          <a:p>
+            <a:pPr indent="0" marL="0">
+              <a:lnSpc>
+                <a:spcPct val="115000"/>
+              </a:lnSpc>
+              <a:buNone/>
+            </a:pPr>
+            <a:r>
+              <a:rPr lang="en-US" sz="1050" dirty="0">
+                <a:solidFill>
+                  <a:srgbClr val="E2E8F0"/>
+                </a:solidFill>
+                <a:latin typeface="Calibri" pitchFamily="34" charset="0"/>
+                <a:ea typeface="Calibri" pitchFamily="34" charset="-122"/>
+                <a:cs typeface="Calibri" pitchFamily="34" charset="-120"/>
+              </a:rPr>
+              <a:t>   Community data flows into AI pipeline</a:t>
+            </a:r>
+            <a:endParaRPr lang="en-US" sz="1050" dirty="0"/>
+          </a:p>
+          <a:p>
+            <a:pPr indent="0" marL="0">
+              <a:lnSpc>
+                <a:spcPct val="115000"/>
+              </a:lnSpc>
+              <a:buNone/>
+            </a:pPr>
+            <a:r>
+              <a:rPr lang="en-US" sz="1050" dirty="0">
+                <a:solidFill>
+                  <a:srgbClr val="E2E8F0"/>
+                </a:solidFill>
+                <a:latin typeface="Calibri" pitchFamily="34" charset="0"/>
+                <a:ea typeface="Calibri" pitchFamily="34" charset="-122"/>
+                <a:cs typeface="Calibri" pitchFamily="34" charset="-120"/>
+              </a:rPr>
+              <a:t>   AI analysis grounded in REAL data</a:t>
+            </a:r>
+            <a:endParaRPr lang="en-US" sz="1050" dirty="0"/>
+          </a:p>
+          <a:p>
+            <a:pPr indent="0" marL="0">
+              <a:lnSpc>
+                <a:spcPct val="115000"/>
+              </a:lnSpc>
+              <a:buNone/>
+            </a:pPr>
+            <a:endParaRPr lang="en-US" sz="1050" dirty="0"/>
+          </a:p>
+          <a:p>
+            <a:pPr indent="0" marL="0">
+              <a:lnSpc>
+                <a:spcPct val="115000"/>
+              </a:lnSpc>
+              <a:buNone/>
+            </a:pPr>
+            <a:r>
+              <a:rPr lang="en-US" sz="1050" dirty="0">
+                <a:solidFill>
+                  <a:srgbClr val="E2E8F0"/>
+                </a:solidFill>
+                <a:latin typeface="Calibri" pitchFamily="34" charset="0"/>
+                <a:ea typeface="Calibri" pitchFamily="34" charset="-122"/>
+                <a:cs typeface="Calibri" pitchFamily="34" charset="-120"/>
+              </a:rPr>
+              <a:t>• Shared regional presence</a:t>
+            </a:r>
+            <a:endParaRPr lang="en-US" sz="1050" dirty="0"/>
+          </a:p>
+          <a:p>
+            <a:pPr indent="0" marL="0">
+              <a:lnSpc>
+                <a:spcPct val="115000"/>
+              </a:lnSpc>
+              <a:buNone/>
+            </a:pPr>
+            <a:r>
+              <a:rPr lang="en-US" sz="1050" dirty="0">
+                <a:solidFill>
+                  <a:srgbClr val="E2E8F0"/>
+                </a:solidFill>
+                <a:latin typeface="Calibri" pitchFamily="34" charset="0"/>
+                <a:ea typeface="Calibri" pitchFamily="34" charset="-122"/>
+                <a:cs typeface="Calibri" pitchFamily="34" charset="-120"/>
+              </a:rPr>
+              <a:t>   Austin | Manor | Pflugerville</a:t>
+            </a:r>
+            <a:endParaRPr lang="en-US" sz="1050" dirty="0"/>
+          </a:p>
+          <a:p>
+            <a:pPr indent="0" marL="0">
+              <a:lnSpc>
+                <a:spcPct val="115000"/>
+              </a:lnSpc>
+              <a:buNone/>
+            </a:pPr>
+            <a:endParaRPr lang="en-US" sz="1050" dirty="0"/>
+          </a:p>
+          <a:p>
+            <a:pPr indent="0" marL="0">
+              <a:lnSpc>
+                <a:spcPct val="115000"/>
+              </a:lnSpc>
+              <a:buNone/>
+            </a:pPr>
+            <a:r>
+              <a:rPr lang="en-US" sz="1050" dirty="0">
+                <a:solidFill>
+                  <a:srgbClr val="E2E8F0"/>
+                </a:solidFill>
+                <a:latin typeface="Calibri" pitchFamily="34" charset="0"/>
+                <a:ea typeface="Calibri" pitchFamily="34" charset="-122"/>
+                <a:cs typeface="Calibri" pitchFamily="34" charset="-120"/>
+              </a:rPr>
+              <a:t>• Huston-Tillotson student research</a:t>
+            </a:r>
+            <a:endParaRPr lang="en-US" sz="1050" dirty="0"/>
+          </a:p>
+          <a:p>
+            <a:pPr indent="0" marL="0">
+              <a:lnSpc>
+                <a:spcPct val="115000"/>
+              </a:lnSpc>
+              <a:buNone/>
+            </a:pPr>
+            <a:r>
+              <a:rPr lang="en-US" sz="1050" dirty="0">
+                <a:solidFill>
+                  <a:srgbClr val="E2E8F0"/>
+                </a:solidFill>
+                <a:latin typeface="Calibri" pitchFamily="34" charset="0"/>
+                <a:ea typeface="Calibri" pitchFamily="34" charset="-122"/>
+                <a:cs typeface="Calibri" pitchFamily="34" charset="-120"/>
+              </a:rPr>
+              <a:t>   MEASURE teaches methodology</a:t>
+            </a:r>
+            <a:endParaRPr lang="en-US" sz="1050" dirty="0"/>
+          </a:p>
+          <a:p>
+            <a:pPr indent="0" marL="0">
+              <a:lnSpc>
+                <a:spcPct val="115000"/>
+              </a:lnSpc>
+              <a:buNone/>
+            </a:pPr>
+            <a:r>
+              <a:rPr lang="en-US" sz="1050" dirty="0">
+                <a:solidFill>
+                  <a:srgbClr val="E2E8F0"/>
+                </a:solidFill>
+                <a:latin typeface="Calibri" pitchFamily="34" charset="0"/>
+                <a:ea typeface="Calibri" pitchFamily="34" charset="-122"/>
+                <a:cs typeface="Calibri" pitchFamily="34" charset="-120"/>
+              </a:rPr>
+              <a:t>   RPLICE + AI provides the tools</a:t>
+            </a:r>
+            <a:endParaRPr lang="en-US" sz="1050" dirty="0"/>
+          </a:p>
+        </p:txBody>
+      </p:sp>
+      <p:sp>
+        <p:nvSpPr>
+          <p:cNvPr id="6" name="Text 3"/>
+          <p:cNvSpPr/>
+          <p:nvPr/>
+        </p:nvSpPr>
+        <p:spPr>
+          <a:xfrm>
+            <a:off x="4846320" y="1097280"/>
             <a:ext cx="3840480" cy="274320"/>
           </a:xfrm>
           <a:prstGeom prst="rect">
@@ -3298,13 +3290,13 @@
             <a:r>
               <a:rPr lang="en-US" sz="1300" b="1" dirty="0">
                 <a:solidFill>
-                  <a:srgbClr val="14B8A6"/>
+                  <a:srgbClr val="6366F1"/>
                 </a:solidFill>
                 <a:latin typeface="Georgia" pitchFamily="34" charset="0"/>
                 <a:ea typeface="Georgia" pitchFamily="34" charset="-122"/>
                 <a:cs typeface="Georgia" pitchFamily="34" charset="-120"/>
               </a:rPr>
-              <a:t>Program Details:</a:t>
+              <a:t>Long-Term Vision:</a:t>
             </a:r>
             <a:endParaRPr lang="en-US" sz="1300" dirty="0"/>
           </a:p>
@@ -3312,303 +3304,13 @@
       </p:sp>
       <p:sp>
         <p:nvSpPr>
-          <p:cNvPr id="6" name="Text 3"/>
-          <p:cNvSpPr/>
-          <p:nvPr/>
-        </p:nvSpPr>
-        <p:spPr>
-          <a:xfrm>
-            <a:off x="731520" y="1737360"/>
-            <a:ext cx="3840480" cy="2743200"/>
-          </a:xfrm>
-          <a:prstGeom prst="rect">
-            <a:avLst/>
-          </a:prstGeom>
-          <a:noFill/>
-          <a:ln/>
-        </p:spPr>
-        <p:txBody>
-          <a:bodyPr wrap="square" rtlCol="0" anchor="ctr"/>
-          <a:lstStyle/>
-          <a:p>
-            <a:pPr indent="0" marL="0">
-              <a:lnSpc>
-                <a:spcPct val="120000"/>
-              </a:lnSpc>
-              <a:buNone/>
-            </a:pPr>
-            <a:r>
-              <a:rPr lang="en-US" sz="1050" dirty="0">
-                <a:solidFill>
-                  <a:srgbClr val="E2E8F0"/>
-                </a:solidFill>
-                <a:latin typeface="Calibri" pitchFamily="34" charset="0"/>
-                <a:ea typeface="Calibri" pitchFamily="34" charset="-122"/>
-                <a:cs typeface="Calibri" pitchFamily="34" charset="-120"/>
-              </a:rPr>
-              <a:t>• 5,000 in data support services (in-kind)</a:t>
-            </a:r>
-            <a:endParaRPr lang="en-US" sz="1050" dirty="0"/>
-          </a:p>
-          <a:p>
-            <a:pPr indent="0" marL="0">
-              <a:lnSpc>
-                <a:spcPct val="120000"/>
-              </a:lnSpc>
-              <a:buNone/>
-            </a:pPr>
-            <a:r>
-              <a:rPr lang="en-US" sz="1050" dirty="0">
-                <a:solidFill>
-                  <a:srgbClr val="E2E8F0"/>
-                </a:solidFill>
-                <a:latin typeface="Calibri" pitchFamily="34" charset="0"/>
-                <a:ea typeface="Calibri" pitchFamily="34" charset="-122"/>
-                <a:cs typeface="Calibri" pitchFamily="34" charset="-120"/>
-              </a:rPr>
-              <a:t>• ,000 participant stipend (cash)</a:t>
-            </a:r>
-            <a:endParaRPr lang="en-US" sz="1050" dirty="0"/>
-          </a:p>
-          <a:p>
-            <a:pPr indent="0" marL="0">
-              <a:lnSpc>
-                <a:spcPct val="120000"/>
-              </a:lnSpc>
-              <a:buNone/>
-            </a:pPr>
-            <a:r>
-              <a:rPr lang="en-US" sz="1050" dirty="0">
-                <a:solidFill>
-                  <a:srgbClr val="E2E8F0"/>
-                </a:solidFill>
-                <a:latin typeface="Calibri" pitchFamily="34" charset="0"/>
-                <a:ea typeface="Calibri" pitchFamily="34" charset="-122"/>
-                <a:cs typeface="Calibri" pitchFamily="34" charset="-120"/>
-              </a:rPr>
-              <a:t>• For Black, Brown &amp; Indigenous-led orgs</a:t>
-            </a:r>
-            <a:endParaRPr lang="en-US" sz="1050" dirty="0"/>
-          </a:p>
-          <a:p>
-            <a:pPr indent="0" marL="0">
-              <a:lnSpc>
-                <a:spcPct val="120000"/>
-              </a:lnSpc>
-              <a:buNone/>
-            </a:pPr>
-            <a:r>
-              <a:rPr lang="en-US" sz="1050" dirty="0">
-                <a:solidFill>
-                  <a:srgbClr val="E2E8F0"/>
-                </a:solidFill>
-                <a:latin typeface="Calibri" pitchFamily="34" charset="0"/>
-                <a:ea typeface="Calibri" pitchFamily="34" charset="-122"/>
-                <a:cs typeface="Calibri" pitchFamily="34" charset="-120"/>
-              </a:rPr>
-              <a:t>• Based in Texas</a:t>
-            </a:r>
-            <a:endParaRPr lang="en-US" sz="1050" dirty="0"/>
-          </a:p>
-          <a:p>
-            <a:pPr indent="0" marL="0">
-              <a:lnSpc>
-                <a:spcPct val="120000"/>
-              </a:lnSpc>
-              <a:buNone/>
-            </a:pPr>
-            <a:r>
-              <a:rPr lang="en-US" sz="1050" dirty="0">
-                <a:solidFill>
-                  <a:srgbClr val="E2E8F0"/>
-                </a:solidFill>
-                <a:latin typeface="Calibri" pitchFamily="34" charset="0"/>
-                <a:ea typeface="Calibri" pitchFamily="34" charset="-122"/>
-                <a:cs typeface="Calibri" pitchFamily="34" charset="-120"/>
-              </a:rPr>
-              <a:t>• Apply: wemeasure.org/our-programs</a:t>
-            </a:r>
-            <a:endParaRPr lang="en-US" sz="1050" dirty="0"/>
-          </a:p>
-          <a:p>
-            <a:pPr indent="0" marL="0">
-              <a:lnSpc>
-                <a:spcPct val="120000"/>
-              </a:lnSpc>
-              <a:buNone/>
-            </a:pPr>
-            <a:endParaRPr lang="en-US" sz="1050" dirty="0"/>
-          </a:p>
-          <a:p>
-            <a:pPr indent="0" marL="0">
-              <a:lnSpc>
-                <a:spcPct val="120000"/>
-              </a:lnSpc>
-              <a:buNone/>
-            </a:pPr>
-            <a:r>
-              <a:rPr lang="en-US" sz="1050" dirty="0">
-                <a:solidFill>
-                  <a:srgbClr val="E2E8F0"/>
-                </a:solidFill>
-                <a:latin typeface="Calibri" pitchFamily="34" charset="0"/>
-                <a:ea typeface="Calibri" pitchFamily="34" charset="-122"/>
-                <a:cs typeface="Calibri" pitchFamily="34" charset="-120"/>
-              </a:rPr>
-              <a:t>Why We Qualify:</a:t>
-            </a:r>
-            <a:endParaRPr lang="en-US" sz="1050" dirty="0"/>
-          </a:p>
-          <a:p>
-            <a:pPr indent="0" marL="0">
-              <a:lnSpc>
-                <a:spcPct val="120000"/>
-              </a:lnSpc>
-              <a:buNone/>
-            </a:pPr>
-            <a:r>
-              <a:rPr lang="en-US" sz="1050" dirty="0">
-                <a:solidFill>
-                  <a:srgbClr val="E2E8F0"/>
-                </a:solidFill>
-                <a:latin typeface="Calibri" pitchFamily="34" charset="0"/>
-                <a:ea typeface="Calibri" pitchFamily="34" charset="-122"/>
-                <a:cs typeface="Calibri" pitchFamily="34" charset="-120"/>
-              </a:rPr>
-              <a:t>• Black-led 501(c)(3)</a:t>
-            </a:r>
-            <a:endParaRPr lang="en-US" sz="1050" dirty="0"/>
-          </a:p>
-          <a:p>
-            <a:pPr indent="0" marL="0">
-              <a:lnSpc>
-                <a:spcPct val="120000"/>
-              </a:lnSpc>
-              <a:buNone/>
-            </a:pPr>
-            <a:r>
-              <a:rPr lang="en-US" sz="1050" dirty="0">
-                <a:solidFill>
-                  <a:srgbClr val="E2E8F0"/>
-                </a:solidFill>
-                <a:latin typeface="Calibri" pitchFamily="34" charset="0"/>
-                <a:ea typeface="Calibri" pitchFamily="34" charset="-122"/>
-                <a:cs typeface="Calibri" pitchFamily="34" charset="-120"/>
-              </a:rPr>
-              <a:t>• Veteran-founded</a:t>
-            </a:r>
-            <a:endParaRPr lang="en-US" sz="1050" dirty="0"/>
-          </a:p>
-          <a:p>
-            <a:pPr indent="0" marL="0">
-              <a:lnSpc>
-                <a:spcPct val="120000"/>
-              </a:lnSpc>
-              <a:buNone/>
-            </a:pPr>
-            <a:r>
-              <a:rPr lang="en-US" sz="1050" dirty="0">
-                <a:solidFill>
-                  <a:srgbClr val="E2E8F0"/>
-                </a:solidFill>
-                <a:latin typeface="Calibri" pitchFamily="34" charset="0"/>
-                <a:ea typeface="Calibri" pitchFamily="34" charset="-122"/>
-                <a:cs typeface="Calibri" pitchFamily="34" charset="-120"/>
-              </a:rPr>
-              <a:t>• Austin-based</a:t>
-            </a:r>
-            <a:endParaRPr lang="en-US" sz="1050" dirty="0"/>
-          </a:p>
-          <a:p>
-            <a:pPr indent="0" marL="0">
-              <a:lnSpc>
-                <a:spcPct val="120000"/>
-              </a:lnSpc>
-              <a:buNone/>
-            </a:pPr>
-            <a:r>
-              <a:rPr lang="en-US" sz="1050" dirty="0">
-                <a:solidFill>
-                  <a:srgbClr val="E2E8F0"/>
-                </a:solidFill>
-                <a:latin typeface="Calibri" pitchFamily="34" charset="0"/>
-                <a:ea typeface="Calibri" pitchFamily="34" charset="-122"/>
-                <a:cs typeface="Calibri" pitchFamily="34" charset="-120"/>
-              </a:rPr>
-              <a:t>• Active data infrastructure (RPLICE)</a:t>
-            </a:r>
-            <a:endParaRPr lang="en-US" sz="1050" dirty="0"/>
-          </a:p>
-          <a:p>
-            <a:pPr indent="0" marL="0">
-              <a:lnSpc>
-                <a:spcPct val="120000"/>
-              </a:lnSpc>
-              <a:buNone/>
-            </a:pPr>
-            <a:r>
-              <a:rPr lang="en-US" sz="1050" dirty="0">
-                <a:solidFill>
-                  <a:srgbClr val="E2E8F0"/>
-                </a:solidFill>
-                <a:latin typeface="Calibri" pitchFamily="34" charset="0"/>
-                <a:ea typeface="Calibri" pitchFamily="34" charset="-122"/>
-                <a:cs typeface="Calibri" pitchFamily="34" charset="-120"/>
-              </a:rPr>
-              <a:t>• Community-serving mission</a:t>
-            </a:r>
-            <a:endParaRPr lang="en-US" sz="1050" dirty="0"/>
-          </a:p>
-        </p:txBody>
-      </p:sp>
-      <p:sp>
-        <p:nvSpPr>
           <p:cNvPr id="7" name="Text 4"/>
           <p:cNvSpPr/>
           <p:nvPr/>
         </p:nvSpPr>
         <p:spPr>
           <a:xfrm>
-            <a:off x="4846320" y="1371600"/>
-            <a:ext cx="3840480" cy="274320"/>
-          </a:xfrm>
-          <a:prstGeom prst="rect">
-            <a:avLst/>
-          </a:prstGeom>
-          <a:noFill/>
-          <a:ln/>
-        </p:spPr>
-        <p:txBody>
-          <a:bodyPr wrap="square" rtlCol="0" anchor="ctr"/>
-          <a:lstStyle/>
-          <a:p>
-            <a:pPr indent="0" marL="0">
-              <a:buNone/>
-            </a:pPr>
-            <a:r>
-              <a:rPr lang="en-US" sz="1300" b="1" dirty="0">
-                <a:solidFill>
-                  <a:srgbClr val="6366F1"/>
-                </a:solidFill>
-                <a:latin typeface="Georgia" pitchFamily="34" charset="0"/>
-                <a:ea typeface="Georgia" pitchFamily="34" charset="-122"/>
-                <a:cs typeface="Georgia" pitchFamily="34" charset="-120"/>
-              </a:rPr>
-              <a:t>Strategic Value Beyond 5K:</a:t>
-            </a:r>
-            <a:endParaRPr lang="en-US" sz="1300" dirty="0"/>
-          </a:p>
-        </p:txBody>
-      </p:sp>
-      <p:sp>
-        <p:nvSpPr>
-          <p:cNvPr id="8" name="Text 5"/>
-          <p:cNvSpPr/>
-          <p:nvPr/>
-        </p:nvSpPr>
-        <p:spPr>
-          <a:xfrm>
-            <a:off x="4846320" y="1737360"/>
+            <a:off x="4846320" y="1463040"/>
             <a:ext cx="3840480" cy="3200400"/>
           </a:xfrm>
           <a:prstGeom prst="rect">
@@ -3636,7 +3338,7 @@
                 <a:ea typeface="Calibri" pitchFamily="34" charset="-122"/>
                 <a:cs typeface="Calibri" pitchFamily="34" charset="-120"/>
               </a:rPr>
-              <a:t>• MEASURE as documented data partner</a:t>
+              <a:t>• Central Texas as a national model</a:t>
             </a:r>
             <a:endParaRPr lang="en-US" sz="1050" dirty="0"/>
           </a:p>
@@ -3656,7 +3358,7 @@
                 <a:ea typeface="Calibri" pitchFamily="34" charset="-122"/>
                 <a:cs typeface="Calibri" pitchFamily="34" charset="-120"/>
               </a:rPr>
-              <a:t>   strengthens EVERY grant application</a:t>
+              <a:t>   for community AI + implementation science</a:t>
             </a:r>
             <a:endParaRPr lang="en-US" sz="1050" dirty="0"/>
           </a:p>
@@ -3685,7 +3387,7 @@
                 <a:ea typeface="Calibri" pitchFamily="34" charset="-122"/>
                 <a:cs typeface="Calibri" pitchFamily="34" charset="-120"/>
               </a:rPr>
-              <a:t>• St. David's: community-informed design ✓</a:t>
+              <a:t>• Publish the methodology together:</a:t>
             </a:r>
             <a:endParaRPr lang="en-US" sz="1050" dirty="0"/>
           </a:p>
@@ -3705,7 +3407,7 @@
                 <a:ea typeface="Calibri" pitchFamily="34" charset="-122"/>
                 <a:cs typeface="Calibri" pitchFamily="34" charset="-120"/>
               </a:rPr>
-              <a:t>• SSG Fox: evidence-based model ✓</a:t>
+              <a:t>   CARE Model + MAP-GAP =</a:t>
             </a:r>
             <a:endParaRPr lang="en-US" sz="1050" dirty="0"/>
           </a:p>
@@ -3725,7 +3427,7 @@
                 <a:ea typeface="Calibri" pitchFamily="34" charset="-122"/>
                 <a:cs typeface="Calibri" pitchFamily="34" charset="-120"/>
               </a:rPr>
-              <a:t>• BB Collective: Black-led research ✓</a:t>
+              <a:t>   peer-reviewable framework</a:t>
             </a:r>
             <a:endParaRPr lang="en-US" sz="1050" dirty="0"/>
           </a:p>
@@ -3736,17 +3438,6 @@
               </a:lnSpc>
               <a:buNone/>
             </a:pPr>
-            <a:r>
-              <a:rPr lang="en-US" sz="1050" dirty="0">
-                <a:solidFill>
-                  <a:srgbClr val="E2E8F0"/>
-                </a:solidFill>
-                <a:latin typeface="Calibri" pitchFamily="34" charset="0"/>
-                <a:ea typeface="Calibri" pitchFamily="34" charset="-122"/>
-                <a:cs typeface="Calibri" pitchFamily="34" charset="-120"/>
-              </a:rPr>
-              <a:t>• Central Health: community data ✓</a:t>
-            </a:r>
             <a:endParaRPr lang="en-US" sz="1050" dirty="0"/>
           </a:p>
           <a:p>
@@ -3756,6 +3447,17 @@
               </a:lnSpc>
               <a:buNone/>
             </a:pPr>
+            <a:r>
+              <a:rPr lang="en-US" sz="1050" dirty="0">
+                <a:solidFill>
+                  <a:srgbClr val="E2E8F0"/>
+                </a:solidFill>
+                <a:latin typeface="Calibri" pitchFamily="34" charset="0"/>
+                <a:ea typeface="Calibri" pitchFamily="34" charset="-122"/>
+                <a:cs typeface="Calibri" pitchFamily="34" charset="-120"/>
+              </a:rPr>
+              <a:t>• Scale beyond Austin:</a:t>
+            </a:r>
             <a:endParaRPr lang="en-US" sz="1050" dirty="0"/>
           </a:p>
           <a:p>
@@ -3774,7 +3476,7 @@
                 <a:ea typeface="Calibri" pitchFamily="34" charset="-122"/>
                 <a:cs typeface="Calibri" pitchFamily="34" charset="-120"/>
               </a:rPr>
-              <a:t>AI Integration Opportunity:</a:t>
+              <a:t>   Ecosystem architecture is replicable</a:t>
             </a:r>
             <a:endParaRPr lang="en-US" sz="1050" dirty="0"/>
           </a:p>
@@ -3794,7 +3496,7 @@
                 <a:ea typeface="Calibri" pitchFamily="34" charset="-122"/>
                 <a:cs typeface="Calibri" pitchFamily="34" charset="-120"/>
               </a:rPr>
-              <a:t>• Ignite data → RPLICE RAG pipeline</a:t>
+              <a:t>   Any community can adopt the model</a:t>
             </a:r>
             <a:endParaRPr lang="en-US" sz="1050" dirty="0"/>
           </a:p>
@@ -3805,17 +3507,6 @@
               </a:lnSpc>
               <a:buNone/>
             </a:pPr>
-            <a:r>
-              <a:rPr lang="en-US" sz="1050" dirty="0">
-                <a:solidFill>
-                  <a:srgbClr val="E2E8F0"/>
-                </a:solidFill>
-                <a:latin typeface="Calibri" pitchFamily="34" charset="0"/>
-                <a:ea typeface="Calibri" pitchFamily="34" charset="-122"/>
-                <a:cs typeface="Calibri" pitchFamily="34" charset="-120"/>
-              </a:rPr>
-              <a:t>• AI-powered community data analysis</a:t>
-            </a:r>
             <a:endParaRPr lang="en-US" sz="1050" dirty="0"/>
           </a:p>
           <a:p>
@@ -3834,7 +3525,7 @@
                 <a:ea typeface="Calibri" pitchFamily="34" charset="-122"/>
                 <a:cs typeface="Calibri" pitchFamily="34" charset="-120"/>
               </a:rPr>
-              <a:t>• Neither org can produce this alone</a:t>
+              <a:t>• Shared advocacy for equitable AI + data</a:t>
             </a:r>
             <a:endParaRPr lang="en-US" sz="1050" dirty="0"/>
           </a:p>
@@ -3854,7 +3545,7 @@
                 <a:ea typeface="Calibri" pitchFamily="34" charset="-122"/>
                 <a:cs typeface="Calibri" pitchFamily="34" charset="-120"/>
               </a:rPr>
-              <a:t>• Combined: publishable, fundable, scalable</a:t>
+              <a:t>   policy at state and federal levels</a:t>
             </a:r>
             <a:endParaRPr lang="en-US" sz="1050" dirty="0"/>
           </a:p>
@@ -3883,7 +3574,47 @@
                 <a:ea typeface="Calibri" pitchFamily="34" charset="-122"/>
                 <a:cs typeface="Calibri" pitchFamily="34" charset="-120"/>
               </a:rPr>
-              <a:t>ACTION: Apply at wemeasure.org/our-programs</a:t>
+              <a:t>This isn't a vendor pitch.</a:t>
+            </a:r>
+            <a:endParaRPr lang="en-US" sz="1050" dirty="0"/>
+          </a:p>
+          <a:p>
+            <a:pPr indent="0" marL="0">
+              <a:lnSpc>
+                <a:spcPct val="115000"/>
+              </a:lnSpc>
+              <a:buNone/>
+            </a:pPr>
+            <a:r>
+              <a:rPr lang="en-US" sz="1050" dirty="0">
+                <a:solidFill>
+                  <a:srgbClr val="E2E8F0"/>
+                </a:solidFill>
+                <a:latin typeface="Calibri" pitchFamily="34" charset="0"/>
+                <a:ea typeface="Calibri" pitchFamily="34" charset="-122"/>
+                <a:cs typeface="Calibri" pitchFamily="34" charset="-120"/>
+              </a:rPr>
+              <a:t>Two orgs, same mission, same geography,</a:t>
+            </a:r>
+            <a:endParaRPr lang="en-US" sz="1050" dirty="0"/>
+          </a:p>
+          <a:p>
+            <a:pPr indent="0" marL="0">
+              <a:lnSpc>
+                <a:spcPct val="115000"/>
+              </a:lnSpc>
+              <a:buNone/>
+            </a:pPr>
+            <a:r>
+              <a:rPr lang="en-US" sz="1050" dirty="0">
+                <a:solidFill>
+                  <a:srgbClr val="E2E8F0"/>
+                </a:solidFill>
+                <a:latin typeface="Calibri" pitchFamily="34" charset="0"/>
+                <a:ea typeface="Calibri" pitchFamily="34" charset="-122"/>
+                <a:cs typeface="Calibri" pitchFamily="34" charset="-120"/>
+              </a:rPr>
+              <a:t>complementary capabilities.</a:t>
             </a:r>
             <a:endParaRPr lang="en-US" sz="1050" dirty="0"/>
           </a:p>
@@ -3954,7 +3685,7 @@
                 <a:ea typeface="Georgia" pitchFamily="34" charset="-122"/>
                 <a:cs typeface="Georgia" pitchFamily="34" charset="-120"/>
               </a:rPr>
-              <a:t>What Partnership Looks Like</a:t>
+              <a:t>Regional Hubs — Austin / Manor / Pflugerville</a:t>
             </a:r>
             <a:endParaRPr lang="en-US" sz="2400" dirty="0"/>
           </a:p>
@@ -3968,34 +3699,34 @@
         </p:nvSpPr>
         <p:spPr>
           <a:xfrm>
-            <a:off x="731520" y="1097280"/>
-            <a:ext cx="3840480" cy="274320"/>
-          </a:xfrm>
-          <a:prstGeom prst="rect">
-            <a:avLst/>
-          </a:prstGeom>
-          <a:noFill/>
-          <a:ln/>
-        </p:spPr>
-        <p:txBody>
-          <a:bodyPr wrap="square" rtlCol="0" anchor="ctr"/>
-          <a:lstStyle/>
-          <a:p>
-            <a:pPr indent="0" marL="0">
-              <a:buNone/>
-            </a:pPr>
-            <a:r>
-              <a:rPr lang="en-US" sz="1300" b="1" dirty="0">
-                <a:solidFill>
-                  <a:srgbClr val="14B8A6"/>
+            <a:off x="731520" y="822960"/>
+            <a:ext cx="7680960" cy="274320"/>
+          </a:xfrm>
+          <a:prstGeom prst="rect">
+            <a:avLst/>
+          </a:prstGeom>
+          <a:noFill/>
+          <a:ln/>
+        </p:spPr>
+        <p:txBody>
+          <a:bodyPr wrap="square" rtlCol="0" anchor="ctr"/>
+          <a:lstStyle/>
+          <a:p>
+            <a:pPr indent="0" marL="0">
+              <a:buNone/>
+            </a:pPr>
+            <a:r>
+              <a:rPr lang="en-US" sz="1200" dirty="0">
+                <a:solidFill>
+                  <a:srgbClr val="94A3B8"/>
                 </a:solidFill>
                 <a:latin typeface="Georgia" pitchFamily="34" charset="0"/>
                 <a:ea typeface="Georgia" pitchFamily="34" charset="-122"/>
                 <a:cs typeface="Georgia" pitchFamily="34" charset="-120"/>
               </a:rPr>
-              <a:t>Immediate Opportunities:</a:t>
-            </a:r>
-            <a:endParaRPr lang="en-US" sz="1300" dirty="0"/>
+              <a:t>Same communities, shared geography, shared mission</a:t>
+            </a:r>
+            <a:endParaRPr lang="en-US" sz="1200" dirty="0"/>
           </a:p>
         </p:txBody>
       </p:sp>
@@ -4007,317 +3738,8 @@
         </p:nvSpPr>
         <p:spPr>
           <a:xfrm>
-            <a:off x="731520" y="1463040"/>
-            <a:ext cx="3840480" cy="3200400"/>
-          </a:xfrm>
-          <a:prstGeom prst="rect">
-            <a:avLst/>
-          </a:prstGeom>
-          <a:noFill/>
-          <a:ln/>
-        </p:spPr>
-        <p:txBody>
-          <a:bodyPr wrap="square" rtlCol="0" anchor="ctr"/>
-          <a:lstStyle/>
-          <a:p>
-            <a:pPr indent="0" marL="0">
-              <a:lnSpc>
-                <a:spcPct val="115000"/>
-              </a:lnSpc>
-              <a:buNone/>
-            </a:pPr>
-            <a:r>
-              <a:rPr lang="en-US" sz="1050" dirty="0">
-                <a:solidFill>
-                  <a:srgbClr val="E2E8F0"/>
-                </a:solidFill>
-                <a:latin typeface="Calibri" pitchFamily="34" charset="0"/>
-                <a:ea typeface="Calibri" pitchFamily="34" charset="-122"/>
-                <a:cs typeface="Calibri" pitchFamily="34" charset="-120"/>
-              </a:rPr>
-              <a:t>• Joint grant applications</a:t>
-            </a:r>
-            <a:endParaRPr lang="en-US" sz="1050" dirty="0"/>
-          </a:p>
-          <a:p>
-            <a:pPr indent="0" marL="0">
-              <a:lnSpc>
-                <a:spcPct val="115000"/>
-              </a:lnSpc>
-              <a:buNone/>
-            </a:pPr>
-            <a:r>
-              <a:rPr lang="en-US" sz="1050" dirty="0">
-                <a:solidFill>
-                  <a:srgbClr val="E2E8F0"/>
-                </a:solidFill>
-                <a:latin typeface="Calibri" pitchFamily="34" charset="0"/>
-                <a:ea typeface="Calibri" pitchFamily="34" charset="-122"/>
-                <a:cs typeface="Calibri" pitchFamily="34" charset="-120"/>
-              </a:rPr>
-              <a:t>   MEASURE = community partner</a:t>
-            </a:r>
-            <a:endParaRPr lang="en-US" sz="1050" dirty="0"/>
-          </a:p>
-          <a:p>
-            <a:pPr indent="0" marL="0">
-              <a:lnSpc>
-                <a:spcPct val="115000"/>
-              </a:lnSpc>
-              <a:buNone/>
-            </a:pPr>
-            <a:r>
-              <a:rPr lang="en-US" sz="1050" dirty="0">
-                <a:solidFill>
-                  <a:srgbClr val="E2E8F0"/>
-                </a:solidFill>
-                <a:latin typeface="Calibri" pitchFamily="34" charset="0"/>
-                <a:ea typeface="Calibri" pitchFamily="34" charset="-122"/>
-                <a:cs typeface="Calibri" pitchFamily="34" charset="-120"/>
-              </a:rPr>
-              <a:t>   Collaborative Advocate = AI + tech partner</a:t>
-            </a:r>
-            <a:endParaRPr lang="en-US" sz="1050" dirty="0"/>
-          </a:p>
-          <a:p>
-            <a:pPr indent="0" marL="0">
-              <a:lnSpc>
-                <a:spcPct val="115000"/>
-              </a:lnSpc>
-              <a:buNone/>
-            </a:pPr>
-            <a:r>
-              <a:rPr lang="en-US" sz="1050" dirty="0">
-                <a:solidFill>
-                  <a:srgbClr val="E2E8F0"/>
-                </a:solidFill>
-                <a:latin typeface="Calibri" pitchFamily="34" charset="0"/>
-                <a:ea typeface="Calibri" pitchFamily="34" charset="-122"/>
-                <a:cs typeface="Calibri" pitchFamily="34" charset="-120"/>
-              </a:rPr>
-              <a:t>   Combined = complete proposal</a:t>
-            </a:r>
-            <a:endParaRPr lang="en-US" sz="1050" dirty="0"/>
-          </a:p>
-          <a:p>
-            <a:pPr indent="0" marL="0">
-              <a:lnSpc>
-                <a:spcPct val="115000"/>
-              </a:lnSpc>
-              <a:buNone/>
-            </a:pPr>
-            <a:endParaRPr lang="en-US" sz="1050" dirty="0"/>
-          </a:p>
-          <a:p>
-            <a:pPr indent="0" marL="0">
-              <a:lnSpc>
-                <a:spcPct val="115000"/>
-              </a:lnSpc>
-              <a:buNone/>
-            </a:pPr>
-            <a:r>
-              <a:rPr lang="en-US" sz="1050" dirty="0">
-                <a:solidFill>
-                  <a:srgbClr val="E2E8F0"/>
-                </a:solidFill>
-                <a:latin typeface="Calibri" pitchFamily="34" charset="0"/>
-                <a:ea typeface="Calibri" pitchFamily="34" charset="-122"/>
-                <a:cs typeface="Calibri" pitchFamily="34" charset="-120"/>
-              </a:rPr>
-              <a:t>• MEASURE Ignite → RPLICE RAG integration</a:t>
-            </a:r>
-            <a:endParaRPr lang="en-US" sz="1050" dirty="0"/>
-          </a:p>
-          <a:p>
-            <a:pPr indent="0" marL="0">
-              <a:lnSpc>
-                <a:spcPct val="115000"/>
-              </a:lnSpc>
-              <a:buNone/>
-            </a:pPr>
-            <a:r>
-              <a:rPr lang="en-US" sz="1050" dirty="0">
-                <a:solidFill>
-                  <a:srgbClr val="E2E8F0"/>
-                </a:solidFill>
-                <a:latin typeface="Calibri" pitchFamily="34" charset="0"/>
-                <a:ea typeface="Calibri" pitchFamily="34" charset="-122"/>
-                <a:cs typeface="Calibri" pitchFamily="34" charset="-120"/>
-              </a:rPr>
-              <a:t>   Community data flows into AI pipeline</a:t>
-            </a:r>
-            <a:endParaRPr lang="en-US" sz="1050" dirty="0"/>
-          </a:p>
-          <a:p>
-            <a:pPr indent="0" marL="0">
-              <a:lnSpc>
-                <a:spcPct val="115000"/>
-              </a:lnSpc>
-              <a:buNone/>
-            </a:pPr>
-            <a:r>
-              <a:rPr lang="en-US" sz="1050" dirty="0">
-                <a:solidFill>
-                  <a:srgbClr val="E2E8F0"/>
-                </a:solidFill>
-                <a:latin typeface="Calibri" pitchFamily="34" charset="0"/>
-                <a:ea typeface="Calibri" pitchFamily="34" charset="-122"/>
-                <a:cs typeface="Calibri" pitchFamily="34" charset="-120"/>
-              </a:rPr>
-              <a:t>   AI analysis grounded in REAL community data</a:t>
-            </a:r>
-            <a:endParaRPr lang="en-US" sz="1050" dirty="0"/>
-          </a:p>
-          <a:p>
-            <a:pPr indent="0" marL="0">
-              <a:lnSpc>
-                <a:spcPct val="115000"/>
-              </a:lnSpc>
-              <a:buNone/>
-            </a:pPr>
-            <a:r>
-              <a:rPr lang="en-US" sz="1050" dirty="0">
-                <a:solidFill>
-                  <a:srgbClr val="E2E8F0"/>
-                </a:solidFill>
-                <a:latin typeface="Calibri" pitchFamily="34" charset="0"/>
-                <a:ea typeface="Calibri" pitchFamily="34" charset="-122"/>
-                <a:cs typeface="Calibri" pitchFamily="34" charset="-120"/>
-              </a:rPr>
-              <a:t>   Neither org can do this alone</a:t>
-            </a:r>
-            <a:endParaRPr lang="en-US" sz="1050" dirty="0"/>
-          </a:p>
-          <a:p>
-            <a:pPr indent="0" marL="0">
-              <a:lnSpc>
-                <a:spcPct val="115000"/>
-              </a:lnSpc>
-              <a:buNone/>
-            </a:pPr>
-            <a:endParaRPr lang="en-US" sz="1050" dirty="0"/>
-          </a:p>
-          <a:p>
-            <a:pPr indent="0" marL="0">
-              <a:lnSpc>
-                <a:spcPct val="115000"/>
-              </a:lnSpc>
-              <a:buNone/>
-            </a:pPr>
-            <a:r>
-              <a:rPr lang="en-US" sz="1050" dirty="0">
-                <a:solidFill>
-                  <a:srgbClr val="E2E8F0"/>
-                </a:solidFill>
-                <a:latin typeface="Calibri" pitchFamily="34" charset="0"/>
-                <a:ea typeface="Calibri" pitchFamily="34" charset="-122"/>
-                <a:cs typeface="Calibri" pitchFamily="34" charset="-120"/>
-              </a:rPr>
-              <a:t>• Shared regional presence</a:t>
-            </a:r>
-            <a:endParaRPr lang="en-US" sz="1050" dirty="0"/>
-          </a:p>
-          <a:p>
-            <a:pPr indent="0" marL="0">
-              <a:lnSpc>
-                <a:spcPct val="115000"/>
-              </a:lnSpc>
-              <a:buNone/>
-            </a:pPr>
-            <a:r>
-              <a:rPr lang="en-US" sz="1050" dirty="0">
-                <a:solidFill>
-                  <a:srgbClr val="E2E8F0"/>
-                </a:solidFill>
-                <a:latin typeface="Calibri" pitchFamily="34" charset="0"/>
-                <a:ea typeface="Calibri" pitchFamily="34" charset="-122"/>
-                <a:cs typeface="Calibri" pitchFamily="34" charset="-120"/>
-              </a:rPr>
-              <a:t>   Austin | Manor | Pflugerville</a:t>
-            </a:r>
-            <a:endParaRPr lang="en-US" sz="1050" dirty="0"/>
-          </a:p>
-          <a:p>
-            <a:pPr indent="0" marL="0">
-              <a:lnSpc>
-                <a:spcPct val="115000"/>
-              </a:lnSpc>
-              <a:buNone/>
-            </a:pPr>
-            <a:endParaRPr lang="en-US" sz="1050" dirty="0"/>
-          </a:p>
-          <a:p>
-            <a:pPr indent="0" marL="0">
-              <a:lnSpc>
-                <a:spcPct val="115000"/>
-              </a:lnSpc>
-              <a:buNone/>
-            </a:pPr>
-            <a:r>
-              <a:rPr lang="en-US" sz="1050" dirty="0">
-                <a:solidFill>
-                  <a:srgbClr val="E2E8F0"/>
-                </a:solidFill>
-                <a:latin typeface="Calibri" pitchFamily="34" charset="0"/>
-                <a:ea typeface="Calibri" pitchFamily="34" charset="-122"/>
-                <a:cs typeface="Calibri" pitchFamily="34" charset="-120"/>
-              </a:rPr>
-              <a:t>• Huston-Tillotson student research</a:t>
-            </a:r>
-            <a:endParaRPr lang="en-US" sz="1050" dirty="0"/>
-          </a:p>
-          <a:p>
-            <a:pPr indent="0" marL="0">
-              <a:lnSpc>
-                <a:spcPct val="115000"/>
-              </a:lnSpc>
-              <a:buNone/>
-            </a:pPr>
-            <a:r>
-              <a:rPr lang="en-US" sz="1050" dirty="0">
-                <a:solidFill>
-                  <a:srgbClr val="E2E8F0"/>
-                </a:solidFill>
-                <a:latin typeface="Calibri" pitchFamily="34" charset="0"/>
-                <a:ea typeface="Calibri" pitchFamily="34" charset="-122"/>
-                <a:cs typeface="Calibri" pitchFamily="34" charset="-120"/>
-              </a:rPr>
-              <a:t>   MEASURE teaches methodology</a:t>
-            </a:r>
-            <a:endParaRPr lang="en-US" sz="1050" dirty="0"/>
-          </a:p>
-          <a:p>
-            <a:pPr indent="0" marL="0">
-              <a:lnSpc>
-                <a:spcPct val="115000"/>
-              </a:lnSpc>
-              <a:buNone/>
-            </a:pPr>
-            <a:r>
-              <a:rPr lang="en-US" sz="1050" dirty="0">
-                <a:solidFill>
-                  <a:srgbClr val="E2E8F0"/>
-                </a:solidFill>
-                <a:latin typeface="Calibri" pitchFamily="34" charset="0"/>
-                <a:ea typeface="Calibri" pitchFamily="34" charset="-122"/>
-                <a:cs typeface="Calibri" pitchFamily="34" charset="-120"/>
-              </a:rPr>
-              <a:t>   RPLICE + AI provides the tools</a:t>
-            </a:r>
-            <a:endParaRPr lang="en-US" sz="1050" dirty="0"/>
-          </a:p>
-        </p:txBody>
-      </p:sp>
-      <p:sp>
-        <p:nvSpPr>
-          <p:cNvPr id="6" name="Text 3"/>
-          <p:cNvSpPr/>
-          <p:nvPr/>
-        </p:nvSpPr>
-        <p:spPr>
-          <a:xfrm>
-            <a:off x="4846320" y="1097280"/>
-            <a:ext cx="3840480" cy="274320"/>
+            <a:off x="731520" y="1371600"/>
+            <a:ext cx="7680960" cy="274320"/>
           </a:xfrm>
           <a:prstGeom prst="rect">
             <a:avLst/>
@@ -4341,7 +3763,7 @@
                 <a:ea typeface="Georgia" pitchFamily="34" charset="-122"/>
                 <a:cs typeface="Georgia" pitchFamily="34" charset="-120"/>
               </a:rPr>
-              <a:t>Long-Term Vision:</a:t>
+              <a:t>Austin Hub — Housing Crisis Response</a:t>
             </a:r>
             <a:endParaRPr lang="en-US" sz="1300" dirty="0"/>
           </a:p>
@@ -4349,359 +3771,325 @@
       </p:sp>
       <p:sp>
         <p:nvSpPr>
+          <p:cNvPr id="6" name="Text 3"/>
+          <p:cNvSpPr/>
+          <p:nvPr/>
+        </p:nvSpPr>
+        <p:spPr>
+          <a:xfrm>
+            <a:off x="731520" y="1691640"/>
+            <a:ext cx="7680960" cy="822960"/>
+          </a:xfrm>
+          <a:prstGeom prst="rect">
+            <a:avLst/>
+          </a:prstGeom>
+          <a:noFill/>
+          <a:ln/>
+        </p:spPr>
+        <p:txBody>
+          <a:bodyPr wrap="square" rtlCol="0" anchor="ctr"/>
+          <a:lstStyle/>
+          <a:p>
+            <a:pPr indent="0" marL="0">
+              <a:lnSpc>
+                <a:spcPct val="120000"/>
+              </a:lnSpc>
+              <a:buNone/>
+            </a:pPr>
+            <a:r>
+              <a:rPr lang="en-US" sz="1000" dirty="0">
+                <a:solidFill>
+                  <a:srgbClr val="E2E8F0"/>
+                </a:solidFill>
+                <a:latin typeface="Calibri" pitchFamily="34" charset="0"/>
+                <a:ea typeface="Calibri" pitchFamily="34" charset="-122"/>
+                <a:cs typeface="Calibri" pitchFamily="34" charset="-120"/>
+              </a:rPr>
+              <a:t>Median Home: $435K | Homeless: 3,238 | Youth: 934</a:t>
+            </a:r>
+            <a:endParaRPr lang="en-US" sz="1000" dirty="0"/>
+          </a:p>
+          <a:p>
+            <a:pPr indent="0" marL="0">
+              <a:lnSpc>
+                <a:spcPct val="120000"/>
+              </a:lnSpc>
+              <a:buNone/>
+            </a:pPr>
+            <a:r>
+              <a:rPr lang="en-US" sz="1000" dirty="0">
+                <a:solidFill>
+                  <a:srgbClr val="E2E8F0"/>
+                </a:solidFill>
+                <a:latin typeface="Calibri" pitchFamily="34" charset="0"/>
+                <a:ea typeface="Calibri" pitchFamily="34" charset="-122"/>
+                <a:cs typeface="Calibri" pitchFamily="34" charset="-120"/>
+              </a:rPr>
+              <a:t>Cost-Burdened: 85%+ | Partners: CommUnity Care, ECHO</a:t>
+            </a:r>
+            <a:endParaRPr lang="en-US" sz="1000" dirty="0"/>
+          </a:p>
+          <a:p>
+            <a:pPr indent="0" marL="0">
+              <a:lnSpc>
+                <a:spcPct val="120000"/>
+              </a:lnSpc>
+              <a:buNone/>
+            </a:pPr>
+            <a:r>
+              <a:rPr lang="en-US" sz="1000" dirty="0">
+                <a:solidFill>
+                  <a:srgbClr val="E2E8F0"/>
+                </a:solidFill>
+                <a:latin typeface="Calibri" pitchFamily="34" charset="0"/>
+                <a:ea typeface="Calibri" pitchFamily="34" charset="-122"/>
+                <a:cs typeface="Calibri" pitchFamily="34" charset="-120"/>
+              </a:rPr>
+              <a:t>Platforms: LifeBridge, Whole-Person Health, MCE</a:t>
+            </a:r>
+            <a:endParaRPr lang="en-US" sz="1000" dirty="0"/>
+          </a:p>
+        </p:txBody>
+      </p:sp>
+      <p:sp>
+        <p:nvSpPr>
           <p:cNvPr id="7" name="Text 4"/>
           <p:cNvSpPr/>
           <p:nvPr/>
         </p:nvSpPr>
         <p:spPr>
           <a:xfrm>
-            <a:off x="4846320" y="1463040"/>
-            <a:ext cx="3840480" cy="3200400"/>
-          </a:xfrm>
-          <a:prstGeom prst="rect">
-            <a:avLst/>
-          </a:prstGeom>
-          <a:noFill/>
-          <a:ln/>
-        </p:spPr>
-        <p:txBody>
-          <a:bodyPr wrap="square" rtlCol="0" anchor="ctr"/>
-          <a:lstStyle/>
-          <a:p>
-            <a:pPr indent="0" marL="0">
-              <a:lnSpc>
-                <a:spcPct val="115000"/>
-              </a:lnSpc>
-              <a:buNone/>
-            </a:pPr>
-            <a:r>
-              <a:rPr lang="en-US" sz="1050" dirty="0">
-                <a:solidFill>
-                  <a:srgbClr val="E2E8F0"/>
-                </a:solidFill>
-                <a:latin typeface="Calibri" pitchFamily="34" charset="0"/>
-                <a:ea typeface="Calibri" pitchFamily="34" charset="-122"/>
-                <a:cs typeface="Calibri" pitchFamily="34" charset="-120"/>
-              </a:rPr>
-              <a:t>• Build Central Texas into a national model</a:t>
-            </a:r>
-            <a:endParaRPr lang="en-US" sz="1050" dirty="0"/>
-          </a:p>
-          <a:p>
-            <a:pPr indent="0" marL="0">
-              <a:lnSpc>
-                <a:spcPct val="115000"/>
-              </a:lnSpc>
-              <a:buNone/>
-            </a:pPr>
-            <a:r>
-              <a:rPr lang="en-US" sz="1050" dirty="0">
-                <a:solidFill>
-                  <a:srgbClr val="E2E8F0"/>
-                </a:solidFill>
-                <a:latin typeface="Calibri" pitchFamily="34" charset="0"/>
-                <a:ea typeface="Calibri" pitchFamily="34" charset="-122"/>
-                <a:cs typeface="Calibri" pitchFamily="34" charset="-120"/>
-              </a:rPr>
-              <a:t>   for community AI + implementation science</a:t>
-            </a:r>
-            <a:endParaRPr lang="en-US" sz="1050" dirty="0"/>
-          </a:p>
-          <a:p>
-            <a:pPr indent="0" marL="0">
-              <a:lnSpc>
-                <a:spcPct val="115000"/>
-              </a:lnSpc>
-              <a:buNone/>
-            </a:pPr>
-            <a:endParaRPr lang="en-US" sz="1050" dirty="0"/>
-          </a:p>
-          <a:p>
-            <a:pPr indent="0" marL="0">
-              <a:lnSpc>
-                <a:spcPct val="115000"/>
-              </a:lnSpc>
-              <a:buNone/>
-            </a:pPr>
-            <a:r>
-              <a:rPr lang="en-US" sz="1050" dirty="0">
-                <a:solidFill>
-                  <a:srgbClr val="E2E8F0"/>
-                </a:solidFill>
-                <a:latin typeface="Calibri" pitchFamily="34" charset="0"/>
-                <a:ea typeface="Calibri" pitchFamily="34" charset="-122"/>
-                <a:cs typeface="Calibri" pitchFamily="34" charset="-120"/>
-              </a:rPr>
-              <a:t>• Publish the methodology together:</a:t>
-            </a:r>
-            <a:endParaRPr lang="en-US" sz="1050" dirty="0"/>
-          </a:p>
-          <a:p>
-            <a:pPr indent="0" marL="0">
-              <a:lnSpc>
-                <a:spcPct val="115000"/>
-              </a:lnSpc>
-              <a:buNone/>
-            </a:pPr>
-            <a:r>
-              <a:rPr lang="en-US" sz="1050" dirty="0">
-                <a:solidFill>
-                  <a:srgbClr val="E2E8F0"/>
-                </a:solidFill>
-                <a:latin typeface="Calibri" pitchFamily="34" charset="0"/>
-                <a:ea typeface="Calibri" pitchFamily="34" charset="-122"/>
-                <a:cs typeface="Calibri" pitchFamily="34" charset="-120"/>
-              </a:rPr>
-              <a:t>   CARE Model (MEASURE) +</a:t>
-            </a:r>
-            <a:endParaRPr lang="en-US" sz="1050" dirty="0"/>
-          </a:p>
-          <a:p>
-            <a:pPr indent="0" marL="0">
-              <a:lnSpc>
-                <a:spcPct val="115000"/>
-              </a:lnSpc>
-              <a:buNone/>
-            </a:pPr>
-            <a:r>
-              <a:rPr lang="en-US" sz="1050" dirty="0">
-                <a:solidFill>
-                  <a:srgbClr val="E2E8F0"/>
-                </a:solidFill>
-                <a:latin typeface="Calibri" pitchFamily="34" charset="0"/>
-                <a:ea typeface="Calibri" pitchFamily="34" charset="-122"/>
-                <a:cs typeface="Calibri" pitchFamily="34" charset="-120"/>
-              </a:rPr>
-              <a:t>   MAP-GAP (Collaborative Advocate) =</a:t>
-            </a:r>
-            <a:endParaRPr lang="en-US" sz="1050" dirty="0"/>
-          </a:p>
-          <a:p>
-            <a:pPr indent="0" marL="0">
-              <a:lnSpc>
-                <a:spcPct val="115000"/>
-              </a:lnSpc>
-              <a:buNone/>
-            </a:pPr>
-            <a:r>
-              <a:rPr lang="en-US" sz="1050" dirty="0">
-                <a:solidFill>
-                  <a:srgbClr val="E2E8F0"/>
-                </a:solidFill>
-                <a:latin typeface="Calibri" pitchFamily="34" charset="0"/>
-                <a:ea typeface="Calibri" pitchFamily="34" charset="-122"/>
-                <a:cs typeface="Calibri" pitchFamily="34" charset="-120"/>
-              </a:rPr>
-              <a:t>   peer-reviewable framework</a:t>
-            </a:r>
-            <a:endParaRPr lang="en-US" sz="1050" dirty="0"/>
-          </a:p>
-          <a:p>
-            <a:pPr indent="0" marL="0">
-              <a:lnSpc>
-                <a:spcPct val="115000"/>
-              </a:lnSpc>
-              <a:buNone/>
-            </a:pPr>
-            <a:endParaRPr lang="en-US" sz="1050" dirty="0"/>
-          </a:p>
-          <a:p>
-            <a:pPr indent="0" marL="0">
-              <a:lnSpc>
-                <a:spcPct val="115000"/>
-              </a:lnSpc>
-              <a:buNone/>
-            </a:pPr>
-            <a:r>
-              <a:rPr lang="en-US" sz="1050" dirty="0">
-                <a:solidFill>
-                  <a:srgbClr val="E2E8F0"/>
-                </a:solidFill>
-                <a:latin typeface="Calibri" pitchFamily="34" charset="0"/>
-                <a:ea typeface="Calibri" pitchFamily="34" charset="-122"/>
-                <a:cs typeface="Calibri" pitchFamily="34" charset="-120"/>
-              </a:rPr>
-              <a:t>• Scale beyond Austin:</a:t>
-            </a:r>
-            <a:endParaRPr lang="en-US" sz="1050" dirty="0"/>
-          </a:p>
-          <a:p>
-            <a:pPr indent="0" marL="0">
-              <a:lnSpc>
-                <a:spcPct val="115000"/>
-              </a:lnSpc>
-              <a:buNone/>
-            </a:pPr>
-            <a:r>
-              <a:rPr lang="en-US" sz="1050" dirty="0">
-                <a:solidFill>
-                  <a:srgbClr val="E2E8F0"/>
-                </a:solidFill>
-                <a:latin typeface="Calibri" pitchFamily="34" charset="0"/>
-                <a:ea typeface="Calibri" pitchFamily="34" charset="-122"/>
-                <a:cs typeface="Calibri" pitchFamily="34" charset="-120"/>
-              </a:rPr>
-              <a:t>   Ecosystem architecture is replicable</a:t>
-            </a:r>
-            <a:endParaRPr lang="en-US" sz="1050" dirty="0"/>
-          </a:p>
-          <a:p>
-            <a:pPr indent="0" marL="0">
-              <a:lnSpc>
-                <a:spcPct val="115000"/>
-              </a:lnSpc>
-              <a:buNone/>
-            </a:pPr>
-            <a:r>
-              <a:rPr lang="en-US" sz="1050" dirty="0">
-                <a:solidFill>
-                  <a:srgbClr val="E2E8F0"/>
-                </a:solidFill>
-                <a:latin typeface="Calibri" pitchFamily="34" charset="0"/>
-                <a:ea typeface="Calibri" pitchFamily="34" charset="-122"/>
-                <a:cs typeface="Calibri" pitchFamily="34" charset="-120"/>
-              </a:rPr>
-              <a:t>   Any community can adopt the model</a:t>
-            </a:r>
-            <a:endParaRPr lang="en-US" sz="1050" dirty="0"/>
-          </a:p>
-          <a:p>
-            <a:pPr indent="0" marL="0">
-              <a:lnSpc>
-                <a:spcPct val="115000"/>
-              </a:lnSpc>
-              <a:buNone/>
-            </a:pPr>
-            <a:r>
-              <a:rPr lang="en-US" sz="1050" dirty="0">
-                <a:solidFill>
-                  <a:srgbClr val="E2E8F0"/>
-                </a:solidFill>
-                <a:latin typeface="Calibri" pitchFamily="34" charset="0"/>
-                <a:ea typeface="Calibri" pitchFamily="34" charset="-122"/>
-                <a:cs typeface="Calibri" pitchFamily="34" charset="-120"/>
-              </a:rPr>
-              <a:t>   MEASURE's network + our AI = national</a:t>
-            </a:r>
-            <a:endParaRPr lang="en-US" sz="1050" dirty="0"/>
-          </a:p>
-          <a:p>
-            <a:pPr indent="0" marL="0">
-              <a:lnSpc>
-                <a:spcPct val="115000"/>
-              </a:lnSpc>
-              <a:buNone/>
-            </a:pPr>
-            <a:endParaRPr lang="en-US" sz="1050" dirty="0"/>
-          </a:p>
-          <a:p>
-            <a:pPr indent="0" marL="0">
-              <a:lnSpc>
-                <a:spcPct val="115000"/>
-              </a:lnSpc>
-              <a:buNone/>
-            </a:pPr>
-            <a:r>
-              <a:rPr lang="en-US" sz="1050" dirty="0">
-                <a:solidFill>
-                  <a:srgbClr val="E2E8F0"/>
-                </a:solidFill>
-                <a:latin typeface="Calibri" pitchFamily="34" charset="0"/>
-                <a:ea typeface="Calibri" pitchFamily="34" charset="-122"/>
-                <a:cs typeface="Calibri" pitchFamily="34" charset="-120"/>
-              </a:rPr>
-              <a:t>• Shared advocacy for equitable AI + data</a:t>
-            </a:r>
-            <a:endParaRPr lang="en-US" sz="1050" dirty="0"/>
-          </a:p>
-          <a:p>
-            <a:pPr indent="0" marL="0">
-              <a:lnSpc>
-                <a:spcPct val="115000"/>
-              </a:lnSpc>
-              <a:buNone/>
-            </a:pPr>
-            <a:r>
-              <a:rPr lang="en-US" sz="1050" dirty="0">
-                <a:solidFill>
-                  <a:srgbClr val="E2E8F0"/>
-                </a:solidFill>
-                <a:latin typeface="Calibri" pitchFamily="34" charset="0"/>
-                <a:ea typeface="Calibri" pitchFamily="34" charset="-122"/>
-                <a:cs typeface="Calibri" pitchFamily="34" charset="-120"/>
-              </a:rPr>
-              <a:t>   policy at state and federal levels</a:t>
-            </a:r>
-            <a:endParaRPr lang="en-US" sz="1050" dirty="0"/>
-          </a:p>
-          <a:p>
-            <a:pPr indent="0" marL="0">
-              <a:lnSpc>
-                <a:spcPct val="115000"/>
-              </a:lnSpc>
-              <a:buNone/>
-            </a:pPr>
-            <a:endParaRPr lang="en-US" sz="1050" dirty="0"/>
-          </a:p>
-          <a:p>
-            <a:pPr indent="0" marL="0">
-              <a:lnSpc>
-                <a:spcPct val="115000"/>
-              </a:lnSpc>
-              <a:buNone/>
-            </a:pPr>
-            <a:r>
-              <a:rPr lang="en-US" sz="1050" dirty="0">
-                <a:solidFill>
-                  <a:srgbClr val="E2E8F0"/>
-                </a:solidFill>
-                <a:latin typeface="Calibri" pitchFamily="34" charset="0"/>
-                <a:ea typeface="Calibri" pitchFamily="34" charset="-122"/>
-                <a:cs typeface="Calibri" pitchFamily="34" charset="-120"/>
-              </a:rPr>
-              <a:t>This isn't a vendor pitch. Two organizations,</a:t>
-            </a:r>
-            <a:endParaRPr lang="en-US" sz="1050" dirty="0"/>
-          </a:p>
-          <a:p>
-            <a:pPr indent="0" marL="0">
-              <a:lnSpc>
-                <a:spcPct val="115000"/>
-              </a:lnSpc>
-              <a:buNone/>
-            </a:pPr>
-            <a:r>
-              <a:rPr lang="en-US" sz="1050" dirty="0">
-                <a:solidFill>
-                  <a:srgbClr val="E2E8F0"/>
-                </a:solidFill>
-                <a:latin typeface="Calibri" pitchFamily="34" charset="0"/>
-                <a:ea typeface="Calibri" pitchFamily="34" charset="-122"/>
-                <a:cs typeface="Calibri" pitchFamily="34" charset="-120"/>
-              </a:rPr>
-              <a:t>same mission, same geography,</a:t>
-            </a:r>
-            <a:endParaRPr lang="en-US" sz="1050" dirty="0"/>
-          </a:p>
-          <a:p>
-            <a:pPr indent="0" marL="0">
-              <a:lnSpc>
-                <a:spcPct val="115000"/>
-              </a:lnSpc>
-              <a:buNone/>
-            </a:pPr>
-            <a:r>
-              <a:rPr lang="en-US" sz="1050" dirty="0">
-                <a:solidFill>
-                  <a:srgbClr val="E2E8F0"/>
-                </a:solidFill>
-                <a:latin typeface="Calibri" pitchFamily="34" charset="0"/>
-                <a:ea typeface="Calibri" pitchFamily="34" charset="-122"/>
-                <a:cs typeface="Calibri" pitchFamily="34" charset="-120"/>
-              </a:rPr>
-              <a:t>complementary AI + community capabilities.</a:t>
-            </a:r>
-            <a:endParaRPr lang="en-US" sz="1050" dirty="0"/>
+            <a:off x="731520" y="2651760"/>
+            <a:ext cx="7680960" cy="274320"/>
+          </a:xfrm>
+          <a:prstGeom prst="rect">
+            <a:avLst/>
+          </a:prstGeom>
+          <a:noFill/>
+          <a:ln/>
+        </p:spPr>
+        <p:txBody>
+          <a:bodyPr wrap="square" rtlCol="0" anchor="ctr"/>
+          <a:lstStyle/>
+          <a:p>
+            <a:pPr indent="0" marL="0">
+              <a:buNone/>
+            </a:pPr>
+            <a:r>
+              <a:rPr lang="en-US" sz="1300" b="1" dirty="0">
+                <a:solidFill>
+                  <a:srgbClr val="10B981"/>
+                </a:solidFill>
+                <a:latin typeface="Georgia" pitchFamily="34" charset="0"/>
+                <a:ea typeface="Georgia" pitchFamily="34" charset="-122"/>
+                <a:cs typeface="Georgia" pitchFamily="34" charset="-120"/>
+              </a:rPr>
+              <a:t>Manor Hub — Growth Without Gaps</a:t>
+            </a:r>
+            <a:endParaRPr lang="en-US" sz="1300" dirty="0"/>
+          </a:p>
+        </p:txBody>
+      </p:sp>
+      <p:sp>
+        <p:nvSpPr>
+          <p:cNvPr id="8" name="Text 5"/>
+          <p:cNvSpPr/>
+          <p:nvPr/>
+        </p:nvSpPr>
+        <p:spPr>
+          <a:xfrm>
+            <a:off x="731520" y="2971800"/>
+            <a:ext cx="7680960" cy="822960"/>
+          </a:xfrm>
+          <a:prstGeom prst="rect">
+            <a:avLst/>
+          </a:prstGeom>
+          <a:noFill/>
+          <a:ln/>
+        </p:spPr>
+        <p:txBody>
+          <a:bodyPr wrap="square" rtlCol="0" anchor="ctr"/>
+          <a:lstStyle/>
+          <a:p>
+            <a:pPr indent="0" marL="0">
+              <a:lnSpc>
+                <a:spcPct val="120000"/>
+              </a:lnSpc>
+              <a:buNone/>
+            </a:pPr>
+            <a:r>
+              <a:rPr lang="en-US" sz="1000" dirty="0">
+                <a:solidFill>
+                  <a:srgbClr val="E2E8F0"/>
+                </a:solidFill>
+                <a:latin typeface="Calibri" pitchFamily="34" charset="0"/>
+                <a:ea typeface="Calibri" pitchFamily="34" charset="-122"/>
+                <a:cs typeface="Calibri" pitchFamily="34" charset="-120"/>
+              </a:rPr>
+              <a:t>Pop Growth: 400%+ | Youth: 38% under 18 | Infrastructure Gap: Critical</a:t>
+            </a:r>
+            <a:endParaRPr lang="en-US" sz="1000" dirty="0"/>
+          </a:p>
+          <a:p>
+            <a:pPr indent="0" marL="0">
+              <a:lnSpc>
+                <a:spcPct val="120000"/>
+              </a:lnSpc>
+              <a:buNone/>
+            </a:pPr>
+            <a:r>
+              <a:rPr lang="en-US" sz="1000" dirty="0">
+                <a:solidFill>
+                  <a:srgbClr val="E2E8F0"/>
+                </a:solidFill>
+                <a:latin typeface="Calibri" pitchFamily="34" charset="0"/>
+                <a:ea typeface="Calibri" pitchFamily="34" charset="-122"/>
+                <a:cs typeface="Calibri" pitchFamily="34" charset="-120"/>
+              </a:rPr>
+              <a:t>Partners: Manor ISD, Travis County Health</a:t>
+            </a:r>
+            <a:endParaRPr lang="en-US" sz="1000" dirty="0"/>
+          </a:p>
+          <a:p>
+            <a:pPr indent="0" marL="0">
+              <a:lnSpc>
+                <a:spcPct val="120000"/>
+              </a:lnSpc>
+              <a:buNone/>
+            </a:pPr>
+            <a:r>
+              <a:rPr lang="en-US" sz="1000" dirty="0">
+                <a:solidFill>
+                  <a:srgbClr val="E2E8F0"/>
+                </a:solidFill>
+                <a:latin typeface="Calibri" pitchFamily="34" charset="0"/>
+                <a:ea typeface="Calibri" pitchFamily="34" charset="-122"/>
+                <a:cs typeface="Calibri" pitchFamily="34" charset="-120"/>
+              </a:rPr>
+              <a:t>Platforms: ThriveUp, ISSS, Sankofa Health</a:t>
+            </a:r>
+            <a:endParaRPr lang="en-US" sz="1000" dirty="0"/>
+          </a:p>
+        </p:txBody>
+      </p:sp>
+      <p:sp>
+        <p:nvSpPr>
+          <p:cNvPr id="9" name="Text 6"/>
+          <p:cNvSpPr/>
+          <p:nvPr/>
+        </p:nvSpPr>
+        <p:spPr>
+          <a:xfrm>
+            <a:off x="731520" y="3931920"/>
+            <a:ext cx="7680960" cy="274320"/>
+          </a:xfrm>
+          <a:prstGeom prst="rect">
+            <a:avLst/>
+          </a:prstGeom>
+          <a:noFill/>
+          <a:ln/>
+        </p:spPr>
+        <p:txBody>
+          <a:bodyPr wrap="square" rtlCol="0" anchor="ctr"/>
+          <a:lstStyle/>
+          <a:p>
+            <a:pPr indent="0" marL="0">
+              <a:buNone/>
+            </a:pPr>
+            <a:r>
+              <a:rPr lang="en-US" sz="1300" b="1" dirty="0">
+                <a:solidFill>
+                  <a:srgbClr val="F59E0B"/>
+                </a:solidFill>
+                <a:latin typeface="Georgia" pitchFamily="34" charset="0"/>
+                <a:ea typeface="Georgia" pitchFamily="34" charset="-122"/>
+                <a:cs typeface="Georgia" pitchFamily="34" charset="-120"/>
+              </a:rPr>
+              <a:t>Pflugerville Hub — Infrastructure First</a:t>
+            </a:r>
+            <a:endParaRPr lang="en-US" sz="1300" dirty="0"/>
+          </a:p>
+        </p:txBody>
+      </p:sp>
+      <p:sp>
+        <p:nvSpPr>
+          <p:cNvPr id="10" name="Text 7"/>
+          <p:cNvSpPr/>
+          <p:nvPr/>
+        </p:nvSpPr>
+        <p:spPr>
+          <a:xfrm>
+            <a:off x="731520" y="4251960"/>
+            <a:ext cx="7680960" cy="822960"/>
+          </a:xfrm>
+          <a:prstGeom prst="rect">
+            <a:avLst/>
+          </a:prstGeom>
+          <a:noFill/>
+          <a:ln/>
+        </p:spPr>
+        <p:txBody>
+          <a:bodyPr wrap="square" rtlCol="0" anchor="ctr"/>
+          <a:lstStyle/>
+          <a:p>
+            <a:pPr indent="0" marL="0">
+              <a:lnSpc>
+                <a:spcPct val="120000"/>
+              </a:lnSpc>
+              <a:buNone/>
+            </a:pPr>
+            <a:r>
+              <a:rPr lang="en-US" sz="1000" dirty="0">
+                <a:solidFill>
+                  <a:srgbClr val="E2E8F0"/>
+                </a:solidFill>
+                <a:latin typeface="Calibri" pitchFamily="34" charset="0"/>
+                <a:ea typeface="Calibri" pitchFamily="34" charset="-122"/>
+                <a:cs typeface="Calibri" pitchFamily="34" charset="-120"/>
+              </a:rPr>
+              <a:t>Population: 75K+ | Growth: 52% | Digital Access Gap: Significant</a:t>
+            </a:r>
+            <a:endParaRPr lang="en-US" sz="1000" dirty="0"/>
+          </a:p>
+          <a:p>
+            <a:pPr indent="0" marL="0">
+              <a:lnSpc>
+                <a:spcPct val="120000"/>
+              </a:lnSpc>
+              <a:buNone/>
+            </a:pPr>
+            <a:r>
+              <a:rPr lang="en-US" sz="1000" dirty="0">
+                <a:solidFill>
+                  <a:srgbClr val="E2E8F0"/>
+                </a:solidFill>
+                <a:latin typeface="Calibri" pitchFamily="34" charset="0"/>
+                <a:ea typeface="Calibri" pitchFamily="34" charset="-122"/>
+                <a:cs typeface="Calibri" pitchFamily="34" charset="-120"/>
+              </a:rPr>
+              <a:t>Partners: PfISD, Pflugerville CDC</a:t>
+            </a:r>
+            <a:endParaRPr lang="en-US" sz="1000" dirty="0"/>
+          </a:p>
+          <a:p>
+            <a:pPr indent="0" marL="0">
+              <a:lnSpc>
+                <a:spcPct val="120000"/>
+              </a:lnSpc>
+              <a:buNone/>
+            </a:pPr>
+            <a:r>
+              <a:rPr lang="en-US" sz="1000" dirty="0">
+                <a:solidFill>
+                  <a:srgbClr val="E2E8F0"/>
+                </a:solidFill>
+                <a:latin typeface="Calibri" pitchFamily="34" charset="0"/>
+                <a:ea typeface="Calibri" pitchFamily="34" charset="-122"/>
+                <a:cs typeface="Calibri" pitchFamily="34" charset="-120"/>
+              </a:rPr>
+              <a:t>Platforms: ThriveUp, Perfectly Different</a:t>
+            </a:r>
+            <a:endParaRPr lang="en-US" sz="1000" dirty="0"/>
           </a:p>
         </p:txBody>
       </p:sp>
@@ -4745,24 +4133,24 @@
         </p:nvSpPr>
         <p:spPr>
           <a:xfrm>
-            <a:off x="731520" y="365760"/>
-            <a:ext cx="7680960" cy="457200"/>
-          </a:xfrm>
-          <a:prstGeom prst="rect">
-            <a:avLst/>
-          </a:prstGeom>
-          <a:noFill/>
-          <a:ln/>
-        </p:spPr>
-        <p:txBody>
-          <a:bodyPr wrap="square" rtlCol="0" anchor="ctr"/>
-          <a:lstStyle/>
-          <a:p>
-            <a:pPr indent="0" marL="0">
-              <a:buNone/>
-            </a:pPr>
-            <a:r>
-              <a:rPr lang="en-US" sz="2400" b="1" dirty="0">
+            <a:off x="731520" y="1371600"/>
+            <a:ext cx="7680960" cy="548640"/>
+          </a:xfrm>
+          <a:prstGeom prst="rect">
+            <a:avLst/>
+          </a:prstGeom>
+          <a:noFill/>
+          <a:ln/>
+        </p:spPr>
+        <p:txBody>
+          <a:bodyPr wrap="square" rtlCol="0" anchor="ctr"/>
+          <a:lstStyle/>
+          <a:p>
+            <a:pPr indent="0" marL="0">
+              <a:buNone/>
+            </a:pPr>
+            <a:r>
+              <a:rPr lang="en-US" sz="2800" b="1" dirty="0">
                 <a:solidFill>
                   <a:srgbClr val="FFFFFF"/>
                 </a:solidFill>
@@ -4770,9 +4158,9 @@
                 <a:ea typeface="Georgia" pitchFamily="34" charset="-122"/>
                 <a:cs typeface="Georgia" pitchFamily="34" charset="-120"/>
               </a:rPr>
-              <a:t>Regional Hubs — Austin / Manor / Pflugerville</a:t>
-            </a:r>
-            <a:endParaRPr lang="en-US" sz="2400" dirty="0"/>
+              <a:t>Research to Implementation with Fidelity</a:t>
+            </a:r>
+            <a:endParaRPr lang="en-US" sz="2800" dirty="0"/>
           </a:p>
         </p:txBody>
       </p:sp>
@@ -4784,457 +4172,218 @@
         </p:nvSpPr>
         <p:spPr>
           <a:xfrm>
-            <a:off x="731520" y="822960"/>
-            <a:ext cx="7680960" cy="274320"/>
-          </a:xfrm>
-          <a:prstGeom prst="rect">
-            <a:avLst/>
-          </a:prstGeom>
-          <a:noFill/>
-          <a:ln/>
-        </p:spPr>
-        <p:txBody>
-          <a:bodyPr wrap="square" rtlCol="0" anchor="ctr"/>
-          <a:lstStyle/>
-          <a:p>
-            <a:pPr indent="0" marL="0">
-              <a:buNone/>
-            </a:pPr>
-            <a:r>
-              <a:rPr lang="en-US" sz="1200" dirty="0">
-                <a:solidFill>
-                  <a:srgbClr val="94A3B8"/>
+            <a:off x="731520" y="2011680"/>
+            <a:ext cx="7680960" cy="548640"/>
+          </a:xfrm>
+          <a:prstGeom prst="rect">
+            <a:avLst/>
+          </a:prstGeom>
+          <a:noFill/>
+          <a:ln/>
+        </p:spPr>
+        <p:txBody>
+          <a:bodyPr wrap="square" rtlCol="0" anchor="ctr"/>
+          <a:lstStyle/>
+          <a:p>
+            <a:pPr indent="0" marL="0">
+              <a:lnSpc>
+                <a:spcPct val="130000"/>
+              </a:lnSpc>
+              <a:buNone/>
+            </a:pPr>
+            <a:r>
+              <a:rPr lang="en-US" sz="1400" dirty="0">
+                <a:solidFill>
+                  <a:srgbClr val="E2E8F0"/>
                 </a:solidFill>
                 <a:latin typeface="Georgia" pitchFamily="34" charset="0"/>
                 <a:ea typeface="Georgia" pitchFamily="34" charset="-122"/>
                 <a:cs typeface="Georgia" pitchFamily="34" charset="-120"/>
               </a:rPr>
-              <a:t>Same communities MEASURE serves — shared geography, shared mission</a:t>
-            </a:r>
-            <a:endParaRPr lang="en-US" sz="1200" dirty="0"/>
-          </a:p>
-        </p:txBody>
-      </p:sp>
-      <p:sp>
-        <p:nvSpPr>
-          <p:cNvPr id="5" name="Text 2"/>
-          <p:cNvSpPr/>
-          <p:nvPr/>
-        </p:nvSpPr>
-        <p:spPr>
-          <a:xfrm>
-            <a:off x="731520" y="1371600"/>
-            <a:ext cx="7680960" cy="274320"/>
-          </a:xfrm>
-          <a:prstGeom prst="rect">
-            <a:avLst/>
-          </a:prstGeom>
-          <a:noFill/>
-          <a:ln/>
-        </p:spPr>
-        <p:txBody>
-          <a:bodyPr wrap="square" rtlCol="0" anchor="ctr"/>
-          <a:lstStyle/>
-          <a:p>
-            <a:pPr indent="0" marL="0">
-              <a:buNone/>
-            </a:pPr>
-            <a:r>
-              <a:rPr lang="en-US" sz="1300" b="1" dirty="0">
-                <a:solidFill>
-                  <a:srgbClr val="6366F1"/>
+              <a:t>For all stakeholders and perspectives — everywhere —</a:t>
+            </a:r>
+            <a:endParaRPr lang="en-US" sz="1400" dirty="0"/>
+          </a:p>
+          <a:p>
+            <a:pPr indent="0" marL="0">
+              <a:lnSpc>
+                <a:spcPct val="130000"/>
+              </a:lnSpc>
+              <a:buNone/>
+            </a:pPr>
+            <a:r>
+              <a:rPr lang="en-US" sz="1400" dirty="0">
+                <a:solidFill>
+                  <a:srgbClr val="E2E8F0"/>
                 </a:solidFill>
                 <a:latin typeface="Georgia" pitchFamily="34" charset="0"/>
                 <a:ea typeface="Georgia" pitchFamily="34" charset="-122"/>
                 <a:cs typeface="Georgia" pitchFamily="34" charset="-120"/>
               </a:rPr>
-              <a:t>Austin Hub — Housing Crisis Response</a:t>
-            </a:r>
-            <a:endParaRPr lang="en-US" sz="1300" dirty="0"/>
-          </a:p>
-        </p:txBody>
-      </p:sp>
-      <p:sp>
-        <p:nvSpPr>
-          <p:cNvPr id="6" name="Text 3"/>
-          <p:cNvSpPr/>
-          <p:nvPr/>
-        </p:nvSpPr>
-        <p:spPr>
-          <a:xfrm>
-            <a:off x="731520" y="1691640"/>
-            <a:ext cx="7680960" cy="914400"/>
-          </a:xfrm>
-          <a:prstGeom prst="rect">
-            <a:avLst/>
-          </a:prstGeom>
-          <a:noFill/>
-          <a:ln/>
-        </p:spPr>
-        <p:txBody>
-          <a:bodyPr wrap="square" rtlCol="0" anchor="ctr"/>
-          <a:lstStyle/>
-          <a:p>
-            <a:pPr indent="0" marL="0">
-              <a:lnSpc>
-                <a:spcPct val="120000"/>
-              </a:lnSpc>
-              <a:buNone/>
-            </a:pPr>
-            <a:r>
-              <a:rPr lang="en-US" sz="1000" dirty="0">
-                <a:solidFill>
-                  <a:srgbClr val="E2E8F0"/>
-                </a:solidFill>
-                <a:latin typeface="Calibri" pitchFamily="34" charset="0"/>
-                <a:ea typeface="Calibri" pitchFamily="34" charset="-122"/>
-                <a:cs typeface="Calibri" pitchFamily="34" charset="-120"/>
-              </a:rPr>
-              <a:t>Median Home: 35K | Homeless: 3,238</a:t>
-            </a:r>
-            <a:endParaRPr lang="en-US" sz="1000" dirty="0"/>
-          </a:p>
-          <a:p>
-            <a:pPr indent="0" marL="0">
-              <a:lnSpc>
-                <a:spcPct val="120000"/>
-              </a:lnSpc>
-              <a:buNone/>
-            </a:pPr>
-            <a:r>
-              <a:rPr lang="en-US" sz="1000" dirty="0">
-                <a:solidFill>
-                  <a:srgbClr val="E2E8F0"/>
-                </a:solidFill>
-                <a:latin typeface="Calibri" pitchFamily="34" charset="0"/>
-                <a:ea typeface="Calibri" pitchFamily="34" charset="-122"/>
-                <a:cs typeface="Calibri" pitchFamily="34" charset="-120"/>
-              </a:rPr>
-              <a:t>Youth Homeless: 934 | Cost-Burdened: 85%+</a:t>
-            </a:r>
-            <a:endParaRPr lang="en-US" sz="1000" dirty="0"/>
-          </a:p>
-          <a:p>
-            <a:pPr indent="0" marL="0">
-              <a:lnSpc>
-                <a:spcPct val="120000"/>
-              </a:lnSpc>
-              <a:buNone/>
-            </a:pPr>
-            <a:r>
-              <a:rPr lang="en-US" sz="1000" dirty="0">
-                <a:solidFill>
-                  <a:srgbClr val="E2E8F0"/>
-                </a:solidFill>
-                <a:latin typeface="Calibri" pitchFamily="34" charset="0"/>
-                <a:ea typeface="Calibri" pitchFamily="34" charset="-122"/>
-                <a:cs typeface="Calibri" pitchFamily="34" charset="-120"/>
-              </a:rPr>
-              <a:t>Partners: CommUnity Care, ECHO, Workforce Solutions</a:t>
-            </a:r>
-            <a:endParaRPr lang="en-US" sz="1000" dirty="0"/>
-          </a:p>
-          <a:p>
-            <a:pPr indent="0" marL="0">
-              <a:lnSpc>
-                <a:spcPct val="120000"/>
-              </a:lnSpc>
-              <a:buNone/>
-            </a:pPr>
-            <a:r>
-              <a:rPr lang="en-US" sz="1000" dirty="0">
-                <a:solidFill>
-                  <a:srgbClr val="E2E8F0"/>
-                </a:solidFill>
-                <a:latin typeface="Calibri" pitchFamily="34" charset="0"/>
-                <a:ea typeface="Calibri" pitchFamily="34" charset="-122"/>
-                <a:cs typeface="Calibri" pitchFamily="34" charset="-120"/>
-              </a:rPr>
-              <a:t>Platforms: LifeBridge, Whole-Person Health, MCE</a:t>
-            </a:r>
-            <a:endParaRPr lang="en-US" sz="1000" dirty="0"/>
-          </a:p>
-        </p:txBody>
-      </p:sp>
-      <p:sp>
-        <p:nvSpPr>
-          <p:cNvPr id="7" name="Text 4"/>
-          <p:cNvSpPr/>
-          <p:nvPr/>
-        </p:nvSpPr>
-        <p:spPr>
-          <a:xfrm>
-            <a:off x="731520" y="2743200"/>
-            <a:ext cx="7680960" cy="274320"/>
-          </a:xfrm>
-          <a:prstGeom prst="rect">
-            <a:avLst/>
-          </a:prstGeom>
-          <a:noFill/>
-          <a:ln/>
-        </p:spPr>
-        <p:txBody>
-          <a:bodyPr wrap="square" rtlCol="0" anchor="ctr"/>
-          <a:lstStyle/>
-          <a:p>
-            <a:pPr indent="0" marL="0">
-              <a:buNone/>
-            </a:pPr>
-            <a:r>
-              <a:rPr lang="en-US" sz="1300" b="1" dirty="0">
-                <a:solidFill>
-                  <a:srgbClr val="10B981"/>
+              <a:t>tied to measurable outcomes.</a:t>
+            </a:r>
+            <a:endParaRPr lang="en-US" sz="1400" dirty="0"/>
+          </a:p>
+        </p:txBody>
+      </p:sp>
+      <p:sp>
+        <p:nvSpPr>
+          <p:cNvPr id="5" name="Text 2"/>
+          <p:cNvSpPr/>
+          <p:nvPr/>
+        </p:nvSpPr>
+        <p:spPr>
+          <a:xfrm>
+            <a:off x="731520" y="2651760"/>
+            <a:ext cx="7680960" cy="365760"/>
+          </a:xfrm>
+          <a:prstGeom prst="rect">
+            <a:avLst/>
+          </a:prstGeom>
+          <a:noFill/>
+          <a:ln/>
+        </p:spPr>
+        <p:txBody>
+          <a:bodyPr wrap="square" rtlCol="0" anchor="ctr"/>
+          <a:lstStyle/>
+          <a:p>
+            <a:pPr indent="0" marL="0">
+              <a:buNone/>
+            </a:pPr>
+            <a:r>
+              <a:rPr lang="en-US" sz="1400" b="1" dirty="0">
+                <a:solidFill>
+                  <a:srgbClr val="6366F1"/>
                 </a:solidFill>
                 <a:latin typeface="Georgia" pitchFamily="34" charset="0"/>
                 <a:ea typeface="Georgia" pitchFamily="34" charset="-122"/>
                 <a:cs typeface="Georgia" pitchFamily="34" charset="-120"/>
               </a:rPr>
-              <a:t>Manor Hub — Growth Without Gaps</a:t>
-            </a:r>
-            <a:endParaRPr lang="en-US" sz="1300" dirty="0"/>
-          </a:p>
-        </p:txBody>
-      </p:sp>
-      <p:sp>
-        <p:nvSpPr>
-          <p:cNvPr id="8" name="Text 5"/>
-          <p:cNvSpPr/>
-          <p:nvPr/>
-        </p:nvSpPr>
-        <p:spPr>
-          <a:xfrm>
-            <a:off x="731520" y="3063240"/>
-            <a:ext cx="7680960" cy="914400"/>
-          </a:xfrm>
-          <a:prstGeom prst="rect">
-            <a:avLst/>
-          </a:prstGeom>
-          <a:noFill/>
-          <a:ln/>
-        </p:spPr>
-        <p:txBody>
-          <a:bodyPr wrap="square" rtlCol="0" anchor="ctr"/>
-          <a:lstStyle/>
-          <a:p>
-            <a:pPr indent="0" marL="0">
-              <a:lnSpc>
-                <a:spcPct val="120000"/>
-              </a:lnSpc>
-              <a:buNone/>
-            </a:pPr>
-            <a:r>
-              <a:rPr lang="en-US" sz="1000" dirty="0">
-                <a:solidFill>
-                  <a:srgbClr val="E2E8F0"/>
-                </a:solidFill>
-                <a:latin typeface="Calibri" pitchFamily="34" charset="0"/>
-                <a:ea typeface="Calibri" pitchFamily="34" charset="-122"/>
-                <a:cs typeface="Calibri" pitchFamily="34" charset="-120"/>
-              </a:rPr>
-              <a:t>Pop Growth: 400%+ | Youth: 38% under 18</a:t>
-            </a:r>
-            <a:endParaRPr lang="en-US" sz="1000" dirty="0"/>
-          </a:p>
-          <a:p>
-            <a:pPr indent="0" marL="0">
-              <a:lnSpc>
-                <a:spcPct val="120000"/>
-              </a:lnSpc>
-              <a:buNone/>
-            </a:pPr>
-            <a:r>
-              <a:rPr lang="en-US" sz="1000" dirty="0">
-                <a:solidFill>
-                  <a:srgbClr val="E2E8F0"/>
-                </a:solidFill>
-                <a:latin typeface="Calibri" pitchFamily="34" charset="0"/>
-                <a:ea typeface="Calibri" pitchFamily="34" charset="-122"/>
-                <a:cs typeface="Calibri" pitchFamily="34" charset="-120"/>
-              </a:rPr>
-              <a:t>Infrastructure Gap: Critical</a:t>
-            </a:r>
-            <a:endParaRPr lang="en-US" sz="1000" dirty="0"/>
-          </a:p>
-          <a:p>
-            <a:pPr indent="0" marL="0">
-              <a:lnSpc>
-                <a:spcPct val="120000"/>
-              </a:lnSpc>
-              <a:buNone/>
-            </a:pPr>
-            <a:r>
-              <a:rPr lang="en-US" sz="1000" dirty="0">
-                <a:solidFill>
-                  <a:srgbClr val="E2E8F0"/>
-                </a:solidFill>
-                <a:latin typeface="Calibri" pitchFamily="34" charset="0"/>
-                <a:ea typeface="Calibri" pitchFamily="34" charset="-122"/>
-                <a:cs typeface="Calibri" pitchFamily="34" charset="-120"/>
-              </a:rPr>
-              <a:t>Partners: Manor ISD, Travis County Health</a:t>
-            </a:r>
-            <a:endParaRPr lang="en-US" sz="1000" dirty="0"/>
-          </a:p>
-          <a:p>
-            <a:pPr indent="0" marL="0">
-              <a:lnSpc>
-                <a:spcPct val="120000"/>
-              </a:lnSpc>
-              <a:buNone/>
-            </a:pPr>
-            <a:r>
-              <a:rPr lang="en-US" sz="1000" dirty="0">
-                <a:solidFill>
-                  <a:srgbClr val="E2E8F0"/>
-                </a:solidFill>
-                <a:latin typeface="Calibri" pitchFamily="34" charset="0"/>
-                <a:ea typeface="Calibri" pitchFamily="34" charset="-122"/>
-                <a:cs typeface="Calibri" pitchFamily="34" charset="-120"/>
-              </a:rPr>
-              <a:t>Platforms: ThriveUp, ISSS, Sankofa Health</a:t>
-            </a:r>
-            <a:endParaRPr lang="en-US" sz="1000" dirty="0"/>
-          </a:p>
-        </p:txBody>
-      </p:sp>
-      <p:sp>
-        <p:nvSpPr>
-          <p:cNvPr id="9" name="Text 6"/>
-          <p:cNvSpPr/>
-          <p:nvPr/>
-        </p:nvSpPr>
-        <p:spPr>
-          <a:xfrm>
-            <a:off x="731520" y="4114800"/>
-            <a:ext cx="7680960" cy="274320"/>
-          </a:xfrm>
-          <a:prstGeom prst="rect">
-            <a:avLst/>
-          </a:prstGeom>
-          <a:noFill/>
-          <a:ln/>
-        </p:spPr>
-        <p:txBody>
-          <a:bodyPr wrap="square" rtlCol="0" anchor="ctr"/>
-          <a:lstStyle/>
-          <a:p>
-            <a:pPr indent="0" marL="0">
-              <a:buNone/>
-            </a:pPr>
-            <a:r>
-              <a:rPr lang="en-US" sz="1300" b="1" dirty="0">
-                <a:solidFill>
-                  <a:srgbClr val="F59E0B"/>
+              <a:t>AI-Powered. Ethical. Evidence-Grounded. Community-Serving.</a:t>
+            </a:r>
+            <a:endParaRPr lang="en-US" sz="1400" dirty="0"/>
+          </a:p>
+        </p:txBody>
+      </p:sp>
+      <p:sp>
+        <p:nvSpPr>
+          <p:cNvPr id="6" name="Shape 3"/>
+          <p:cNvSpPr/>
+          <p:nvPr/>
+        </p:nvSpPr>
+        <p:spPr>
+          <a:xfrm>
+            <a:off x="731520" y="3200400"/>
+            <a:ext cx="2743200" cy="36576"/>
+          </a:xfrm>
+          <a:prstGeom prst="rect">
+            <a:avLst/>
+          </a:prstGeom>
+          <a:solidFill>
+            <a:srgbClr val="6366F1"/>
+          </a:solidFill>
+          <a:ln/>
+        </p:spPr>
+      </p:sp>
+      <p:sp>
+        <p:nvSpPr>
+          <p:cNvPr id="7" name="Text 4"/>
+          <p:cNvSpPr/>
+          <p:nvPr/>
+        </p:nvSpPr>
+        <p:spPr>
+          <a:xfrm>
+            <a:off x="731520" y="3474720"/>
+            <a:ext cx="7680960" cy="1097280"/>
+          </a:xfrm>
+          <a:prstGeom prst="rect">
+            <a:avLst/>
+          </a:prstGeom>
+          <a:noFill/>
+          <a:ln/>
+        </p:spPr>
+        <p:txBody>
+          <a:bodyPr wrap="square" rtlCol="0" anchor="ctr"/>
+          <a:lstStyle/>
+          <a:p>
+            <a:pPr indent="0" marL="0">
+              <a:lnSpc>
+                <a:spcPct val="140000"/>
+              </a:lnSpc>
+              <a:buNone/>
+            </a:pPr>
+            <a:r>
+              <a:rPr lang="en-US" sz="1200" dirty="0">
+                <a:solidFill>
+                  <a:srgbClr val="94A3B8"/>
                 </a:solidFill>
                 <a:latin typeface="Georgia" pitchFamily="34" charset="0"/>
                 <a:ea typeface="Georgia" pitchFamily="34" charset="-122"/>
                 <a:cs typeface="Georgia" pitchFamily="34" charset="-120"/>
               </a:rPr>
-              <a:t>Pflugerville Hub — Infrastructure First</a:t>
-            </a:r>
-            <a:endParaRPr lang="en-US" sz="1300" dirty="0"/>
-          </a:p>
-        </p:txBody>
-      </p:sp>
-      <p:sp>
-        <p:nvSpPr>
-          <p:cNvPr id="10" name="Text 7"/>
-          <p:cNvSpPr/>
-          <p:nvPr/>
-        </p:nvSpPr>
-        <p:spPr>
-          <a:xfrm>
-            <a:off x="731520" y="4434840"/>
-            <a:ext cx="7680960" cy="914400"/>
-          </a:xfrm>
-          <a:prstGeom prst="rect">
-            <a:avLst/>
-          </a:prstGeom>
-          <a:noFill/>
-          <a:ln/>
-        </p:spPr>
-        <p:txBody>
-          <a:bodyPr wrap="square" rtlCol="0" anchor="ctr"/>
-          <a:lstStyle/>
-          <a:p>
-            <a:pPr indent="0" marL="0">
-              <a:lnSpc>
-                <a:spcPct val="120000"/>
-              </a:lnSpc>
-              <a:buNone/>
-            </a:pPr>
-            <a:r>
-              <a:rPr lang="en-US" sz="1000" dirty="0">
-                <a:solidFill>
-                  <a:srgbClr val="E2E8F0"/>
-                </a:solidFill>
-                <a:latin typeface="Calibri" pitchFamily="34" charset="0"/>
-                <a:ea typeface="Calibri" pitchFamily="34" charset="-122"/>
-                <a:cs typeface="Calibri" pitchFamily="34" charset="-120"/>
-              </a:rPr>
-              <a:t>Population: 75K+ | Growth: 52%</a:t>
-            </a:r>
-            <a:endParaRPr lang="en-US" sz="1000" dirty="0"/>
-          </a:p>
-          <a:p>
-            <a:pPr indent="0" marL="0">
-              <a:lnSpc>
-                <a:spcPct val="120000"/>
-              </a:lnSpc>
-              <a:buNone/>
-            </a:pPr>
-            <a:r>
-              <a:rPr lang="en-US" sz="1000" dirty="0">
-                <a:solidFill>
-                  <a:srgbClr val="E2E8F0"/>
-                </a:solidFill>
-                <a:latin typeface="Calibri" pitchFamily="34" charset="0"/>
-                <a:ea typeface="Calibri" pitchFamily="34" charset="-122"/>
-                <a:cs typeface="Calibri" pitchFamily="34" charset="-120"/>
-              </a:rPr>
-              <a:t>Digital Access Gap: Significant</a:t>
-            </a:r>
-            <a:endParaRPr lang="en-US" sz="1000" dirty="0"/>
-          </a:p>
-          <a:p>
-            <a:pPr indent="0" marL="0">
-              <a:lnSpc>
-                <a:spcPct val="120000"/>
-              </a:lnSpc>
-              <a:buNone/>
-            </a:pPr>
-            <a:r>
-              <a:rPr lang="en-US" sz="1000" dirty="0">
-                <a:solidFill>
-                  <a:srgbClr val="E2E8F0"/>
-                </a:solidFill>
-                <a:latin typeface="Calibri" pitchFamily="34" charset="0"/>
-                <a:ea typeface="Calibri" pitchFamily="34" charset="-122"/>
-                <a:cs typeface="Calibri" pitchFamily="34" charset="-120"/>
-              </a:rPr>
-              <a:t>Partners: PfISD, Pflugerville CDC</a:t>
-            </a:r>
-            <a:endParaRPr lang="en-US" sz="1000" dirty="0"/>
-          </a:p>
-          <a:p>
-            <a:pPr indent="0" marL="0">
-              <a:lnSpc>
-                <a:spcPct val="120000"/>
-              </a:lnSpc>
-              <a:buNone/>
-            </a:pPr>
-            <a:r>
-              <a:rPr lang="en-US" sz="1000" dirty="0">
-                <a:solidFill>
-                  <a:srgbClr val="E2E8F0"/>
-                </a:solidFill>
-                <a:latin typeface="Calibri" pitchFamily="34" charset="0"/>
-                <a:ea typeface="Calibri" pitchFamily="34" charset="-122"/>
-                <a:cs typeface="Calibri" pitchFamily="34" charset="-120"/>
-              </a:rPr>
-              <a:t>Platforms: ThriveUp, Perfectly Different</a:t>
-            </a:r>
-            <a:endParaRPr lang="en-US" sz="1000" dirty="0"/>
+              <a:t>Dr. Terry Flood, DHA  &amp;  Meredith Sisnett</a:t>
+            </a:r>
+            <a:endParaRPr lang="en-US" sz="1200" dirty="0"/>
+          </a:p>
+          <a:p>
+            <a:pPr indent="0" marL="0">
+              <a:lnSpc>
+                <a:spcPct val="140000"/>
+              </a:lnSpc>
+              <a:buNone/>
+            </a:pPr>
+            <a:r>
+              <a:rPr lang="en-US" sz="1200" dirty="0">
+                <a:solidFill>
+                  <a:srgbClr val="94A3B8"/>
+                </a:solidFill>
+                <a:latin typeface="Georgia" pitchFamily="34" charset="0"/>
+                <a:ea typeface="Georgia" pitchFamily="34" charset="-122"/>
+                <a:cs typeface="Georgia" pitchFamily="34" charset="-120"/>
+              </a:rPr>
+              <a:t>Co-Founders, The Collaborative Advocate</a:t>
+            </a:r>
+            <a:endParaRPr lang="en-US" sz="1200" dirty="0"/>
+          </a:p>
+          <a:p>
+            <a:pPr indent="0" marL="0">
+              <a:lnSpc>
+                <a:spcPct val="140000"/>
+              </a:lnSpc>
+              <a:buNone/>
+            </a:pPr>
+            <a:r>
+              <a:rPr lang="en-US" sz="1200" dirty="0">
+                <a:solidFill>
+                  <a:srgbClr val="94A3B8"/>
+                </a:solidFill>
+                <a:latin typeface="Georgia" pitchFamily="34" charset="0"/>
+                <a:ea typeface="Georgia" pitchFamily="34" charset="-122"/>
+                <a:cs typeface="Georgia" pitchFamily="34" charset="-120"/>
+              </a:rPr>
+              <a:t>mr.terryflood@gmail.com  |  sisnett.meredith@gmail.com</a:t>
+            </a:r>
+            <a:endParaRPr lang="en-US" sz="1200" dirty="0"/>
+          </a:p>
+          <a:p>
+            <a:pPr indent="0" marL="0">
+              <a:lnSpc>
+                <a:spcPct val="140000"/>
+              </a:lnSpc>
+              <a:buNone/>
+            </a:pPr>
+            <a:r>
+              <a:rPr lang="en-US" sz="1200" dirty="0">
+                <a:solidFill>
+                  <a:srgbClr val="94A3B8"/>
+                </a:solidFill>
+                <a:latin typeface="Georgia" pitchFamily="34" charset="0"/>
+                <a:ea typeface="Georgia" pitchFamily="34" charset="-122"/>
+                <a:cs typeface="Georgia" pitchFamily="34" charset="-120"/>
+              </a:rPr>
+              <a:t>Veteran-Owned Small Business (VOSB)  |  Austin, TX</a:t>
+            </a:r>
+            <a:endParaRPr lang="en-US" sz="1200" dirty="0"/>
           </a:p>
         </p:txBody>
       </p:sp>
@@ -5278,24 +4427,24 @@
         </p:nvSpPr>
         <p:spPr>
           <a:xfrm>
-            <a:off x="731520" y="1371600"/>
-            <a:ext cx="7680960" cy="548640"/>
-          </a:xfrm>
-          <a:prstGeom prst="rect">
-            <a:avLst/>
-          </a:prstGeom>
-          <a:noFill/>
-          <a:ln/>
-        </p:spPr>
-        <p:txBody>
-          <a:bodyPr wrap="square" rtlCol="0" anchor="ctr"/>
-          <a:lstStyle/>
-          <a:p>
-            <a:pPr indent="0" marL="0">
-              <a:buNone/>
-            </a:pPr>
-            <a:r>
-              <a:rPr lang="en-US" sz="2800" b="1" dirty="0">
+            <a:off x="731520" y="182880"/>
+            <a:ext cx="7680960" cy="365760"/>
+          </a:xfrm>
+          <a:prstGeom prst="rect">
+            <a:avLst/>
+          </a:prstGeom>
+          <a:noFill/>
+          <a:ln/>
+        </p:spPr>
+        <p:txBody>
+          <a:bodyPr wrap="square" rtlCol="0" anchor="ctr"/>
+          <a:lstStyle/>
+          <a:p>
+            <a:pPr indent="0" marL="0">
+              <a:buNone/>
+            </a:pPr>
+            <a:r>
+              <a:rPr lang="en-US" sz="2200" b="1" dirty="0">
                 <a:solidFill>
                   <a:srgbClr val="FFFFFF"/>
                 </a:solidFill>
@@ -5303,9 +4452,9 @@
                 <a:ea typeface="Georgia" pitchFamily="34" charset="-122"/>
                 <a:cs typeface="Georgia" pitchFamily="34" charset="-120"/>
               </a:rPr>
-              <a:t>Research to Implementation with Fidelity</a:t>
-            </a:r>
-            <a:endParaRPr lang="en-US" sz="2800" dirty="0"/>
+              <a:t>Appendix — Live Platform Links</a:t>
+            </a:r>
+            <a:endParaRPr lang="en-US" sz="2200" dirty="0"/>
           </a:p>
         </p:txBody>
       </p:sp>
@@ -5317,57 +4466,34 @@
         </p:nvSpPr>
         <p:spPr>
           <a:xfrm>
-            <a:off x="731520" y="2011680"/>
-            <a:ext cx="7680960" cy="548640"/>
-          </a:xfrm>
-          <a:prstGeom prst="rect">
-            <a:avLst/>
-          </a:prstGeom>
-          <a:noFill/>
-          <a:ln/>
-        </p:spPr>
-        <p:txBody>
-          <a:bodyPr wrap="square" rtlCol="0" anchor="ctr"/>
-          <a:lstStyle/>
-          <a:p>
-            <a:pPr indent="0" marL="0">
-              <a:lnSpc>
-                <a:spcPct val="130000"/>
-              </a:lnSpc>
-              <a:buNone/>
-            </a:pPr>
-            <a:r>
-              <a:rPr lang="en-US" sz="1400" dirty="0">
-                <a:solidFill>
-                  <a:srgbClr val="E2E8F0"/>
+            <a:off x="731520" y="548640"/>
+            <a:ext cx="7680960" cy="274320"/>
+          </a:xfrm>
+          <a:prstGeom prst="rect">
+            <a:avLst/>
+          </a:prstGeom>
+          <a:noFill/>
+          <a:ln/>
+        </p:spPr>
+        <p:txBody>
+          <a:bodyPr wrap="square" rtlCol="0" anchor="ctr"/>
+          <a:lstStyle/>
+          <a:p>
+            <a:pPr indent="0" marL="0">
+              <a:buNone/>
+            </a:pPr>
+            <a:r>
+              <a:rPr lang="en-US" sz="1100" dirty="0">
+                <a:solidFill>
+                  <a:srgbClr val="94A3B8"/>
                 </a:solidFill>
                 <a:latin typeface="Georgia" pitchFamily="34" charset="0"/>
                 <a:ea typeface="Georgia" pitchFamily="34" charset="-122"/>
                 <a:cs typeface="Georgia" pitchFamily="34" charset="-120"/>
               </a:rPr>
-              <a:t>For all stakeholders and perspectives — everywhere —</a:t>
-            </a:r>
-            <a:endParaRPr lang="en-US" sz="1400" dirty="0"/>
-          </a:p>
-          <a:p>
-            <a:pPr indent="0" marL="0">
-              <a:lnSpc>
-                <a:spcPct val="130000"/>
-              </a:lnSpc>
-              <a:buNone/>
-            </a:pPr>
-            <a:r>
-              <a:rPr lang="en-US" sz="1400" dirty="0">
-                <a:solidFill>
-                  <a:srgbClr val="E2E8F0"/>
-                </a:solidFill>
-                <a:latin typeface="Georgia" pitchFamily="34" charset="0"/>
-                <a:ea typeface="Georgia" pitchFamily="34" charset="-122"/>
-                <a:cs typeface="Georgia" pitchFamily="34" charset="-120"/>
-              </a:rPr>
-              <a:t>tied to measurable outcomes.</a:t>
-            </a:r>
-            <a:endParaRPr lang="en-US" sz="1400" dirty="0"/>
+              <a:t>Every platform below is live. Click any link to see what we've built.</a:t>
+            </a:r>
+            <a:endParaRPr lang="en-US" sz="1100" dirty="0"/>
           </a:p>
         </p:txBody>
       </p:sp>
@@ -5379,56 +4505,84 @@
         </p:nvSpPr>
         <p:spPr>
           <a:xfrm>
-            <a:off x="731520" y="2651760"/>
-            <a:ext cx="7680960" cy="365760"/>
-          </a:xfrm>
-          <a:prstGeom prst="rect">
-            <a:avLst/>
-          </a:prstGeom>
-          <a:noFill/>
-          <a:ln/>
-        </p:spPr>
-        <p:txBody>
-          <a:bodyPr wrap="square" rtlCol="0" anchor="ctr"/>
-          <a:lstStyle/>
-          <a:p>
-            <a:pPr indent="0" marL="0">
-              <a:buNone/>
-            </a:pPr>
-            <a:r>
-              <a:rPr lang="en-US" sz="1400" b="1" dirty="0">
-                <a:solidFill>
-                  <a:srgbClr val="6366F1"/>
-                </a:solidFill>
-                <a:latin typeface="Georgia" pitchFamily="34" charset="0"/>
-                <a:ea typeface="Georgia" pitchFamily="34" charset="-122"/>
-                <a:cs typeface="Georgia" pitchFamily="34" charset="-120"/>
-              </a:rPr>
-              <a:t>AI-Powered. Ethical. Evidence-Grounded. Community-Serving.</a:t>
-            </a:r>
-            <a:endParaRPr lang="en-US" sz="1400" dirty="0"/>
-          </a:p>
-        </p:txBody>
-      </p:sp>
-      <p:sp>
-        <p:nvSpPr>
-          <p:cNvPr id="6" name="Shape 3"/>
-          <p:cNvSpPr/>
-          <p:nvPr/>
-        </p:nvSpPr>
-        <p:spPr>
-          <a:xfrm>
-            <a:off x="731520" y="3200400"/>
-            <a:ext cx="2743200" cy="36576"/>
-          </a:xfrm>
-          <a:prstGeom prst="rect">
-            <a:avLst/>
-          </a:prstGeom>
-          <a:solidFill>
-            <a:srgbClr val="6366F1"/>
-          </a:solidFill>
-          <a:ln/>
-        </p:spPr>
+            <a:off x="731520" y="914400"/>
+            <a:ext cx="2286000" cy="320040"/>
+          </a:xfrm>
+          <a:prstGeom prst="rect">
+            <a:avLst/>
+          </a:prstGeom>
+          <a:noFill/>
+          <a:ln/>
+        </p:spPr>
+        <p:txBody>
+          <a:bodyPr wrap="square" rtlCol="0" anchor="ctr"/>
+          <a:lstStyle/>
+          <a:p>
+            <a:pPr indent="0" marL="0">
+              <a:buNone/>
+            </a:pPr>
+            <a:r>
+              <a:rPr lang="en-US" sz="850" dirty="0">
+                <a:solidFill>
+                  <a:srgbClr val="E2E8F0"/>
+                </a:solidFill>
+                <a:latin typeface="Calibri" pitchFamily="34" charset="0"/>
+                <a:ea typeface="Calibri" pitchFamily="34" charset="-122"/>
+                <a:cs typeface="Calibri" pitchFamily="34" charset="-120"/>
+              </a:rPr>
+              <a:t>ThriveUp Academy (Main Hub)</a:t>
+            </a:r>
+            <a:endParaRPr lang="en-US" sz="850" dirty="0"/>
+          </a:p>
+        </p:txBody>
+      </p:sp>
+      <p:sp>
+        <p:nvSpPr>
+          <p:cNvPr id="6" name="Text 3">
+            <a:hlinkClick r:id="rId1" tooltip=""/>
+          </p:cNvPr>
+          <p:cNvSpPr/>
+          <p:nvPr/>
+        </p:nvSpPr>
+        <p:spPr>
+          <a:xfrm>
+            <a:off x="3017520" y="914400"/>
+            <a:ext cx="1737360" cy="320040"/>
+          </a:xfrm>
+          <a:prstGeom prst="rect">
+            <a:avLst/>
+          </a:prstGeom>
+          <a:noFill/>
+          <a:ln/>
+        </p:spPr>
+        <p:txBody>
+          <a:bodyPr wrap="square" rtlCol="0" anchor="ctr"/>
+          <a:lstStyle/>
+          <a:p>
+            <a:pPr indent="0" marL="0">
+              <a:buNone/>
+            </a:pPr>
+            <a:r>
+              <a:rPr lang="en-US" sz="700" u="sng" dirty="0">
+                <a:solidFill>
+                  <a:srgbClr val="14B8A6"/>
+                </a:solidFill>
+                <a:latin typeface="Calibri" pitchFamily="34" charset="0"/>
+                <a:ea typeface="Calibri" pitchFamily="34" charset="-122"/>
+                <a:cs typeface="Calibri" pitchFamily="34" charset="-120"/>
+                <a:hlinkClick r:id="rId1" invalidUrl="" action="" tgtFrame="" tooltip="" history="1" highlightClick="0" endSnd="0">
+                  <a:extLst>
+                    <a:ext uri="{A12FA001-AC4F-418D-AE19-62706E023703}">
+                      <ahyp:hlinkClr xmlns:ahyp="http://schemas.microsoft.com/office/drawing/2018/hyperlinkcolor" val="tx"/>
+                    </a:ext>
+                  </a:extLst>
+                </a:hlinkClick>
+              </a:rPr>
+              <a:t>https://thrivingcommunitiesforall.com</a:t>
+            </a:r>
+            <a:endParaRPr lang="en-US" sz="700" dirty="0"/>
+          </a:p>
+        </p:txBody>
       </p:sp>
       <p:sp>
         <p:nvSpPr>
@@ -5438,97 +4592,1996 @@
         </p:nvSpPr>
         <p:spPr>
           <a:xfrm>
-            <a:off x="731520" y="3474720"/>
-            <a:ext cx="7680960" cy="1097280"/>
-          </a:xfrm>
-          <a:prstGeom prst="rect">
-            <a:avLst/>
-          </a:prstGeom>
-          <a:noFill/>
-          <a:ln/>
-        </p:spPr>
-        <p:txBody>
-          <a:bodyPr wrap="square" rtlCol="0" anchor="ctr"/>
-          <a:lstStyle/>
-          <a:p>
-            <a:pPr indent="0" marL="0">
-              <a:lnSpc>
-                <a:spcPct val="140000"/>
-              </a:lnSpc>
-              <a:buNone/>
-            </a:pPr>
-            <a:r>
-              <a:rPr lang="en-US" sz="1200" dirty="0">
-                <a:solidFill>
-                  <a:srgbClr val="94A3B8"/>
-                </a:solidFill>
-                <a:latin typeface="Georgia" pitchFamily="34" charset="0"/>
-                <a:ea typeface="Georgia" pitchFamily="34" charset="-122"/>
-                <a:cs typeface="Georgia" pitchFamily="34" charset="-120"/>
-              </a:rPr>
-              <a:t>Dr. Terry Flood, DHA  &amp;  Meredith Sisnett</a:t>
-            </a:r>
-            <a:endParaRPr lang="en-US" sz="1200" dirty="0"/>
-          </a:p>
-          <a:p>
-            <a:pPr indent="0" marL="0">
-              <a:lnSpc>
-                <a:spcPct val="140000"/>
-              </a:lnSpc>
-              <a:buNone/>
-            </a:pPr>
-            <a:r>
-              <a:rPr lang="en-US" sz="1200" dirty="0">
-                <a:solidFill>
-                  <a:srgbClr val="94A3B8"/>
-                </a:solidFill>
-                <a:latin typeface="Georgia" pitchFamily="34" charset="0"/>
-                <a:ea typeface="Georgia" pitchFamily="34" charset="-122"/>
-                <a:cs typeface="Georgia" pitchFamily="34" charset="-120"/>
-              </a:rPr>
-              <a:t>Co-Founders, The Collaborative Advocate</a:t>
-            </a:r>
-            <a:endParaRPr lang="en-US" sz="1200" dirty="0"/>
-          </a:p>
-          <a:p>
-            <a:pPr indent="0" marL="0">
-              <a:lnSpc>
-                <a:spcPct val="140000"/>
-              </a:lnSpc>
-              <a:buNone/>
-            </a:pPr>
-            <a:r>
-              <a:rPr lang="en-US" sz="1200" dirty="0">
-                <a:solidFill>
-                  <a:srgbClr val="94A3B8"/>
-                </a:solidFill>
-                <a:latin typeface="Georgia" pitchFamily="34" charset="0"/>
-                <a:ea typeface="Georgia" pitchFamily="34" charset="-122"/>
-                <a:cs typeface="Georgia" pitchFamily="34" charset="-120"/>
-              </a:rPr>
-              <a:t>mr.terryflood@gmail.com  |  sisnett.meredith@gmail.com</a:t>
-            </a:r>
-            <a:endParaRPr lang="en-US" sz="1200" dirty="0"/>
-          </a:p>
-          <a:p>
-            <a:pPr indent="0" marL="0">
-              <a:lnSpc>
-                <a:spcPct val="140000"/>
-              </a:lnSpc>
-              <a:buNone/>
-            </a:pPr>
-            <a:r>
-              <a:rPr lang="en-US" sz="1200" dirty="0">
-                <a:solidFill>
-                  <a:srgbClr val="94A3B8"/>
-                </a:solidFill>
-                <a:latin typeface="Georgia" pitchFamily="34" charset="0"/>
-                <a:ea typeface="Georgia" pitchFamily="34" charset="-122"/>
-                <a:cs typeface="Georgia" pitchFamily="34" charset="-120"/>
-              </a:rPr>
-              <a:t>Veteran-Owned Small Business (VOSB)  |  Austin, TX</a:t>
-            </a:r>
-            <a:endParaRPr lang="en-US" sz="1200" dirty="0"/>
+            <a:off x="731520" y="1252728"/>
+            <a:ext cx="2286000" cy="320040"/>
+          </a:xfrm>
+          <a:prstGeom prst="rect">
+            <a:avLst/>
+          </a:prstGeom>
+          <a:noFill/>
+          <a:ln/>
+        </p:spPr>
+        <p:txBody>
+          <a:bodyPr wrap="square" rtlCol="0" anchor="ctr"/>
+          <a:lstStyle/>
+          <a:p>
+            <a:pPr indent="0" marL="0">
+              <a:buNone/>
+            </a:pPr>
+            <a:r>
+              <a:rPr lang="en-US" sz="850" dirty="0">
+                <a:solidFill>
+                  <a:srgbClr val="E2E8F0"/>
+                </a:solidFill>
+                <a:latin typeface="Calibri" pitchFamily="34" charset="0"/>
+                <a:ea typeface="Calibri" pitchFamily="34" charset="-122"/>
+                <a:cs typeface="Calibri" pitchFamily="34" charset="-120"/>
+              </a:rPr>
+              <a:t>Better Science Lab / RPLICE</a:t>
+            </a:r>
+            <a:endParaRPr lang="en-US" sz="850" dirty="0"/>
+          </a:p>
+        </p:txBody>
+      </p:sp>
+      <p:sp>
+        <p:nvSpPr>
+          <p:cNvPr id="8" name="Text 5">
+            <a:hlinkClick r:id="rId2" tooltip=""/>
+          </p:cNvPr>
+          <p:cNvSpPr/>
+          <p:nvPr/>
+        </p:nvSpPr>
+        <p:spPr>
+          <a:xfrm>
+            <a:off x="3017520" y="1252728"/>
+            <a:ext cx="1737360" cy="320040"/>
+          </a:xfrm>
+          <a:prstGeom prst="rect">
+            <a:avLst/>
+          </a:prstGeom>
+          <a:noFill/>
+          <a:ln/>
+        </p:spPr>
+        <p:txBody>
+          <a:bodyPr wrap="square" rtlCol="0" anchor="ctr"/>
+          <a:lstStyle/>
+          <a:p>
+            <a:pPr indent="0" marL="0">
+              <a:buNone/>
+            </a:pPr>
+            <a:r>
+              <a:rPr lang="en-US" sz="700" u="sng" dirty="0">
+                <a:solidFill>
+                  <a:srgbClr val="14B8A6"/>
+                </a:solidFill>
+                <a:latin typeface="Calibri" pitchFamily="34" charset="0"/>
+                <a:ea typeface="Calibri" pitchFamily="34" charset="-122"/>
+                <a:cs typeface="Calibri" pitchFamily="34" charset="-120"/>
+                <a:hlinkClick r:id="rId2" invalidUrl="" action="" tgtFrame="" tooltip="" history="1" highlightClick="0" endSnd="0">
+                  <a:extLst>
+                    <a:ext uri="{A12FA001-AC4F-418D-AE19-62706E023703}">
+                      <ahyp:hlinkClr xmlns:ahyp="http://schemas.microsoft.com/office/drawing/2018/hyperlinkcolor" val="tx"/>
+                    </a:ext>
+                  </a:extLst>
+                </a:hlinkClick>
+              </a:rPr>
+              <a:t>https://bettersciencelab.com</a:t>
+            </a:r>
+            <a:endParaRPr lang="en-US" sz="700" dirty="0"/>
+          </a:p>
+        </p:txBody>
+      </p:sp>
+      <p:sp>
+        <p:nvSpPr>
+          <p:cNvPr id="9" name="Text 6"/>
+          <p:cNvSpPr/>
+          <p:nvPr/>
+        </p:nvSpPr>
+        <p:spPr>
+          <a:xfrm>
+            <a:off x="731520" y="1591056"/>
+            <a:ext cx="2286000" cy="320040"/>
+          </a:xfrm>
+          <a:prstGeom prst="rect">
+            <a:avLst/>
+          </a:prstGeom>
+          <a:noFill/>
+          <a:ln/>
+        </p:spPr>
+        <p:txBody>
+          <a:bodyPr wrap="square" rtlCol="0" anchor="ctr"/>
+          <a:lstStyle/>
+          <a:p>
+            <a:pPr indent="0" marL="0">
+              <a:buNone/>
+            </a:pPr>
+            <a:r>
+              <a:rPr lang="en-US" sz="850" dirty="0">
+                <a:solidFill>
+                  <a:srgbClr val="E2E8F0"/>
+                </a:solidFill>
+                <a:latin typeface="Calibri" pitchFamily="34" charset="0"/>
+                <a:ea typeface="Calibri" pitchFamily="34" charset="-122"/>
+                <a:cs typeface="Calibri" pitchFamily="34" charset="-120"/>
+              </a:rPr>
+              <a:t>LifeBridge (Housing/Benefits)</a:t>
+            </a:r>
+            <a:endParaRPr lang="en-US" sz="850" dirty="0"/>
+          </a:p>
+        </p:txBody>
+      </p:sp>
+      <p:sp>
+        <p:nvSpPr>
+          <p:cNvPr id="10" name="Text 7">
+            <a:hlinkClick r:id="rId3" tooltip=""/>
+          </p:cNvPr>
+          <p:cNvSpPr/>
+          <p:nvPr/>
+        </p:nvSpPr>
+        <p:spPr>
+          <a:xfrm>
+            <a:off x="3017520" y="1591056"/>
+            <a:ext cx="1737360" cy="320040"/>
+          </a:xfrm>
+          <a:prstGeom prst="rect">
+            <a:avLst/>
+          </a:prstGeom>
+          <a:noFill/>
+          <a:ln/>
+        </p:spPr>
+        <p:txBody>
+          <a:bodyPr wrap="square" rtlCol="0" anchor="ctr"/>
+          <a:lstStyle/>
+          <a:p>
+            <a:pPr indent="0" marL="0">
+              <a:buNone/>
+            </a:pPr>
+            <a:r>
+              <a:rPr lang="en-US" sz="700" u="sng" dirty="0">
+                <a:solidFill>
+                  <a:srgbClr val="14B8A6"/>
+                </a:solidFill>
+                <a:latin typeface="Calibri" pitchFamily="34" charset="0"/>
+                <a:ea typeface="Calibri" pitchFamily="34" charset="-122"/>
+                <a:cs typeface="Calibri" pitchFamily="34" charset="-120"/>
+                <a:hlinkClick r:id="rId3" invalidUrl="" action="" tgtFrame="" tooltip="" history="1" highlightClick="0" endSnd="0">
+                  <a:extLst>
+                    <a:ext uri="{A12FA001-AC4F-418D-AE19-62706E023703}">
+                      <ahyp:hlinkClr xmlns:ahyp="http://schemas.microsoft.com/office/drawing/2018/hyperlinkcolor" val="tx"/>
+                    </a:ext>
+                  </a:extLst>
+                </a:hlinkClick>
+              </a:rPr>
+              <a:t>https://lifetransitionsaid.org</a:t>
+            </a:r>
+            <a:endParaRPr lang="en-US" sz="700" dirty="0"/>
+          </a:p>
+        </p:txBody>
+      </p:sp>
+      <p:sp>
+        <p:nvSpPr>
+          <p:cNvPr id="11" name="Text 8"/>
+          <p:cNvSpPr/>
+          <p:nvPr/>
+        </p:nvSpPr>
+        <p:spPr>
+          <a:xfrm>
+            <a:off x="731520" y="1929384"/>
+            <a:ext cx="2286000" cy="320040"/>
+          </a:xfrm>
+          <a:prstGeom prst="rect">
+            <a:avLst/>
+          </a:prstGeom>
+          <a:noFill/>
+          <a:ln/>
+        </p:spPr>
+        <p:txBody>
+          <a:bodyPr wrap="square" rtlCol="0" anchor="ctr"/>
+          <a:lstStyle/>
+          <a:p>
+            <a:pPr indent="0" marL="0">
+              <a:buNone/>
+            </a:pPr>
+            <a:r>
+              <a:rPr lang="en-US" sz="850" dirty="0">
+                <a:solidFill>
+                  <a:srgbClr val="E2E8F0"/>
+                </a:solidFill>
+                <a:latin typeface="Calibri" pitchFamily="34" charset="0"/>
+                <a:ea typeface="Calibri" pitchFamily="34" charset="-122"/>
+                <a:cs typeface="Calibri" pitchFamily="34" charset="-120"/>
+              </a:rPr>
+              <a:t>Mission Transition (Veterans)</a:t>
+            </a:r>
+            <a:endParaRPr lang="en-US" sz="850" dirty="0"/>
+          </a:p>
+        </p:txBody>
+      </p:sp>
+      <p:sp>
+        <p:nvSpPr>
+          <p:cNvPr id="12" name="Text 9">
+            <a:hlinkClick r:id="rId4" tooltip=""/>
+          </p:cNvPr>
+          <p:cNvSpPr/>
+          <p:nvPr/>
+        </p:nvSpPr>
+        <p:spPr>
+          <a:xfrm>
+            <a:off x="3017520" y="1929384"/>
+            <a:ext cx="1737360" cy="320040"/>
+          </a:xfrm>
+          <a:prstGeom prst="rect">
+            <a:avLst/>
+          </a:prstGeom>
+          <a:noFill/>
+          <a:ln/>
+        </p:spPr>
+        <p:txBody>
+          <a:bodyPr wrap="square" rtlCol="0" anchor="ctr"/>
+          <a:lstStyle/>
+          <a:p>
+            <a:pPr indent="0" marL="0">
+              <a:buNone/>
+            </a:pPr>
+            <a:r>
+              <a:rPr lang="en-US" sz="700" u="sng" dirty="0">
+                <a:solidFill>
+                  <a:srgbClr val="14B8A6"/>
+                </a:solidFill>
+                <a:latin typeface="Calibri" pitchFamily="34" charset="0"/>
+                <a:ea typeface="Calibri" pitchFamily="34" charset="-122"/>
+                <a:cs typeface="Calibri" pitchFamily="34" charset="-120"/>
+                <a:hlinkClick r:id="rId4" invalidUrl="" action="" tgtFrame="" tooltip="" history="1" highlightClick="0" endSnd="0">
+                  <a:extLst>
+                    <a:ext uri="{A12FA001-AC4F-418D-AE19-62706E023703}">
+                      <ahyp:hlinkClr xmlns:ahyp="http://schemas.microsoft.com/office/drawing/2018/hyperlinkcolor" val="tx"/>
+                    </a:ext>
+                  </a:extLst>
+                </a:hlinkClick>
+              </a:rPr>
+              <a:t>https://vetmissiontransition.com</a:t>
+            </a:r>
+            <a:endParaRPr lang="en-US" sz="700" dirty="0"/>
+          </a:p>
+        </p:txBody>
+      </p:sp>
+      <p:sp>
+        <p:nvSpPr>
+          <p:cNvPr id="13" name="Text 10"/>
+          <p:cNvSpPr/>
+          <p:nvPr/>
+        </p:nvSpPr>
+        <p:spPr>
+          <a:xfrm>
+            <a:off x="731520" y="2267712"/>
+            <a:ext cx="2286000" cy="320040"/>
+          </a:xfrm>
+          <a:prstGeom prst="rect">
+            <a:avLst/>
+          </a:prstGeom>
+          <a:noFill/>
+          <a:ln/>
+        </p:spPr>
+        <p:txBody>
+          <a:bodyPr wrap="square" rtlCol="0" anchor="ctr"/>
+          <a:lstStyle/>
+          <a:p>
+            <a:pPr indent="0" marL="0">
+              <a:buNone/>
+            </a:pPr>
+            <a:r>
+              <a:rPr lang="en-US" sz="850" dirty="0">
+                <a:solidFill>
+                  <a:srgbClr val="E2E8F0"/>
+                </a:solidFill>
+                <a:latin typeface="Calibri" pitchFamily="34" charset="0"/>
+                <a:ea typeface="Calibri" pitchFamily="34" charset="-122"/>
+                <a:cs typeface="Calibri" pitchFamily="34" charset="-120"/>
+              </a:rPr>
+              <a:t>Whole-Person Health</a:t>
+            </a:r>
+            <a:endParaRPr lang="en-US" sz="850" dirty="0"/>
+          </a:p>
+        </p:txBody>
+      </p:sp>
+      <p:sp>
+        <p:nvSpPr>
+          <p:cNvPr id="14" name="Text 11">
+            <a:hlinkClick r:id="rId5" tooltip=""/>
+          </p:cNvPr>
+          <p:cNvSpPr/>
+          <p:nvPr/>
+        </p:nvSpPr>
+        <p:spPr>
+          <a:xfrm>
+            <a:off x="3017520" y="2267712"/>
+            <a:ext cx="1737360" cy="320040"/>
+          </a:xfrm>
+          <a:prstGeom prst="rect">
+            <a:avLst/>
+          </a:prstGeom>
+          <a:noFill/>
+          <a:ln/>
+        </p:spPr>
+        <p:txBody>
+          <a:bodyPr wrap="square" rtlCol="0" anchor="ctr"/>
+          <a:lstStyle/>
+          <a:p>
+            <a:pPr indent="0" marL="0">
+              <a:buNone/>
+            </a:pPr>
+            <a:r>
+              <a:rPr lang="en-US" sz="700" u="sng" dirty="0">
+                <a:solidFill>
+                  <a:srgbClr val="14B8A6"/>
+                </a:solidFill>
+                <a:latin typeface="Calibri" pitchFamily="34" charset="0"/>
+                <a:ea typeface="Calibri" pitchFamily="34" charset="-122"/>
+                <a:cs typeface="Calibri" pitchFamily="34" charset="-120"/>
+                <a:hlinkClick r:id="rId5" invalidUrl="" action="" tgtFrame="" tooltip="" history="1" highlightClick="0" endSnd="0">
+                  <a:extLst>
+                    <a:ext uri="{A12FA001-AC4F-418D-AE19-62706E023703}">
+                      <ahyp:hlinkClr xmlns:ahyp="http://schemas.microsoft.com/office/drawing/2018/hyperlinkcolor" val="tx"/>
+                    </a:ext>
+                  </a:extLst>
+                </a:hlinkClick>
+              </a:rPr>
+              <a:t>https://mentalwellnesssupport.net</a:t>
+            </a:r>
+            <a:endParaRPr lang="en-US" sz="700" dirty="0"/>
+          </a:p>
+        </p:txBody>
+      </p:sp>
+      <p:sp>
+        <p:nvSpPr>
+          <p:cNvPr id="15" name="Text 12"/>
+          <p:cNvSpPr/>
+          <p:nvPr/>
+        </p:nvSpPr>
+        <p:spPr>
+          <a:xfrm>
+            <a:off x="731520" y="2606040"/>
+            <a:ext cx="2286000" cy="320040"/>
+          </a:xfrm>
+          <a:prstGeom prst="rect">
+            <a:avLst/>
+          </a:prstGeom>
+          <a:noFill/>
+          <a:ln/>
+        </p:spPr>
+        <p:txBody>
+          <a:bodyPr wrap="square" rtlCol="0" anchor="ctr"/>
+          <a:lstStyle/>
+          <a:p>
+            <a:pPr indent="0" marL="0">
+              <a:buNone/>
+            </a:pPr>
+            <a:r>
+              <a:rPr lang="en-US" sz="850" dirty="0">
+                <a:solidFill>
+                  <a:srgbClr val="E2E8F0"/>
+                </a:solidFill>
+                <a:latin typeface="Calibri" pitchFamily="34" charset="0"/>
+                <a:ea typeface="Calibri" pitchFamily="34" charset="-122"/>
+                <a:cs typeface="Calibri" pitchFamily="34" charset="-120"/>
+              </a:rPr>
+              <a:t>Sankofa Health</a:t>
+            </a:r>
+            <a:endParaRPr lang="en-US" sz="850" dirty="0"/>
+          </a:p>
+        </p:txBody>
+      </p:sp>
+      <p:sp>
+        <p:nvSpPr>
+          <p:cNvPr id="16" name="Text 13">
+            <a:hlinkClick r:id="rId6" tooltip=""/>
+          </p:cNvPr>
+          <p:cNvSpPr/>
+          <p:nvPr/>
+        </p:nvSpPr>
+        <p:spPr>
+          <a:xfrm>
+            <a:off x="3017520" y="2606040"/>
+            <a:ext cx="1737360" cy="320040"/>
+          </a:xfrm>
+          <a:prstGeom prst="rect">
+            <a:avLst/>
+          </a:prstGeom>
+          <a:noFill/>
+          <a:ln/>
+        </p:spPr>
+        <p:txBody>
+          <a:bodyPr wrap="square" rtlCol="0" anchor="ctr"/>
+          <a:lstStyle/>
+          <a:p>
+            <a:pPr indent="0" marL="0">
+              <a:buNone/>
+            </a:pPr>
+            <a:r>
+              <a:rPr lang="en-US" sz="700" u="sng" dirty="0">
+                <a:solidFill>
+                  <a:srgbClr val="14B8A6"/>
+                </a:solidFill>
+                <a:latin typeface="Calibri" pitchFamily="34" charset="0"/>
+                <a:ea typeface="Calibri" pitchFamily="34" charset="-122"/>
+                <a:cs typeface="Calibri" pitchFamily="34" charset="-120"/>
+                <a:hlinkClick r:id="rId6" invalidUrl="" action="" tgtFrame="" tooltip="" history="1" highlightClick="0" endSnd="0">
+                  <a:extLst>
+                    <a:ext uri="{A12FA001-AC4F-418D-AE19-62706E023703}">
+                      <ahyp:hlinkClr xmlns:ahyp="http://schemas.microsoft.com/office/drawing/2018/hyperlinkcolor" val="tx"/>
+                    </a:ext>
+                  </a:extLst>
+                </a:hlinkClick>
+              </a:rPr>
+              <a:t>https://yourhealthbirthright.net</a:t>
+            </a:r>
+            <a:endParaRPr lang="en-US" sz="700" dirty="0"/>
+          </a:p>
+        </p:txBody>
+      </p:sp>
+      <p:sp>
+        <p:nvSpPr>
+          <p:cNvPr id="17" name="Text 14"/>
+          <p:cNvSpPr/>
+          <p:nvPr/>
+        </p:nvSpPr>
+        <p:spPr>
+          <a:xfrm>
+            <a:off x="731520" y="2944368"/>
+            <a:ext cx="2286000" cy="320040"/>
+          </a:xfrm>
+          <a:prstGeom prst="rect">
+            <a:avLst/>
+          </a:prstGeom>
+          <a:noFill/>
+          <a:ln/>
+        </p:spPr>
+        <p:txBody>
+          <a:bodyPr wrap="square" rtlCol="0" anchor="ctr"/>
+          <a:lstStyle/>
+          <a:p>
+            <a:pPr indent="0" marL="0">
+              <a:buNone/>
+            </a:pPr>
+            <a:r>
+              <a:rPr lang="en-US" sz="850" dirty="0">
+                <a:solidFill>
+                  <a:srgbClr val="E2E8F0"/>
+                </a:solidFill>
+                <a:latin typeface="Calibri" pitchFamily="34" charset="0"/>
+                <a:ea typeface="Calibri" pitchFamily="34" charset="-122"/>
+                <a:cs typeface="Calibri" pitchFamily="34" charset="-120"/>
+              </a:rPr>
+              <a:t>Black Maternal Health</a:t>
+            </a:r>
+            <a:endParaRPr lang="en-US" sz="850" dirty="0"/>
+          </a:p>
+        </p:txBody>
+      </p:sp>
+      <p:sp>
+        <p:nvSpPr>
+          <p:cNvPr id="18" name="Text 15">
+            <a:hlinkClick r:id="rId7" tooltip=""/>
+          </p:cNvPr>
+          <p:cNvSpPr/>
+          <p:nvPr/>
+        </p:nvSpPr>
+        <p:spPr>
+          <a:xfrm>
+            <a:off x="3017520" y="2944368"/>
+            <a:ext cx="1737360" cy="320040"/>
+          </a:xfrm>
+          <a:prstGeom prst="rect">
+            <a:avLst/>
+          </a:prstGeom>
+          <a:noFill/>
+          <a:ln/>
+        </p:spPr>
+        <p:txBody>
+          <a:bodyPr wrap="square" rtlCol="0" anchor="ctr"/>
+          <a:lstStyle/>
+          <a:p>
+            <a:pPr indent="0" marL="0">
+              <a:buNone/>
+            </a:pPr>
+            <a:r>
+              <a:rPr lang="en-US" sz="700" u="sng" dirty="0">
+                <a:solidFill>
+                  <a:srgbClr val="14B8A6"/>
+                </a:solidFill>
+                <a:latin typeface="Calibri" pitchFamily="34" charset="0"/>
+                <a:ea typeface="Calibri" pitchFamily="34" charset="-122"/>
+                <a:cs typeface="Calibri" pitchFamily="34" charset="-120"/>
+                <a:hlinkClick r:id="rId7" invalidUrl="" action="" tgtFrame="" tooltip="" history="1" highlightClick="0" endSnd="0">
+                  <a:extLst>
+                    <a:ext uri="{A12FA001-AC4F-418D-AE19-62706E023703}">
+                      <ahyp:hlinkClr xmlns:ahyp="http://schemas.microsoft.com/office/drawing/2018/hyperlinkcolor" val="tx"/>
+                    </a:ext>
+                  </a:extLst>
+                </a:hlinkClick>
+              </a:rPr>
+              <a:t>https://black-maternal-health-network.replit.app</a:t>
+            </a:r>
+            <a:endParaRPr lang="en-US" sz="700" dirty="0"/>
+          </a:p>
+        </p:txBody>
+      </p:sp>
+      <p:sp>
+        <p:nvSpPr>
+          <p:cNvPr id="19" name="Text 16"/>
+          <p:cNvSpPr/>
+          <p:nvPr/>
+        </p:nvSpPr>
+        <p:spPr>
+          <a:xfrm>
+            <a:off x="731520" y="3282696"/>
+            <a:ext cx="2286000" cy="320040"/>
+          </a:xfrm>
+          <a:prstGeom prst="rect">
+            <a:avLst/>
+          </a:prstGeom>
+          <a:noFill/>
+          <a:ln/>
+        </p:spPr>
+        <p:txBody>
+          <a:bodyPr wrap="square" rtlCol="0" anchor="ctr"/>
+          <a:lstStyle/>
+          <a:p>
+            <a:pPr indent="0" marL="0">
+              <a:buNone/>
+            </a:pPr>
+            <a:r>
+              <a:rPr lang="en-US" sz="850" dirty="0">
+                <a:solidFill>
+                  <a:srgbClr val="E2E8F0"/>
+                </a:solidFill>
+                <a:latin typeface="Calibri" pitchFamily="34" charset="0"/>
+                <a:ea typeface="Calibri" pitchFamily="34" charset="-122"/>
+                <a:cs typeface="Calibri" pitchFamily="34" charset="-120"/>
+              </a:rPr>
+              <a:t>Sankofa Feminine Health</a:t>
+            </a:r>
+            <a:endParaRPr lang="en-US" sz="850" dirty="0"/>
+          </a:p>
+        </p:txBody>
+      </p:sp>
+      <p:sp>
+        <p:nvSpPr>
+          <p:cNvPr id="20" name="Text 17">
+            <a:hlinkClick r:id="rId8" tooltip=""/>
+          </p:cNvPr>
+          <p:cNvSpPr/>
+          <p:nvPr/>
+        </p:nvSpPr>
+        <p:spPr>
+          <a:xfrm>
+            <a:off x="3017520" y="3282696"/>
+            <a:ext cx="1737360" cy="320040"/>
+          </a:xfrm>
+          <a:prstGeom prst="rect">
+            <a:avLst/>
+          </a:prstGeom>
+          <a:noFill/>
+          <a:ln/>
+        </p:spPr>
+        <p:txBody>
+          <a:bodyPr wrap="square" rtlCol="0" anchor="ctr"/>
+          <a:lstStyle/>
+          <a:p>
+            <a:pPr indent="0" marL="0">
+              <a:buNone/>
+            </a:pPr>
+            <a:r>
+              <a:rPr lang="en-US" sz="700" u="sng" dirty="0">
+                <a:solidFill>
+                  <a:srgbClr val="14B8A6"/>
+                </a:solidFill>
+                <a:latin typeface="Calibri" pitchFamily="34" charset="0"/>
+                <a:ea typeface="Calibri" pitchFamily="34" charset="-122"/>
+                <a:cs typeface="Calibri" pitchFamily="34" charset="-120"/>
+                <a:hlinkClick r:id="rId8" invalidUrl="" action="" tgtFrame="" tooltip="" history="1" highlightClick="0" endSnd="0">
+                  <a:extLst>
+                    <a:ext uri="{A12FA001-AC4F-418D-AE19-62706E023703}">
+                      <ahyp:hlinkClr xmlns:ahyp="http://schemas.microsoft.com/office/drawing/2018/hyperlinkcolor" val="tx"/>
+                    </a:ext>
+                  </a:extLst>
+                </a:hlinkClick>
+              </a:rPr>
+              <a:t>https://holistic-black-feminine-health-hub.replit.app</a:t>
+            </a:r>
+            <a:endParaRPr lang="en-US" sz="700" dirty="0"/>
+          </a:p>
+        </p:txBody>
+      </p:sp>
+      <p:sp>
+        <p:nvSpPr>
+          <p:cNvPr id="21" name="Text 18"/>
+          <p:cNvSpPr/>
+          <p:nvPr/>
+        </p:nvSpPr>
+        <p:spPr>
+          <a:xfrm>
+            <a:off x="731520" y="3621024"/>
+            <a:ext cx="2286000" cy="320040"/>
+          </a:xfrm>
+          <a:prstGeom prst="rect">
+            <a:avLst/>
+          </a:prstGeom>
+          <a:noFill/>
+          <a:ln/>
+        </p:spPr>
+        <p:txBody>
+          <a:bodyPr wrap="square" rtlCol="0" anchor="ctr"/>
+          <a:lstStyle/>
+          <a:p>
+            <a:pPr indent="0" marL="0">
+              <a:buNone/>
+            </a:pPr>
+            <a:r>
+              <a:rPr lang="en-US" sz="850" dirty="0">
+                <a:solidFill>
+                  <a:srgbClr val="E2E8F0"/>
+                </a:solidFill>
+                <a:latin typeface="Calibri" pitchFamily="34" charset="0"/>
+                <a:ea typeface="Calibri" pitchFamily="34" charset="-122"/>
+                <a:cs typeface="Calibri" pitchFamily="34" charset="-120"/>
+              </a:rPr>
+              <a:t>Black Men's Health</a:t>
+            </a:r>
+            <a:endParaRPr lang="en-US" sz="850" dirty="0"/>
+          </a:p>
+        </p:txBody>
+      </p:sp>
+      <p:sp>
+        <p:nvSpPr>
+          <p:cNvPr id="22" name="Text 19">
+            <a:hlinkClick r:id="rId9" tooltip=""/>
+          </p:cNvPr>
+          <p:cNvSpPr/>
+          <p:nvPr/>
+        </p:nvSpPr>
+        <p:spPr>
+          <a:xfrm>
+            <a:off x="3017520" y="3621024"/>
+            <a:ext cx="1737360" cy="320040"/>
+          </a:xfrm>
+          <a:prstGeom prst="rect">
+            <a:avLst/>
+          </a:prstGeom>
+          <a:noFill/>
+          <a:ln/>
+        </p:spPr>
+        <p:txBody>
+          <a:bodyPr wrap="square" rtlCol="0" anchor="ctr"/>
+          <a:lstStyle/>
+          <a:p>
+            <a:pPr indent="0" marL="0">
+              <a:buNone/>
+            </a:pPr>
+            <a:r>
+              <a:rPr lang="en-US" sz="700" u="sng" dirty="0">
+                <a:solidFill>
+                  <a:srgbClr val="14B8A6"/>
+                </a:solidFill>
+                <a:latin typeface="Calibri" pitchFamily="34" charset="0"/>
+                <a:ea typeface="Calibri" pitchFamily="34" charset="-122"/>
+                <a:cs typeface="Calibri" pitchFamily="34" charset="-120"/>
+                <a:hlinkClick r:id="rId9" invalidUrl="" action="" tgtFrame="" tooltip="" history="1" highlightClick="0" endSnd="0">
+                  <a:extLst>
+                    <a:ext uri="{A12FA001-AC4F-418D-AE19-62706E023703}">
+                      <ahyp:hlinkClr xmlns:ahyp="http://schemas.microsoft.com/office/drawing/2018/hyperlinkcolor" val="tx"/>
+                    </a:ext>
+                  </a:extLst>
+                </a:hlinkClick>
+              </a:rPr>
+              <a:t>https://black-men-health.replit.app</a:t>
+            </a:r>
+            <a:endParaRPr lang="en-US" sz="700" dirty="0"/>
+          </a:p>
+        </p:txBody>
+      </p:sp>
+      <p:sp>
+        <p:nvSpPr>
+          <p:cNvPr id="23" name="Text 20"/>
+          <p:cNvSpPr/>
+          <p:nvPr/>
+        </p:nvSpPr>
+        <p:spPr>
+          <a:xfrm>
+            <a:off x="731520" y="3959352"/>
+            <a:ext cx="2286000" cy="320040"/>
+          </a:xfrm>
+          <a:prstGeom prst="rect">
+            <a:avLst/>
+          </a:prstGeom>
+          <a:noFill/>
+          <a:ln/>
+        </p:spPr>
+        <p:txBody>
+          <a:bodyPr wrap="square" rtlCol="0" anchor="ctr"/>
+          <a:lstStyle/>
+          <a:p>
+            <a:pPr indent="0" marL="0">
+              <a:buNone/>
+            </a:pPr>
+            <a:r>
+              <a:rPr lang="en-US" sz="850" dirty="0">
+                <a:solidFill>
+                  <a:srgbClr val="E2E8F0"/>
+                </a:solidFill>
+                <a:latin typeface="Calibri" pitchFamily="34" charset="0"/>
+                <a:ea typeface="Calibri" pitchFamily="34" charset="-122"/>
+                <a:cs typeface="Calibri" pitchFamily="34" charset="-120"/>
+              </a:rPr>
+              <a:t>Autoimmune Thrive</a:t>
+            </a:r>
+            <a:endParaRPr lang="en-US" sz="850" dirty="0"/>
+          </a:p>
+        </p:txBody>
+      </p:sp>
+      <p:sp>
+        <p:nvSpPr>
+          <p:cNvPr id="24" name="Text 21">
+            <a:hlinkClick r:id="rId10" tooltip=""/>
+          </p:cNvPr>
+          <p:cNvSpPr/>
+          <p:nvPr/>
+        </p:nvSpPr>
+        <p:spPr>
+          <a:xfrm>
+            <a:off x="3017520" y="3959352"/>
+            <a:ext cx="1737360" cy="320040"/>
+          </a:xfrm>
+          <a:prstGeom prst="rect">
+            <a:avLst/>
+          </a:prstGeom>
+          <a:noFill/>
+          <a:ln/>
+        </p:spPr>
+        <p:txBody>
+          <a:bodyPr wrap="square" rtlCol="0" anchor="ctr"/>
+          <a:lstStyle/>
+          <a:p>
+            <a:pPr indent="0" marL="0">
+              <a:buNone/>
+            </a:pPr>
+            <a:r>
+              <a:rPr lang="en-US" sz="700" u="sng" dirty="0">
+                <a:solidFill>
+                  <a:srgbClr val="14B8A6"/>
+                </a:solidFill>
+                <a:latin typeface="Calibri" pitchFamily="34" charset="0"/>
+                <a:ea typeface="Calibri" pitchFamily="34" charset="-122"/>
+                <a:cs typeface="Calibri" pitchFamily="34" charset="-120"/>
+                <a:hlinkClick r:id="rId10" invalidUrl="" action="" tgtFrame="" tooltip="" history="1" highlightClick="0" endSnd="0">
+                  <a:extLst>
+                    <a:ext uri="{A12FA001-AC4F-418D-AE19-62706E023703}">
+                      <ahyp:hlinkClr xmlns:ahyp="http://schemas.microsoft.com/office/drawing/2018/hyperlinkcolor" val="tx"/>
+                    </a:ext>
+                  </a:extLst>
+                </a:hlinkClick>
+              </a:rPr>
+              <a:t>https://autoimmune-thrive.replit.app</a:t>
+            </a:r>
+            <a:endParaRPr lang="en-US" sz="700" dirty="0"/>
+          </a:p>
+        </p:txBody>
+      </p:sp>
+      <p:sp>
+        <p:nvSpPr>
+          <p:cNvPr id="25" name="Text 22"/>
+          <p:cNvSpPr/>
+          <p:nvPr/>
+        </p:nvSpPr>
+        <p:spPr>
+          <a:xfrm>
+            <a:off x="731520" y="4297680"/>
+            <a:ext cx="2286000" cy="320040"/>
+          </a:xfrm>
+          <a:prstGeom prst="rect">
+            <a:avLst/>
+          </a:prstGeom>
+          <a:noFill/>
+          <a:ln/>
+        </p:spPr>
+        <p:txBody>
+          <a:bodyPr wrap="square" rtlCol="0" anchor="ctr"/>
+          <a:lstStyle/>
+          <a:p>
+            <a:pPr indent="0" marL="0">
+              <a:buNone/>
+            </a:pPr>
+            <a:r>
+              <a:rPr lang="en-US" sz="850" dirty="0">
+                <a:solidFill>
+                  <a:srgbClr val="E2E8F0"/>
+                </a:solidFill>
+                <a:latin typeface="Calibri" pitchFamily="34" charset="0"/>
+                <a:ea typeface="Calibri" pitchFamily="34" charset="-122"/>
+                <a:cs typeface="Calibri" pitchFamily="34" charset="-120"/>
+              </a:rPr>
+              <a:t>SafeCogniCare (Cognitive Health)</a:t>
+            </a:r>
+            <a:endParaRPr lang="en-US" sz="850" dirty="0"/>
+          </a:p>
+        </p:txBody>
+      </p:sp>
+      <p:sp>
+        <p:nvSpPr>
+          <p:cNvPr id="26" name="Text 23">
+            <a:hlinkClick r:id="rId11" tooltip=""/>
+          </p:cNvPr>
+          <p:cNvSpPr/>
+          <p:nvPr/>
+        </p:nvSpPr>
+        <p:spPr>
+          <a:xfrm>
+            <a:off x="3017520" y="4297680"/>
+            <a:ext cx="1737360" cy="320040"/>
+          </a:xfrm>
+          <a:prstGeom prst="rect">
+            <a:avLst/>
+          </a:prstGeom>
+          <a:noFill/>
+          <a:ln/>
+        </p:spPr>
+        <p:txBody>
+          <a:bodyPr wrap="square" rtlCol="0" anchor="ctr"/>
+          <a:lstStyle/>
+          <a:p>
+            <a:pPr indent="0" marL="0">
+              <a:buNone/>
+            </a:pPr>
+            <a:r>
+              <a:rPr lang="en-US" sz="700" u="sng" dirty="0">
+                <a:solidFill>
+                  <a:srgbClr val="14B8A6"/>
+                </a:solidFill>
+                <a:latin typeface="Calibri" pitchFamily="34" charset="0"/>
+                <a:ea typeface="Calibri" pitchFamily="34" charset="-122"/>
+                <a:cs typeface="Calibri" pitchFamily="34" charset="-120"/>
+                <a:hlinkClick r:id="rId11" invalidUrl="" action="" tgtFrame="" tooltip="" history="1" highlightClick="0" endSnd="0">
+                  <a:extLst>
+                    <a:ext uri="{A12FA001-AC4F-418D-AE19-62706E023703}">
+                      <ahyp:hlinkClr xmlns:ahyp="http://schemas.microsoft.com/office/drawing/2018/hyperlinkcolor" val="tx"/>
+                    </a:ext>
+                  </a:extLst>
+                </a:hlinkClick>
+              </a:rPr>
+              <a:t>https://safecognicare.com</a:t>
+            </a:r>
+            <a:endParaRPr lang="en-US" sz="700" dirty="0"/>
+          </a:p>
+        </p:txBody>
+      </p:sp>
+      <p:sp>
+        <p:nvSpPr>
+          <p:cNvPr id="27" name="Text 24"/>
+          <p:cNvSpPr/>
+          <p:nvPr/>
+        </p:nvSpPr>
+        <p:spPr>
+          <a:xfrm>
+            <a:off x="731520" y="4636008"/>
+            <a:ext cx="2286000" cy="320040"/>
+          </a:xfrm>
+          <a:prstGeom prst="rect">
+            <a:avLst/>
+          </a:prstGeom>
+          <a:noFill/>
+          <a:ln/>
+        </p:spPr>
+        <p:txBody>
+          <a:bodyPr wrap="square" rtlCol="0" anchor="ctr"/>
+          <a:lstStyle/>
+          <a:p>
+            <a:pPr indent="0" marL="0">
+              <a:buNone/>
+            </a:pPr>
+            <a:r>
+              <a:rPr lang="en-US" sz="850" dirty="0">
+                <a:solidFill>
+                  <a:srgbClr val="E2E8F0"/>
+                </a:solidFill>
+                <a:latin typeface="Calibri" pitchFamily="34" charset="0"/>
+                <a:ea typeface="Calibri" pitchFamily="34" charset="-122"/>
+                <a:cs typeface="Calibri" pitchFamily="34" charset="-120"/>
+              </a:rPr>
+              <a:t>PillScheduler</a:t>
+            </a:r>
+            <a:endParaRPr lang="en-US" sz="850" dirty="0"/>
+          </a:p>
+        </p:txBody>
+      </p:sp>
+      <p:sp>
+        <p:nvSpPr>
+          <p:cNvPr id="28" name="Text 25">
+            <a:hlinkClick r:id="rId12" tooltip=""/>
+          </p:cNvPr>
+          <p:cNvSpPr/>
+          <p:nvPr/>
+        </p:nvSpPr>
+        <p:spPr>
+          <a:xfrm>
+            <a:off x="3017520" y="4636008"/>
+            <a:ext cx="1737360" cy="320040"/>
+          </a:xfrm>
+          <a:prstGeom prst="rect">
+            <a:avLst/>
+          </a:prstGeom>
+          <a:noFill/>
+          <a:ln/>
+        </p:spPr>
+        <p:txBody>
+          <a:bodyPr wrap="square" rtlCol="0" anchor="ctr"/>
+          <a:lstStyle/>
+          <a:p>
+            <a:pPr indent="0" marL="0">
+              <a:buNone/>
+            </a:pPr>
+            <a:r>
+              <a:rPr lang="en-US" sz="700" u="sng" dirty="0">
+                <a:solidFill>
+                  <a:srgbClr val="14B8A6"/>
+                </a:solidFill>
+                <a:latin typeface="Calibri" pitchFamily="34" charset="0"/>
+                <a:ea typeface="Calibri" pitchFamily="34" charset="-122"/>
+                <a:cs typeface="Calibri" pitchFamily="34" charset="-120"/>
+                <a:hlinkClick r:id="rId12" invalidUrl="" action="" tgtFrame="" tooltip="" history="1" highlightClick="0" endSnd="0">
+                  <a:extLst>
+                    <a:ext uri="{A12FA001-AC4F-418D-AE19-62706E023703}">
+                      <ahyp:hlinkClr xmlns:ahyp="http://schemas.microsoft.com/office/drawing/2018/hyperlinkcolor" val="tx"/>
+                    </a:ext>
+                  </a:extLst>
+                </a:hlinkClick>
+              </a:rPr>
+              <a:t>https://pillscheduler.net</a:t>
+            </a:r>
+            <a:endParaRPr lang="en-US" sz="700" dirty="0"/>
+          </a:p>
+        </p:txBody>
+      </p:sp>
+      <p:sp>
+        <p:nvSpPr>
+          <p:cNvPr id="29" name="Text 26"/>
+          <p:cNvSpPr/>
+          <p:nvPr/>
+        </p:nvSpPr>
+        <p:spPr>
+          <a:xfrm>
+            <a:off x="4937760" y="914400"/>
+            <a:ext cx="2103120" cy="320040"/>
+          </a:xfrm>
+          <a:prstGeom prst="rect">
+            <a:avLst/>
+          </a:prstGeom>
+          <a:noFill/>
+          <a:ln/>
+        </p:spPr>
+        <p:txBody>
+          <a:bodyPr wrap="square" rtlCol="0" anchor="ctr"/>
+          <a:lstStyle/>
+          <a:p>
+            <a:pPr indent="0" marL="0">
+              <a:buNone/>
+            </a:pPr>
+            <a:r>
+              <a:rPr lang="en-US" sz="850" dirty="0">
+                <a:solidFill>
+                  <a:srgbClr val="E2E8F0"/>
+                </a:solidFill>
+                <a:latin typeface="Calibri" pitchFamily="34" charset="0"/>
+                <a:ea typeface="Calibri" pitchFamily="34" charset="-122"/>
+                <a:cs typeface="Calibri" pitchFamily="34" charset="-120"/>
+              </a:rPr>
+              <a:t>ISSS (K-12 Implementation)</a:t>
+            </a:r>
+            <a:endParaRPr lang="en-US" sz="850" dirty="0"/>
+          </a:p>
+        </p:txBody>
+      </p:sp>
+      <p:sp>
+        <p:nvSpPr>
+          <p:cNvPr id="30" name="Text 27">
+            <a:hlinkClick r:id="rId13" tooltip=""/>
+          </p:cNvPr>
+          <p:cNvSpPr/>
+          <p:nvPr/>
+        </p:nvSpPr>
+        <p:spPr>
+          <a:xfrm>
+            <a:off x="7040880" y="914400"/>
+            <a:ext cx="1828800" cy="320040"/>
+          </a:xfrm>
+          <a:prstGeom prst="rect">
+            <a:avLst/>
+          </a:prstGeom>
+          <a:noFill/>
+          <a:ln/>
+        </p:spPr>
+        <p:txBody>
+          <a:bodyPr wrap="square" rtlCol="0" anchor="ctr"/>
+          <a:lstStyle/>
+          <a:p>
+            <a:pPr indent="0" marL="0">
+              <a:buNone/>
+            </a:pPr>
+            <a:r>
+              <a:rPr lang="en-US" sz="700" u="sng" dirty="0">
+                <a:solidFill>
+                  <a:srgbClr val="14B8A6"/>
+                </a:solidFill>
+                <a:latin typeface="Calibri" pitchFamily="34" charset="0"/>
+                <a:ea typeface="Calibri" pitchFamily="34" charset="-122"/>
+                <a:cs typeface="Calibri" pitchFamily="34" charset="-120"/>
+                <a:hlinkClick r:id="rId13" invalidUrl="" action="" tgtFrame="" tooltip="" history="1" highlightClick="0" endSnd="0">
+                  <a:extLst>
+                    <a:ext uri="{A12FA001-AC4F-418D-AE19-62706E023703}">
+                      <ahyp:hlinkClr xmlns:ahyp="http://schemas.microsoft.com/office/drawing/2018/hyperlinkcolor" val="tx"/>
+                    </a:ext>
+                  </a:extLst>
+                </a:hlinkClick>
+              </a:rPr>
+              <a:t>https://implementationineducatio.com</a:t>
+            </a:r>
+            <a:endParaRPr lang="en-US" sz="700" dirty="0"/>
+          </a:p>
+        </p:txBody>
+      </p:sp>
+      <p:sp>
+        <p:nvSpPr>
+          <p:cNvPr id="31" name="Text 28"/>
+          <p:cNvSpPr/>
+          <p:nvPr/>
+        </p:nvSpPr>
+        <p:spPr>
+          <a:xfrm>
+            <a:off x="4937760" y="1252728"/>
+            <a:ext cx="2103120" cy="320040"/>
+          </a:xfrm>
+          <a:prstGeom prst="rect">
+            <a:avLst/>
+          </a:prstGeom>
+          <a:noFill/>
+          <a:ln/>
+        </p:spPr>
+        <p:txBody>
+          <a:bodyPr wrap="square" rtlCol="0" anchor="ctr"/>
+          <a:lstStyle/>
+          <a:p>
+            <a:pPr indent="0" marL="0">
+              <a:buNone/>
+            </a:pPr>
+            <a:r>
+              <a:rPr lang="en-US" sz="850" dirty="0">
+                <a:solidFill>
+                  <a:srgbClr val="E2E8F0"/>
+                </a:solidFill>
+                <a:latin typeface="Calibri" pitchFamily="34" charset="0"/>
+                <a:ea typeface="Calibri" pitchFamily="34" charset="-122"/>
+                <a:cs typeface="Calibri" pitchFamily="34" charset="-120"/>
+              </a:rPr>
+              <a:t>WholeMind Learning</a:t>
+            </a:r>
+            <a:endParaRPr lang="en-US" sz="850" dirty="0"/>
+          </a:p>
+        </p:txBody>
+      </p:sp>
+      <p:sp>
+        <p:nvSpPr>
+          <p:cNvPr id="32" name="Text 29">
+            <a:hlinkClick r:id="rId14" tooltip=""/>
+          </p:cNvPr>
+          <p:cNvSpPr/>
+          <p:nvPr/>
+        </p:nvSpPr>
+        <p:spPr>
+          <a:xfrm>
+            <a:off x="7040880" y="1252728"/>
+            <a:ext cx="1828800" cy="320040"/>
+          </a:xfrm>
+          <a:prstGeom prst="rect">
+            <a:avLst/>
+          </a:prstGeom>
+          <a:noFill/>
+          <a:ln/>
+        </p:spPr>
+        <p:txBody>
+          <a:bodyPr wrap="square" rtlCol="0" anchor="ctr"/>
+          <a:lstStyle/>
+          <a:p>
+            <a:pPr indent="0" marL="0">
+              <a:buNone/>
+            </a:pPr>
+            <a:r>
+              <a:rPr lang="en-US" sz="700" u="sng" dirty="0">
+                <a:solidFill>
+                  <a:srgbClr val="14B8A6"/>
+                </a:solidFill>
+                <a:latin typeface="Calibri" pitchFamily="34" charset="0"/>
+                <a:ea typeface="Calibri" pitchFamily="34" charset="-122"/>
+                <a:cs typeface="Calibri" pitchFamily="34" charset="-120"/>
+                <a:hlinkClick r:id="rId14" invalidUrl="" action="" tgtFrame="" tooltip="" history="1" highlightClick="0" endSnd="0">
+                  <a:extLst>
+                    <a:ext uri="{A12FA001-AC4F-418D-AE19-62706E023703}">
+                      <ahyp:hlinkClr xmlns:ahyp="http://schemas.microsoft.com/office/drawing/2018/hyperlinkcolor" val="tx"/>
+                    </a:ext>
+                  </a:extLst>
+                </a:hlinkClick>
+              </a:rPr>
+              <a:t>https://life-pals-standalone.replit.app</a:t>
+            </a:r>
+            <a:endParaRPr lang="en-US" sz="700" dirty="0"/>
+          </a:p>
+        </p:txBody>
+      </p:sp>
+      <p:sp>
+        <p:nvSpPr>
+          <p:cNvPr id="33" name="Text 30"/>
+          <p:cNvSpPr/>
+          <p:nvPr/>
+        </p:nvSpPr>
+        <p:spPr>
+          <a:xfrm>
+            <a:off x="4937760" y="1591056"/>
+            <a:ext cx="2103120" cy="320040"/>
+          </a:xfrm>
+          <a:prstGeom prst="rect">
+            <a:avLst/>
+          </a:prstGeom>
+          <a:noFill/>
+          <a:ln/>
+        </p:spPr>
+        <p:txBody>
+          <a:bodyPr wrap="square" rtlCol="0" anchor="ctr"/>
+          <a:lstStyle/>
+          <a:p>
+            <a:pPr indent="0" marL="0">
+              <a:buNone/>
+            </a:pPr>
+            <a:r>
+              <a:rPr lang="en-US" sz="850" dirty="0">
+                <a:solidFill>
+                  <a:srgbClr val="E2E8F0"/>
+                </a:solidFill>
+                <a:latin typeface="Calibri" pitchFamily="34" charset="0"/>
+                <a:ea typeface="Calibri" pitchFamily="34" charset="-122"/>
+                <a:cs typeface="Calibri" pitchFamily="34" charset="-120"/>
+              </a:rPr>
+              <a:t>Perfectly Different (Neurodiversity)</a:t>
+            </a:r>
+            <a:endParaRPr lang="en-US" sz="850" dirty="0"/>
+          </a:p>
+        </p:txBody>
+      </p:sp>
+      <p:sp>
+        <p:nvSpPr>
+          <p:cNvPr id="34" name="Text 31">
+            <a:hlinkClick r:id="rId15" tooltip=""/>
+          </p:cNvPr>
+          <p:cNvSpPr/>
+          <p:nvPr/>
+        </p:nvSpPr>
+        <p:spPr>
+          <a:xfrm>
+            <a:off x="7040880" y="1591056"/>
+            <a:ext cx="1828800" cy="320040"/>
+          </a:xfrm>
+          <a:prstGeom prst="rect">
+            <a:avLst/>
+          </a:prstGeom>
+          <a:noFill/>
+          <a:ln/>
+        </p:spPr>
+        <p:txBody>
+          <a:bodyPr wrap="square" rtlCol="0" anchor="ctr"/>
+          <a:lstStyle/>
+          <a:p>
+            <a:pPr indent="0" marL="0">
+              <a:buNone/>
+            </a:pPr>
+            <a:r>
+              <a:rPr lang="en-US" sz="700" u="sng" dirty="0">
+                <a:solidFill>
+                  <a:srgbClr val="14B8A6"/>
+                </a:solidFill>
+                <a:latin typeface="Calibri" pitchFamily="34" charset="0"/>
+                <a:ea typeface="Calibri" pitchFamily="34" charset="-122"/>
+                <a:cs typeface="Calibri" pitchFamily="34" charset="-120"/>
+                <a:hlinkClick r:id="rId15" invalidUrl="" action="" tgtFrame="" tooltip="" history="1" highlightClick="0" endSnd="0">
+                  <a:extLst>
+                    <a:ext uri="{A12FA001-AC4F-418D-AE19-62706E023703}">
+                      <ahyp:hlinkClr xmlns:ahyp="http://schemas.microsoft.com/office/drawing/2018/hyperlinkcolor" val="tx"/>
+                    </a:ext>
+                  </a:extLst>
+                </a:hlinkClick>
+              </a:rPr>
+              <a:t>https://neurodifferentassistant.app</a:t>
+            </a:r>
+            <a:endParaRPr lang="en-US" sz="700" dirty="0"/>
+          </a:p>
+        </p:txBody>
+      </p:sp>
+      <p:sp>
+        <p:nvSpPr>
+          <p:cNvPr id="35" name="Text 32"/>
+          <p:cNvSpPr/>
+          <p:nvPr/>
+        </p:nvSpPr>
+        <p:spPr>
+          <a:xfrm>
+            <a:off x="4937760" y="1929384"/>
+            <a:ext cx="2103120" cy="320040"/>
+          </a:xfrm>
+          <a:prstGeom prst="rect">
+            <a:avLst/>
+          </a:prstGeom>
+          <a:noFill/>
+          <a:ln/>
+        </p:spPr>
+        <p:txBody>
+          <a:bodyPr wrap="square" rtlCol="0" anchor="ctr"/>
+          <a:lstStyle/>
+          <a:p>
+            <a:pPr indent="0" marL="0">
+              <a:buNone/>
+            </a:pPr>
+            <a:r>
+              <a:rPr lang="en-US" sz="850" dirty="0">
+                <a:solidFill>
+                  <a:srgbClr val="E2E8F0"/>
+                </a:solidFill>
+                <a:latin typeface="Calibri" pitchFamily="34" charset="0"/>
+                <a:ea typeface="Calibri" pitchFamily="34" charset="-122"/>
+                <a:cs typeface="Calibri" pitchFamily="34" charset="-120"/>
+              </a:rPr>
+              <a:t>Speech Bridge</a:t>
+            </a:r>
+            <a:endParaRPr lang="en-US" sz="850" dirty="0"/>
+          </a:p>
+        </p:txBody>
+      </p:sp>
+      <p:sp>
+        <p:nvSpPr>
+          <p:cNvPr id="36" name="Text 33">
+            <a:hlinkClick r:id="rId16" tooltip=""/>
+          </p:cNvPr>
+          <p:cNvSpPr/>
+          <p:nvPr/>
+        </p:nvSpPr>
+        <p:spPr>
+          <a:xfrm>
+            <a:off x="7040880" y="1929384"/>
+            <a:ext cx="1828800" cy="320040"/>
+          </a:xfrm>
+          <a:prstGeom prst="rect">
+            <a:avLst/>
+          </a:prstGeom>
+          <a:noFill/>
+          <a:ln/>
+        </p:spPr>
+        <p:txBody>
+          <a:bodyPr wrap="square" rtlCol="0" anchor="ctr"/>
+          <a:lstStyle/>
+          <a:p>
+            <a:pPr indent="0" marL="0">
+              <a:buNone/>
+            </a:pPr>
+            <a:r>
+              <a:rPr lang="en-US" sz="700" u="sng" dirty="0">
+                <a:solidFill>
+                  <a:srgbClr val="14B8A6"/>
+                </a:solidFill>
+                <a:latin typeface="Calibri" pitchFamily="34" charset="0"/>
+                <a:ea typeface="Calibri" pitchFamily="34" charset="-122"/>
+                <a:cs typeface="Calibri" pitchFamily="34" charset="-120"/>
+                <a:hlinkClick r:id="rId16" invalidUrl="" action="" tgtFrame="" tooltip="" history="1" highlightClick="0" endSnd="0">
+                  <a:extLst>
+                    <a:ext uri="{A12FA001-AC4F-418D-AE19-62706E023703}">
+                      <ahyp:hlinkClr xmlns:ahyp="http://schemas.microsoft.com/office/drawing/2018/hyperlinkcolor" val="tx"/>
+                    </a:ext>
+                  </a:extLst>
+                </a:hlinkClick>
+              </a:rPr>
+              <a:t>https://speech-bridge.replit.app</a:t>
+            </a:r>
+            <a:endParaRPr lang="en-US" sz="700" dirty="0"/>
+          </a:p>
+        </p:txBody>
+      </p:sp>
+      <p:sp>
+        <p:nvSpPr>
+          <p:cNvPr id="37" name="Text 34"/>
+          <p:cNvSpPr/>
+          <p:nvPr/>
+        </p:nvSpPr>
+        <p:spPr>
+          <a:xfrm>
+            <a:off x="4937760" y="2267712"/>
+            <a:ext cx="2103120" cy="320040"/>
+          </a:xfrm>
+          <a:prstGeom prst="rect">
+            <a:avLst/>
+          </a:prstGeom>
+          <a:noFill/>
+          <a:ln/>
+        </p:spPr>
+        <p:txBody>
+          <a:bodyPr wrap="square" rtlCol="0" anchor="ctr"/>
+          <a:lstStyle/>
+          <a:p>
+            <a:pPr indent="0" marL="0">
+              <a:buNone/>
+            </a:pPr>
+            <a:r>
+              <a:rPr lang="en-US" sz="850" dirty="0">
+                <a:solidFill>
+                  <a:srgbClr val="E2E8F0"/>
+                </a:solidFill>
+                <a:latin typeface="Calibri" pitchFamily="34" charset="0"/>
+                <a:ea typeface="Calibri" pitchFamily="34" charset="-122"/>
+                <a:cs typeface="Calibri" pitchFamily="34" charset="-120"/>
+              </a:rPr>
+              <a:t>SafeReport</a:t>
+            </a:r>
+            <a:endParaRPr lang="en-US" sz="850" dirty="0"/>
+          </a:p>
+        </p:txBody>
+      </p:sp>
+      <p:sp>
+        <p:nvSpPr>
+          <p:cNvPr id="38" name="Text 35">
+            <a:hlinkClick r:id="rId17" tooltip=""/>
+          </p:cNvPr>
+          <p:cNvSpPr/>
+          <p:nvPr/>
+        </p:nvSpPr>
+        <p:spPr>
+          <a:xfrm>
+            <a:off x="7040880" y="2267712"/>
+            <a:ext cx="1828800" cy="320040"/>
+          </a:xfrm>
+          <a:prstGeom prst="rect">
+            <a:avLst/>
+          </a:prstGeom>
+          <a:noFill/>
+          <a:ln/>
+        </p:spPr>
+        <p:txBody>
+          <a:bodyPr wrap="square" rtlCol="0" anchor="ctr"/>
+          <a:lstStyle/>
+          <a:p>
+            <a:pPr indent="0" marL="0">
+              <a:buNone/>
+            </a:pPr>
+            <a:r>
+              <a:rPr lang="en-US" sz="700" u="sng" dirty="0">
+                <a:solidFill>
+                  <a:srgbClr val="14B8A6"/>
+                </a:solidFill>
+                <a:latin typeface="Calibri" pitchFamily="34" charset="0"/>
+                <a:ea typeface="Calibri" pitchFamily="34" charset="-122"/>
+                <a:cs typeface="Calibri" pitchFamily="34" charset="-120"/>
+                <a:hlinkClick r:id="rId17" invalidUrl="" action="" tgtFrame="" tooltip="" history="1" highlightClick="0" endSnd="0">
+                  <a:extLst>
+                    <a:ext uri="{A12FA001-AC4F-418D-AE19-62706E023703}">
+                      <ahyp:hlinkClr xmlns:ahyp="http://schemas.microsoft.com/office/drawing/2018/hyperlinkcolor" val="tx"/>
+                    </a:ext>
+                  </a:extLst>
+                </a:hlinkClick>
+              </a:rPr>
+              <a:t>https://safereports.net</a:t>
+            </a:r>
+            <a:endParaRPr lang="en-US" sz="700" dirty="0"/>
+          </a:p>
+        </p:txBody>
+      </p:sp>
+      <p:sp>
+        <p:nvSpPr>
+          <p:cNvPr id="39" name="Text 36"/>
+          <p:cNvSpPr/>
+          <p:nvPr/>
+        </p:nvSpPr>
+        <p:spPr>
+          <a:xfrm>
+            <a:off x="4937760" y="2606040"/>
+            <a:ext cx="2103120" cy="320040"/>
+          </a:xfrm>
+          <a:prstGeom prst="rect">
+            <a:avLst/>
+          </a:prstGeom>
+          <a:noFill/>
+          <a:ln/>
+        </p:spPr>
+        <p:txBody>
+          <a:bodyPr wrap="square" rtlCol="0" anchor="ctr"/>
+          <a:lstStyle/>
+          <a:p>
+            <a:pPr indent="0" marL="0">
+              <a:buNone/>
+            </a:pPr>
+            <a:r>
+              <a:rPr lang="en-US" sz="850" dirty="0">
+                <a:solidFill>
+                  <a:srgbClr val="E2E8F0"/>
+                </a:solidFill>
+                <a:latin typeface="Calibri" pitchFamily="34" charset="0"/>
+                <a:ea typeface="Calibri" pitchFamily="34" charset="-122"/>
+                <a:cs typeface="Calibri" pitchFamily="34" charset="-120"/>
+              </a:rPr>
+              <a:t>Shield Atlas</a:t>
+            </a:r>
+            <a:endParaRPr lang="en-US" sz="850" dirty="0"/>
+          </a:p>
+        </p:txBody>
+      </p:sp>
+      <p:sp>
+        <p:nvSpPr>
+          <p:cNvPr id="40" name="Text 37">
+            <a:hlinkClick r:id="rId18" tooltip=""/>
+          </p:cNvPr>
+          <p:cNvSpPr/>
+          <p:nvPr/>
+        </p:nvSpPr>
+        <p:spPr>
+          <a:xfrm>
+            <a:off x="7040880" y="2606040"/>
+            <a:ext cx="1828800" cy="320040"/>
+          </a:xfrm>
+          <a:prstGeom prst="rect">
+            <a:avLst/>
+          </a:prstGeom>
+          <a:noFill/>
+          <a:ln/>
+        </p:spPr>
+        <p:txBody>
+          <a:bodyPr wrap="square" rtlCol="0" anchor="ctr"/>
+          <a:lstStyle/>
+          <a:p>
+            <a:pPr indent="0" marL="0">
+              <a:buNone/>
+            </a:pPr>
+            <a:r>
+              <a:rPr lang="en-US" sz="700" u="sng" dirty="0">
+                <a:solidFill>
+                  <a:srgbClr val="14B8A6"/>
+                </a:solidFill>
+                <a:latin typeface="Calibri" pitchFamily="34" charset="0"/>
+                <a:ea typeface="Calibri" pitchFamily="34" charset="-122"/>
+                <a:cs typeface="Calibri" pitchFamily="34" charset="-120"/>
+                <a:hlinkClick r:id="rId18" invalidUrl="" action="" tgtFrame="" tooltip="" history="1" highlightClick="0" endSnd="0">
+                  <a:extLst>
+                    <a:ext uri="{A12FA001-AC4F-418D-AE19-62706E023703}">
+                      <ahyp:hlinkClr xmlns:ahyp="http://schemas.microsoft.com/office/drawing/2018/hyperlinkcolor" val="tx"/>
+                    </a:ext>
+                  </a:extLst>
+                </a:hlinkClick>
+              </a:rPr>
+              <a:t>https://shield-atlas.replit.app</a:t>
+            </a:r>
+            <a:endParaRPr lang="en-US" sz="700" dirty="0"/>
+          </a:p>
+        </p:txBody>
+      </p:sp>
+      <p:sp>
+        <p:nvSpPr>
+          <p:cNvPr id="41" name="Text 38"/>
+          <p:cNvSpPr/>
+          <p:nvPr/>
+        </p:nvSpPr>
+        <p:spPr>
+          <a:xfrm>
+            <a:off x="4937760" y="2944368"/>
+            <a:ext cx="2103120" cy="320040"/>
+          </a:xfrm>
+          <a:prstGeom prst="rect">
+            <a:avLst/>
+          </a:prstGeom>
+          <a:noFill/>
+          <a:ln/>
+        </p:spPr>
+        <p:txBody>
+          <a:bodyPr wrap="square" rtlCol="0" anchor="ctr"/>
+          <a:lstStyle/>
+          <a:p>
+            <a:pPr indent="0" marL="0">
+              <a:buNone/>
+            </a:pPr>
+            <a:r>
+              <a:rPr lang="en-US" sz="850" dirty="0">
+                <a:solidFill>
+                  <a:srgbClr val="E2E8F0"/>
+                </a:solidFill>
+                <a:latin typeface="Calibri" pitchFamily="34" charset="0"/>
+                <a:ea typeface="Calibri" pitchFamily="34" charset="-122"/>
+                <a:cs typeface="Calibri" pitchFamily="34" charset="-120"/>
+              </a:rPr>
+              <a:t>MCE (Minority Center of Excellence)</a:t>
+            </a:r>
+            <a:endParaRPr lang="en-US" sz="850" dirty="0"/>
+          </a:p>
+        </p:txBody>
+      </p:sp>
+      <p:sp>
+        <p:nvSpPr>
+          <p:cNvPr id="42" name="Text 39">
+            <a:hlinkClick r:id="rId19" tooltip=""/>
+          </p:cNvPr>
+          <p:cNvSpPr/>
+          <p:nvPr/>
+        </p:nvSpPr>
+        <p:spPr>
+          <a:xfrm>
+            <a:off x="7040880" y="2944368"/>
+            <a:ext cx="1828800" cy="320040"/>
+          </a:xfrm>
+          <a:prstGeom prst="rect">
+            <a:avLst/>
+          </a:prstGeom>
+          <a:noFill/>
+          <a:ln/>
+        </p:spPr>
+        <p:txBody>
+          <a:bodyPr wrap="square" rtlCol="0" anchor="ctr"/>
+          <a:lstStyle/>
+          <a:p>
+            <a:pPr indent="0" marL="0">
+              <a:buNone/>
+            </a:pPr>
+            <a:r>
+              <a:rPr lang="en-US" sz="700" u="sng" dirty="0">
+                <a:solidFill>
+                  <a:srgbClr val="14B8A6"/>
+                </a:solidFill>
+                <a:latin typeface="Calibri" pitchFamily="34" charset="0"/>
+                <a:ea typeface="Calibri" pitchFamily="34" charset="-122"/>
+                <a:cs typeface="Calibri" pitchFamily="34" charset="-120"/>
+                <a:hlinkClick r:id="rId19" invalidUrl="" action="" tgtFrame="" tooltip="" history="1" highlightClick="0" endSnd="0">
+                  <a:extLst>
+                    <a:ext uri="{A12FA001-AC4F-418D-AE19-62706E023703}">
+                      <ahyp:hlinkClr xmlns:ahyp="http://schemas.microsoft.com/office/drawing/2018/hyperlinkcolor" val="tx"/>
+                    </a:ext>
+                  </a:extLst>
+                </a:hlinkClick>
+              </a:rPr>
+              <a:t>https://minoritycenterofexcellence.com</a:t>
+            </a:r>
+            <a:endParaRPr lang="en-US" sz="700" dirty="0"/>
+          </a:p>
+        </p:txBody>
+      </p:sp>
+      <p:sp>
+        <p:nvSpPr>
+          <p:cNvPr id="43" name="Text 40"/>
+          <p:cNvSpPr/>
+          <p:nvPr/>
+        </p:nvSpPr>
+        <p:spPr>
+          <a:xfrm>
+            <a:off x="4937760" y="3282696"/>
+            <a:ext cx="2103120" cy="320040"/>
+          </a:xfrm>
+          <a:prstGeom prst="rect">
+            <a:avLst/>
+          </a:prstGeom>
+          <a:noFill/>
+          <a:ln/>
+        </p:spPr>
+        <p:txBody>
+          <a:bodyPr wrap="square" rtlCol="0" anchor="ctr"/>
+          <a:lstStyle/>
+          <a:p>
+            <a:pPr indent="0" marL="0">
+              <a:buNone/>
+            </a:pPr>
+            <a:r>
+              <a:rPr lang="en-US" sz="850" dirty="0">
+                <a:solidFill>
+                  <a:srgbClr val="E2E8F0"/>
+                </a:solidFill>
+                <a:latin typeface="Calibri" pitchFamily="34" charset="0"/>
+                <a:ea typeface="Calibri" pitchFamily="34" charset="-122"/>
+                <a:cs typeface="Calibri" pitchFamily="34" charset="-120"/>
+              </a:rPr>
+              <a:t>Pinnacle Business</a:t>
+            </a:r>
+            <a:endParaRPr lang="en-US" sz="850" dirty="0"/>
+          </a:p>
+        </p:txBody>
+      </p:sp>
+      <p:sp>
+        <p:nvSpPr>
+          <p:cNvPr id="44" name="Text 41">
+            <a:hlinkClick r:id="rId20" tooltip=""/>
+          </p:cNvPr>
+          <p:cNvSpPr/>
+          <p:nvPr/>
+        </p:nvSpPr>
+        <p:spPr>
+          <a:xfrm>
+            <a:off x="7040880" y="3282696"/>
+            <a:ext cx="1828800" cy="320040"/>
+          </a:xfrm>
+          <a:prstGeom prst="rect">
+            <a:avLst/>
+          </a:prstGeom>
+          <a:noFill/>
+          <a:ln/>
+        </p:spPr>
+        <p:txBody>
+          <a:bodyPr wrap="square" rtlCol="0" anchor="ctr"/>
+          <a:lstStyle/>
+          <a:p>
+            <a:pPr indent="0" marL="0">
+              <a:buNone/>
+            </a:pPr>
+            <a:r>
+              <a:rPr lang="en-US" sz="700" u="sng" dirty="0">
+                <a:solidFill>
+                  <a:srgbClr val="14B8A6"/>
+                </a:solidFill>
+                <a:latin typeface="Calibri" pitchFamily="34" charset="0"/>
+                <a:ea typeface="Calibri" pitchFamily="34" charset="-122"/>
+                <a:cs typeface="Calibri" pitchFamily="34" charset="-120"/>
+                <a:hlinkClick r:id="rId20" invalidUrl="" action="" tgtFrame="" tooltip="" history="1" highlightClick="0" endSnd="0">
+                  <a:extLst>
+                    <a:ext uri="{A12FA001-AC4F-418D-AE19-62706E023703}">
+                      <ahyp:hlinkClr xmlns:ahyp="http://schemas.microsoft.com/office/drawing/2018/hyperlinkcolor" val="tx"/>
+                    </a:ext>
+                  </a:extLst>
+                </a:hlinkClick>
+              </a:rPr>
+              <a:t>https://pinnacle-business-conglomerate.replit.app</a:t>
+            </a:r>
+            <a:endParaRPr lang="en-US" sz="700" dirty="0"/>
+          </a:p>
+        </p:txBody>
+      </p:sp>
+      <p:sp>
+        <p:nvSpPr>
+          <p:cNvPr id="45" name="Text 42"/>
+          <p:cNvSpPr/>
+          <p:nvPr/>
+        </p:nvSpPr>
+        <p:spPr>
+          <a:xfrm>
+            <a:off x="4937760" y="3621024"/>
+            <a:ext cx="2103120" cy="320040"/>
+          </a:xfrm>
+          <a:prstGeom prst="rect">
+            <a:avLst/>
+          </a:prstGeom>
+          <a:noFill/>
+          <a:ln/>
+        </p:spPr>
+        <p:txBody>
+          <a:bodyPr wrap="square" rtlCol="0" anchor="ctr"/>
+          <a:lstStyle/>
+          <a:p>
+            <a:pPr indent="0" marL="0">
+              <a:buNone/>
+            </a:pPr>
+            <a:r>
+              <a:rPr lang="en-US" sz="850" dirty="0">
+                <a:solidFill>
+                  <a:srgbClr val="E2E8F0"/>
+                </a:solidFill>
+                <a:latin typeface="Calibri" pitchFamily="34" charset="0"/>
+                <a:ea typeface="Calibri" pitchFamily="34" charset="-122"/>
+                <a:cs typeface="Calibri" pitchFamily="34" charset="-120"/>
+              </a:rPr>
+              <a:t>M2C Transition</a:t>
+            </a:r>
+            <a:endParaRPr lang="en-US" sz="850" dirty="0"/>
+          </a:p>
+        </p:txBody>
+      </p:sp>
+      <p:sp>
+        <p:nvSpPr>
+          <p:cNvPr id="46" name="Text 43">
+            <a:hlinkClick r:id="rId21" tooltip=""/>
+          </p:cNvPr>
+          <p:cNvSpPr/>
+          <p:nvPr/>
+        </p:nvSpPr>
+        <p:spPr>
+          <a:xfrm>
+            <a:off x="7040880" y="3621024"/>
+            <a:ext cx="1828800" cy="320040"/>
+          </a:xfrm>
+          <a:prstGeom prst="rect">
+            <a:avLst/>
+          </a:prstGeom>
+          <a:noFill/>
+          <a:ln/>
+        </p:spPr>
+        <p:txBody>
+          <a:bodyPr wrap="square" rtlCol="0" anchor="ctr"/>
+          <a:lstStyle/>
+          <a:p>
+            <a:pPr indent="0" marL="0">
+              <a:buNone/>
+            </a:pPr>
+            <a:r>
+              <a:rPr lang="en-US" sz="700" u="sng" dirty="0">
+                <a:solidFill>
+                  <a:srgbClr val="14B8A6"/>
+                </a:solidFill>
+                <a:latin typeface="Calibri" pitchFamily="34" charset="0"/>
+                <a:ea typeface="Calibri" pitchFamily="34" charset="-122"/>
+                <a:cs typeface="Calibri" pitchFamily="34" charset="-120"/>
+                <a:hlinkClick r:id="rId21" invalidUrl="" action="" tgtFrame="" tooltip="" history="1" highlightClick="0" endSnd="0">
+                  <a:extLst>
+                    <a:ext uri="{A12FA001-AC4F-418D-AE19-62706E023703}">
+                      <ahyp:hlinkClr xmlns:ahyp="http://schemas.microsoft.com/office/drawing/2018/hyperlinkcolor" val="tx"/>
+                    </a:ext>
+                  </a:extLst>
+                </a:hlinkClick>
+              </a:rPr>
+              <a:t>https://vetmissiontransition.com</a:t>
+            </a:r>
+            <a:endParaRPr lang="en-US" sz="700" dirty="0"/>
+          </a:p>
+        </p:txBody>
+      </p:sp>
+      <p:sp>
+        <p:nvSpPr>
+          <p:cNvPr id="47" name="Text 44"/>
+          <p:cNvSpPr/>
+          <p:nvPr/>
+        </p:nvSpPr>
+        <p:spPr>
+          <a:xfrm>
+            <a:off x="4937760" y="3959352"/>
+            <a:ext cx="2103120" cy="320040"/>
+          </a:xfrm>
+          <a:prstGeom prst="rect">
+            <a:avLst/>
+          </a:prstGeom>
+          <a:noFill/>
+          <a:ln/>
+        </p:spPr>
+        <p:txBody>
+          <a:bodyPr wrap="square" rtlCol="0" anchor="ctr"/>
+          <a:lstStyle/>
+          <a:p>
+            <a:pPr indent="0" marL="0">
+              <a:buNone/>
+            </a:pPr>
+            <a:r>
+              <a:rPr lang="en-US" sz="850" dirty="0">
+                <a:solidFill>
+                  <a:srgbClr val="E2E8F0"/>
+                </a:solidFill>
+                <a:latin typeface="Calibri" pitchFamily="34" charset="0"/>
+                <a:ea typeface="Calibri" pitchFamily="34" charset="-122"/>
+                <a:cs typeface="Calibri" pitchFamily="34" charset="-120"/>
+              </a:rPr>
+              <a:t>Video Creator AI</a:t>
+            </a:r>
+            <a:endParaRPr lang="en-US" sz="850" dirty="0"/>
+          </a:p>
+        </p:txBody>
+      </p:sp>
+      <p:sp>
+        <p:nvSpPr>
+          <p:cNvPr id="48" name="Text 45">
+            <a:hlinkClick r:id="rId22" tooltip=""/>
+          </p:cNvPr>
+          <p:cNvSpPr/>
+          <p:nvPr/>
+        </p:nvSpPr>
+        <p:spPr>
+          <a:xfrm>
+            <a:off x="7040880" y="3959352"/>
+            <a:ext cx="1828800" cy="320040"/>
+          </a:xfrm>
+          <a:prstGeom prst="rect">
+            <a:avLst/>
+          </a:prstGeom>
+          <a:noFill/>
+          <a:ln/>
+        </p:spPr>
+        <p:txBody>
+          <a:bodyPr wrap="square" rtlCol="0" anchor="ctr"/>
+          <a:lstStyle/>
+          <a:p>
+            <a:pPr indent="0" marL="0">
+              <a:buNone/>
+            </a:pPr>
+            <a:r>
+              <a:rPr lang="en-US" sz="700" u="sng" dirty="0">
+                <a:solidFill>
+                  <a:srgbClr val="14B8A6"/>
+                </a:solidFill>
+                <a:latin typeface="Calibri" pitchFamily="34" charset="0"/>
+                <a:ea typeface="Calibri" pitchFamily="34" charset="-122"/>
+                <a:cs typeface="Calibri" pitchFamily="34" charset="-120"/>
+                <a:hlinkClick r:id="rId22" invalidUrl="" action="" tgtFrame="" tooltip="" history="1" highlightClick="0" endSnd="0">
+                  <a:extLst>
+                    <a:ext uri="{A12FA001-AC4F-418D-AE19-62706E023703}">
+                      <ahyp:hlinkClr xmlns:ahyp="http://schemas.microsoft.com/office/drawing/2018/hyperlinkcolor" val="tx"/>
+                    </a:ext>
+                  </a:extLst>
+                </a:hlinkClick>
+              </a:rPr>
+              <a:t>https://video-creator-ai-mrterryflood.replit.app</a:t>
+            </a:r>
+            <a:endParaRPr lang="en-US" sz="700" dirty="0"/>
+          </a:p>
+        </p:txBody>
+      </p:sp>
+      <p:sp>
+        <p:nvSpPr>
+          <p:cNvPr id="49" name="Text 46"/>
+          <p:cNvSpPr/>
+          <p:nvPr/>
+        </p:nvSpPr>
+        <p:spPr>
+          <a:xfrm>
+            <a:off x="4937760" y="4297680"/>
+            <a:ext cx="2103120" cy="320040"/>
+          </a:xfrm>
+          <a:prstGeom prst="rect">
+            <a:avLst/>
+          </a:prstGeom>
+          <a:noFill/>
+          <a:ln/>
+        </p:spPr>
+        <p:txBody>
+          <a:bodyPr wrap="square" rtlCol="0" anchor="ctr"/>
+          <a:lstStyle/>
+          <a:p>
+            <a:pPr indent="0" marL="0">
+              <a:buNone/>
+            </a:pPr>
+            <a:r>
+              <a:rPr lang="en-US" sz="850" dirty="0">
+                <a:solidFill>
+                  <a:srgbClr val="E2E8F0"/>
+                </a:solidFill>
+                <a:latin typeface="Calibri" pitchFamily="34" charset="0"/>
+                <a:ea typeface="Calibri" pitchFamily="34" charset="-122"/>
+                <a:cs typeface="Calibri" pitchFamily="34" charset="-120"/>
+              </a:rPr>
+              <a:t>Ecosystem Nexus</a:t>
+            </a:r>
+            <a:endParaRPr lang="en-US" sz="850" dirty="0"/>
+          </a:p>
+        </p:txBody>
+      </p:sp>
+      <p:sp>
+        <p:nvSpPr>
+          <p:cNvPr id="50" name="Text 47">
+            <a:hlinkClick r:id="rId23" tooltip=""/>
+          </p:cNvPr>
+          <p:cNvSpPr/>
+          <p:nvPr/>
+        </p:nvSpPr>
+        <p:spPr>
+          <a:xfrm>
+            <a:off x="7040880" y="4297680"/>
+            <a:ext cx="1828800" cy="320040"/>
+          </a:xfrm>
+          <a:prstGeom prst="rect">
+            <a:avLst/>
+          </a:prstGeom>
+          <a:noFill/>
+          <a:ln/>
+        </p:spPr>
+        <p:txBody>
+          <a:bodyPr wrap="square" rtlCol="0" anchor="ctr"/>
+          <a:lstStyle/>
+          <a:p>
+            <a:pPr indent="0" marL="0">
+              <a:buNone/>
+            </a:pPr>
+            <a:r>
+              <a:rPr lang="en-US" sz="700" u="sng" dirty="0">
+                <a:solidFill>
+                  <a:srgbClr val="14B8A6"/>
+                </a:solidFill>
+                <a:latin typeface="Calibri" pitchFamily="34" charset="0"/>
+                <a:ea typeface="Calibri" pitchFamily="34" charset="-122"/>
+                <a:cs typeface="Calibri" pitchFamily="34" charset="-120"/>
+                <a:hlinkClick r:id="rId23" invalidUrl="" action="" tgtFrame="" tooltip="" history="1" highlightClick="0" endSnd="0">
+                  <a:extLst>
+                    <a:ext uri="{A12FA001-AC4F-418D-AE19-62706E023703}">
+                      <ahyp:hlinkClr xmlns:ahyp="http://schemas.microsoft.com/office/drawing/2018/hyperlinkcolor" val="tx"/>
+                    </a:ext>
+                  </a:extLst>
+                </a:hlinkClick>
+              </a:rPr>
+              <a:t>https://ecosystem-nexus.replit.app</a:t>
+            </a:r>
+            <a:endParaRPr lang="en-US" sz="700" dirty="0"/>
+          </a:p>
+        </p:txBody>
+      </p:sp>
+      <p:sp>
+        <p:nvSpPr>
+          <p:cNvPr id="51" name="Text 48"/>
+          <p:cNvSpPr/>
+          <p:nvPr/>
+        </p:nvSpPr>
+        <p:spPr>
+          <a:xfrm>
+            <a:off x="4937760" y="4636008"/>
+            <a:ext cx="2103120" cy="320040"/>
+          </a:xfrm>
+          <a:prstGeom prst="rect">
+            <a:avLst/>
+          </a:prstGeom>
+          <a:noFill/>
+          <a:ln/>
+        </p:spPr>
+        <p:txBody>
+          <a:bodyPr wrap="square" rtlCol="0" anchor="ctr"/>
+          <a:lstStyle/>
+          <a:p>
+            <a:pPr indent="0" marL="0">
+              <a:buNone/>
+            </a:pPr>
+            <a:r>
+              <a:rPr lang="en-US" sz="850" dirty="0">
+                <a:solidFill>
+                  <a:srgbClr val="E2E8F0"/>
+                </a:solidFill>
+                <a:latin typeface="Calibri" pitchFamily="34" charset="0"/>
+                <a:ea typeface="Calibri" pitchFamily="34" charset="-122"/>
+                <a:cs typeface="Calibri" pitchFamily="34" charset="-120"/>
+              </a:rPr>
+              <a:t>Ad Targeting</a:t>
+            </a:r>
+            <a:endParaRPr lang="en-US" sz="850" dirty="0"/>
+          </a:p>
+        </p:txBody>
+      </p:sp>
+      <p:sp>
+        <p:nvSpPr>
+          <p:cNvPr id="52" name="Text 49">
+            <a:hlinkClick r:id="rId24" tooltip=""/>
+          </p:cNvPr>
+          <p:cNvSpPr/>
+          <p:nvPr/>
+        </p:nvSpPr>
+        <p:spPr>
+          <a:xfrm>
+            <a:off x="7040880" y="4636008"/>
+            <a:ext cx="1828800" cy="320040"/>
+          </a:xfrm>
+          <a:prstGeom prst="rect">
+            <a:avLst/>
+          </a:prstGeom>
+          <a:noFill/>
+          <a:ln/>
+        </p:spPr>
+        <p:txBody>
+          <a:bodyPr wrap="square" rtlCol="0" anchor="ctr"/>
+          <a:lstStyle/>
+          <a:p>
+            <a:pPr indent="0" marL="0">
+              <a:buNone/>
+            </a:pPr>
+            <a:r>
+              <a:rPr lang="en-US" sz="700" u="sng" dirty="0">
+                <a:solidFill>
+                  <a:srgbClr val="14B8A6"/>
+                </a:solidFill>
+                <a:latin typeface="Calibri" pitchFamily="34" charset="0"/>
+                <a:ea typeface="Calibri" pitchFamily="34" charset="-122"/>
+                <a:cs typeface="Calibri" pitchFamily="34" charset="-120"/>
+                <a:hlinkClick r:id="rId24" invalidUrl="" action="" tgtFrame="" tooltip="" history="1" highlightClick="0" endSnd="0">
+                  <a:extLst>
+                    <a:ext uri="{A12FA001-AC4F-418D-AE19-62706E023703}">
+                      <ahyp:hlinkClr xmlns:ahyp="http://schemas.microsoft.com/office/drawing/2018/hyperlinkcolor" val="tx"/>
+                    </a:ext>
+                  </a:extLst>
+                </a:hlinkClick>
+              </a:rPr>
+              <a:t>https://advertising-targeting-for-platforms.replit.app</a:t>
+            </a:r>
+            <a:endParaRPr lang="en-US" sz="700" dirty="0"/>
           </a:p>
         </p:txBody>
       </p:sp>
@@ -5757,7 +6810,7 @@
                 <a:ea typeface="Calibri" pitchFamily="34" charset="-122"/>
                 <a:cs typeface="Calibri" pitchFamily="34" charset="-120"/>
               </a:rPr>
-              <a:t>Veterans  |  Implementation Scientists  |  AI Architects  |  Builders</a:t>
+              <a:t>Veterans  |  Implementation Scientists  |  Builders</a:t>
             </a:r>
             <a:endParaRPr lang="en-US" sz="1100" dirty="0"/>
           </a:p>
@@ -5867,7 +6920,7 @@
                 <a:ea typeface="Calibri" pitchFamily="34" charset="-122"/>
                 <a:cs typeface="Calibri" pitchFamily="34" charset="-120"/>
               </a:rPr>
-              <a:t>AI-powered technology that bridges the gap between research and practice — so what works in studies actually works in communities</a:t>
+              <a:t>AI-powered technology that bridges the gap</a:t>
             </a:r>
             <a:endParaRPr lang="en-US" sz="1100" dirty="0"/>
           </a:p>
@@ -5878,6 +6931,17 @@
               </a:lnSpc>
               <a:buNone/>
             </a:pPr>
+            <a:r>
+              <a:rPr lang="en-US" sz="1100" dirty="0">
+                <a:solidFill>
+                  <a:srgbClr val="E2E8F0"/>
+                </a:solidFill>
+                <a:latin typeface="Calibri" pitchFamily="34" charset="0"/>
+                <a:ea typeface="Calibri" pitchFamily="34" charset="-122"/>
+                <a:cs typeface="Calibri" pitchFamily="34" charset="-120"/>
+              </a:rPr>
+              <a:t>between research and practice — so what works</a:t>
+            </a:r>
             <a:endParaRPr lang="en-US" sz="1100" dirty="0"/>
           </a:p>
           <a:p>
@@ -5896,6 +6960,35 @@
                 <a:ea typeface="Calibri" pitchFamily="34" charset="-122"/>
                 <a:cs typeface="Calibri" pitchFamily="34" charset="-120"/>
               </a:rPr>
+              <a:t>in studies actually works in communities</a:t>
+            </a:r>
+            <a:endParaRPr lang="en-US" sz="1100" dirty="0"/>
+          </a:p>
+          <a:p>
+            <a:pPr indent="0" marL="0">
+              <a:lnSpc>
+                <a:spcPct val="125000"/>
+              </a:lnSpc>
+              <a:buNone/>
+            </a:pPr>
+            <a:endParaRPr lang="en-US" sz="1100" dirty="0"/>
+          </a:p>
+          <a:p>
+            <a:pPr indent="0" marL="0">
+              <a:lnSpc>
+                <a:spcPct val="125000"/>
+              </a:lnSpc>
+              <a:buNone/>
+            </a:pPr>
+            <a:r>
+              <a:rPr lang="en-US" sz="1100" dirty="0">
+                <a:solidFill>
+                  <a:srgbClr val="E2E8F0"/>
+                </a:solidFill>
+                <a:latin typeface="Calibri" pitchFamily="34" charset="0"/>
+                <a:ea typeface="Calibri" pitchFamily="34" charset="-122"/>
+                <a:cs typeface="Calibri" pitchFamily="34" charset="-120"/>
+              </a:rPr>
               <a:t>24 interconnected platforms spanning:</a:t>
             </a:r>
             <a:endParaRPr lang="en-US" sz="1100" dirty="0"/>
@@ -5965,7 +7058,7 @@
                 <a:ea typeface="Calibri" pitchFamily="34" charset="-122"/>
                 <a:cs typeface="Calibri" pitchFamily="34" charset="-120"/>
               </a:rPr>
-              <a:t>4-Engine AI Architecture:</a:t>
+              <a:t>4-Engine AI + RAG Architecture:</a:t>
             </a:r>
             <a:endParaRPr lang="en-US" sz="1100" dirty="0"/>
           </a:p>
@@ -5985,7 +7078,7 @@
                 <a:ea typeface="Calibri" pitchFamily="34" charset="-122"/>
                 <a:cs typeface="Calibri" pitchFamily="34" charset="-120"/>
               </a:rPr>
-              <a:t>GPT-5 + Claude Sonnet + Scholarly RAG + Ecosystem RAG</a:t>
+              <a:t>GPT-5 + Claude + Scholarly RAG + Ecosystem RAG</a:t>
             </a:r>
             <a:endParaRPr lang="en-US" sz="1100" dirty="0"/>
           </a:p>
@@ -6257,7 +7350,7 @@
               <a:buNone/>
             </a:pPr>
             <a:r>
-              <a:rPr lang="en-US" sz="1000" dirty="0">
+              <a:rPr lang="en-US" sz="1050" dirty="0">
                 <a:solidFill>
                   <a:srgbClr val="E2E8F0"/>
                 </a:solidFill>
@@ -6267,7 +7360,7 @@
               </a:rPr>
               <a:t>• Operationalizes CFIR 2.0, RE-AIM, EPIS frameworks</a:t>
             </a:r>
-            <a:endParaRPr lang="en-US" sz="1000" dirty="0"/>
+            <a:endParaRPr lang="en-US" sz="1050" dirty="0"/>
           </a:p>
           <a:p>
             <a:pPr indent="0" marL="0">
@@ -6277,7 +7370,7 @@
               <a:buNone/>
             </a:pPr>
             <a:r>
-              <a:rPr lang="en-US" sz="1000" dirty="0">
+              <a:rPr lang="en-US" sz="1050" dirty="0">
                 <a:solidFill>
                   <a:srgbClr val="E2E8F0"/>
                 </a:solidFill>
@@ -6287,7 +7380,7 @@
               </a:rPr>
               <a:t>• MAP-GAP Governance Cycle:</a:t>
             </a:r>
-            <a:endParaRPr lang="en-US" sz="1000" dirty="0"/>
+            <a:endParaRPr lang="en-US" sz="1050" dirty="0"/>
           </a:p>
           <a:p>
             <a:pPr indent="0" marL="0">
@@ -6297,7 +7390,7 @@
               <a:buNone/>
             </a:pPr>
             <a:r>
-              <a:rPr lang="en-US" sz="1000" dirty="0">
+              <a:rPr lang="en-US" sz="1050" dirty="0">
                 <a:solidFill>
                   <a:srgbClr val="E2E8F0"/>
                 </a:solidFill>
@@ -6307,7 +7400,7 @@
               </a:rPr>
               <a:t>   Orient → Map → Gap → Act → Track → Reflect</a:t>
             </a:r>
-            <a:endParaRPr lang="en-US" sz="1000" dirty="0"/>
+            <a:endParaRPr lang="en-US" sz="1050" dirty="0"/>
           </a:p>
           <a:p>
             <a:pPr indent="0" marL="0">
@@ -6317,7 +7410,7 @@
               <a:buNone/>
             </a:pPr>
             <a:r>
-              <a:rPr lang="en-US" sz="1000" dirty="0">
+              <a:rPr lang="en-US" sz="1050" dirty="0">
                 <a:solidFill>
                   <a:srgbClr val="E2E8F0"/>
                 </a:solidFill>
@@ -6327,7 +7420,7 @@
               </a:rPr>
               <a:t>• Three Realities Diagnostic:</a:t>
             </a:r>
-            <a:endParaRPr lang="en-US" sz="1000" dirty="0"/>
+            <a:endParaRPr lang="en-US" sz="1050" dirty="0"/>
           </a:p>
           <a:p>
             <a:pPr indent="0" marL="0">
@@ -6337,7 +7430,7 @@
               <a:buNone/>
             </a:pPr>
             <a:r>
-              <a:rPr lang="en-US" sz="1000" dirty="0">
+              <a:rPr lang="en-US" sz="1050" dirty="0">
                 <a:solidFill>
                   <a:srgbClr val="E2E8F0"/>
                 </a:solidFill>
@@ -6347,7 +7440,7 @@
               </a:rPr>
               <a:t>   Designed vs. Operational vs. Experienced</a:t>
             </a:r>
-            <a:endParaRPr lang="en-US" sz="1000" dirty="0"/>
+            <a:endParaRPr lang="en-US" sz="1050" dirty="0"/>
           </a:p>
           <a:p>
             <a:pPr indent="0" marL="0">
@@ -6357,7 +7450,7 @@
               <a:buNone/>
             </a:pPr>
             <a:r>
-              <a:rPr lang="en-US" sz="1000" dirty="0">
+              <a:rPr lang="en-US" sz="1050" dirty="0">
                 <a:solidFill>
                   <a:srgbClr val="E2E8F0"/>
                 </a:solidFill>
@@ -6367,7 +7460,7 @@
               </a:rPr>
               <a:t>• 6-Step Project Wizard with AI recommendations</a:t>
             </a:r>
-            <a:endParaRPr lang="en-US" sz="1000" dirty="0"/>
+            <a:endParaRPr lang="en-US" sz="1050" dirty="0"/>
           </a:p>
           <a:p>
             <a:pPr indent="0" marL="0">
@@ -6377,7 +7470,7 @@
               <a:buNone/>
             </a:pPr>
             <a:r>
-              <a:rPr lang="en-US" sz="1000" dirty="0">
+              <a:rPr lang="en-US" sz="1050" dirty="0">
                 <a:solidFill>
                   <a:srgbClr val="E2E8F0"/>
                 </a:solidFill>
@@ -6387,7 +7480,7 @@
               </a:rPr>
               <a:t>• Validation &amp; Fidelity Hub</a:t>
             </a:r>
-            <a:endParaRPr lang="en-US" sz="1000" dirty="0"/>
+            <a:endParaRPr lang="en-US" sz="1050" dirty="0"/>
           </a:p>
           <a:p>
             <a:pPr indent="0" marL="0">
@@ -6397,7 +7490,7 @@
               <a:buNone/>
             </a:pPr>
             <a:r>
-              <a:rPr lang="en-US" sz="1000" dirty="0">
+              <a:rPr lang="en-US" sz="1050" dirty="0">
                 <a:solidFill>
                   <a:srgbClr val="E2E8F0"/>
                 </a:solidFill>
@@ -6407,7 +7500,7 @@
               </a:rPr>
               <a:t>• SALP continuous monitoring engine</a:t>
             </a:r>
-            <a:endParaRPr lang="en-US" sz="1000" dirty="0"/>
+            <a:endParaRPr lang="en-US" sz="1050" dirty="0"/>
           </a:p>
           <a:p>
             <a:pPr indent="0" marL="0">
@@ -6417,7 +7510,7 @@
               <a:buNone/>
             </a:pPr>
             <a:r>
-              <a:rPr lang="en-US" sz="1000" dirty="0">
+              <a:rPr lang="en-US" sz="1050" dirty="0">
                 <a:solidFill>
                   <a:srgbClr val="E2E8F0"/>
                 </a:solidFill>
@@ -6427,7 +7520,7 @@
               </a:rPr>
               <a:t>• Grant compliance tracking</a:t>
             </a:r>
-            <a:endParaRPr lang="en-US" sz="1000" dirty="0"/>
+            <a:endParaRPr lang="en-US" sz="1050" dirty="0"/>
           </a:p>
           <a:p>
             <a:pPr indent="0" marL="0">
@@ -6437,7 +7530,7 @@
               <a:buNone/>
             </a:pPr>
             <a:r>
-              <a:rPr lang="en-US" sz="1000" dirty="0">
+              <a:rPr lang="en-US" sz="1050" dirty="0">
                 <a:solidFill>
                   <a:srgbClr val="E2E8F0"/>
                 </a:solidFill>
@@ -6447,7 +7540,7 @@
               </a:rPr>
               <a:t>• 167 database tables | 223+ pages</a:t>
             </a:r>
-            <a:endParaRPr lang="en-US" sz="1000" dirty="0"/>
+            <a:endParaRPr lang="en-US" sz="1050" dirty="0"/>
           </a:p>
         </p:txBody>
       </p:sp>
@@ -6518,7 +7611,7 @@
               <a:buNone/>
             </a:pPr>
             <a:r>
-              <a:rPr lang="en-US" sz="1000" dirty="0">
+              <a:rPr lang="en-US" sz="1050" dirty="0">
                 <a:solidFill>
                   <a:srgbClr val="E2E8F0"/>
                 </a:solidFill>
@@ -6528,7 +7621,7 @@
               </a:rPr>
               <a:t>• GPT-5 — structured analysis &amp; recommendations</a:t>
             </a:r>
-            <a:endParaRPr lang="en-US" sz="1000" dirty="0"/>
+            <a:endParaRPr lang="en-US" sz="1050" dirty="0"/>
           </a:p>
           <a:p>
             <a:pPr indent="0" marL="0">
@@ -6538,7 +7631,7 @@
               <a:buNone/>
             </a:pPr>
             <a:r>
-              <a:rPr lang="en-US" sz="1000" dirty="0">
+              <a:rPr lang="en-US" sz="1050" dirty="0">
                 <a:solidFill>
                   <a:srgbClr val="E2E8F0"/>
                 </a:solidFill>
@@ -6548,7 +7641,7 @@
               </a:rPr>
               <a:t>• Claude Sonnet — nuanced reasoning &amp; synthesis</a:t>
             </a:r>
-            <a:endParaRPr lang="en-US" sz="1000" dirty="0"/>
+            <a:endParaRPr lang="en-US" sz="1050" dirty="0"/>
           </a:p>
           <a:p>
             <a:pPr indent="0" marL="0">
@@ -6558,17 +7651,17 @@
               <a:buNone/>
             </a:pPr>
             <a:r>
-              <a:rPr lang="en-US" sz="1000" dirty="0">
-                <a:solidFill>
-                  <a:srgbClr val="E2E8F0"/>
-                </a:solidFill>
-                <a:latin typeface="Calibri" pitchFamily="34" charset="0"/>
-                <a:ea typeface="Calibri" pitchFamily="34" charset="-122"/>
-                <a:cs typeface="Calibri" pitchFamily="34" charset="-120"/>
-              </a:rPr>
-              <a:t>• Scholarly Research RAG — 6 live academic databases</a:t>
-            </a:r>
-            <a:endParaRPr lang="en-US" sz="1000" dirty="0"/>
+              <a:rPr lang="en-US" sz="1050" dirty="0">
+                <a:solidFill>
+                  <a:srgbClr val="E2E8F0"/>
+                </a:solidFill>
+                <a:latin typeface="Calibri" pitchFamily="34" charset="0"/>
+                <a:ea typeface="Calibri" pitchFamily="34" charset="-122"/>
+                <a:cs typeface="Calibri" pitchFamily="34" charset="-120"/>
+              </a:rPr>
+              <a:t>• Scholarly Research RAG — 6 live databases</a:t>
+            </a:r>
+            <a:endParaRPr lang="en-US" sz="1050" dirty="0"/>
           </a:p>
           <a:p>
             <a:pPr indent="0" marL="0">
@@ -6578,7 +7671,7 @@
               <a:buNone/>
             </a:pPr>
             <a:r>
-              <a:rPr lang="en-US" sz="1000" dirty="0">
+              <a:rPr lang="en-US" sz="1050" dirty="0">
                 <a:solidFill>
                   <a:srgbClr val="E2E8F0"/>
                 </a:solidFill>
@@ -6588,7 +7681,7 @@
               </a:rPr>
               <a:t>   PubMed | Semantic Scholar | CrossRef</a:t>
             </a:r>
-            <a:endParaRPr lang="en-US" sz="1000" dirty="0"/>
+            <a:endParaRPr lang="en-US" sz="1050" dirty="0"/>
           </a:p>
           <a:p>
             <a:pPr indent="0" marL="0">
@@ -6598,7 +7691,7 @@
               <a:buNone/>
             </a:pPr>
             <a:r>
-              <a:rPr lang="en-US" sz="1000" dirty="0">
+              <a:rPr lang="en-US" sz="1050" dirty="0">
                 <a:solidFill>
                   <a:srgbClr val="E2E8F0"/>
                 </a:solidFill>
@@ -6608,7 +7701,7 @@
               </a:rPr>
               <a:t>   Europe PMC | medRxiv | bioRxiv</a:t>
             </a:r>
-            <a:endParaRPr lang="en-US" sz="1000" dirty="0"/>
+            <a:endParaRPr lang="en-US" sz="1050" dirty="0"/>
           </a:p>
           <a:p>
             <a:pPr indent="0" marL="0">
@@ -6618,7 +7711,7 @@
               <a:buNone/>
             </a:pPr>
             <a:r>
-              <a:rPr lang="en-US" sz="1000" dirty="0">
+              <a:rPr lang="en-US" sz="1050" dirty="0">
                 <a:solidFill>
                   <a:srgbClr val="E2E8F0"/>
                 </a:solidFill>
@@ -6628,7 +7721,7 @@
               </a:rPr>
               <a:t>• Ecosystem RAG — platform-aware context</a:t>
             </a:r>
-            <a:endParaRPr lang="en-US" sz="1000" dirty="0"/>
+            <a:endParaRPr lang="en-US" sz="1050" dirty="0"/>
           </a:p>
           <a:p>
             <a:pPr indent="0" marL="0">
@@ -6638,17 +7731,17 @@
               <a:buNone/>
             </a:pPr>
             <a:r>
-              <a:rPr lang="en-US" sz="1000" dirty="0">
-                <a:solidFill>
-                  <a:srgbClr val="E2E8F0"/>
-                </a:solidFill>
-                <a:latin typeface="Calibri" pitchFamily="34" charset="0"/>
-                <a:ea typeface="Calibri" pitchFamily="34" charset="-122"/>
-                <a:cs typeface="Calibri" pitchFamily="34" charset="-120"/>
-              </a:rPr>
-              <a:t>   Knows YOUR data, YOUR participants,</a:t>
-            </a:r>
-            <a:endParaRPr lang="en-US" sz="1000" dirty="0"/>
+              <a:rPr lang="en-US" sz="1050" dirty="0">
+                <a:solidFill>
+                  <a:srgbClr val="E2E8F0"/>
+                </a:solidFill>
+                <a:latin typeface="Calibri" pitchFamily="34" charset="0"/>
+                <a:ea typeface="Calibri" pitchFamily="34" charset="-122"/>
+                <a:cs typeface="Calibri" pitchFamily="34" charset="-120"/>
+              </a:rPr>
+              <a:t>   Knows YOUR data, YOUR participants</a:t>
+            </a:r>
+            <a:endParaRPr lang="en-US" sz="1050" dirty="0"/>
           </a:p>
           <a:p>
             <a:pPr indent="0" marL="0">
@@ -6657,18 +7750,7 @@
               </a:lnSpc>
               <a:buNone/>
             </a:pPr>
-            <a:r>
-              <a:rPr lang="en-US" sz="1000" dirty="0">
-                <a:solidFill>
-                  <a:srgbClr val="E2E8F0"/>
-                </a:solidFill>
-                <a:latin typeface="Calibri" pitchFamily="34" charset="0"/>
-                <a:ea typeface="Calibri" pitchFamily="34" charset="-122"/>
-                <a:cs typeface="Calibri" pitchFamily="34" charset="-120"/>
-              </a:rPr>
-              <a:t>   YOUR interventions</a:t>
-            </a:r>
-            <a:endParaRPr lang="en-US" sz="1000" dirty="0"/>
+            <a:endParaRPr lang="en-US" sz="1050" dirty="0"/>
           </a:p>
           <a:p>
             <a:pPr indent="0" marL="0">
@@ -6677,7 +7759,18 @@
               </a:lnSpc>
               <a:buNone/>
             </a:pPr>
-            <a:endParaRPr lang="en-US" sz="1000" dirty="0"/>
+            <a:r>
+              <a:rPr lang="en-US" sz="1050" dirty="0">
+                <a:solidFill>
+                  <a:srgbClr val="E2E8F0"/>
+                </a:solidFill>
+                <a:latin typeface="Calibri" pitchFamily="34" charset="0"/>
+                <a:ea typeface="Calibri" pitchFamily="34" charset="-122"/>
+                <a:cs typeface="Calibri" pitchFamily="34" charset="-120"/>
+              </a:rPr>
+              <a:t>"ALL" mode fires all engines in parallel,</a:t>
+            </a:r>
+            <a:endParaRPr lang="en-US" sz="1050" dirty="0"/>
           </a:p>
           <a:p>
             <a:pPr indent="0" marL="0">
@@ -6687,17 +7780,17 @@
               <a:buNone/>
             </a:pPr>
             <a:r>
-              <a:rPr lang="en-US" sz="1000" dirty="0">
-                <a:solidFill>
-                  <a:srgbClr val="E2E8F0"/>
-                </a:solidFill>
-                <a:latin typeface="Calibri" pitchFamily="34" charset="0"/>
-                <a:ea typeface="Calibri" pitchFamily="34" charset="-122"/>
-                <a:cs typeface="Calibri" pitchFamily="34" charset="-120"/>
-              </a:rPr>
-              <a:t>"ALL" mode fires all engines in parallel,</a:t>
-            </a:r>
-            <a:endParaRPr lang="en-US" sz="1000" dirty="0"/>
+              <a:rPr lang="en-US" sz="1050" dirty="0">
+                <a:solidFill>
+                  <a:srgbClr val="E2E8F0"/>
+                </a:solidFill>
+                <a:latin typeface="Calibri" pitchFamily="34" charset="0"/>
+                <a:ea typeface="Calibri" pitchFamily="34" charset="-122"/>
+                <a:cs typeface="Calibri" pitchFamily="34" charset="-120"/>
+              </a:rPr>
+              <a:t>then synthesizes into one unified response</a:t>
+            </a:r>
+            <a:endParaRPr lang="en-US" sz="1050" dirty="0"/>
           </a:p>
           <a:p>
             <a:pPr indent="0" marL="0">
@@ -6706,18 +7799,7 @@
               </a:lnSpc>
               <a:buNone/>
             </a:pPr>
-            <a:r>
-              <a:rPr lang="en-US" sz="1000" dirty="0">
-                <a:solidFill>
-                  <a:srgbClr val="E2E8F0"/>
-                </a:solidFill>
-                <a:latin typeface="Calibri" pitchFamily="34" charset="0"/>
-                <a:ea typeface="Calibri" pitchFamily="34" charset="-122"/>
-                <a:cs typeface="Calibri" pitchFamily="34" charset="-120"/>
-              </a:rPr>
-              <a:t>then synthesizes into one unified response</a:t>
-            </a:r>
-            <a:endParaRPr lang="en-US" sz="1000" dirty="0"/>
+            <a:endParaRPr lang="en-US" sz="1050" dirty="0"/>
           </a:p>
           <a:p>
             <a:pPr indent="0" marL="0">
@@ -6726,7 +7808,18 @@
               </a:lnSpc>
               <a:buNone/>
             </a:pPr>
-            <a:endParaRPr lang="en-US" sz="1000" dirty="0"/>
+            <a:r>
+              <a:rPr lang="en-US" sz="1050" dirty="0">
+                <a:solidFill>
+                  <a:srgbClr val="E2E8F0"/>
+                </a:solidFill>
+                <a:latin typeface="Calibri" pitchFamily="34" charset="0"/>
+                <a:ea typeface="Calibri" pitchFamily="34" charset="-122"/>
+                <a:cs typeface="Calibri" pitchFamily="34" charset="-120"/>
+              </a:rPr>
+              <a:t>✓ Anti-hallucination guardrails</a:t>
+            </a:r>
+            <a:endParaRPr lang="en-US" sz="1050" dirty="0"/>
           </a:p>
           <a:p>
             <a:pPr indent="0" marL="0">
@@ -6736,17 +7829,17 @@
               <a:buNone/>
             </a:pPr>
             <a:r>
-              <a:rPr lang="en-US" sz="1000" dirty="0">
-                <a:solidFill>
-                  <a:srgbClr val="E2E8F0"/>
-                </a:solidFill>
-                <a:latin typeface="Calibri" pitchFamily="34" charset="0"/>
-                <a:ea typeface="Calibri" pitchFamily="34" charset="-122"/>
-                <a:cs typeface="Calibri" pitchFamily="34" charset="-120"/>
-              </a:rPr>
-              <a:t>✓ Anti-hallucination guardrails</a:t>
-            </a:r>
-            <a:endParaRPr lang="en-US" sz="1000" dirty="0"/>
+              <a:rPr lang="en-US" sz="1050" dirty="0">
+                <a:solidFill>
+                  <a:srgbClr val="E2E8F0"/>
+                </a:solidFill>
+                <a:latin typeface="Calibri" pitchFamily="34" charset="0"/>
+                <a:ea typeface="Calibri" pitchFamily="34" charset="-122"/>
+                <a:cs typeface="Calibri" pitchFamily="34" charset="-120"/>
+              </a:rPr>
+              <a:t>✓ APA citations on every response</a:t>
+            </a:r>
+            <a:endParaRPr lang="en-US" sz="1050" dirty="0"/>
           </a:p>
           <a:p>
             <a:pPr indent="0" marL="0">
@@ -6756,17 +7849,17 @@
               <a:buNone/>
             </a:pPr>
             <a:r>
-              <a:rPr lang="en-US" sz="1000" dirty="0">
-                <a:solidFill>
-                  <a:srgbClr val="E2E8F0"/>
-                </a:solidFill>
-                <a:latin typeface="Calibri" pitchFamily="34" charset="0"/>
-                <a:ea typeface="Calibri" pitchFamily="34" charset="-122"/>
-                <a:cs typeface="Calibri" pitchFamily="34" charset="-120"/>
-              </a:rPr>
-              <a:t>✓ APA citations on every response</a:t>
-            </a:r>
-            <a:endParaRPr lang="en-US" sz="1000" dirty="0"/>
+              <a:rPr lang="en-US" sz="1050" dirty="0">
+                <a:solidFill>
+                  <a:srgbClr val="E2E8F0"/>
+                </a:solidFill>
+                <a:latin typeface="Calibri" pitchFamily="34" charset="0"/>
+                <a:ea typeface="Calibri" pitchFamily="34" charset="-122"/>
+                <a:cs typeface="Calibri" pitchFamily="34" charset="-120"/>
+              </a:rPr>
+              <a:t>✓ Bias-auditable output chains</a:t>
+            </a:r>
+            <a:endParaRPr lang="en-US" sz="1050" dirty="0"/>
           </a:p>
           <a:p>
             <a:pPr indent="0" marL="0">
@@ -6776,37 +7869,17 @@
               <a:buNone/>
             </a:pPr>
             <a:r>
-              <a:rPr lang="en-US" sz="1000" dirty="0">
-                <a:solidFill>
-                  <a:srgbClr val="E2E8F0"/>
-                </a:solidFill>
-                <a:latin typeface="Calibri" pitchFamily="34" charset="0"/>
-                <a:ea typeface="Calibri" pitchFamily="34" charset="-122"/>
-                <a:cs typeface="Calibri" pitchFamily="34" charset="-120"/>
-              </a:rPr>
-              <a:t>✓ Bias-auditable output chains</a:t>
-            </a:r>
-            <a:endParaRPr lang="en-US" sz="1000" dirty="0"/>
-          </a:p>
-          <a:p>
-            <a:pPr indent="0" marL="0">
-              <a:lnSpc>
-                <a:spcPct val="120000"/>
-              </a:lnSpc>
-              <a:buNone/>
-            </a:pPr>
-            <a:r>
-              <a:rPr lang="en-US" sz="1000" dirty="0">
-                <a:solidFill>
-                  <a:srgbClr val="E2E8F0"/>
-                </a:solidFill>
-                <a:latin typeface="Calibri" pitchFamily="34" charset="0"/>
-                <a:ea typeface="Calibri" pitchFamily="34" charset="-122"/>
-                <a:cs typeface="Calibri" pitchFamily="34" charset="-120"/>
-              </a:rPr>
-              <a:t>✓ Ethical AI — serves communities, not extracts</a:t>
-            </a:r>
-            <a:endParaRPr lang="en-US" sz="1000" dirty="0"/>
+              <a:rPr lang="en-US" sz="1050" dirty="0">
+                <a:solidFill>
+                  <a:srgbClr val="E2E8F0"/>
+                </a:solidFill>
+                <a:latin typeface="Calibri" pitchFamily="34" charset="0"/>
+                <a:ea typeface="Calibri" pitchFamily="34" charset="-122"/>
+                <a:cs typeface="Calibri" pitchFamily="34" charset="-120"/>
+              </a:rPr>
+              <a:t>✓ Ethical, transparent, community-serving AI</a:t>
+            </a:r>
+            <a:endParaRPr lang="en-US" sz="1050" dirty="0"/>
           </a:p>
         </p:txBody>
       </p:sp>
@@ -6914,7 +7987,7 @@
                 <a:ea typeface="Georgia" pitchFamily="34" charset="-122"/>
                 <a:cs typeface="Georgia" pitchFamily="34" charset="-120"/>
               </a:rPr>
-              <a:t>Why Our AI Is Different — Ethical, Evidence-Grounded, Community-Serving</a:t>
+              <a:t>Ethical, Evidence-Grounded, Community-Serving AI</a:t>
             </a:r>
             <a:endParaRPr lang="en-US" sz="1200" dirty="0"/>
           </a:p>
@@ -6995,7 +8068,7 @@
                 <a:ea typeface="Calibri" pitchFamily="34" charset="-122"/>
                 <a:cs typeface="Calibri" pitchFamily="34" charset="-120"/>
               </a:rPr>
-              <a:t>1. User asks a question about their program</a:t>
+              <a:t>1. User asks about their program</a:t>
             </a:r>
             <a:endParaRPr lang="en-US" sz="1050" dirty="0"/>
           </a:p>
@@ -7551,46 +8624,6 @@
                 <a:cs typeface="Calibri" pitchFamily="34" charset="-120"/>
               </a:rPr>
               <a:t>✓ Anti-extractive — serves, never surveils</a:t>
-            </a:r>
-            <a:endParaRPr lang="en-US" sz="1050" dirty="0"/>
-          </a:p>
-          <a:p>
-            <a:pPr indent="0" marL="0">
-              <a:lnSpc>
-                <a:spcPct val="115000"/>
-              </a:lnSpc>
-              <a:buNone/>
-            </a:pPr>
-            <a:r>
-              <a:rPr lang="en-US" sz="1050" dirty="0">
-                <a:solidFill>
-                  <a:srgbClr val="E2E8F0"/>
-                </a:solidFill>
-                <a:latin typeface="Calibri" pitchFamily="34" charset="0"/>
-                <a:ea typeface="Calibri" pitchFamily="34" charset="-122"/>
-                <a:cs typeface="Calibri" pitchFamily="34" charset="-120"/>
-              </a:rPr>
-              <a:t>✓ Aligned with Meme's vision for equitable</a:t>
-            </a:r>
-            <a:endParaRPr lang="en-US" sz="1050" dirty="0"/>
-          </a:p>
-          <a:p>
-            <a:pPr indent="0" marL="0">
-              <a:lnSpc>
-                <a:spcPct val="115000"/>
-              </a:lnSpc>
-              <a:buNone/>
-            </a:pPr>
-            <a:r>
-              <a:rPr lang="en-US" sz="1050" dirty="0">
-                <a:solidFill>
-                  <a:srgbClr val="E2E8F0"/>
-                </a:solidFill>
-                <a:latin typeface="Calibri" pitchFamily="34" charset="0"/>
-                <a:ea typeface="Calibri" pitchFamily="34" charset="-122"/>
-                <a:cs typeface="Calibri" pitchFamily="34" charset="-120"/>
-              </a:rPr>
-              <a:t>   data practices in communities of color</a:t>
             </a:r>
             <a:endParaRPr lang="en-US" sz="1050" dirty="0"/>
           </a:p>
@@ -7841,7 +8874,7 @@
                 <a:ea typeface="Calibri" pitchFamily="34" charset="-122"/>
                 <a:cs typeface="Calibri" pitchFamily="34" charset="-120"/>
               </a:rPr>
-              <a:t>PillScheduler</a:t>
+              <a:t>PillScheduler, Autoimmune Thrive</a:t>
             </a:r>
             <a:endParaRPr lang="en-US" sz="950" dirty="0"/>
           </a:p>
@@ -7982,7 +9015,7 @@
                 <a:ea typeface="Calibri" pitchFamily="34" charset="-122"/>
                 <a:cs typeface="Calibri" pitchFamily="34" charset="-120"/>
               </a:rPr>
-              <a:t>Code Canvas</a:t>
+              <a:t>Speech Bridge</a:t>
             </a:r>
             <a:endParaRPr lang="en-US" sz="950" dirty="0"/>
           </a:p>
@@ -8204,7 +9237,27 @@
                 <a:ea typeface="Calibri" pitchFamily="34" charset="-122"/>
                 <a:cs typeface="Calibri" pitchFamily="34" charset="-120"/>
               </a:rPr>
-              <a:t>LexiBridge, Video Creator AI,</a:t>
+              <a:t>Video Creator AI,</a:t>
+            </a:r>
+            <a:endParaRPr lang="en-US" sz="950" dirty="0"/>
+          </a:p>
+          <a:p>
+            <a:pPr indent="0" marL="0">
+              <a:lnSpc>
+                <a:spcPct val="120000"/>
+              </a:lnSpc>
+              <a:buNone/>
+            </a:pPr>
+            <a:r>
+              <a:rPr lang="en-US" sz="950" dirty="0">
+                <a:solidFill>
+                  <a:srgbClr val="E2E8F0"/>
+                </a:solidFill>
+                <a:latin typeface="Calibri" pitchFamily="34" charset="0"/>
+                <a:ea typeface="Calibri" pitchFamily="34" charset="-122"/>
+                <a:cs typeface="Calibri" pitchFamily="34" charset="-120"/>
+              </a:rPr>
+              <a:t>Ad Targeting,</a:t>
             </a:r>
             <a:endParaRPr lang="en-US" sz="950" dirty="0"/>
           </a:p>
@@ -8825,7 +9878,7 @@
                 <a:ea typeface="Calibri" pitchFamily="34" charset="-122"/>
                 <a:cs typeface="Calibri" pitchFamily="34" charset="-120"/>
               </a:rPr>
-              <a:t>Connection to Ecosystem:</a:t>
+              <a:t>Ecosystem Connections:</a:t>
             </a:r>
             <a:endParaRPr lang="en-US" sz="1100" dirty="0"/>
           </a:p>
@@ -8845,7 +9898,7 @@
                 <a:ea typeface="Calibri" pitchFamily="34" charset="-122"/>
                 <a:cs typeface="Calibri" pitchFamily="34" charset="-120"/>
               </a:rPr>
-              <a:t>• Student flagged for home instability?</a:t>
+              <a:t>• Student home instability → LifeBridge housing</a:t>
             </a:r>
             <a:endParaRPr lang="en-US" sz="1100" dirty="0"/>
           </a:p>
@@ -8865,7 +9918,7 @@
                 <a:ea typeface="Calibri" pitchFamily="34" charset="-122"/>
                 <a:cs typeface="Calibri" pitchFamily="34" charset="-120"/>
               </a:rPr>
-              <a:t>   → LifeBridge activates housing resources</a:t>
+              <a:t>• Parent mental health need → WholeMind support</a:t>
             </a:r>
             <a:endParaRPr lang="en-US" sz="1100" dirty="0"/>
           </a:p>
@@ -8885,67 +9938,7 @@
                 <a:ea typeface="Calibri" pitchFamily="34" charset="-122"/>
                 <a:cs typeface="Calibri" pitchFamily="34" charset="-120"/>
               </a:rPr>
-              <a:t>• Parent screening shows mental health need?</a:t>
-            </a:r>
-            <a:endParaRPr lang="en-US" sz="1100" dirty="0"/>
-          </a:p>
-          <a:p>
-            <a:pPr indent="0" marL="0">
-              <a:lnSpc>
-                <a:spcPct val="120000"/>
-              </a:lnSpc>
-              <a:buNone/>
-            </a:pPr>
-            <a:r>
-              <a:rPr lang="en-US" sz="1100" dirty="0">
-                <a:solidFill>
-                  <a:srgbClr val="E2E8F0"/>
-                </a:solidFill>
-                <a:latin typeface="Calibri" pitchFamily="34" charset="0"/>
-                <a:ea typeface="Calibri" pitchFamily="34" charset="-122"/>
-                <a:cs typeface="Calibri" pitchFamily="34" charset="-120"/>
-              </a:rPr>
-              <a:t>   → WholeMind connects family support</a:t>
-            </a:r>
-            <a:endParaRPr lang="en-US" sz="1100" dirty="0"/>
-          </a:p>
-          <a:p>
-            <a:pPr indent="0" marL="0">
-              <a:lnSpc>
-                <a:spcPct val="120000"/>
-              </a:lnSpc>
-              <a:buNone/>
-            </a:pPr>
-            <a:r>
-              <a:rPr lang="en-US" sz="1100" dirty="0">
-                <a:solidFill>
-                  <a:srgbClr val="E2E8F0"/>
-                </a:solidFill>
-                <a:latin typeface="Calibri" pitchFamily="34" charset="0"/>
-                <a:ea typeface="Calibri" pitchFamily="34" charset="-122"/>
-                <a:cs typeface="Calibri" pitchFamily="34" charset="-120"/>
-              </a:rPr>
-              <a:t>• Substance use concern?</a:t>
-            </a:r>
-            <a:endParaRPr lang="en-US" sz="1100" dirty="0"/>
-          </a:p>
-          <a:p>
-            <a:pPr indent="0" marL="0">
-              <a:lnSpc>
-                <a:spcPct val="120000"/>
-              </a:lnSpc>
-              <a:buNone/>
-            </a:pPr>
-            <a:r>
-              <a:rPr lang="en-US" sz="1100" dirty="0">
-                <a:solidFill>
-                  <a:srgbClr val="E2E8F0"/>
-                </a:solidFill>
-                <a:latin typeface="Calibri" pitchFamily="34" charset="0"/>
-                <a:ea typeface="Calibri" pitchFamily="34" charset="-122"/>
-                <a:cs typeface="Calibri" pitchFamily="34" charset="-120"/>
-              </a:rPr>
-              <a:t>   → RPLICE tracks DFC coalition fidelity</a:t>
+              <a:t>• Substance use concern → RPLICE DFC tracking</a:t>
             </a:r>
             <a:endParaRPr lang="en-US" sz="1100" dirty="0"/>
           </a:p>
@@ -9016,7 +10009,7 @@
                 <a:ea typeface="Georgia" pitchFamily="34" charset="-122"/>
                 <a:cs typeface="Georgia" pitchFamily="34" charset="-120"/>
               </a:rPr>
-              <a:t>MEASURE — Our Strategic Partner</a:t>
+              <a:t>Why We Make a Strong Collaboration Partner</a:t>
             </a:r>
             <a:endParaRPr lang="en-US" sz="2400" dirty="0"/>
           </a:p>
@@ -9030,8 +10023,8 @@
         </p:nvSpPr>
         <p:spPr>
           <a:xfrm>
-            <a:off x="731520" y="822960"/>
-            <a:ext cx="7680960" cy="274320"/>
+            <a:off x="731520" y="1097280"/>
+            <a:ext cx="3840480" cy="274320"/>
           </a:xfrm>
           <a:prstGeom prst="rect">
             <a:avLst/>
@@ -9049,13 +10042,13 @@
             <a:r>
               <a:rPr lang="en-US" sz="1300" b="1" dirty="0">
                 <a:solidFill>
-                  <a:srgbClr val="F59E0B"/>
+                  <a:srgbClr val="14B8A6"/>
                 </a:solidFill>
                 <a:latin typeface="Georgia" pitchFamily="34" charset="0"/>
                 <a:ea typeface="Georgia" pitchFamily="34" charset="-122"/>
                 <a:cs typeface="Georgia" pitchFamily="34" charset="-120"/>
               </a:rPr>
-              <a:t>Founded by Jameila "Meme" Styles — Leading Ethical AI Consultant</a:t>
+              <a:t>What We Bring to Any Partnership:</a:t>
             </a:r>
             <a:endParaRPr lang="en-US" sz="1300" dirty="0"/>
           </a:p>
@@ -9069,7 +10062,249 @@
         </p:nvSpPr>
         <p:spPr>
           <a:xfrm>
-            <a:off x="731520" y="1371600"/>
+            <a:off x="731520" y="1463040"/>
+            <a:ext cx="3840480" cy="2743200"/>
+          </a:xfrm>
+          <a:prstGeom prst="rect">
+            <a:avLst/>
+          </a:prstGeom>
+          <a:noFill/>
+          <a:ln/>
+        </p:spPr>
+        <p:txBody>
+          <a:bodyPr wrap="square" rtlCol="0" anchor="ctr"/>
+          <a:lstStyle/>
+          <a:p>
+            <a:pPr indent="0" marL="0">
+              <a:lnSpc>
+                <a:spcPct val="120000"/>
+              </a:lnSpc>
+              <a:buNone/>
+            </a:pPr>
+            <a:r>
+              <a:rPr lang="en-US" sz="1050" dirty="0">
+                <a:solidFill>
+                  <a:srgbClr val="E2E8F0"/>
+                </a:solidFill>
+                <a:latin typeface="Calibri" pitchFamily="34" charset="0"/>
+                <a:ea typeface="Calibri" pitchFamily="34" charset="-122"/>
+                <a:cs typeface="Calibri" pitchFamily="34" charset="-120"/>
+              </a:rPr>
+              <a:t>• 24-platform live technology ecosystem</a:t>
+            </a:r>
+            <a:endParaRPr lang="en-US" sz="1050" dirty="0"/>
+          </a:p>
+          <a:p>
+            <a:pPr indent="0" marL="0">
+              <a:lnSpc>
+                <a:spcPct val="120000"/>
+              </a:lnSpc>
+              <a:buNone/>
+            </a:pPr>
+            <a:r>
+              <a:rPr lang="en-US" sz="1050" dirty="0">
+                <a:solidFill>
+                  <a:srgbClr val="E2E8F0"/>
+                </a:solidFill>
+                <a:latin typeface="Calibri" pitchFamily="34" charset="0"/>
+                <a:ea typeface="Calibri" pitchFamily="34" charset="-122"/>
+                <a:cs typeface="Calibri" pitchFamily="34" charset="-120"/>
+              </a:rPr>
+              <a:t>• RPLICE — implementation fidelity tracking</a:t>
+            </a:r>
+            <a:endParaRPr lang="en-US" sz="1050" dirty="0"/>
+          </a:p>
+          <a:p>
+            <a:pPr indent="0" marL="0">
+              <a:lnSpc>
+                <a:spcPct val="120000"/>
+              </a:lnSpc>
+              <a:buNone/>
+            </a:pPr>
+            <a:r>
+              <a:rPr lang="en-US" sz="1050" dirty="0">
+                <a:solidFill>
+                  <a:srgbClr val="E2E8F0"/>
+                </a:solidFill>
+                <a:latin typeface="Calibri" pitchFamily="34" charset="0"/>
+                <a:ea typeface="Calibri" pitchFamily="34" charset="-122"/>
+                <a:cs typeface="Calibri" pitchFamily="34" charset="-120"/>
+              </a:rPr>
+              <a:t>• MAP-GAP governance methodology</a:t>
+            </a:r>
+            <a:endParaRPr lang="en-US" sz="1050" dirty="0"/>
+          </a:p>
+          <a:p>
+            <a:pPr indent="0" marL="0">
+              <a:lnSpc>
+                <a:spcPct val="120000"/>
+              </a:lnSpc>
+              <a:buNone/>
+            </a:pPr>
+            <a:r>
+              <a:rPr lang="en-US" sz="1050" dirty="0">
+                <a:solidFill>
+                  <a:srgbClr val="E2E8F0"/>
+                </a:solidFill>
+                <a:latin typeface="Calibri" pitchFamily="34" charset="0"/>
+                <a:ea typeface="Calibri" pitchFamily="34" charset="-122"/>
+                <a:cs typeface="Calibri" pitchFamily="34" charset="-120"/>
+              </a:rPr>
+              <a:t>• AI-powered analysis (4 engines + RAG)</a:t>
+            </a:r>
+            <a:endParaRPr lang="en-US" sz="1050" dirty="0"/>
+          </a:p>
+          <a:p>
+            <a:pPr indent="0" marL="0">
+              <a:lnSpc>
+                <a:spcPct val="120000"/>
+              </a:lnSpc>
+              <a:buNone/>
+            </a:pPr>
+            <a:r>
+              <a:rPr lang="en-US" sz="1050" dirty="0">
+                <a:solidFill>
+                  <a:srgbClr val="E2E8F0"/>
+                </a:solidFill>
+                <a:latin typeface="Calibri" pitchFamily="34" charset="0"/>
+                <a:ea typeface="Calibri" pitchFamily="34" charset="-122"/>
+                <a:cs typeface="Calibri" pitchFamily="34" charset="-120"/>
+              </a:rPr>
+              <a:t>• Scholarly research integration (6 databases)</a:t>
+            </a:r>
+            <a:endParaRPr lang="en-US" sz="1050" dirty="0"/>
+          </a:p>
+          <a:p>
+            <a:pPr indent="0" marL="0">
+              <a:lnSpc>
+                <a:spcPct val="120000"/>
+              </a:lnSpc>
+              <a:buNone/>
+            </a:pPr>
+            <a:r>
+              <a:rPr lang="en-US" sz="1050" dirty="0">
+                <a:solidFill>
+                  <a:srgbClr val="E2E8F0"/>
+                </a:solidFill>
+                <a:latin typeface="Calibri" pitchFamily="34" charset="0"/>
+                <a:ea typeface="Calibri" pitchFamily="34" charset="-122"/>
+                <a:cs typeface="Calibri" pitchFamily="34" charset="-120"/>
+              </a:rPr>
+              <a:t>• Grant combinatorics across federal streams</a:t>
+            </a:r>
+            <a:endParaRPr lang="en-US" sz="1050" dirty="0"/>
+          </a:p>
+          <a:p>
+            <a:pPr indent="0" marL="0">
+              <a:lnSpc>
+                <a:spcPct val="120000"/>
+              </a:lnSpc>
+              <a:buNone/>
+            </a:pPr>
+            <a:r>
+              <a:rPr lang="en-US" sz="1050" dirty="0">
+                <a:solidFill>
+                  <a:srgbClr val="E2E8F0"/>
+                </a:solidFill>
+                <a:latin typeface="Calibri" pitchFamily="34" charset="0"/>
+                <a:ea typeface="Calibri" pitchFamily="34" charset="-122"/>
+                <a:cs typeface="Calibri" pitchFamily="34" charset="-120"/>
+              </a:rPr>
+              <a:t>• 167 database tables of implementation data</a:t>
+            </a:r>
+            <a:endParaRPr lang="en-US" sz="1050" dirty="0"/>
+          </a:p>
+          <a:p>
+            <a:pPr indent="0" marL="0">
+              <a:lnSpc>
+                <a:spcPct val="120000"/>
+              </a:lnSpc>
+              <a:buNone/>
+            </a:pPr>
+            <a:r>
+              <a:rPr lang="en-US" sz="1050" dirty="0">
+                <a:solidFill>
+                  <a:srgbClr val="E2E8F0"/>
+                </a:solidFill>
+                <a:latin typeface="Calibri" pitchFamily="34" charset="0"/>
+                <a:ea typeface="Calibri" pitchFamily="34" charset="-122"/>
+                <a:cs typeface="Calibri" pitchFamily="34" charset="-120"/>
+              </a:rPr>
+              <a:t>• Cross-platform event bus architecture</a:t>
+            </a:r>
+            <a:endParaRPr lang="en-US" sz="1050" dirty="0"/>
+          </a:p>
+          <a:p>
+            <a:pPr indent="0" marL="0">
+              <a:lnSpc>
+                <a:spcPct val="120000"/>
+              </a:lnSpc>
+              <a:buNone/>
+            </a:pPr>
+            <a:r>
+              <a:rPr lang="en-US" sz="1050" dirty="0">
+                <a:solidFill>
+                  <a:srgbClr val="E2E8F0"/>
+                </a:solidFill>
+                <a:latin typeface="Calibri" pitchFamily="34" charset="0"/>
+                <a:ea typeface="Calibri" pitchFamily="34" charset="-122"/>
+                <a:cs typeface="Calibri" pitchFamily="34" charset="-120"/>
+              </a:rPr>
+              <a:t>• Federal contracting capability (VOSB)</a:t>
+            </a:r>
+            <a:endParaRPr lang="en-US" sz="1050" dirty="0"/>
+          </a:p>
+          <a:p>
+            <a:pPr indent="0" marL="0">
+              <a:lnSpc>
+                <a:spcPct val="120000"/>
+              </a:lnSpc>
+              <a:buNone/>
+            </a:pPr>
+            <a:r>
+              <a:rPr lang="en-US" sz="1050" dirty="0">
+                <a:solidFill>
+                  <a:srgbClr val="E2E8F0"/>
+                </a:solidFill>
+                <a:latin typeface="Calibri" pitchFamily="34" charset="0"/>
+                <a:ea typeface="Calibri" pitchFamily="34" charset="-122"/>
+                <a:cs typeface="Calibri" pitchFamily="34" charset="-120"/>
+              </a:rPr>
+              <a:t>• Anti-hallucination AI guardrails</a:t>
+            </a:r>
+            <a:endParaRPr lang="en-US" sz="1050" dirty="0"/>
+          </a:p>
+          <a:p>
+            <a:pPr indent="0" marL="0">
+              <a:lnSpc>
+                <a:spcPct val="120000"/>
+              </a:lnSpc>
+              <a:buNone/>
+            </a:pPr>
+            <a:r>
+              <a:rPr lang="en-US" sz="1050" dirty="0">
+                <a:solidFill>
+                  <a:srgbClr val="E2E8F0"/>
+                </a:solidFill>
+                <a:latin typeface="Calibri" pitchFamily="34" charset="0"/>
+                <a:ea typeface="Calibri" pitchFamily="34" charset="-122"/>
+                <a:cs typeface="Calibri" pitchFamily="34" charset="-120"/>
+              </a:rPr>
+              <a:t>• Bias-auditable output chains</a:t>
+            </a:r>
+            <a:endParaRPr lang="en-US" sz="1050" dirty="0"/>
+          </a:p>
+        </p:txBody>
+      </p:sp>
+      <p:sp>
+        <p:nvSpPr>
+          <p:cNvPr id="6" name="Text 3"/>
+          <p:cNvSpPr/>
+          <p:nvPr/>
+        </p:nvSpPr>
+        <p:spPr>
+          <a:xfrm>
+            <a:off x="4846320" y="1097280"/>
             <a:ext cx="3840480" cy="274320"/>
           </a:xfrm>
           <a:prstGeom prst="rect">
@@ -9088,13 +10323,13 @@
             <a:r>
               <a:rPr lang="en-US" sz="1300" b="1" dirty="0">
                 <a:solidFill>
-                  <a:srgbClr val="14B8A6"/>
+                  <a:srgbClr val="6366F1"/>
                 </a:solidFill>
                 <a:latin typeface="Georgia" pitchFamily="34" charset="0"/>
                 <a:ea typeface="Georgia" pitchFamily="34" charset="-122"/>
                 <a:cs typeface="Georgia" pitchFamily="34" charset="-120"/>
               </a:rPr>
-              <a:t>What MEASURE Brings:</a:t>
+              <a:t>Our Collaboration Track Record:</a:t>
             </a:r>
             <a:endParaRPr lang="en-US" sz="1300" dirty="0"/>
           </a:p>
@@ -9102,522 +10337,297 @@
       </p:sp>
       <p:sp>
         <p:nvSpPr>
-          <p:cNvPr id="6" name="Text 3"/>
-          <p:cNvSpPr/>
-          <p:nvPr/>
-        </p:nvSpPr>
-        <p:spPr>
-          <a:xfrm>
-            <a:off x="731520" y="1737360"/>
-            <a:ext cx="3840480" cy="3017520"/>
-          </a:xfrm>
-          <a:prstGeom prst="rect">
-            <a:avLst/>
-          </a:prstGeom>
-          <a:noFill/>
-          <a:ln/>
-        </p:spPr>
-        <p:txBody>
-          <a:bodyPr wrap="square" rtlCol="0" anchor="ctr"/>
-          <a:lstStyle/>
-          <a:p>
-            <a:pPr indent="0" marL="0">
-              <a:lnSpc>
-                <a:spcPct val="120000"/>
-              </a:lnSpc>
-              <a:buNone/>
-            </a:pPr>
-            <a:r>
-              <a:rPr lang="en-US" sz="1050" dirty="0">
-                <a:solidFill>
-                  <a:srgbClr val="E2E8F0"/>
-                </a:solidFill>
-                <a:latin typeface="Calibri" pitchFamily="34" charset="0"/>
-                <a:ea typeface="Calibri" pitchFamily="34" charset="-122"/>
-                <a:cs typeface="Calibri" pitchFamily="34" charset="-120"/>
-              </a:rPr>
-              <a:t>• Community trust &amp; deep relationships</a:t>
-            </a:r>
-            <a:endParaRPr lang="en-US" sz="1050" dirty="0"/>
-          </a:p>
-          <a:p>
-            <a:pPr indent="0" marL="0">
-              <a:lnSpc>
-                <a:spcPct val="120000"/>
-              </a:lnSpc>
-              <a:buNone/>
-            </a:pPr>
-            <a:r>
-              <a:rPr lang="en-US" sz="1050" dirty="0">
-                <a:solidFill>
-                  <a:srgbClr val="E2E8F0"/>
-                </a:solidFill>
-                <a:latin typeface="Calibri" pitchFamily="34" charset="0"/>
-                <a:ea typeface="Calibri" pitchFamily="34" charset="-122"/>
-                <a:cs typeface="Calibri" pitchFamily="34" charset="-120"/>
-              </a:rPr>
-              <a:t>• CARE Model — equity-centered evaluation</a:t>
-            </a:r>
-            <a:endParaRPr lang="en-US" sz="1050" dirty="0"/>
-          </a:p>
-          <a:p>
-            <a:pPr indent="0" marL="0">
-              <a:lnSpc>
-                <a:spcPct val="120000"/>
-              </a:lnSpc>
-              <a:buNone/>
-            </a:pPr>
-            <a:r>
-              <a:rPr lang="en-US" sz="1050" dirty="0">
-                <a:solidFill>
-                  <a:srgbClr val="E2E8F0"/>
-                </a:solidFill>
-                <a:latin typeface="Calibri" pitchFamily="34" charset="0"/>
-                <a:ea typeface="Calibri" pitchFamily="34" charset="-122"/>
-                <a:cs typeface="Calibri" pitchFamily="34" charset="-120"/>
-              </a:rPr>
-              <a:t>• Ignite platform — data collection for orgs</a:t>
-            </a:r>
-            <a:endParaRPr lang="en-US" sz="1050" dirty="0"/>
-          </a:p>
-          <a:p>
-            <a:pPr indent="0" marL="0">
-              <a:lnSpc>
-                <a:spcPct val="120000"/>
-              </a:lnSpc>
-              <a:buNone/>
-            </a:pPr>
-            <a:r>
-              <a:rPr lang="en-US" sz="1050" dirty="0">
-                <a:solidFill>
-                  <a:srgbClr val="E2E8F0"/>
-                </a:solidFill>
-                <a:latin typeface="Calibri" pitchFamily="34" charset="0"/>
-                <a:ea typeface="Calibri" pitchFamily="34" charset="-122"/>
-                <a:cs typeface="Calibri" pitchFamily="34" charset="-120"/>
-              </a:rPr>
-              <a:t>• Participatory Action Research expertise</a:t>
-            </a:r>
-            <a:endParaRPr lang="en-US" sz="1050" dirty="0"/>
-          </a:p>
-          <a:p>
-            <a:pPr indent="0" marL="0">
-              <a:lnSpc>
-                <a:spcPct val="120000"/>
-              </a:lnSpc>
-              <a:buNone/>
-            </a:pPr>
-            <a:r>
-              <a:rPr lang="en-US" sz="1050" dirty="0">
-                <a:solidFill>
-                  <a:srgbClr val="E2E8F0"/>
-                </a:solidFill>
-                <a:latin typeface="Calibri" pitchFamily="34" charset="0"/>
-                <a:ea typeface="Calibri" pitchFamily="34" charset="-122"/>
-                <a:cs typeface="Calibri" pitchFamily="34" charset="-120"/>
-              </a:rPr>
-              <a:t>• 3,000+ hours of free data support delivered</a:t>
-            </a:r>
-            <a:endParaRPr lang="en-US" sz="1050" dirty="0"/>
-          </a:p>
-          <a:p>
-            <a:pPr indent="0" marL="0">
-              <a:lnSpc>
-                <a:spcPct val="120000"/>
-              </a:lnSpc>
-              <a:buNone/>
-            </a:pPr>
-            <a:r>
-              <a:rPr lang="en-US" sz="1050" dirty="0">
-                <a:solidFill>
-                  <a:srgbClr val="E2E8F0"/>
-                </a:solidFill>
-                <a:latin typeface="Calibri" pitchFamily="34" charset="0"/>
-                <a:ea typeface="Calibri" pitchFamily="34" charset="-122"/>
-                <a:cs typeface="Calibri" pitchFamily="34" charset="-120"/>
-              </a:rPr>
-              <a:t>• Austin/Pflugerville community presence</a:t>
-            </a:r>
-            <a:endParaRPr lang="en-US" sz="1050" dirty="0"/>
-          </a:p>
-          <a:p>
-            <a:pPr indent="0" marL="0">
-              <a:lnSpc>
-                <a:spcPct val="120000"/>
-              </a:lnSpc>
-              <a:buNone/>
-            </a:pPr>
-            <a:r>
-              <a:rPr lang="en-US" sz="1050" dirty="0">
-                <a:solidFill>
-                  <a:srgbClr val="E2E8F0"/>
-                </a:solidFill>
-                <a:latin typeface="Calibri" pitchFamily="34" charset="0"/>
-                <a:ea typeface="Calibri" pitchFamily="34" charset="-122"/>
-                <a:cs typeface="Calibri" pitchFamily="34" charset="-120"/>
-              </a:rPr>
-              <a:t>• Huston-Tillotson University partnership (HBCU)</a:t>
-            </a:r>
-            <a:endParaRPr lang="en-US" sz="1050" dirty="0"/>
-          </a:p>
-          <a:p>
-            <a:pPr indent="0" marL="0">
-              <a:lnSpc>
-                <a:spcPct val="120000"/>
-              </a:lnSpc>
-              <a:buNone/>
-            </a:pPr>
-            <a:r>
-              <a:rPr lang="en-US" sz="1050" dirty="0">
-                <a:solidFill>
-                  <a:srgbClr val="E2E8F0"/>
-                </a:solidFill>
-                <a:latin typeface="Calibri" pitchFamily="34" charset="0"/>
-                <a:ea typeface="Calibri" pitchFamily="34" charset="-122"/>
-                <a:cs typeface="Calibri" pitchFamily="34" charset="-120"/>
-              </a:rPr>
-              <a:t>• Policy advocacy track record (CROWN Act)</a:t>
-            </a:r>
-            <a:endParaRPr lang="en-US" sz="1050" dirty="0"/>
-          </a:p>
-          <a:p>
-            <a:pPr indent="0" marL="0">
-              <a:lnSpc>
-                <a:spcPct val="120000"/>
-              </a:lnSpc>
-              <a:buNone/>
-            </a:pPr>
-            <a:r>
-              <a:rPr lang="en-US" sz="1050" dirty="0">
-                <a:solidFill>
-                  <a:srgbClr val="E2E8F0"/>
-                </a:solidFill>
-                <a:latin typeface="Calibri" pitchFamily="34" charset="0"/>
-                <a:ea typeface="Calibri" pitchFamily="34" charset="-122"/>
-                <a:cs typeface="Calibri" pitchFamily="34" charset="-120"/>
-              </a:rPr>
-              <a:t>• MIT Solve backing</a:t>
-            </a:r>
-            <a:endParaRPr lang="en-US" sz="1050" dirty="0"/>
-          </a:p>
-          <a:p>
-            <a:pPr indent="0" marL="0">
-              <a:lnSpc>
-                <a:spcPct val="120000"/>
-              </a:lnSpc>
-              <a:buNone/>
-            </a:pPr>
-            <a:r>
-              <a:rPr lang="en-US" sz="1050" dirty="0">
-                <a:solidFill>
-                  <a:srgbClr val="E2E8F0"/>
-                </a:solidFill>
-                <a:latin typeface="Calibri" pitchFamily="34" charset="0"/>
-                <a:ea typeface="Calibri" pitchFamily="34" charset="-122"/>
-                <a:cs typeface="Calibri" pitchFamily="34" charset="-120"/>
-              </a:rPr>
-              <a:t>• Ethical AI leadership — Meme ensures</a:t>
-            </a:r>
-            <a:endParaRPr lang="en-US" sz="1050" dirty="0"/>
-          </a:p>
-          <a:p>
-            <a:pPr indent="0" marL="0">
-              <a:lnSpc>
-                <a:spcPct val="120000"/>
-              </a:lnSpc>
-              <a:buNone/>
-            </a:pPr>
-            <a:r>
-              <a:rPr lang="en-US" sz="1050" dirty="0">
-                <a:solidFill>
-                  <a:srgbClr val="E2E8F0"/>
-                </a:solidFill>
-                <a:latin typeface="Calibri" pitchFamily="34" charset="0"/>
-                <a:ea typeface="Calibri" pitchFamily="34" charset="-122"/>
-                <a:cs typeface="Calibri" pitchFamily="34" charset="-120"/>
-              </a:rPr>
-              <a:t>   AI serves communities, never extracts</a:t>
-            </a:r>
-            <a:endParaRPr lang="en-US" sz="1050" dirty="0"/>
-          </a:p>
-        </p:txBody>
-      </p:sp>
-      <p:sp>
-        <p:nvSpPr>
           <p:cNvPr id="7" name="Text 4"/>
           <p:cNvSpPr/>
           <p:nvPr/>
         </p:nvSpPr>
         <p:spPr>
           <a:xfrm>
-            <a:off x="4846320" y="1371600"/>
-            <a:ext cx="3840480" cy="274320"/>
-          </a:xfrm>
-          <a:prstGeom prst="rect">
-            <a:avLst/>
-          </a:prstGeom>
-          <a:noFill/>
-          <a:ln/>
-        </p:spPr>
-        <p:txBody>
-          <a:bodyPr wrap="square" rtlCol="0" anchor="ctr"/>
-          <a:lstStyle/>
-          <a:p>
-            <a:pPr indent="0" marL="0">
-              <a:buNone/>
-            </a:pPr>
-            <a:r>
-              <a:rPr lang="en-US" sz="1300" b="1" dirty="0">
-                <a:solidFill>
-                  <a:srgbClr val="6366F1"/>
-                </a:solidFill>
-                <a:latin typeface="Georgia" pitchFamily="34" charset="0"/>
-                <a:ea typeface="Georgia" pitchFamily="34" charset="-122"/>
-                <a:cs typeface="Georgia" pitchFamily="34" charset="-120"/>
-              </a:rPr>
-              <a:t>What We Bring:</a:t>
-            </a:r>
-            <a:endParaRPr lang="en-US" sz="1300" dirty="0"/>
-          </a:p>
-        </p:txBody>
-      </p:sp>
-      <p:sp>
-        <p:nvSpPr>
-          <p:cNvPr id="8" name="Text 5"/>
-          <p:cNvSpPr/>
-          <p:nvPr/>
-        </p:nvSpPr>
-        <p:spPr>
-          <a:xfrm>
-            <a:off x="4846320" y="1737360"/>
-            <a:ext cx="3840480" cy="3017520"/>
-          </a:xfrm>
-          <a:prstGeom prst="rect">
-            <a:avLst/>
-          </a:prstGeom>
-          <a:noFill/>
-          <a:ln/>
-        </p:spPr>
-        <p:txBody>
-          <a:bodyPr wrap="square" rtlCol="0" anchor="ctr"/>
-          <a:lstStyle/>
-          <a:p>
-            <a:pPr indent="0" marL="0">
-              <a:lnSpc>
-                <a:spcPct val="120000"/>
-              </a:lnSpc>
-              <a:buNone/>
-            </a:pPr>
-            <a:r>
-              <a:rPr lang="en-US" sz="1050" dirty="0">
-                <a:solidFill>
-                  <a:srgbClr val="E2E8F0"/>
-                </a:solidFill>
-                <a:latin typeface="Calibri" pitchFamily="34" charset="0"/>
-                <a:ea typeface="Calibri" pitchFamily="34" charset="-122"/>
-                <a:cs typeface="Calibri" pitchFamily="34" charset="-120"/>
-              </a:rPr>
-              <a:t>• 24-platform technology ecosystem</a:t>
-            </a:r>
-            <a:endParaRPr lang="en-US" sz="1050" dirty="0"/>
-          </a:p>
-          <a:p>
-            <a:pPr indent="0" marL="0">
-              <a:lnSpc>
-                <a:spcPct val="120000"/>
-              </a:lnSpc>
-              <a:buNone/>
-            </a:pPr>
-            <a:r>
-              <a:rPr lang="en-US" sz="1050" dirty="0">
-                <a:solidFill>
-                  <a:srgbClr val="E2E8F0"/>
-                </a:solidFill>
-                <a:latin typeface="Calibri" pitchFamily="34" charset="0"/>
-                <a:ea typeface="Calibri" pitchFamily="34" charset="-122"/>
-                <a:cs typeface="Calibri" pitchFamily="34" charset="-120"/>
-              </a:rPr>
-              <a:t>• RPLICE — implementation fidelity tracking</a:t>
-            </a:r>
-            <a:endParaRPr lang="en-US" sz="1050" dirty="0"/>
-          </a:p>
-          <a:p>
-            <a:pPr indent="0" marL="0">
-              <a:lnSpc>
-                <a:spcPct val="120000"/>
-              </a:lnSpc>
-              <a:buNone/>
-            </a:pPr>
-            <a:r>
-              <a:rPr lang="en-US" sz="1050" dirty="0">
-                <a:solidFill>
-                  <a:srgbClr val="E2E8F0"/>
-                </a:solidFill>
-                <a:latin typeface="Calibri" pitchFamily="34" charset="0"/>
-                <a:ea typeface="Calibri" pitchFamily="34" charset="-122"/>
-                <a:cs typeface="Calibri" pitchFamily="34" charset="-120"/>
-              </a:rPr>
-              <a:t>• MAP-GAP governance methodology</a:t>
-            </a:r>
-            <a:endParaRPr lang="en-US" sz="1050" dirty="0"/>
-          </a:p>
-          <a:p>
-            <a:pPr indent="0" marL="0">
-              <a:lnSpc>
-                <a:spcPct val="120000"/>
-              </a:lnSpc>
-              <a:buNone/>
-            </a:pPr>
-            <a:r>
-              <a:rPr lang="en-US" sz="1050" dirty="0">
-                <a:solidFill>
-                  <a:srgbClr val="E2E8F0"/>
-                </a:solidFill>
-                <a:latin typeface="Calibri" pitchFamily="34" charset="0"/>
-                <a:ea typeface="Calibri" pitchFamily="34" charset="-122"/>
-                <a:cs typeface="Calibri" pitchFamily="34" charset="-120"/>
-              </a:rPr>
-              <a:t>• AI-powered analysis (4 engines + RAG)</a:t>
-            </a:r>
-            <a:endParaRPr lang="en-US" sz="1050" dirty="0"/>
-          </a:p>
-          <a:p>
-            <a:pPr indent="0" marL="0">
-              <a:lnSpc>
-                <a:spcPct val="120000"/>
-              </a:lnSpc>
-              <a:buNone/>
-            </a:pPr>
-            <a:r>
-              <a:rPr lang="en-US" sz="1050" dirty="0">
-                <a:solidFill>
-                  <a:srgbClr val="E2E8F0"/>
-                </a:solidFill>
-                <a:latin typeface="Calibri" pitchFamily="34" charset="0"/>
-                <a:ea typeface="Calibri" pitchFamily="34" charset="-122"/>
-                <a:cs typeface="Calibri" pitchFamily="34" charset="-120"/>
-              </a:rPr>
-              <a:t>• Scholarly research integration (6 databases)</a:t>
-            </a:r>
-            <a:endParaRPr lang="en-US" sz="1050" dirty="0"/>
-          </a:p>
-          <a:p>
-            <a:pPr indent="0" marL="0">
-              <a:lnSpc>
-                <a:spcPct val="120000"/>
-              </a:lnSpc>
-              <a:buNone/>
-            </a:pPr>
-            <a:r>
-              <a:rPr lang="en-US" sz="1050" dirty="0">
-                <a:solidFill>
-                  <a:srgbClr val="E2E8F0"/>
-                </a:solidFill>
-                <a:latin typeface="Calibri" pitchFamily="34" charset="0"/>
-                <a:ea typeface="Calibri" pitchFamily="34" charset="-122"/>
-                <a:cs typeface="Calibri" pitchFamily="34" charset="-120"/>
-              </a:rPr>
-              <a:t>• Grant combinatorics across federal streams</a:t>
-            </a:r>
-            <a:endParaRPr lang="en-US" sz="1050" dirty="0"/>
-          </a:p>
-          <a:p>
-            <a:pPr indent="0" marL="0">
-              <a:lnSpc>
-                <a:spcPct val="120000"/>
-              </a:lnSpc>
-              <a:buNone/>
-            </a:pPr>
-            <a:r>
-              <a:rPr lang="en-US" sz="1050" dirty="0">
-                <a:solidFill>
-                  <a:srgbClr val="E2E8F0"/>
-                </a:solidFill>
-                <a:latin typeface="Calibri" pitchFamily="34" charset="0"/>
-                <a:ea typeface="Calibri" pitchFamily="34" charset="-122"/>
-                <a:cs typeface="Calibri" pitchFamily="34" charset="-120"/>
-              </a:rPr>
-              <a:t>• 167 database tables of implementation data</a:t>
-            </a:r>
-            <a:endParaRPr lang="en-US" sz="1050" dirty="0"/>
-          </a:p>
-          <a:p>
-            <a:pPr indent="0" marL="0">
-              <a:lnSpc>
-                <a:spcPct val="120000"/>
-              </a:lnSpc>
-              <a:buNone/>
-            </a:pPr>
-            <a:r>
-              <a:rPr lang="en-US" sz="1050" dirty="0">
-                <a:solidFill>
-                  <a:srgbClr val="E2E8F0"/>
-                </a:solidFill>
-                <a:latin typeface="Calibri" pitchFamily="34" charset="0"/>
-                <a:ea typeface="Calibri" pitchFamily="34" charset="-122"/>
-                <a:cs typeface="Calibri" pitchFamily="34" charset="-120"/>
-              </a:rPr>
-              <a:t>• Cross-platform event bus architecture</a:t>
-            </a:r>
-            <a:endParaRPr lang="en-US" sz="1050" dirty="0"/>
-          </a:p>
-          <a:p>
-            <a:pPr indent="0" marL="0">
-              <a:lnSpc>
-                <a:spcPct val="120000"/>
-              </a:lnSpc>
-              <a:buNone/>
-            </a:pPr>
-            <a:r>
-              <a:rPr lang="en-US" sz="1050" dirty="0">
-                <a:solidFill>
-                  <a:srgbClr val="E2E8F0"/>
-                </a:solidFill>
-                <a:latin typeface="Calibri" pitchFamily="34" charset="0"/>
-                <a:ea typeface="Calibri" pitchFamily="34" charset="-122"/>
-                <a:cs typeface="Calibri" pitchFamily="34" charset="-120"/>
-              </a:rPr>
-              <a:t>• Federal contracting capability (VOSB)</a:t>
-            </a:r>
-            <a:endParaRPr lang="en-US" sz="1050" dirty="0"/>
-          </a:p>
-          <a:p>
-            <a:pPr indent="0" marL="0">
-              <a:lnSpc>
-                <a:spcPct val="120000"/>
-              </a:lnSpc>
-              <a:buNone/>
-            </a:pPr>
-            <a:r>
-              <a:rPr lang="en-US" sz="1050" dirty="0">
-                <a:solidFill>
-                  <a:srgbClr val="E2E8F0"/>
-                </a:solidFill>
-                <a:latin typeface="Calibri" pitchFamily="34" charset="0"/>
-                <a:ea typeface="Calibri" pitchFamily="34" charset="-122"/>
-                <a:cs typeface="Calibri" pitchFamily="34" charset="-120"/>
-              </a:rPr>
-              <a:t>• Anti-hallucination AI guardrails</a:t>
-            </a:r>
-            <a:endParaRPr lang="en-US" sz="1050" dirty="0"/>
-          </a:p>
-          <a:p>
-            <a:pPr indent="0" marL="0">
-              <a:lnSpc>
-                <a:spcPct val="120000"/>
-              </a:lnSpc>
-              <a:buNone/>
-            </a:pPr>
-            <a:r>
-              <a:rPr lang="en-US" sz="1050" dirty="0">
-                <a:solidFill>
-                  <a:srgbClr val="E2E8F0"/>
-                </a:solidFill>
-                <a:latin typeface="Calibri" pitchFamily="34" charset="0"/>
-                <a:ea typeface="Calibri" pitchFamily="34" charset="-122"/>
-                <a:cs typeface="Calibri" pitchFamily="34" charset="-120"/>
-              </a:rPr>
-              <a:t>• Bias-auditable output chains</a:t>
+            <a:off x="4846320" y="1463040"/>
+            <a:ext cx="3840480" cy="3200400"/>
+          </a:xfrm>
+          <a:prstGeom prst="rect">
+            <a:avLst/>
+          </a:prstGeom>
+          <a:noFill/>
+          <a:ln/>
+        </p:spPr>
+        <p:txBody>
+          <a:bodyPr wrap="square" rtlCol="0" anchor="ctr"/>
+          <a:lstStyle/>
+          <a:p>
+            <a:pPr indent="0" marL="0">
+              <a:lnSpc>
+                <a:spcPct val="115000"/>
+              </a:lnSpc>
+              <a:buNone/>
+            </a:pPr>
+            <a:r>
+              <a:rPr lang="en-US" sz="1050" dirty="0">
+                <a:solidFill>
+                  <a:srgbClr val="E2E8F0"/>
+                </a:solidFill>
+                <a:latin typeface="Calibri" pitchFamily="34" charset="0"/>
+                <a:ea typeface="Calibri" pitchFamily="34" charset="-122"/>
+                <a:cs typeface="Calibri" pitchFamily="34" charset="-120"/>
+              </a:rPr>
+              <a:t>• Veteran-founded, Black-led 501(c)(3)</a:t>
+            </a:r>
+            <a:endParaRPr lang="en-US" sz="1050" dirty="0"/>
+          </a:p>
+          <a:p>
+            <a:pPr indent="0" marL="0">
+              <a:lnSpc>
+                <a:spcPct val="115000"/>
+              </a:lnSpc>
+              <a:buNone/>
+            </a:pPr>
+            <a:r>
+              <a:rPr lang="en-US" sz="1050" dirty="0">
+                <a:solidFill>
+                  <a:srgbClr val="E2E8F0"/>
+                </a:solidFill>
+                <a:latin typeface="Calibri" pitchFamily="34" charset="0"/>
+                <a:ea typeface="Calibri" pitchFamily="34" charset="-122"/>
+                <a:cs typeface="Calibri" pitchFamily="34" charset="-120"/>
+              </a:rPr>
+              <a:t>• Dr. Flood: DHA, MS Implementation Science,</a:t>
+            </a:r>
+            <a:endParaRPr lang="en-US" sz="1050" dirty="0"/>
+          </a:p>
+          <a:p>
+            <a:pPr indent="0" marL="0">
+              <a:lnSpc>
+                <a:spcPct val="115000"/>
+              </a:lnSpc>
+              <a:buNone/>
+            </a:pPr>
+            <a:r>
+              <a:rPr lang="en-US" sz="1050" dirty="0">
+                <a:solidFill>
+                  <a:srgbClr val="E2E8F0"/>
+                </a:solidFill>
+                <a:latin typeface="Calibri" pitchFamily="34" charset="0"/>
+                <a:ea typeface="Calibri" pitchFamily="34" charset="-122"/>
+                <a:cs typeface="Calibri" pitchFamily="34" charset="-120"/>
+              </a:rPr>
+              <a:t>   MA Psychology, MSHRM, MBA, MSCJ</a:t>
+            </a:r>
+            <a:endParaRPr lang="en-US" sz="1050" dirty="0"/>
+          </a:p>
+          <a:p>
+            <a:pPr indent="0" marL="0">
+              <a:lnSpc>
+                <a:spcPct val="115000"/>
+              </a:lnSpc>
+              <a:buNone/>
+            </a:pPr>
+            <a:r>
+              <a:rPr lang="en-US" sz="1050" dirty="0">
+                <a:solidFill>
+                  <a:srgbClr val="E2E8F0"/>
+                </a:solidFill>
+                <a:latin typeface="Calibri" pitchFamily="34" charset="0"/>
+                <a:ea typeface="Calibri" pitchFamily="34" charset="-122"/>
+                <a:cs typeface="Calibri" pitchFamily="34" charset="-120"/>
+              </a:rPr>
+              <a:t>   U.S. Army Veteran — Bronze Star (x2)</a:t>
+            </a:r>
+            <a:endParaRPr lang="en-US" sz="1050" dirty="0"/>
+          </a:p>
+          <a:p>
+            <a:pPr indent="0" marL="0">
+              <a:lnSpc>
+                <a:spcPct val="115000"/>
+              </a:lnSpc>
+              <a:buNone/>
+            </a:pPr>
+            <a:endParaRPr lang="en-US" sz="1050" dirty="0"/>
+          </a:p>
+          <a:p>
+            <a:pPr indent="0" marL="0">
+              <a:lnSpc>
+                <a:spcPct val="115000"/>
+              </a:lnSpc>
+              <a:buNone/>
+            </a:pPr>
+            <a:r>
+              <a:rPr lang="en-US" sz="1050" dirty="0">
+                <a:solidFill>
+                  <a:srgbClr val="E2E8F0"/>
+                </a:solidFill>
+                <a:latin typeface="Calibri" pitchFamily="34" charset="0"/>
+                <a:ea typeface="Calibri" pitchFamily="34" charset="-122"/>
+                <a:cs typeface="Calibri" pitchFamily="34" charset="-120"/>
+              </a:rPr>
+              <a:t>• Same Central Texas community focus</a:t>
+            </a:r>
+            <a:endParaRPr lang="en-US" sz="1050" dirty="0"/>
+          </a:p>
+          <a:p>
+            <a:pPr indent="0" marL="0">
+              <a:lnSpc>
+                <a:spcPct val="115000"/>
+              </a:lnSpc>
+              <a:buNone/>
+            </a:pPr>
+            <a:r>
+              <a:rPr lang="en-US" sz="1050" dirty="0">
+                <a:solidFill>
+                  <a:srgbClr val="E2E8F0"/>
+                </a:solidFill>
+                <a:latin typeface="Calibri" pitchFamily="34" charset="0"/>
+                <a:ea typeface="Calibri" pitchFamily="34" charset="-122"/>
+                <a:cs typeface="Calibri" pitchFamily="34" charset="-120"/>
+              </a:rPr>
+              <a:t>   Austin | Manor | Pflugerville</a:t>
+            </a:r>
+            <a:endParaRPr lang="en-US" sz="1050" dirty="0"/>
+          </a:p>
+          <a:p>
+            <a:pPr indent="0" marL="0">
+              <a:lnSpc>
+                <a:spcPct val="115000"/>
+              </a:lnSpc>
+              <a:buNone/>
+            </a:pPr>
+            <a:endParaRPr lang="en-US" sz="1050" dirty="0"/>
+          </a:p>
+          <a:p>
+            <a:pPr indent="0" marL="0">
+              <a:lnSpc>
+                <a:spcPct val="115000"/>
+              </a:lnSpc>
+              <a:buNone/>
+            </a:pPr>
+            <a:r>
+              <a:rPr lang="en-US" sz="1050" dirty="0">
+                <a:solidFill>
+                  <a:srgbClr val="E2E8F0"/>
+                </a:solidFill>
+                <a:latin typeface="Calibri" pitchFamily="34" charset="0"/>
+                <a:ea typeface="Calibri" pitchFamily="34" charset="-122"/>
+                <a:cs typeface="Calibri" pitchFamily="34" charset="-120"/>
+              </a:rPr>
+              <a:t>• Three Realities ensures community voice</a:t>
+            </a:r>
+            <a:endParaRPr lang="en-US" sz="1050" dirty="0"/>
+          </a:p>
+          <a:p>
+            <a:pPr indent="0" marL="0">
+              <a:lnSpc>
+                <a:spcPct val="115000"/>
+              </a:lnSpc>
+              <a:buNone/>
+            </a:pPr>
+            <a:r>
+              <a:rPr lang="en-US" sz="1050" dirty="0">
+                <a:solidFill>
+                  <a:srgbClr val="E2E8F0"/>
+                </a:solidFill>
+                <a:latin typeface="Calibri" pitchFamily="34" charset="0"/>
+                <a:ea typeface="Calibri" pitchFamily="34" charset="-122"/>
+                <a:cs typeface="Calibri" pitchFamily="34" charset="-120"/>
+              </a:rPr>
+              <a:t>   drives every program we touch</a:t>
+            </a:r>
+            <a:endParaRPr lang="en-US" sz="1050" dirty="0"/>
+          </a:p>
+          <a:p>
+            <a:pPr indent="0" marL="0">
+              <a:lnSpc>
+                <a:spcPct val="115000"/>
+              </a:lnSpc>
+              <a:buNone/>
+            </a:pPr>
+            <a:endParaRPr lang="en-US" sz="1050" dirty="0"/>
+          </a:p>
+          <a:p>
+            <a:pPr indent="0" marL="0">
+              <a:lnSpc>
+                <a:spcPct val="115000"/>
+              </a:lnSpc>
+              <a:buNone/>
+            </a:pPr>
+            <a:r>
+              <a:rPr lang="en-US" sz="1050" dirty="0">
+                <a:solidFill>
+                  <a:srgbClr val="E2E8F0"/>
+                </a:solidFill>
+                <a:latin typeface="Calibri" pitchFamily="34" charset="0"/>
+                <a:ea typeface="Calibri" pitchFamily="34" charset="-122"/>
+                <a:cs typeface="Calibri" pitchFamily="34" charset="-120"/>
+              </a:rPr>
+              <a:t>• Technology is the backbone — we provide</a:t>
+            </a:r>
+            <a:endParaRPr lang="en-US" sz="1050" dirty="0"/>
+          </a:p>
+          <a:p>
+            <a:pPr indent="0" marL="0">
+              <a:lnSpc>
+                <a:spcPct val="115000"/>
+              </a:lnSpc>
+              <a:buNone/>
+            </a:pPr>
+            <a:r>
+              <a:rPr lang="en-US" sz="1050" dirty="0">
+                <a:solidFill>
+                  <a:srgbClr val="E2E8F0"/>
+                </a:solidFill>
+                <a:latin typeface="Calibri" pitchFamily="34" charset="0"/>
+                <a:ea typeface="Calibri" pitchFamily="34" charset="-122"/>
+                <a:cs typeface="Calibri" pitchFamily="34" charset="-120"/>
+              </a:rPr>
+              <a:t>   the engineering that community orgs need</a:t>
+            </a:r>
+            <a:endParaRPr lang="en-US" sz="1050" dirty="0"/>
+          </a:p>
+          <a:p>
+            <a:pPr indent="0" marL="0">
+              <a:lnSpc>
+                <a:spcPct val="115000"/>
+              </a:lnSpc>
+              <a:buNone/>
+            </a:pPr>
+            <a:r>
+              <a:rPr lang="en-US" sz="1050" dirty="0">
+                <a:solidFill>
+                  <a:srgbClr val="E2E8F0"/>
+                </a:solidFill>
+                <a:latin typeface="Calibri" pitchFamily="34" charset="0"/>
+                <a:ea typeface="Calibri" pitchFamily="34" charset="-122"/>
+                <a:cs typeface="Calibri" pitchFamily="34" charset="-120"/>
+              </a:rPr>
+              <a:t>   but cannot build on their own</a:t>
+            </a:r>
+            <a:endParaRPr lang="en-US" sz="1050" dirty="0"/>
+          </a:p>
+          <a:p>
+            <a:pPr indent="0" marL="0">
+              <a:lnSpc>
+                <a:spcPct val="115000"/>
+              </a:lnSpc>
+              <a:buNone/>
+            </a:pPr>
+            <a:endParaRPr lang="en-US" sz="1050" dirty="0"/>
+          </a:p>
+          <a:p>
+            <a:pPr indent="0" marL="0">
+              <a:lnSpc>
+                <a:spcPct val="115000"/>
+              </a:lnSpc>
+              <a:buNone/>
+            </a:pPr>
+            <a:r>
+              <a:rPr lang="en-US" sz="1050" dirty="0">
+                <a:solidFill>
+                  <a:srgbClr val="E2E8F0"/>
+                </a:solidFill>
+                <a:latin typeface="Calibri" pitchFamily="34" charset="0"/>
+                <a:ea typeface="Calibri" pitchFamily="34" charset="-122"/>
+                <a:cs typeface="Calibri" pitchFamily="34" charset="-120"/>
+              </a:rPr>
+              <a:t>• We measure what matters, not just activities</a:t>
             </a:r>
             <a:endParaRPr lang="en-US" sz="1050" dirty="0"/>
           </a:p>
@@ -9688,7 +10698,7 @@
                 <a:ea typeface="Georgia" pitchFamily="34" charset="-122"/>
                 <a:cs typeface="Georgia" pitchFamily="34" charset="-120"/>
               </a:rPr>
-              <a:t>The Gap We Fill Together</a:t>
+              <a:t>MEASURE — A Natural Collaboration</a:t>
             </a:r>
             <a:endParaRPr lang="en-US" sz="2400" dirty="0"/>
           </a:p>
@@ -9702,34 +10712,34 @@
         </p:nvSpPr>
         <p:spPr>
           <a:xfrm>
-            <a:off x="731520" y="1097280"/>
-            <a:ext cx="3840480" cy="274320"/>
-          </a:xfrm>
-          <a:prstGeom prst="rect">
-            <a:avLst/>
-          </a:prstGeom>
-          <a:noFill/>
-          <a:ln/>
-        </p:spPr>
-        <p:txBody>
-          <a:bodyPr wrap="square" rtlCol="0" anchor="ctr"/>
-          <a:lstStyle/>
-          <a:p>
-            <a:pPr indent="0" marL="0">
-              <a:buNone/>
-            </a:pPr>
-            <a:r>
-              <a:rPr lang="en-US" sz="1300" b="1" dirty="0">
-                <a:solidFill>
-                  <a:srgbClr val="F59E0B"/>
+            <a:off x="731520" y="822960"/>
+            <a:ext cx="7680960" cy="274320"/>
+          </a:xfrm>
+          <a:prstGeom prst="rect">
+            <a:avLst/>
+          </a:prstGeom>
+          <a:noFill/>
+          <a:ln/>
+        </p:spPr>
+        <p:txBody>
+          <a:bodyPr wrap="square" rtlCol="0" anchor="ctr"/>
+          <a:lstStyle/>
+          <a:p>
+            <a:pPr indent="0" marL="0">
+              <a:buNone/>
+            </a:pPr>
+            <a:r>
+              <a:rPr lang="en-US" sz="1200" dirty="0">
+                <a:solidFill>
+                  <a:srgbClr val="94A3B8"/>
                 </a:solidFill>
                 <a:latin typeface="Georgia" pitchFamily="34" charset="0"/>
                 <a:ea typeface="Georgia" pitchFamily="34" charset="-122"/>
                 <a:cs typeface="Georgia" pitchFamily="34" charset="-120"/>
               </a:rPr>
-              <a:t>The Problem:</a:t>
-            </a:r>
-            <a:endParaRPr lang="en-US" sz="1300" dirty="0"/>
+              <a:t>Complementary capabilities serving the same Central Texas communities</a:t>
+            </a:r>
+            <a:endParaRPr lang="en-US" sz="1200" dirty="0"/>
           </a:p>
         </p:txBody>
       </p:sp>
@@ -9741,247 +10751,7 @@
         </p:nvSpPr>
         <p:spPr>
           <a:xfrm>
-            <a:off x="731520" y="1463040"/>
-            <a:ext cx="3840480" cy="2743200"/>
-          </a:xfrm>
-          <a:prstGeom prst="rect">
-            <a:avLst/>
-          </a:prstGeom>
-          <a:noFill/>
-          <a:ln/>
-        </p:spPr>
-        <p:txBody>
-          <a:bodyPr wrap="square" rtlCol="0" anchor="ctr"/>
-          <a:lstStyle/>
-          <a:p>
-            <a:pPr indent="0" marL="0">
-              <a:lnSpc>
-                <a:spcPct val="120000"/>
-              </a:lnSpc>
-              <a:buNone/>
-            </a:pPr>
-            <a:r>
-              <a:rPr lang="en-US" sz="1050" dirty="0">
-                <a:solidFill>
-                  <a:srgbClr val="E2E8F0"/>
-                </a:solidFill>
-                <a:latin typeface="Calibri" pitchFamily="34" charset="0"/>
-                <a:ea typeface="Calibri" pitchFamily="34" charset="-122"/>
-                <a:cs typeface="Calibri" pitchFamily="34" charset="-120"/>
-              </a:rPr>
-              <a:t>MEASURE found that 79% of Black-led</a:t>
-            </a:r>
-            <a:endParaRPr lang="en-US" sz="1050" dirty="0"/>
-          </a:p>
-          <a:p>
-            <a:pPr indent="0" marL="0">
-              <a:lnSpc>
-                <a:spcPct val="120000"/>
-              </a:lnSpc>
-              <a:buNone/>
-            </a:pPr>
-            <a:r>
-              <a:rPr lang="en-US" sz="1050" dirty="0">
-                <a:solidFill>
-                  <a:srgbClr val="E2E8F0"/>
-                </a:solidFill>
-                <a:latin typeface="Calibri" pitchFamily="34" charset="0"/>
-                <a:ea typeface="Calibri" pitchFamily="34" charset="-122"/>
-                <a:cs typeface="Calibri" pitchFamily="34" charset="-120"/>
-              </a:rPr>
-              <a:t>organizations have no systems for collecting data.</a:t>
-            </a:r>
-            <a:endParaRPr lang="en-US" sz="1050" dirty="0"/>
-          </a:p>
-          <a:p>
-            <a:pPr indent="0" marL="0">
-              <a:lnSpc>
-                <a:spcPct val="120000"/>
-              </a:lnSpc>
-              <a:buNone/>
-            </a:pPr>
-            <a:endParaRPr lang="en-US" sz="1050" dirty="0"/>
-          </a:p>
-          <a:p>
-            <a:pPr indent="0" marL="0">
-              <a:lnSpc>
-                <a:spcPct val="120000"/>
-              </a:lnSpc>
-              <a:buNone/>
-            </a:pPr>
-            <a:r>
-              <a:rPr lang="en-US" sz="1050" dirty="0">
-                <a:solidFill>
-                  <a:srgbClr val="E2E8F0"/>
-                </a:solidFill>
-                <a:latin typeface="Calibri" pitchFamily="34" charset="0"/>
-                <a:ea typeface="Calibri" pitchFamily="34" charset="-122"/>
-                <a:cs typeface="Calibri" pitchFamily="34" charset="-120"/>
-              </a:rPr>
-              <a:t>That's why they built Ignite.</a:t>
-            </a:r>
-            <a:endParaRPr lang="en-US" sz="1050" dirty="0"/>
-          </a:p>
-          <a:p>
-            <a:pPr indent="0" marL="0">
-              <a:lnSpc>
-                <a:spcPct val="120000"/>
-              </a:lnSpc>
-              <a:buNone/>
-            </a:pPr>
-            <a:r>
-              <a:rPr lang="en-US" sz="1050" dirty="0">
-                <a:solidFill>
-                  <a:srgbClr val="E2E8F0"/>
-                </a:solidFill>
-                <a:latin typeface="Calibri" pitchFamily="34" charset="0"/>
-                <a:ea typeface="Calibri" pitchFamily="34" charset="-122"/>
-                <a:cs typeface="Calibri" pitchFamily="34" charset="-120"/>
-              </a:rPr>
-              <a:t>But collecting data is step one.</a:t>
-            </a:r>
-            <a:endParaRPr lang="en-US" sz="1050" dirty="0"/>
-          </a:p>
-          <a:p>
-            <a:pPr indent="0" marL="0">
-              <a:lnSpc>
-                <a:spcPct val="120000"/>
-              </a:lnSpc>
-              <a:buNone/>
-            </a:pPr>
-            <a:endParaRPr lang="en-US" sz="1050" dirty="0"/>
-          </a:p>
-          <a:p>
-            <a:pPr indent="0" marL="0">
-              <a:lnSpc>
-                <a:spcPct val="120000"/>
-              </a:lnSpc>
-              <a:buNone/>
-            </a:pPr>
-            <a:r>
-              <a:rPr lang="en-US" sz="1050" dirty="0">
-                <a:solidFill>
-                  <a:srgbClr val="E2E8F0"/>
-                </a:solidFill>
-                <a:latin typeface="Calibri" pitchFamily="34" charset="0"/>
-                <a:ea typeface="Calibri" pitchFamily="34" charset="-122"/>
-                <a:cs typeface="Calibri" pitchFamily="34" charset="-120"/>
-              </a:rPr>
-              <a:t>The harder questions are:</a:t>
-            </a:r>
-            <a:endParaRPr lang="en-US" sz="1050" dirty="0"/>
-          </a:p>
-          <a:p>
-            <a:pPr indent="0" marL="0">
-              <a:lnSpc>
-                <a:spcPct val="120000"/>
-              </a:lnSpc>
-              <a:buNone/>
-            </a:pPr>
-            <a:r>
-              <a:rPr lang="en-US" sz="1050" dirty="0">
-                <a:solidFill>
-                  <a:srgbClr val="E2E8F0"/>
-                </a:solidFill>
-                <a:latin typeface="Calibri" pitchFamily="34" charset="0"/>
-                <a:ea typeface="Calibri" pitchFamily="34" charset="-122"/>
-                <a:cs typeface="Calibri" pitchFamily="34" charset="-120"/>
-              </a:rPr>
-              <a:t>  Is the intervention being delivered</a:t>
-            </a:r>
-            <a:endParaRPr lang="en-US" sz="1050" dirty="0"/>
-          </a:p>
-          <a:p>
-            <a:pPr indent="0" marL="0">
-              <a:lnSpc>
-                <a:spcPct val="120000"/>
-              </a:lnSpc>
-              <a:buNone/>
-            </a:pPr>
-            <a:r>
-              <a:rPr lang="en-US" sz="1050" dirty="0">
-                <a:solidFill>
-                  <a:srgbClr val="E2E8F0"/>
-                </a:solidFill>
-                <a:latin typeface="Calibri" pitchFamily="34" charset="0"/>
-                <a:ea typeface="Calibri" pitchFamily="34" charset="-122"/>
-                <a:cs typeface="Calibri" pitchFamily="34" charset="-120"/>
-              </a:rPr>
-              <a:t>  the way it was designed?</a:t>
-            </a:r>
-            <a:endParaRPr lang="en-US" sz="1050" dirty="0"/>
-          </a:p>
-          <a:p>
-            <a:pPr indent="0" marL="0">
-              <a:lnSpc>
-                <a:spcPct val="120000"/>
-              </a:lnSpc>
-              <a:buNone/>
-            </a:pPr>
-            <a:r>
-              <a:rPr lang="en-US" sz="1050" dirty="0">
-                <a:solidFill>
-                  <a:srgbClr val="E2E8F0"/>
-                </a:solidFill>
-                <a:latin typeface="Calibri" pitchFamily="34" charset="0"/>
-                <a:ea typeface="Calibri" pitchFamily="34" charset="-122"/>
-                <a:cs typeface="Calibri" pitchFamily="34" charset="-120"/>
-              </a:rPr>
-              <a:t>  Are outcomes improving?</a:t>
-            </a:r>
-            <a:endParaRPr lang="en-US" sz="1050" dirty="0"/>
-          </a:p>
-          <a:p>
-            <a:pPr indent="0" marL="0">
-              <a:lnSpc>
-                <a:spcPct val="120000"/>
-              </a:lnSpc>
-              <a:buNone/>
-            </a:pPr>
-            <a:r>
-              <a:rPr lang="en-US" sz="1050" dirty="0">
-                <a:solidFill>
-                  <a:srgbClr val="E2E8F0"/>
-                </a:solidFill>
-                <a:latin typeface="Calibri" pitchFamily="34" charset="0"/>
-                <a:ea typeface="Calibri" pitchFamily="34" charset="-122"/>
-                <a:cs typeface="Calibri" pitchFamily="34" charset="-120"/>
-              </a:rPr>
-              <a:t>  What's the gap between plan and reality?</a:t>
-            </a:r>
-            <a:endParaRPr lang="en-US" sz="1050" dirty="0"/>
-          </a:p>
-          <a:p>
-            <a:pPr indent="0" marL="0">
-              <a:lnSpc>
-                <a:spcPct val="120000"/>
-              </a:lnSpc>
-              <a:buNone/>
-            </a:pPr>
-            <a:r>
-              <a:rPr lang="en-US" sz="1050" dirty="0">
-                <a:solidFill>
-                  <a:srgbClr val="E2E8F0"/>
-                </a:solidFill>
-                <a:latin typeface="Calibri" pitchFamily="34" charset="0"/>
-                <a:ea typeface="Calibri" pitchFamily="34" charset="-122"/>
-                <a:cs typeface="Calibri" pitchFamily="34" charset="-120"/>
-              </a:rPr>
-              <a:t>  How do we know it will sustain?</a:t>
-            </a:r>
-            <a:endParaRPr lang="en-US" sz="1050" dirty="0"/>
-          </a:p>
-        </p:txBody>
-      </p:sp>
-      <p:sp>
-        <p:nvSpPr>
-          <p:cNvPr id="6" name="Text 3"/>
-          <p:cNvSpPr/>
-          <p:nvPr/>
-        </p:nvSpPr>
-        <p:spPr>
-          <a:xfrm>
-            <a:off x="4846320" y="1097280"/>
+            <a:off x="731520" y="1371600"/>
             <a:ext cx="3840480" cy="274320"/>
           </a:xfrm>
           <a:prstGeom prst="rect">
@@ -10006,7 +10776,7 @@
                 <a:ea typeface="Georgia" pitchFamily="34" charset="-122"/>
                 <a:cs typeface="Georgia" pitchFamily="34" charset="-120"/>
               </a:rPr>
-              <a:t>Together — The Full AI-Powered Loop:</a:t>
+              <a:t>What MEASURE Brings:</a:t>
             </a:r>
             <a:endParaRPr lang="en-US" sz="1300" dirty="0"/>
           </a:p>
@@ -10014,13 +10784,294 @@
       </p:sp>
       <p:sp>
         <p:nvSpPr>
+          <p:cNvPr id="6" name="Text 3"/>
+          <p:cNvSpPr/>
+          <p:nvPr/>
+        </p:nvSpPr>
+        <p:spPr>
+          <a:xfrm>
+            <a:off x="731520" y="1737360"/>
+            <a:ext cx="3840480" cy="3017520"/>
+          </a:xfrm>
+          <a:prstGeom prst="rect">
+            <a:avLst/>
+          </a:prstGeom>
+          <a:noFill/>
+          <a:ln/>
+        </p:spPr>
+        <p:txBody>
+          <a:bodyPr wrap="square" rtlCol="0" anchor="ctr"/>
+          <a:lstStyle/>
+          <a:p>
+            <a:pPr indent="0" marL="0">
+              <a:lnSpc>
+                <a:spcPct val="120000"/>
+              </a:lnSpc>
+              <a:buNone/>
+            </a:pPr>
+            <a:r>
+              <a:rPr lang="en-US" sz="1050" dirty="0">
+                <a:solidFill>
+                  <a:srgbClr val="E2E8F0"/>
+                </a:solidFill>
+                <a:latin typeface="Calibri" pitchFamily="34" charset="0"/>
+                <a:ea typeface="Calibri" pitchFamily="34" charset="-122"/>
+                <a:cs typeface="Calibri" pitchFamily="34" charset="-120"/>
+              </a:rPr>
+              <a:t>• Community trust &amp; deep relationships</a:t>
+            </a:r>
+            <a:endParaRPr lang="en-US" sz="1050" dirty="0"/>
+          </a:p>
+          <a:p>
+            <a:pPr indent="0" marL="0">
+              <a:lnSpc>
+                <a:spcPct val="120000"/>
+              </a:lnSpc>
+              <a:buNone/>
+            </a:pPr>
+            <a:r>
+              <a:rPr lang="en-US" sz="1050" dirty="0">
+                <a:solidFill>
+                  <a:srgbClr val="E2E8F0"/>
+                </a:solidFill>
+                <a:latin typeface="Calibri" pitchFamily="34" charset="0"/>
+                <a:ea typeface="Calibri" pitchFamily="34" charset="-122"/>
+                <a:cs typeface="Calibri" pitchFamily="34" charset="-120"/>
+              </a:rPr>
+              <a:t>• CARE Model — equity-centered evaluation</a:t>
+            </a:r>
+            <a:endParaRPr lang="en-US" sz="1050" dirty="0"/>
+          </a:p>
+          <a:p>
+            <a:pPr indent="0" marL="0">
+              <a:lnSpc>
+                <a:spcPct val="120000"/>
+              </a:lnSpc>
+              <a:buNone/>
+            </a:pPr>
+            <a:r>
+              <a:rPr lang="en-US" sz="1050" dirty="0">
+                <a:solidFill>
+                  <a:srgbClr val="E2E8F0"/>
+                </a:solidFill>
+                <a:latin typeface="Calibri" pitchFamily="34" charset="0"/>
+                <a:ea typeface="Calibri" pitchFamily="34" charset="-122"/>
+                <a:cs typeface="Calibri" pitchFamily="34" charset="-120"/>
+              </a:rPr>
+              <a:t>• Ignite platform — data collection for orgs</a:t>
+            </a:r>
+            <a:endParaRPr lang="en-US" sz="1050" dirty="0"/>
+          </a:p>
+          <a:p>
+            <a:pPr indent="0" marL="0">
+              <a:lnSpc>
+                <a:spcPct val="120000"/>
+              </a:lnSpc>
+              <a:buNone/>
+            </a:pPr>
+            <a:r>
+              <a:rPr lang="en-US" sz="1050" dirty="0">
+                <a:solidFill>
+                  <a:srgbClr val="E2E8F0"/>
+                </a:solidFill>
+                <a:latin typeface="Calibri" pitchFamily="34" charset="0"/>
+                <a:ea typeface="Calibri" pitchFamily="34" charset="-122"/>
+                <a:cs typeface="Calibri" pitchFamily="34" charset="-120"/>
+              </a:rPr>
+              <a:t>• Participatory Action Research expertise</a:t>
+            </a:r>
+            <a:endParaRPr lang="en-US" sz="1050" dirty="0"/>
+          </a:p>
+          <a:p>
+            <a:pPr indent="0" marL="0">
+              <a:lnSpc>
+                <a:spcPct val="120000"/>
+              </a:lnSpc>
+              <a:buNone/>
+            </a:pPr>
+            <a:r>
+              <a:rPr lang="en-US" sz="1050" dirty="0">
+                <a:solidFill>
+                  <a:srgbClr val="E2E8F0"/>
+                </a:solidFill>
+                <a:latin typeface="Calibri" pitchFamily="34" charset="0"/>
+                <a:ea typeface="Calibri" pitchFamily="34" charset="-122"/>
+                <a:cs typeface="Calibri" pitchFamily="34" charset="-120"/>
+              </a:rPr>
+              <a:t>• 3,000+ hours of free data support delivered</a:t>
+            </a:r>
+            <a:endParaRPr lang="en-US" sz="1050" dirty="0"/>
+          </a:p>
+          <a:p>
+            <a:pPr indent="0" marL="0">
+              <a:lnSpc>
+                <a:spcPct val="120000"/>
+              </a:lnSpc>
+              <a:buNone/>
+            </a:pPr>
+            <a:r>
+              <a:rPr lang="en-US" sz="1050" dirty="0">
+                <a:solidFill>
+                  <a:srgbClr val="E2E8F0"/>
+                </a:solidFill>
+                <a:latin typeface="Calibri" pitchFamily="34" charset="0"/>
+                <a:ea typeface="Calibri" pitchFamily="34" charset="-122"/>
+                <a:cs typeface="Calibri" pitchFamily="34" charset="-120"/>
+              </a:rPr>
+              <a:t>• Austin/Pflugerville community presence</a:t>
+            </a:r>
+            <a:endParaRPr lang="en-US" sz="1050" dirty="0"/>
+          </a:p>
+          <a:p>
+            <a:pPr indent="0" marL="0">
+              <a:lnSpc>
+                <a:spcPct val="120000"/>
+              </a:lnSpc>
+              <a:buNone/>
+            </a:pPr>
+            <a:r>
+              <a:rPr lang="en-US" sz="1050" dirty="0">
+                <a:solidFill>
+                  <a:srgbClr val="E2E8F0"/>
+                </a:solidFill>
+                <a:latin typeface="Calibri" pitchFamily="34" charset="0"/>
+                <a:ea typeface="Calibri" pitchFamily="34" charset="-122"/>
+                <a:cs typeface="Calibri" pitchFamily="34" charset="-120"/>
+              </a:rPr>
+              <a:t>• Huston-Tillotson partnership (HBCU)</a:t>
+            </a:r>
+            <a:endParaRPr lang="en-US" sz="1050" dirty="0"/>
+          </a:p>
+          <a:p>
+            <a:pPr indent="0" marL="0">
+              <a:lnSpc>
+                <a:spcPct val="120000"/>
+              </a:lnSpc>
+              <a:buNone/>
+            </a:pPr>
+            <a:r>
+              <a:rPr lang="en-US" sz="1050" dirty="0">
+                <a:solidFill>
+                  <a:srgbClr val="E2E8F0"/>
+                </a:solidFill>
+                <a:latin typeface="Calibri" pitchFamily="34" charset="0"/>
+                <a:ea typeface="Calibri" pitchFamily="34" charset="-122"/>
+                <a:cs typeface="Calibri" pitchFamily="34" charset="-120"/>
+              </a:rPr>
+              <a:t>• Policy advocacy track record (CROWN Act)</a:t>
+            </a:r>
+            <a:endParaRPr lang="en-US" sz="1050" dirty="0"/>
+          </a:p>
+          <a:p>
+            <a:pPr indent="0" marL="0">
+              <a:lnSpc>
+                <a:spcPct val="120000"/>
+              </a:lnSpc>
+              <a:buNone/>
+            </a:pPr>
+            <a:r>
+              <a:rPr lang="en-US" sz="1050" dirty="0">
+                <a:solidFill>
+                  <a:srgbClr val="E2E8F0"/>
+                </a:solidFill>
+                <a:latin typeface="Calibri" pitchFamily="34" charset="0"/>
+                <a:ea typeface="Calibri" pitchFamily="34" charset="-122"/>
+                <a:cs typeface="Calibri" pitchFamily="34" charset="-120"/>
+              </a:rPr>
+              <a:t>• MIT Solve backing</a:t>
+            </a:r>
+            <a:endParaRPr lang="en-US" sz="1050" dirty="0"/>
+          </a:p>
+          <a:p>
+            <a:pPr indent="0" marL="0">
+              <a:lnSpc>
+                <a:spcPct val="120000"/>
+              </a:lnSpc>
+              <a:buNone/>
+            </a:pPr>
+            <a:r>
+              <a:rPr lang="en-US" sz="1050" dirty="0">
+                <a:solidFill>
+                  <a:srgbClr val="E2E8F0"/>
+                </a:solidFill>
+                <a:latin typeface="Calibri" pitchFamily="34" charset="0"/>
+                <a:ea typeface="Calibri" pitchFamily="34" charset="-122"/>
+                <a:cs typeface="Calibri" pitchFamily="34" charset="-120"/>
+              </a:rPr>
+              <a:t>• Founded by Jameila "Meme" Styles,</a:t>
+            </a:r>
+            <a:endParaRPr lang="en-US" sz="1050" dirty="0"/>
+          </a:p>
+          <a:p>
+            <a:pPr indent="0" marL="0">
+              <a:lnSpc>
+                <a:spcPct val="120000"/>
+              </a:lnSpc>
+              <a:buNone/>
+            </a:pPr>
+            <a:r>
+              <a:rPr lang="en-US" sz="1050" dirty="0">
+                <a:solidFill>
+                  <a:srgbClr val="E2E8F0"/>
+                </a:solidFill>
+                <a:latin typeface="Calibri" pitchFamily="34" charset="0"/>
+                <a:ea typeface="Calibri" pitchFamily="34" charset="-122"/>
+                <a:cs typeface="Calibri" pitchFamily="34" charset="-120"/>
+              </a:rPr>
+              <a:t>   a leading ethical AI consultant</a:t>
+            </a:r>
+            <a:endParaRPr lang="en-US" sz="1050" dirty="0"/>
+          </a:p>
+        </p:txBody>
+      </p:sp>
+      <p:sp>
+        <p:nvSpPr>
           <p:cNvPr id="7" name="Text 4"/>
           <p:cNvSpPr/>
           <p:nvPr/>
         </p:nvSpPr>
         <p:spPr>
           <a:xfrm>
-            <a:off x="4846320" y="1463040"/>
+            <a:off x="4846320" y="1371600"/>
+            <a:ext cx="3840480" cy="274320"/>
+          </a:xfrm>
+          <a:prstGeom prst="rect">
+            <a:avLst/>
+          </a:prstGeom>
+          <a:noFill/>
+          <a:ln/>
+        </p:spPr>
+        <p:txBody>
+          <a:bodyPr wrap="square" rtlCol="0" anchor="ctr"/>
+          <a:lstStyle/>
+          <a:p>
+            <a:pPr indent="0" marL="0">
+              <a:buNone/>
+            </a:pPr>
+            <a:r>
+              <a:rPr lang="en-US" sz="1300" b="1" dirty="0">
+                <a:solidFill>
+                  <a:srgbClr val="6366F1"/>
+                </a:solidFill>
+                <a:latin typeface="Georgia" pitchFamily="34" charset="0"/>
+                <a:ea typeface="Georgia" pitchFamily="34" charset="-122"/>
+                <a:cs typeface="Georgia" pitchFamily="34" charset="-120"/>
+              </a:rPr>
+              <a:t>What We Bring:</a:t>
+            </a:r>
+            <a:endParaRPr lang="en-US" sz="1300" dirty="0"/>
+          </a:p>
+        </p:txBody>
+      </p:sp>
+      <p:sp>
+        <p:nvSpPr>
+          <p:cNvPr id="8" name="Text 5"/>
+          <p:cNvSpPr/>
+          <p:nvPr/>
+        </p:nvSpPr>
+        <p:spPr>
+          <a:xfrm>
+            <a:off x="4846320" y="1737360"/>
             <a:ext cx="3840480" cy="3200400"/>
           </a:xfrm>
           <a:prstGeom prst="rect">
@@ -10048,7 +11099,7 @@
                 <a:ea typeface="Calibri" pitchFamily="34" charset="-122"/>
                 <a:cs typeface="Calibri" pitchFamily="34" charset="-120"/>
               </a:rPr>
-              <a:t>MEASURE:</a:t>
+              <a:t>• 24-platform AI-powered ecosystem</a:t>
             </a:r>
             <a:endParaRPr lang="en-US" sz="1050" dirty="0"/>
           </a:p>
@@ -10068,7 +11119,7 @@
                 <a:ea typeface="Calibri" pitchFamily="34" charset="-122"/>
                 <a:cs typeface="Calibri" pitchFamily="34" charset="-120"/>
               </a:rPr>
-              <a:t>  Community voice → Data collection</a:t>
+              <a:t>• RPLICE — implementation fidelity engine</a:t>
             </a:r>
             <a:endParaRPr lang="en-US" sz="1050" dirty="0"/>
           </a:p>
@@ -10088,7 +11139,7 @@
                 <a:ea typeface="Calibri" pitchFamily="34" charset="-122"/>
                 <a:cs typeface="Calibri" pitchFamily="34" charset="-120"/>
               </a:rPr>
-              <a:t>  → Advocacy → Policy change</a:t>
+              <a:t>• MAP-GAP governance methodology</a:t>
             </a:r>
             <a:endParaRPr lang="en-US" sz="1050" dirty="0"/>
           </a:p>
@@ -10099,6 +11150,17 @@
               </a:lnSpc>
               <a:buNone/>
             </a:pPr>
+            <a:r>
+              <a:rPr lang="en-US" sz="1050" dirty="0">
+                <a:solidFill>
+                  <a:srgbClr val="E2E8F0"/>
+                </a:solidFill>
+                <a:latin typeface="Calibri" pitchFamily="34" charset="0"/>
+                <a:ea typeface="Calibri" pitchFamily="34" charset="-122"/>
+                <a:cs typeface="Calibri" pitchFamily="34" charset="-120"/>
+              </a:rPr>
+              <a:t>• 4-engine AI + RAG architecture</a:t>
+            </a:r>
             <a:endParaRPr lang="en-US" sz="1050" dirty="0"/>
           </a:p>
           <a:p>
@@ -10117,7 +11179,7 @@
                 <a:ea typeface="Calibri" pitchFamily="34" charset="-122"/>
                 <a:cs typeface="Calibri" pitchFamily="34" charset="-120"/>
               </a:rPr>
-              <a:t>RPLICE + AI:</a:t>
+              <a:t>• 6 scholarly databases integrated</a:t>
             </a:r>
             <a:endParaRPr lang="en-US" sz="1050" dirty="0"/>
           </a:p>
@@ -10137,7 +11199,7 @@
                 <a:ea typeface="Calibri" pitchFamily="34" charset="-122"/>
                 <a:cs typeface="Calibri" pitchFamily="34" charset="-120"/>
               </a:rPr>
-              <a:t>  Implementation design → AI fidelity tracking</a:t>
+              <a:t>• 167 database tables</a:t>
             </a:r>
             <a:endParaRPr lang="en-US" sz="1050" dirty="0"/>
           </a:p>
@@ -10157,7 +11219,7 @@
                 <a:ea typeface="Calibri" pitchFamily="34" charset="-122"/>
                 <a:cs typeface="Calibri" pitchFamily="34" charset="-120"/>
               </a:rPr>
-              <a:t>  → RAG-verified outcome measurement</a:t>
+              <a:t>• Federal contracting capability (VOSB)</a:t>
             </a:r>
             <a:endParaRPr lang="en-US" sz="1050" dirty="0"/>
           </a:p>
@@ -10168,17 +11230,6 @@
               </a:lnSpc>
               <a:buNone/>
             </a:pPr>
-            <a:r>
-              <a:rPr lang="en-US" sz="1050" dirty="0">
-                <a:solidFill>
-                  <a:srgbClr val="E2E8F0"/>
-                </a:solidFill>
-                <a:latin typeface="Calibri" pitchFamily="34" charset="0"/>
-                <a:ea typeface="Calibri" pitchFamily="34" charset="-122"/>
-                <a:cs typeface="Calibri" pitchFamily="34" charset="-120"/>
-              </a:rPr>
-              <a:t>  → Sustainment planning</a:t>
-            </a:r>
             <a:endParaRPr lang="en-US" sz="1050" dirty="0"/>
           </a:p>
           <a:p>
@@ -10188,6 +11239,17 @@
               </a:lnSpc>
               <a:buNone/>
             </a:pPr>
+            <a:r>
+              <a:rPr lang="en-US" sz="1050" dirty="0">
+                <a:solidFill>
+                  <a:srgbClr val="E2E8F0"/>
+                </a:solidFill>
+                <a:latin typeface="Calibri" pitchFamily="34" charset="0"/>
+                <a:ea typeface="Calibri" pitchFamily="34" charset="-122"/>
+                <a:cs typeface="Calibri" pitchFamily="34" charset="-120"/>
+              </a:rPr>
+              <a:t>The Full Loop Together:</a:t>
+            </a:r>
             <a:endParaRPr lang="en-US" sz="1050" dirty="0"/>
           </a:p>
           <a:p>
@@ -10206,7 +11268,7 @@
                 <a:ea typeface="Calibri" pitchFamily="34" charset="-122"/>
                 <a:cs typeface="Calibri" pitchFamily="34" charset="-120"/>
               </a:rPr>
-              <a:t>Combined:</a:t>
+              <a:t>MEASURE collects the community data.</a:t>
             </a:r>
             <a:endParaRPr lang="en-US" sz="1050" dirty="0"/>
           </a:p>
@@ -10226,7 +11288,7 @@
                 <a:ea typeface="Calibri" pitchFamily="34" charset="-122"/>
                 <a:cs typeface="Calibri" pitchFamily="34" charset="-120"/>
               </a:rPr>
-              <a:t>  Community voice drives intervention</a:t>
+              <a:t>RPLICE tells you if the interventions</a:t>
             </a:r>
             <a:endParaRPr lang="en-US" sz="1050" dirty="0"/>
           </a:p>
@@ -10246,7 +11308,7 @@
                 <a:ea typeface="Calibri" pitchFamily="34" charset="-122"/>
                 <a:cs typeface="Calibri" pitchFamily="34" charset="-120"/>
               </a:rPr>
-              <a:t>  → AI tracks implementation fidelity</a:t>
+              <a:t>that data is driving are working the way</a:t>
             </a:r>
             <a:endParaRPr lang="en-US" sz="1050" dirty="0"/>
           </a:p>
@@ -10266,7 +11328,7 @@
                 <a:ea typeface="Calibri" pitchFamily="34" charset="-122"/>
                 <a:cs typeface="Calibri" pitchFamily="34" charset="-120"/>
               </a:rPr>
-              <a:t>  → Outcomes measured against evidence (RAG)</a:t>
+              <a:t>they were designed to work.</a:t>
             </a:r>
             <a:endParaRPr lang="en-US" sz="1050" dirty="0"/>
           </a:p>
@@ -10277,17 +11339,6 @@
               </a:lnSpc>
               <a:buNone/>
             </a:pPr>
-            <a:r>
-              <a:rPr lang="en-US" sz="1050" dirty="0">
-                <a:solidFill>
-                  <a:srgbClr val="E2E8F0"/>
-                </a:solidFill>
-                <a:latin typeface="Calibri" pitchFamily="34" charset="0"/>
-                <a:ea typeface="Calibri" pitchFamily="34" charset="-122"/>
-                <a:cs typeface="Calibri" pitchFamily="34" charset="-120"/>
-              </a:rPr>
-              <a:t>  → Data feeds back to community</a:t>
-            </a:r>
             <a:endParaRPr lang="en-US" sz="1050" dirty="0"/>
           </a:p>
           <a:p>
@@ -10306,76 +11357,7 @@
                 <a:ea typeface="Calibri" pitchFamily="34" charset="-122"/>
                 <a:cs typeface="Calibri" pitchFamily="34" charset="-120"/>
               </a:rPr>
-              <a:t>  → Continuous AI-powered improvement cycle</a:t>
-            </a:r>
-            <a:endParaRPr lang="en-US" sz="1050" dirty="0"/>
-          </a:p>
-          <a:p>
-            <a:pPr indent="0" marL="0">
-              <a:lnSpc>
-                <a:spcPct val="115000"/>
-              </a:lnSpc>
-              <a:buNone/>
-            </a:pPr>
-            <a:endParaRPr lang="en-US" sz="1050" dirty="0"/>
-          </a:p>
-          <a:p>
-            <a:pPr indent="0" marL="0">
-              <a:lnSpc>
-                <a:spcPct val="115000"/>
-              </a:lnSpc>
-              <a:buNone/>
-            </a:pPr>
-            <a:r>
-              <a:rPr lang="en-US" sz="1050" dirty="0">
-                <a:solidFill>
-                  <a:srgbClr val="E2E8F0"/>
-                </a:solidFill>
-                <a:latin typeface="Calibri" pitchFamily="34" charset="0"/>
-                <a:ea typeface="Calibri" pitchFamily="34" charset="-122"/>
-                <a:cs typeface="Calibri" pitchFamily="34" charset="-120"/>
-              </a:rPr>
-              <a:t>Nobody else in Central Texas has this.</a:t>
-            </a:r>
-            <a:endParaRPr lang="en-US" sz="1050" dirty="0"/>
-          </a:p>
-          <a:p>
-            <a:pPr indent="0" marL="0">
-              <a:lnSpc>
-                <a:spcPct val="115000"/>
-              </a:lnSpc>
-              <a:buNone/>
-            </a:pPr>
-            <a:r>
-              <a:rPr lang="en-US" sz="1050" dirty="0">
-                <a:solidFill>
-                  <a:srgbClr val="E2E8F0"/>
-                </a:solidFill>
-                <a:latin typeface="Calibri" pitchFamily="34" charset="0"/>
-                <a:ea typeface="Calibri" pitchFamily="34" charset="-122"/>
-                <a:cs typeface="Calibri" pitchFamily="34" charset="-120"/>
-              </a:rPr>
-              <a:t>AI makes it scalable. One program manager</a:t>
-            </a:r>
-            <a:endParaRPr lang="en-US" sz="1050" dirty="0"/>
-          </a:p>
-          <a:p>
-            <a:pPr indent="0" marL="0">
-              <a:lnSpc>
-                <a:spcPct val="115000"/>
-              </a:lnSpc>
-              <a:buNone/>
-            </a:pPr>
-            <a:r>
-              <a:rPr lang="en-US" sz="1050" dirty="0">
-                <a:solidFill>
-                  <a:srgbClr val="E2E8F0"/>
-                </a:solidFill>
-                <a:latin typeface="Calibri" pitchFamily="34" charset="0"/>
-                <a:ea typeface="Calibri" pitchFamily="34" charset="-122"/>
-                <a:cs typeface="Calibri" pitchFamily="34" charset="-120"/>
-              </a:rPr>
-              <a:t>can run the full cycle.</a:t>
+              <a:t>Neither alone does what both together can.</a:t>
             </a:r>
             <a:endParaRPr lang="en-US" sz="1050" dirty="0"/>
           </a:p>
@@ -10446,7 +11428,7 @@
                 <a:ea typeface="Georgia" pitchFamily="34" charset="-122"/>
                 <a:cs typeface="Georgia" pitchFamily="34" charset="-120"/>
               </a:rPr>
-              <a:t>Shared Values &amp; Ethical AI Alignment</a:t>
+              <a:t>The Gap We Fill Together</a:t>
             </a:r>
             <a:endParaRPr lang="en-US" sz="2400" dirty="0"/>
           </a:p>
@@ -10477,17 +11459,17 @@
               <a:buNone/>
             </a:pPr>
             <a:r>
-              <a:rPr lang="en-US" sz="1200" b="1" dirty="0">
-                <a:solidFill>
-                  <a:srgbClr val="14B8A6"/>
+              <a:rPr lang="en-US" sz="1300" b="1" dirty="0">
+                <a:solidFill>
+                  <a:srgbClr val="F59E0B"/>
                 </a:solidFill>
                 <a:latin typeface="Georgia" pitchFamily="34" charset="0"/>
                 <a:ea typeface="Georgia" pitchFamily="34" charset="-122"/>
                 <a:cs typeface="Georgia" pitchFamily="34" charset="-120"/>
               </a:rPr>
-              <a:t>MEASURE's Core Belief:</a:t>
-            </a:r>
-            <a:endParaRPr lang="en-US" sz="1200" dirty="0"/>
+              <a:t>The Problem:</a:t>
+            </a:r>
+            <a:endParaRPr lang="en-US" sz="1300" dirty="0"/>
           </a:p>
         </p:txBody>
       </p:sp>
@@ -10500,36 +11482,234 @@
         <p:spPr>
           <a:xfrm>
             <a:off x="731520" y="1463040"/>
-            <a:ext cx="3840480" cy="1371600"/>
-          </a:xfrm>
-          <a:prstGeom prst="rect">
-            <a:avLst/>
-          </a:prstGeom>
-          <a:noFill/>
-          <a:ln/>
-        </p:spPr>
-        <p:txBody>
-          <a:bodyPr wrap="square" rtlCol="0" anchor="ctr"/>
-          <a:lstStyle/>
-          <a:p>
-            <a:pPr indent="0" marL="0">
-              <a:lnSpc>
-                <a:spcPct val="125000"/>
-              </a:lnSpc>
-              <a:buNone/>
-            </a:pPr>
-            <a:r>
-              <a:rPr lang="en-US" sz="1000" i="1" dirty="0">
-                <a:solidFill>
-                  <a:srgbClr val="E2E8F0"/>
-                </a:solidFill>
-                <a:latin typeface="Calibri" pitchFamily="34" charset="0"/>
-                <a:ea typeface="Calibri" pitchFamily="34" charset="-122"/>
-                <a:cs typeface="Calibri" pitchFamily="34" charset="-120"/>
-              </a:rPr>
-              <a:t>"Lived experience and quantitative data about complex social problems impacting Black, Brown, and Multiracial communities are not used effectively for justice due to racism, a lack of equitable data tools, and village support."</a:t>
-            </a:r>
-            <a:endParaRPr lang="en-US" sz="1000" dirty="0"/>
+            <a:ext cx="3840480" cy="2743200"/>
+          </a:xfrm>
+          <a:prstGeom prst="rect">
+            <a:avLst/>
+          </a:prstGeom>
+          <a:noFill/>
+          <a:ln/>
+        </p:spPr>
+        <p:txBody>
+          <a:bodyPr wrap="square" rtlCol="0" anchor="ctr"/>
+          <a:lstStyle/>
+          <a:p>
+            <a:pPr indent="0" marL="0">
+              <a:lnSpc>
+                <a:spcPct val="120000"/>
+              </a:lnSpc>
+              <a:buNone/>
+            </a:pPr>
+            <a:r>
+              <a:rPr lang="en-US" sz="1050" dirty="0">
+                <a:solidFill>
+                  <a:srgbClr val="E2E8F0"/>
+                </a:solidFill>
+                <a:latin typeface="Calibri" pitchFamily="34" charset="0"/>
+                <a:ea typeface="Calibri" pitchFamily="34" charset="-122"/>
+                <a:cs typeface="Calibri" pitchFamily="34" charset="-120"/>
+              </a:rPr>
+              <a:t>79% of Black-led organizations</a:t>
+            </a:r>
+            <a:endParaRPr lang="en-US" sz="1050" dirty="0"/>
+          </a:p>
+          <a:p>
+            <a:pPr indent="0" marL="0">
+              <a:lnSpc>
+                <a:spcPct val="120000"/>
+              </a:lnSpc>
+              <a:buNone/>
+            </a:pPr>
+            <a:r>
+              <a:rPr lang="en-US" sz="1050" dirty="0">
+                <a:solidFill>
+                  <a:srgbClr val="E2E8F0"/>
+                </a:solidFill>
+                <a:latin typeface="Calibri" pitchFamily="34" charset="0"/>
+                <a:ea typeface="Calibri" pitchFamily="34" charset="-122"/>
+                <a:cs typeface="Calibri" pitchFamily="34" charset="-120"/>
+              </a:rPr>
+              <a:t>have no systems for collecting data.</a:t>
+            </a:r>
+            <a:endParaRPr lang="en-US" sz="1050" dirty="0"/>
+          </a:p>
+          <a:p>
+            <a:pPr indent="0" marL="0">
+              <a:lnSpc>
+                <a:spcPct val="120000"/>
+              </a:lnSpc>
+              <a:buNone/>
+            </a:pPr>
+            <a:endParaRPr lang="en-US" sz="1050" dirty="0"/>
+          </a:p>
+          <a:p>
+            <a:pPr indent="0" marL="0">
+              <a:lnSpc>
+                <a:spcPct val="120000"/>
+              </a:lnSpc>
+              <a:buNone/>
+            </a:pPr>
+            <a:r>
+              <a:rPr lang="en-US" sz="1050" dirty="0">
+                <a:solidFill>
+                  <a:srgbClr val="E2E8F0"/>
+                </a:solidFill>
+                <a:latin typeface="Calibri" pitchFamily="34" charset="0"/>
+                <a:ea typeface="Calibri" pitchFamily="34" charset="-122"/>
+                <a:cs typeface="Calibri" pitchFamily="34" charset="-120"/>
+              </a:rPr>
+              <a:t>MEASURE built Ignite to fix that.</a:t>
+            </a:r>
+            <a:endParaRPr lang="en-US" sz="1050" dirty="0"/>
+          </a:p>
+          <a:p>
+            <a:pPr indent="0" marL="0">
+              <a:lnSpc>
+                <a:spcPct val="120000"/>
+              </a:lnSpc>
+              <a:buNone/>
+            </a:pPr>
+            <a:r>
+              <a:rPr lang="en-US" sz="1050" dirty="0">
+                <a:solidFill>
+                  <a:srgbClr val="E2E8F0"/>
+                </a:solidFill>
+                <a:latin typeface="Calibri" pitchFamily="34" charset="0"/>
+                <a:ea typeface="Calibri" pitchFamily="34" charset="-122"/>
+                <a:cs typeface="Calibri" pitchFamily="34" charset="-120"/>
+              </a:rPr>
+              <a:t>But collecting data is step one.</a:t>
+            </a:r>
+            <a:endParaRPr lang="en-US" sz="1050" dirty="0"/>
+          </a:p>
+          <a:p>
+            <a:pPr indent="0" marL="0">
+              <a:lnSpc>
+                <a:spcPct val="120000"/>
+              </a:lnSpc>
+              <a:buNone/>
+            </a:pPr>
+            <a:endParaRPr lang="en-US" sz="1050" dirty="0"/>
+          </a:p>
+          <a:p>
+            <a:pPr indent="0" marL="0">
+              <a:lnSpc>
+                <a:spcPct val="120000"/>
+              </a:lnSpc>
+              <a:buNone/>
+            </a:pPr>
+            <a:r>
+              <a:rPr lang="en-US" sz="1050" dirty="0">
+                <a:solidFill>
+                  <a:srgbClr val="E2E8F0"/>
+                </a:solidFill>
+                <a:latin typeface="Calibri" pitchFamily="34" charset="0"/>
+                <a:ea typeface="Calibri" pitchFamily="34" charset="-122"/>
+                <a:cs typeface="Calibri" pitchFamily="34" charset="-120"/>
+              </a:rPr>
+              <a:t>The harder questions are:</a:t>
+            </a:r>
+            <a:endParaRPr lang="en-US" sz="1050" dirty="0"/>
+          </a:p>
+          <a:p>
+            <a:pPr indent="0" marL="0">
+              <a:lnSpc>
+                <a:spcPct val="120000"/>
+              </a:lnSpc>
+              <a:buNone/>
+            </a:pPr>
+            <a:r>
+              <a:rPr lang="en-US" sz="1050" dirty="0">
+                <a:solidFill>
+                  <a:srgbClr val="E2E8F0"/>
+                </a:solidFill>
+                <a:latin typeface="Calibri" pitchFamily="34" charset="0"/>
+                <a:ea typeface="Calibri" pitchFamily="34" charset="-122"/>
+                <a:cs typeface="Calibri" pitchFamily="34" charset="-120"/>
+              </a:rPr>
+              <a:t>  Is the intervention being delivered</a:t>
+            </a:r>
+            <a:endParaRPr lang="en-US" sz="1050" dirty="0"/>
+          </a:p>
+          <a:p>
+            <a:pPr indent="0" marL="0">
+              <a:lnSpc>
+                <a:spcPct val="120000"/>
+              </a:lnSpc>
+              <a:buNone/>
+            </a:pPr>
+            <a:r>
+              <a:rPr lang="en-US" sz="1050" dirty="0">
+                <a:solidFill>
+                  <a:srgbClr val="E2E8F0"/>
+                </a:solidFill>
+                <a:latin typeface="Calibri" pitchFamily="34" charset="0"/>
+                <a:ea typeface="Calibri" pitchFamily="34" charset="-122"/>
+                <a:cs typeface="Calibri" pitchFamily="34" charset="-120"/>
+              </a:rPr>
+              <a:t>  the way it was designed?</a:t>
+            </a:r>
+            <a:endParaRPr lang="en-US" sz="1050" dirty="0"/>
+          </a:p>
+          <a:p>
+            <a:pPr indent="0" marL="0">
+              <a:lnSpc>
+                <a:spcPct val="120000"/>
+              </a:lnSpc>
+              <a:buNone/>
+            </a:pPr>
+            <a:r>
+              <a:rPr lang="en-US" sz="1050" dirty="0">
+                <a:solidFill>
+                  <a:srgbClr val="E2E8F0"/>
+                </a:solidFill>
+                <a:latin typeface="Calibri" pitchFamily="34" charset="0"/>
+                <a:ea typeface="Calibri" pitchFamily="34" charset="-122"/>
+                <a:cs typeface="Calibri" pitchFamily="34" charset="-120"/>
+              </a:rPr>
+              <a:t>  Are outcomes improving?</a:t>
+            </a:r>
+            <a:endParaRPr lang="en-US" sz="1050" dirty="0"/>
+          </a:p>
+          <a:p>
+            <a:pPr indent="0" marL="0">
+              <a:lnSpc>
+                <a:spcPct val="120000"/>
+              </a:lnSpc>
+              <a:buNone/>
+            </a:pPr>
+            <a:r>
+              <a:rPr lang="en-US" sz="1050" dirty="0">
+                <a:solidFill>
+                  <a:srgbClr val="E2E8F0"/>
+                </a:solidFill>
+                <a:latin typeface="Calibri" pitchFamily="34" charset="0"/>
+                <a:ea typeface="Calibri" pitchFamily="34" charset="-122"/>
+                <a:cs typeface="Calibri" pitchFamily="34" charset="-120"/>
+              </a:rPr>
+              <a:t>  What's the gap between plan and reality?</a:t>
+            </a:r>
+            <a:endParaRPr lang="en-US" sz="1050" dirty="0"/>
+          </a:p>
+          <a:p>
+            <a:pPr indent="0" marL="0">
+              <a:lnSpc>
+                <a:spcPct val="120000"/>
+              </a:lnSpc>
+              <a:buNone/>
+            </a:pPr>
+            <a:r>
+              <a:rPr lang="en-US" sz="1050" dirty="0">
+                <a:solidFill>
+                  <a:srgbClr val="E2E8F0"/>
+                </a:solidFill>
+                <a:latin typeface="Calibri" pitchFamily="34" charset="0"/>
+                <a:ea typeface="Calibri" pitchFamily="34" charset="-122"/>
+                <a:cs typeface="Calibri" pitchFamily="34" charset="-120"/>
+              </a:rPr>
+              <a:t>  How do we know it will sustain?</a:t>
+            </a:r>
+            <a:endParaRPr lang="en-US" sz="1050" dirty="0"/>
           </a:p>
         </p:txBody>
       </p:sp>
@@ -10541,7 +11721,7 @@
         </p:nvSpPr>
         <p:spPr>
           <a:xfrm>
-            <a:off x="731520" y="2926080"/>
+            <a:off x="4846320" y="1097280"/>
             <a:ext cx="3840480" cy="274320"/>
           </a:xfrm>
           <a:prstGeom prst="rect">
@@ -10558,104 +11738,23 @@
               <a:buNone/>
             </a:pPr>
             <a:r>
-              <a:rPr lang="en-US" sz="1200" b="1" dirty="0">
-                <a:solidFill>
-                  <a:srgbClr val="6366F1"/>
+              <a:rPr lang="en-US" sz="1300" b="1" dirty="0">
+                <a:solidFill>
+                  <a:srgbClr val="14B8A6"/>
                 </a:solidFill>
                 <a:latin typeface="Georgia" pitchFamily="34" charset="0"/>
                 <a:ea typeface="Georgia" pitchFamily="34" charset="-122"/>
                 <a:cs typeface="Georgia" pitchFamily="34" charset="-120"/>
               </a:rPr>
-              <a:t>Our Core Belief:</a:t>
-            </a:r>
-            <a:endParaRPr lang="en-US" sz="1200" dirty="0"/>
+              <a:t>Together — The Full AI-Powered Loop:</a:t>
+            </a:r>
+            <a:endParaRPr lang="en-US" sz="1300" dirty="0"/>
           </a:p>
         </p:txBody>
       </p:sp>
       <p:sp>
         <p:nvSpPr>
           <p:cNvPr id="7" name="Text 4"/>
-          <p:cNvSpPr/>
-          <p:nvPr/>
-        </p:nvSpPr>
-        <p:spPr>
-          <a:xfrm>
-            <a:off x="731520" y="3200400"/>
-            <a:ext cx="3840480" cy="1371600"/>
-          </a:xfrm>
-          <a:prstGeom prst="rect">
-            <a:avLst/>
-          </a:prstGeom>
-          <a:noFill/>
-          <a:ln/>
-        </p:spPr>
-        <p:txBody>
-          <a:bodyPr wrap="square" rtlCol="0" anchor="ctr"/>
-          <a:lstStyle/>
-          <a:p>
-            <a:pPr indent="0" marL="0">
-              <a:lnSpc>
-                <a:spcPct val="125000"/>
-              </a:lnSpc>
-              <a:buNone/>
-            </a:pPr>
-            <a:r>
-              <a:rPr lang="en-US" sz="1000" i="1" dirty="0">
-                <a:solidFill>
-                  <a:srgbClr val="E2E8F0"/>
-                </a:solidFill>
-                <a:latin typeface="Calibri" pitchFamily="34" charset="0"/>
-                <a:ea typeface="Calibri" pitchFamily="34" charset="-122"/>
-                <a:cs typeface="Calibri" pitchFamily="34" charset="-120"/>
-              </a:rPr>
-              <a:t>"Nothing happens in a silo. Collaboration is key. We need to know ourselves, the outside world, behaviors, history, and how to implement with fidelity by knowing our stakeholders and building with the user experience in mind."</a:t>
-            </a:r>
-            <a:endParaRPr lang="en-US" sz="1000" dirty="0"/>
-          </a:p>
-        </p:txBody>
-      </p:sp>
-      <p:sp>
-        <p:nvSpPr>
-          <p:cNvPr id="8" name="Text 5"/>
-          <p:cNvSpPr/>
-          <p:nvPr/>
-        </p:nvSpPr>
-        <p:spPr>
-          <a:xfrm>
-            <a:off x="4846320" y="1097280"/>
-            <a:ext cx="3840480" cy="274320"/>
-          </a:xfrm>
-          <a:prstGeom prst="rect">
-            <a:avLst/>
-          </a:prstGeom>
-          <a:noFill/>
-          <a:ln/>
-        </p:spPr>
-        <p:txBody>
-          <a:bodyPr wrap="square" rtlCol="0" anchor="ctr"/>
-          <a:lstStyle/>
-          <a:p>
-            <a:pPr indent="0" marL="0">
-              <a:buNone/>
-            </a:pPr>
-            <a:r>
-              <a:rPr lang="en-US" sz="1200" b="1" dirty="0">
-                <a:solidFill>
-                  <a:srgbClr val="F59E0B"/>
-                </a:solidFill>
-                <a:latin typeface="Georgia" pitchFamily="34" charset="0"/>
-                <a:ea typeface="Georgia" pitchFamily="34" charset="-122"/>
-                <a:cs typeface="Georgia" pitchFamily="34" charset="-120"/>
-              </a:rPr>
-              <a:t>Where We Align:</a:t>
-            </a:r>
-            <a:endParaRPr lang="en-US" sz="1200" dirty="0"/>
-          </a:p>
-        </p:txBody>
-      </p:sp>
-      <p:sp>
-        <p:nvSpPr>
-          <p:cNvPr id="9" name="Text 6"/>
           <p:cNvSpPr/>
           <p:nvPr/>
         </p:nvSpPr>
@@ -10689,7 +11788,7 @@
                 <a:ea typeface="Calibri" pitchFamily="34" charset="-122"/>
                 <a:cs typeface="Calibri" pitchFamily="34" charset="-120"/>
               </a:rPr>
-              <a:t>• Data must serve communities, not extract</a:t>
+              <a:t>MEASURE:</a:t>
             </a:r>
             <a:endParaRPr lang="en-US" sz="1050" dirty="0"/>
           </a:p>
@@ -10709,7 +11808,7 @@
                 <a:ea typeface="Calibri" pitchFamily="34" charset="-122"/>
                 <a:cs typeface="Calibri" pitchFamily="34" charset="-120"/>
               </a:rPr>
-              <a:t>• Equity is structure, not decoration</a:t>
+              <a:t>  Community voice → Data collection</a:t>
             </a:r>
             <a:endParaRPr lang="en-US" sz="1050" dirty="0"/>
           </a:p>
@@ -10729,7 +11828,7 @@
                 <a:ea typeface="Calibri" pitchFamily="34" charset="-122"/>
                 <a:cs typeface="Calibri" pitchFamily="34" charset="-120"/>
               </a:rPr>
-              <a:t>• Lived experience is valid evidence</a:t>
+              <a:t>  → Advocacy → Policy change</a:t>
             </a:r>
             <a:endParaRPr lang="en-US" sz="1050" dirty="0"/>
           </a:p>
@@ -10740,17 +11839,6 @@
               </a:lnSpc>
               <a:buNone/>
             </a:pPr>
-            <a:r>
-              <a:rPr lang="en-US" sz="1050" dirty="0">
-                <a:solidFill>
-                  <a:srgbClr val="E2E8F0"/>
-                </a:solidFill>
-                <a:latin typeface="Calibri" pitchFamily="34" charset="0"/>
-                <a:ea typeface="Calibri" pitchFamily="34" charset="-122"/>
-                <a:cs typeface="Calibri" pitchFamily="34" charset="-120"/>
-              </a:rPr>
-              <a:t>• Measurement without action is meaningless</a:t>
-            </a:r>
             <a:endParaRPr lang="en-US" sz="1050" dirty="0"/>
           </a:p>
           <a:p>
@@ -10769,7 +11857,7 @@
                 <a:ea typeface="Calibri" pitchFamily="34" charset="-122"/>
                 <a:cs typeface="Calibri" pitchFamily="34" charset="-120"/>
               </a:rPr>
-              <a:t>• Community-centered, not institution-centered</a:t>
+              <a:t>RPLICE + AI:</a:t>
             </a:r>
             <a:endParaRPr lang="en-US" sz="1050" dirty="0"/>
           </a:p>
@@ -10789,7 +11877,7 @@
                 <a:ea typeface="Calibri" pitchFamily="34" charset="-122"/>
                 <a:cs typeface="Calibri" pitchFamily="34" charset="-120"/>
               </a:rPr>
-              <a:t>• Austin / Pflugerville focus</a:t>
+              <a:t>  Implementation design → AI fidelity tracking</a:t>
             </a:r>
             <a:endParaRPr lang="en-US" sz="1050" dirty="0"/>
           </a:p>
@@ -10809,7 +11897,7 @@
                 <a:ea typeface="Calibri" pitchFamily="34" charset="-122"/>
                 <a:cs typeface="Calibri" pitchFamily="34" charset="-120"/>
               </a:rPr>
-              <a:t>• Both believe impacted people drive solutions</a:t>
+              <a:t>  → RAG-verified outcome measurement</a:t>
             </a:r>
             <a:endParaRPr lang="en-US" sz="1050" dirty="0"/>
           </a:p>
@@ -10820,6 +11908,17 @@
               </a:lnSpc>
               <a:buNone/>
             </a:pPr>
+            <a:r>
+              <a:rPr lang="en-US" sz="1050" dirty="0">
+                <a:solidFill>
+                  <a:srgbClr val="E2E8F0"/>
+                </a:solidFill>
+                <a:latin typeface="Calibri" pitchFamily="34" charset="0"/>
+                <a:ea typeface="Calibri" pitchFamily="34" charset="-122"/>
+                <a:cs typeface="Calibri" pitchFamily="34" charset="-120"/>
+              </a:rPr>
+              <a:t>  → Sustainment planning</a:t>
+            </a:r>
             <a:endParaRPr lang="en-US" sz="1050" dirty="0"/>
           </a:p>
           <a:p>
@@ -10829,17 +11928,6 @@
               </a:lnSpc>
               <a:buNone/>
             </a:pPr>
-            <a:r>
-              <a:rPr lang="en-US" sz="1050" dirty="0">
-                <a:solidFill>
-                  <a:srgbClr val="E2E8F0"/>
-                </a:solidFill>
-                <a:latin typeface="Calibri" pitchFamily="34" charset="0"/>
-                <a:ea typeface="Calibri" pitchFamily="34" charset="-122"/>
-                <a:cs typeface="Calibri" pitchFamily="34" charset="-120"/>
-              </a:rPr>
-              <a:t>Ethical AI Shared Principles:</a:t>
-            </a:r>
             <a:endParaRPr lang="en-US" sz="1050" dirty="0"/>
           </a:p>
           <a:p>
@@ -10858,7 +11946,7 @@
                 <a:ea typeface="Calibri" pitchFamily="34" charset="-122"/>
                 <a:cs typeface="Calibri" pitchFamily="34" charset="-120"/>
               </a:rPr>
-              <a:t>• AI outputs are transparent and cited</a:t>
+              <a:t>Combined:</a:t>
             </a:r>
             <a:endParaRPr lang="en-US" sz="1050" dirty="0"/>
           </a:p>
@@ -10878,7 +11966,7 @@
                 <a:ea typeface="Calibri" pitchFamily="34" charset="-122"/>
                 <a:cs typeface="Calibri" pitchFamily="34" charset="-120"/>
               </a:rPr>
-              <a:t>• Bias is auditable — not hidden</a:t>
+              <a:t>  Community voice drives intervention</a:t>
             </a:r>
             <a:endParaRPr lang="en-US" sz="1050" dirty="0"/>
           </a:p>
@@ -10898,7 +11986,7 @@
                 <a:ea typeface="Calibri" pitchFamily="34" charset="-122"/>
                 <a:cs typeface="Calibri" pitchFamily="34" charset="-120"/>
               </a:rPr>
-              <a:t>• Community data stays community-owned</a:t>
+              <a:t>  → AI tracks fidelity in real time</a:t>
             </a:r>
             <a:endParaRPr lang="en-US" sz="1050" dirty="0"/>
           </a:p>
@@ -10918,7 +12006,7 @@
                 <a:ea typeface="Calibri" pitchFamily="34" charset="-122"/>
                 <a:cs typeface="Calibri" pitchFamily="34" charset="-120"/>
               </a:rPr>
-              <a:t>• AI serves — it never surveils</a:t>
+              <a:t>  → Outcomes verified against evidence (RAG)</a:t>
             </a:r>
             <a:endParaRPr lang="en-US" sz="1050" dirty="0"/>
           </a:p>
@@ -10938,7 +12026,7 @@
                 <a:ea typeface="Calibri" pitchFamily="34" charset="-122"/>
                 <a:cs typeface="Calibri" pitchFamily="34" charset="-120"/>
               </a:rPr>
-              <a:t>• Meme's ethical AI leadership + our</a:t>
+              <a:t>  → Data feeds back to community</a:t>
             </a:r>
             <a:endParaRPr lang="en-US" sz="1050" dirty="0"/>
           </a:p>
@@ -10958,7 +12046,36 @@
                 <a:ea typeface="Calibri" pitchFamily="34" charset="-122"/>
                 <a:cs typeface="Calibri" pitchFamily="34" charset="-120"/>
               </a:rPr>
-              <a:t>   anti-hallucination architecture = trust</a:t>
+              <a:t>  → Continuous AI-powered improvement</a:t>
+            </a:r>
+            <a:endParaRPr lang="en-US" sz="1050" dirty="0"/>
+          </a:p>
+          <a:p>
+            <a:pPr indent="0" marL="0">
+              <a:lnSpc>
+                <a:spcPct val="115000"/>
+              </a:lnSpc>
+              <a:buNone/>
+            </a:pPr>
+            <a:endParaRPr lang="en-US" sz="1050" dirty="0"/>
+          </a:p>
+          <a:p>
+            <a:pPr indent="0" marL="0">
+              <a:lnSpc>
+                <a:spcPct val="115000"/>
+              </a:lnSpc>
+              <a:buNone/>
+            </a:pPr>
+            <a:r>
+              <a:rPr lang="en-US" sz="1050" dirty="0">
+                <a:solidFill>
+                  <a:srgbClr val="E2E8F0"/>
+                </a:solidFill>
+                <a:latin typeface="Calibri" pitchFamily="34" charset="0"/>
+                <a:ea typeface="Calibri" pitchFamily="34" charset="-122"/>
+                <a:cs typeface="Calibri" pitchFamily="34" charset="-120"/>
+              </a:rPr>
+              <a:t>Nobody else in Central Texas has this.</a:t>
             </a:r>
             <a:endParaRPr lang="en-US" sz="1050" dirty="0"/>
           </a:p>
